--- a/08-pca-and-factor-models/slides.pptx
+++ b/08-pca-and-factor-models/slides.pptx
@@ -942,7 +942,7 @@
           <a:bodyPr anchor="t"/>
           <a:lstStyle>
             <a:lvl1pPr algn="l">
-              <a:defRPr sz="3000" b="1" cap="all"/>
+              <a:defRPr sz="2350" b="1" cap="all"/>
             </a:lvl1pPr>
           </a:lstStyle>
           <a:p>
@@ -974,7 +974,7 @@
           <a:lstStyle>
             <a:lvl1pPr marL="0" indent="0">
               <a:buNone/>
-              <a:defRPr sz="1500">
+              <a:defRPr sz="1150">
                 <a:solidFill>
                   <a:schemeClr val="tx1">
                     <a:tint val="75000"/>
@@ -984,7 +984,7 @@
             </a:lvl1pPr>
             <a:lvl2pPr marL="342900" indent="0">
               <a:buNone/>
-              <a:defRPr sz="1350">
+              <a:defRPr sz="1050">
                 <a:solidFill>
                   <a:schemeClr val="tx1">
                     <a:tint val="75000"/>
@@ -994,7 +994,7 @@
             </a:lvl2pPr>
             <a:lvl3pPr marL="685800" indent="0">
               <a:buNone/>
-              <a:defRPr sz="1200">
+              <a:defRPr sz="950">
                 <a:solidFill>
                   <a:schemeClr val="tx1">
                     <a:tint val="75000"/>
@@ -1004,7 +1004,7 @@
             </a:lvl3pPr>
             <a:lvl4pPr marL="1028700" indent="0">
               <a:buNone/>
-              <a:defRPr sz="1050">
+              <a:defRPr sz="800">
                 <a:solidFill>
                   <a:schemeClr val="tx1">
                     <a:tint val="75000"/>
@@ -1014,7 +1014,7 @@
             </a:lvl4pPr>
             <a:lvl5pPr marL="1371600" indent="0">
               <a:buNone/>
-              <a:defRPr sz="1050">
+              <a:defRPr sz="800">
                 <a:solidFill>
                   <a:schemeClr val="tx1">
                     <a:tint val="75000"/>
@@ -1024,7 +1024,7 @@
             </a:lvl5pPr>
             <a:lvl6pPr marL="1714500" indent="0">
               <a:buNone/>
-              <a:defRPr sz="1050">
+              <a:defRPr sz="800">
                 <a:solidFill>
                   <a:schemeClr val="tx1">
                     <a:tint val="75000"/>
@@ -1034,7 +1034,7 @@
             </a:lvl6pPr>
             <a:lvl7pPr marL="2057400" indent="0">
               <a:buNone/>
-              <a:defRPr sz="1050">
+              <a:defRPr sz="800">
                 <a:solidFill>
                   <a:schemeClr val="tx1">
                     <a:tint val="75000"/>
@@ -1044,7 +1044,7 @@
             </a:lvl7pPr>
             <a:lvl8pPr marL="2400300" indent="0">
               <a:buNone/>
-              <a:defRPr sz="1050">
+              <a:defRPr sz="800">
                 <a:solidFill>
                   <a:schemeClr val="tx1">
                     <a:tint val="75000"/>
@@ -1054,7 +1054,7 @@
             </a:lvl8pPr>
             <a:lvl9pPr marL="2743200" indent="0">
               <a:buNone/>
-              <a:defRPr sz="1050">
+              <a:defRPr sz="800">
                 <a:solidFill>
                   <a:schemeClr val="tx1">
                     <a:tint val="75000"/>
@@ -1209,31 +1209,31 @@
           <a:bodyPr/>
           <a:lstStyle>
             <a:lvl1pPr>
-              <a:defRPr sz="2100"/>
+              <a:defRPr sz="1650"/>
             </a:lvl1pPr>
             <a:lvl2pPr>
-              <a:defRPr sz="1800"/>
+              <a:defRPr sz="1400"/>
             </a:lvl2pPr>
             <a:lvl3pPr>
-              <a:defRPr sz="1500"/>
+              <a:defRPr sz="1150"/>
             </a:lvl3pPr>
             <a:lvl4pPr>
-              <a:defRPr sz="1350"/>
+              <a:defRPr sz="1050"/>
             </a:lvl4pPr>
             <a:lvl5pPr>
-              <a:defRPr sz="1350"/>
+              <a:defRPr sz="1050"/>
             </a:lvl5pPr>
             <a:lvl6pPr>
-              <a:defRPr sz="1350"/>
+              <a:defRPr sz="1050"/>
             </a:lvl6pPr>
             <a:lvl7pPr>
-              <a:defRPr sz="1350"/>
+              <a:defRPr sz="1050"/>
             </a:lvl7pPr>
             <a:lvl8pPr>
-              <a:defRPr sz="1350"/>
+              <a:defRPr sz="1050"/>
             </a:lvl8pPr>
             <a:lvl9pPr>
-              <a:defRPr sz="1350"/>
+              <a:defRPr sz="1050"/>
             </a:lvl9pPr>
           </a:lstStyle>
           <a:p>
@@ -1293,31 +1293,31 @@
           <a:bodyPr/>
           <a:lstStyle>
             <a:lvl1pPr>
-              <a:defRPr sz="2100"/>
+              <a:defRPr sz="1650"/>
             </a:lvl1pPr>
             <a:lvl2pPr>
-              <a:defRPr sz="1800"/>
+              <a:defRPr sz="1400"/>
             </a:lvl2pPr>
             <a:lvl3pPr>
-              <a:defRPr sz="1500"/>
+              <a:defRPr sz="1150"/>
             </a:lvl3pPr>
             <a:lvl4pPr>
-              <a:defRPr sz="1350"/>
+              <a:defRPr sz="1050"/>
             </a:lvl4pPr>
             <a:lvl5pPr>
-              <a:defRPr sz="1350"/>
+              <a:defRPr sz="1050"/>
             </a:lvl5pPr>
             <a:lvl6pPr>
-              <a:defRPr sz="1350"/>
+              <a:defRPr sz="1050"/>
             </a:lvl6pPr>
             <a:lvl7pPr>
-              <a:defRPr sz="1350"/>
+              <a:defRPr sz="1050"/>
             </a:lvl7pPr>
             <a:lvl8pPr>
-              <a:defRPr sz="1350"/>
+              <a:defRPr sz="1050"/>
             </a:lvl8pPr>
             <a:lvl9pPr>
-              <a:defRPr sz="1350"/>
+              <a:defRPr sz="1050"/>
             </a:lvl9pPr>
           </a:lstStyle>
           <a:p>
@@ -1499,39 +1499,39 @@
           <a:lstStyle>
             <a:lvl1pPr marL="0" indent="0">
               <a:buNone/>
-              <a:defRPr sz="1800" b="1"/>
+              <a:defRPr sz="1400" b="1"/>
             </a:lvl1pPr>
             <a:lvl2pPr marL="342900" indent="0">
               <a:buNone/>
-              <a:defRPr sz="1500" b="1"/>
+              <a:defRPr sz="1150" b="1"/>
             </a:lvl2pPr>
             <a:lvl3pPr marL="685800" indent="0">
               <a:buNone/>
-              <a:defRPr sz="1350" b="1"/>
+              <a:defRPr sz="1050" b="1"/>
             </a:lvl3pPr>
             <a:lvl4pPr marL="1028700" indent="0">
               <a:buNone/>
-              <a:defRPr sz="1200" b="1"/>
+              <a:defRPr sz="950" b="1"/>
             </a:lvl4pPr>
             <a:lvl5pPr marL="1371600" indent="0">
               <a:buNone/>
-              <a:defRPr sz="1200" b="1"/>
+              <a:defRPr sz="950" b="1"/>
             </a:lvl5pPr>
             <a:lvl6pPr marL="1714500" indent="0">
               <a:buNone/>
-              <a:defRPr sz="1200" b="1"/>
+              <a:defRPr sz="950" b="1"/>
             </a:lvl6pPr>
             <a:lvl7pPr marL="2057400" indent="0">
               <a:buNone/>
-              <a:defRPr sz="1200" b="1"/>
+              <a:defRPr sz="950" b="1"/>
             </a:lvl7pPr>
             <a:lvl8pPr marL="2400300" indent="0">
               <a:buNone/>
-              <a:defRPr sz="1200" b="1"/>
+              <a:defRPr sz="950" b="1"/>
             </a:lvl8pPr>
             <a:lvl9pPr marL="2743200" indent="0">
               <a:buNone/>
-              <a:defRPr sz="1200" b="1"/>
+              <a:defRPr sz="950" b="1"/>
             </a:lvl9pPr>
           </a:lstStyle>
           <a:p>
@@ -1563,31 +1563,31 @@
           <a:bodyPr/>
           <a:lstStyle>
             <a:lvl1pPr>
-              <a:defRPr sz="1800"/>
+              <a:defRPr sz="1400"/>
             </a:lvl1pPr>
             <a:lvl2pPr>
-              <a:defRPr sz="1500"/>
+              <a:defRPr sz="1150"/>
             </a:lvl2pPr>
             <a:lvl3pPr>
-              <a:defRPr sz="1350"/>
+              <a:defRPr sz="1050"/>
             </a:lvl3pPr>
             <a:lvl4pPr>
-              <a:defRPr sz="1200"/>
+              <a:defRPr sz="950"/>
             </a:lvl4pPr>
             <a:lvl5pPr>
-              <a:defRPr sz="1200"/>
+              <a:defRPr sz="950"/>
             </a:lvl5pPr>
             <a:lvl6pPr>
-              <a:defRPr sz="1200"/>
+              <a:defRPr sz="950"/>
             </a:lvl6pPr>
             <a:lvl7pPr>
-              <a:defRPr sz="1200"/>
+              <a:defRPr sz="950"/>
             </a:lvl7pPr>
             <a:lvl8pPr>
-              <a:defRPr sz="1200"/>
+              <a:defRPr sz="950"/>
             </a:lvl8pPr>
             <a:lvl9pPr>
-              <a:defRPr sz="1200"/>
+              <a:defRPr sz="950"/>
             </a:lvl9pPr>
           </a:lstStyle>
           <a:p>
@@ -1648,39 +1648,39 @@
           <a:lstStyle>
             <a:lvl1pPr marL="0" indent="0">
               <a:buNone/>
-              <a:defRPr sz="1800" b="1"/>
+              <a:defRPr sz="1400" b="1"/>
             </a:lvl1pPr>
             <a:lvl2pPr marL="342900" indent="0">
               <a:buNone/>
-              <a:defRPr sz="1500" b="1"/>
+              <a:defRPr sz="1150" b="1"/>
             </a:lvl2pPr>
             <a:lvl3pPr marL="685800" indent="0">
               <a:buNone/>
-              <a:defRPr sz="1350" b="1"/>
+              <a:defRPr sz="1050" b="1"/>
             </a:lvl3pPr>
             <a:lvl4pPr marL="1028700" indent="0">
               <a:buNone/>
-              <a:defRPr sz="1200" b="1"/>
+              <a:defRPr sz="950" b="1"/>
             </a:lvl4pPr>
             <a:lvl5pPr marL="1371600" indent="0">
               <a:buNone/>
-              <a:defRPr sz="1200" b="1"/>
+              <a:defRPr sz="950" b="1"/>
             </a:lvl5pPr>
             <a:lvl6pPr marL="1714500" indent="0">
               <a:buNone/>
-              <a:defRPr sz="1200" b="1"/>
+              <a:defRPr sz="950" b="1"/>
             </a:lvl6pPr>
             <a:lvl7pPr marL="2057400" indent="0">
               <a:buNone/>
-              <a:defRPr sz="1200" b="1"/>
+              <a:defRPr sz="950" b="1"/>
             </a:lvl7pPr>
             <a:lvl8pPr marL="2400300" indent="0">
               <a:buNone/>
-              <a:defRPr sz="1200" b="1"/>
+              <a:defRPr sz="950" b="1"/>
             </a:lvl8pPr>
             <a:lvl9pPr marL="2743200" indent="0">
               <a:buNone/>
-              <a:defRPr sz="1200" b="1"/>
+              <a:defRPr sz="950" b="1"/>
             </a:lvl9pPr>
           </a:lstStyle>
           <a:p>
@@ -1712,31 +1712,31 @@
           <a:bodyPr/>
           <a:lstStyle>
             <a:lvl1pPr>
-              <a:defRPr sz="1800"/>
+              <a:defRPr sz="1400"/>
             </a:lvl1pPr>
             <a:lvl2pPr>
-              <a:defRPr sz="1500"/>
+              <a:defRPr sz="1150"/>
             </a:lvl2pPr>
             <a:lvl3pPr>
-              <a:defRPr sz="1350"/>
+              <a:defRPr sz="1050"/>
             </a:lvl3pPr>
             <a:lvl4pPr>
-              <a:defRPr sz="1200"/>
+              <a:defRPr sz="950"/>
             </a:lvl4pPr>
             <a:lvl5pPr>
-              <a:defRPr sz="1200"/>
+              <a:defRPr sz="950"/>
             </a:lvl5pPr>
             <a:lvl6pPr>
-              <a:defRPr sz="1200"/>
+              <a:defRPr sz="950"/>
             </a:lvl6pPr>
             <a:lvl7pPr>
-              <a:defRPr sz="1200"/>
+              <a:defRPr sz="950"/>
             </a:lvl7pPr>
             <a:lvl8pPr>
-              <a:defRPr sz="1200"/>
+              <a:defRPr sz="950"/>
             </a:lvl8pPr>
             <a:lvl9pPr>
-              <a:defRPr sz="1200"/>
+              <a:defRPr sz="950"/>
             </a:lvl9pPr>
           </a:lstStyle>
           <a:p>
@@ -2103,7 +2103,7 @@
           <a:bodyPr anchor="b"/>
           <a:lstStyle>
             <a:lvl1pPr algn="l">
-              <a:defRPr sz="1500" b="1"/>
+              <a:defRPr sz="1150" b="1"/>
             </a:lvl1pPr>
           </a:lstStyle>
           <a:p>
@@ -2134,31 +2134,31 @@
           <a:bodyPr/>
           <a:lstStyle>
             <a:lvl1pPr>
-              <a:defRPr sz="2400"/>
+              <a:defRPr sz="1850"/>
             </a:lvl1pPr>
             <a:lvl2pPr>
-              <a:defRPr sz="2100"/>
+              <a:defRPr sz="1650"/>
             </a:lvl2pPr>
             <a:lvl3pPr>
-              <a:defRPr sz="1800"/>
+              <a:defRPr sz="1400"/>
             </a:lvl3pPr>
             <a:lvl4pPr>
-              <a:defRPr sz="1500"/>
+              <a:defRPr sz="1150"/>
             </a:lvl4pPr>
             <a:lvl5pPr>
-              <a:defRPr sz="1500"/>
+              <a:defRPr sz="1150"/>
             </a:lvl5pPr>
             <a:lvl6pPr>
-              <a:defRPr sz="1500"/>
+              <a:defRPr sz="1150"/>
             </a:lvl6pPr>
             <a:lvl7pPr>
-              <a:defRPr sz="1500"/>
+              <a:defRPr sz="1150"/>
             </a:lvl7pPr>
             <a:lvl8pPr>
-              <a:defRPr sz="1500"/>
+              <a:defRPr sz="1150"/>
             </a:lvl8pPr>
             <a:lvl9pPr>
-              <a:defRPr sz="1500"/>
+              <a:defRPr sz="1150"/>
             </a:lvl9pPr>
           </a:lstStyle>
           <a:p>
@@ -2219,39 +2219,39 @@
           <a:lstStyle>
             <a:lvl1pPr marL="0" indent="0">
               <a:buNone/>
-              <a:defRPr sz="1050"/>
+              <a:defRPr sz="800"/>
             </a:lvl1pPr>
             <a:lvl2pPr marL="342900" indent="0">
               <a:buNone/>
-              <a:defRPr sz="900"/>
+              <a:defRPr sz="700"/>
             </a:lvl2pPr>
             <a:lvl3pPr marL="685800" indent="0">
               <a:buNone/>
-              <a:defRPr sz="750"/>
+              <a:defRPr sz="700"/>
             </a:lvl3pPr>
             <a:lvl4pPr marL="1028700" indent="0">
               <a:buNone/>
-              <a:defRPr sz="675"/>
+              <a:defRPr sz="700"/>
             </a:lvl4pPr>
             <a:lvl5pPr marL="1371600" indent="0">
               <a:buNone/>
-              <a:defRPr sz="675"/>
+              <a:defRPr sz="700"/>
             </a:lvl5pPr>
             <a:lvl6pPr marL="1714500" indent="0">
               <a:buNone/>
-              <a:defRPr sz="675"/>
+              <a:defRPr sz="700"/>
             </a:lvl6pPr>
             <a:lvl7pPr marL="2057400" indent="0">
               <a:buNone/>
-              <a:defRPr sz="675"/>
+              <a:defRPr sz="700"/>
             </a:lvl7pPr>
             <a:lvl8pPr marL="2400300" indent="0">
               <a:buNone/>
-              <a:defRPr sz="675"/>
+              <a:defRPr sz="700"/>
             </a:lvl8pPr>
             <a:lvl9pPr marL="2743200" indent="0">
               <a:buNone/>
-              <a:defRPr sz="675"/>
+              <a:defRPr sz="700"/>
             </a:lvl9pPr>
           </a:lstStyle>
           <a:p>
@@ -2378,7 +2378,7 @@
           <a:bodyPr anchor="b"/>
           <a:lstStyle>
             <a:lvl1pPr algn="l">
-              <a:defRPr sz="1500" b="1"/>
+              <a:defRPr sz="1150" b="1"/>
             </a:lvl1pPr>
           </a:lstStyle>
           <a:p>
@@ -2410,39 +2410,39 @@
           <a:lstStyle>
             <a:lvl1pPr marL="0" indent="0">
               <a:buNone/>
-              <a:defRPr sz="2400"/>
+              <a:defRPr sz="1850"/>
             </a:lvl1pPr>
             <a:lvl2pPr marL="342900" indent="0">
               <a:buNone/>
-              <a:defRPr sz="2100"/>
+              <a:defRPr sz="1650"/>
             </a:lvl2pPr>
             <a:lvl3pPr marL="685800" indent="0">
               <a:buNone/>
-              <a:defRPr sz="1800"/>
+              <a:defRPr sz="1400"/>
             </a:lvl3pPr>
             <a:lvl4pPr marL="1028700" indent="0">
               <a:buNone/>
-              <a:defRPr sz="1500"/>
+              <a:defRPr sz="1150"/>
             </a:lvl4pPr>
             <a:lvl5pPr marL="1371600" indent="0">
               <a:buNone/>
-              <a:defRPr sz="1500"/>
+              <a:defRPr sz="1150"/>
             </a:lvl5pPr>
             <a:lvl6pPr marL="1714500" indent="0">
               <a:buNone/>
-              <a:defRPr sz="1500"/>
+              <a:defRPr sz="1150"/>
             </a:lvl6pPr>
             <a:lvl7pPr marL="2057400" indent="0">
               <a:buNone/>
-              <a:defRPr sz="1500"/>
+              <a:defRPr sz="1150"/>
             </a:lvl7pPr>
             <a:lvl8pPr marL="2400300" indent="0">
               <a:buNone/>
-              <a:defRPr sz="1500"/>
+              <a:defRPr sz="1150"/>
             </a:lvl8pPr>
             <a:lvl9pPr marL="2743200" indent="0">
               <a:buNone/>
-              <a:defRPr sz="1500"/>
+              <a:defRPr sz="1150"/>
             </a:lvl9pPr>
           </a:lstStyle>
           <a:p>
@@ -2471,39 +2471,39 @@
           <a:lstStyle>
             <a:lvl1pPr marL="0" indent="0">
               <a:buNone/>
-              <a:defRPr sz="1050"/>
+              <a:defRPr sz="800"/>
             </a:lvl1pPr>
             <a:lvl2pPr marL="342900" indent="0">
               <a:buNone/>
-              <a:defRPr sz="900"/>
+              <a:defRPr sz="700"/>
             </a:lvl2pPr>
             <a:lvl3pPr marL="685800" indent="0">
               <a:buNone/>
-              <a:defRPr sz="750"/>
+              <a:defRPr sz="700"/>
             </a:lvl3pPr>
             <a:lvl4pPr marL="1028700" indent="0">
               <a:buNone/>
-              <a:defRPr sz="675"/>
+              <a:defRPr sz="700"/>
             </a:lvl4pPr>
             <a:lvl5pPr marL="1371600" indent="0">
               <a:buNone/>
-              <a:defRPr sz="675"/>
+              <a:defRPr sz="700"/>
             </a:lvl5pPr>
             <a:lvl6pPr marL="1714500" indent="0">
               <a:buNone/>
-              <a:defRPr sz="675"/>
+              <a:defRPr sz="700"/>
             </a:lvl6pPr>
             <a:lvl7pPr marL="2057400" indent="0">
               <a:buNone/>
-              <a:defRPr sz="675"/>
+              <a:defRPr sz="700"/>
             </a:lvl7pPr>
             <a:lvl8pPr marL="2400300" indent="0">
               <a:buNone/>
-              <a:defRPr sz="675"/>
+              <a:defRPr sz="700"/>
             </a:lvl8pPr>
             <a:lvl9pPr marL="2743200" indent="0">
               <a:buNone/>
-              <a:defRPr sz="675"/>
+              <a:defRPr sz="700"/>
             </a:lvl9pPr>
           </a:lstStyle>
           <a:p>
@@ -2731,7 +2731,7 @@
           <a:bodyPr anchor="ctr" bIns="45720" lIns="91440" rIns="91440" rtlCol="0" tIns="45720" vert="horz"/>
           <a:lstStyle>
             <a:lvl1pPr algn="l">
-              <a:defRPr sz="900">
+              <a:defRPr sz="700">
                 <a:solidFill>
                   <a:schemeClr val="tx1">
                     <a:tint val="75000"/>
@@ -2772,7 +2772,7 @@
           <a:bodyPr anchor="ctr" bIns="45720" lIns="91440" rIns="91440" rtlCol="0" tIns="45720" vert="horz"/>
           <a:lstStyle>
             <a:lvl1pPr algn="ctr">
-              <a:defRPr sz="900">
+              <a:defRPr sz="700">
                 <a:solidFill>
                   <a:schemeClr val="tx1">
                     <a:tint val="75000"/>
@@ -2809,7 +2809,7 @@
           <a:bodyPr anchor="ctr" bIns="45720" lIns="91440" rIns="91440" rtlCol="0" tIns="45720" vert="horz"/>
           <a:lstStyle>
             <a:lvl1pPr algn="r">
-              <a:defRPr sz="900">
+              <a:defRPr sz="700">
                 <a:solidFill>
                   <a:schemeClr val="tx1">
                     <a:tint val="75000"/>
@@ -2855,7 +2855,7 @@
           <a:spcPct val="0"/>
         </a:spcBef>
         <a:buNone/>
-        <a:defRPr kern="1200" sz="3300">
+        <a:defRPr kern="1200" sz="2550">
           <a:solidFill>
             <a:schemeClr val="tx1"/>
           </a:solidFill>
@@ -2872,7 +2872,7 @@
         </a:spcBef>
         <a:buFont typeface="Arial"/>
         <a:buChar char="•"/>
-        <a:defRPr kern="1200" sz="2400">
+        <a:defRPr kern="1200" sz="1850">
           <a:solidFill>
             <a:schemeClr val="tx1"/>
           </a:solidFill>
@@ -2887,7 +2887,7 @@
         </a:spcBef>
         <a:buFont typeface="Arial"/>
         <a:buChar char="–"/>
-        <a:defRPr kern="1200" sz="2100">
+        <a:defRPr kern="1200" sz="1650">
           <a:solidFill>
             <a:schemeClr val="tx1"/>
           </a:solidFill>
@@ -2902,7 +2902,7 @@
         </a:spcBef>
         <a:buFont typeface="Arial"/>
         <a:buChar char="•"/>
-        <a:defRPr kern="1200" sz="1800">
+        <a:defRPr kern="1200" sz="1400">
           <a:solidFill>
             <a:schemeClr val="tx1"/>
           </a:solidFill>
@@ -2917,7 +2917,7 @@
         </a:spcBef>
         <a:buFont typeface="Arial"/>
         <a:buChar char="–"/>
-        <a:defRPr kern="1200" sz="1500">
+        <a:defRPr kern="1200" sz="1150">
           <a:solidFill>
             <a:schemeClr val="tx1"/>
           </a:solidFill>
@@ -2932,7 +2932,7 @@
         </a:spcBef>
         <a:buFont typeface="Arial"/>
         <a:buChar char="»"/>
-        <a:defRPr kern="1200" sz="1500">
+        <a:defRPr kern="1200" sz="1150">
           <a:solidFill>
             <a:schemeClr val="tx1"/>
           </a:solidFill>
@@ -2947,7 +2947,7 @@
         </a:spcBef>
         <a:buFont typeface="Arial"/>
         <a:buChar char="•"/>
-        <a:defRPr kern="1200" sz="1500">
+        <a:defRPr kern="1200" sz="1150">
           <a:solidFill>
             <a:schemeClr val="tx1"/>
           </a:solidFill>
@@ -2962,7 +2962,7 @@
         </a:spcBef>
         <a:buFont typeface="Arial"/>
         <a:buChar char="•"/>
-        <a:defRPr kern="1200" sz="1500">
+        <a:defRPr kern="1200" sz="1150">
           <a:solidFill>
             <a:schemeClr val="tx1"/>
           </a:solidFill>
@@ -2977,7 +2977,7 @@
         </a:spcBef>
         <a:buFont typeface="Arial"/>
         <a:buChar char="•"/>
-        <a:defRPr kern="1200" sz="1500">
+        <a:defRPr kern="1200" sz="1150">
           <a:solidFill>
             <a:schemeClr val="tx1"/>
           </a:solidFill>
@@ -2992,7 +2992,7 @@
         </a:spcBef>
         <a:buFont typeface="Arial"/>
         <a:buChar char="•"/>
-        <a:defRPr kern="1200" sz="1500">
+        <a:defRPr kern="1200" sz="1150">
           <a:solidFill>
             <a:schemeClr val="tx1"/>
           </a:solidFill>
@@ -3007,7 +3007,7 @@
         <a:defRPr lang="en-US"/>
       </a:defPPr>
       <a:lvl1pPr algn="l" defTabSz="342900" eaLnBrk="1" hangingPunct="1" latinLnBrk="0" marL="0" rtl="0">
-        <a:defRPr kern="1200" sz="1350">
+        <a:defRPr kern="1200" sz="1050">
           <a:solidFill>
             <a:schemeClr val="tx1"/>
           </a:solidFill>
@@ -3017,7 +3017,7 @@
         </a:defRPr>
       </a:lvl1pPr>
       <a:lvl2pPr algn="l" defTabSz="342900" eaLnBrk="1" hangingPunct="1" latinLnBrk="0" marL="342900" rtl="0">
-        <a:defRPr kern="1200" sz="1350">
+        <a:defRPr kern="1200" sz="1050">
           <a:solidFill>
             <a:schemeClr val="tx1"/>
           </a:solidFill>
@@ -3027,7 +3027,7 @@
         </a:defRPr>
       </a:lvl2pPr>
       <a:lvl3pPr algn="l" defTabSz="342900" eaLnBrk="1" hangingPunct="1" latinLnBrk="0" marL="685800" rtl="0">
-        <a:defRPr kern="1200" sz="1350">
+        <a:defRPr kern="1200" sz="1050">
           <a:solidFill>
             <a:schemeClr val="tx1"/>
           </a:solidFill>
@@ -3037,7 +3037,7 @@
         </a:defRPr>
       </a:lvl3pPr>
       <a:lvl4pPr algn="l" defTabSz="342900" eaLnBrk="1" hangingPunct="1" latinLnBrk="0" marL="1028700" rtl="0">
-        <a:defRPr kern="1200" sz="1350">
+        <a:defRPr kern="1200" sz="1050">
           <a:solidFill>
             <a:schemeClr val="tx1"/>
           </a:solidFill>
@@ -3047,7 +3047,7 @@
         </a:defRPr>
       </a:lvl4pPr>
       <a:lvl5pPr algn="l" defTabSz="342900" eaLnBrk="1" hangingPunct="1" latinLnBrk="0" marL="1371600" rtl="0">
-        <a:defRPr kern="1200" sz="1350">
+        <a:defRPr kern="1200" sz="1050">
           <a:solidFill>
             <a:schemeClr val="tx1"/>
           </a:solidFill>
@@ -3057,7 +3057,7 @@
         </a:defRPr>
       </a:lvl5pPr>
       <a:lvl6pPr algn="l" defTabSz="342900" eaLnBrk="1" hangingPunct="1" latinLnBrk="0" marL="1714500" rtl="0">
-        <a:defRPr kern="1200" sz="1350">
+        <a:defRPr kern="1200" sz="1050">
           <a:solidFill>
             <a:schemeClr val="tx1"/>
           </a:solidFill>
@@ -3067,7 +3067,7 @@
         </a:defRPr>
       </a:lvl6pPr>
       <a:lvl7pPr algn="l" defTabSz="342900" eaLnBrk="1" hangingPunct="1" latinLnBrk="0" marL="2057400" rtl="0">
-        <a:defRPr kern="1200" sz="1350">
+        <a:defRPr kern="1200" sz="1050">
           <a:solidFill>
             <a:schemeClr val="tx1"/>
           </a:solidFill>
@@ -3077,7 +3077,7 @@
         </a:defRPr>
       </a:lvl7pPr>
       <a:lvl8pPr algn="l" defTabSz="342900" eaLnBrk="1" hangingPunct="1" latinLnBrk="0" marL="2400300" rtl="0">
-        <a:defRPr kern="1200" sz="1350">
+        <a:defRPr kern="1200" sz="1050">
           <a:solidFill>
             <a:schemeClr val="tx1"/>
           </a:solidFill>
@@ -3087,7 +3087,7 @@
         </a:defRPr>
       </a:lvl8pPr>
       <a:lvl9pPr algn="l" defTabSz="342900" eaLnBrk="1" hangingPunct="1" latinLnBrk="0" marL="2743200" rtl="0">
-        <a:defRPr kern="1200" sz="1350">
+        <a:defRPr kern="1200" sz="1050">
           <a:solidFill>
             <a:schemeClr val="tx1"/>
           </a:solidFill>

--- a/08-pca-and-factor-models/slides.pptx
+++ b/08-pca-and-factor-models/slides.pptx
@@ -942,7 +942,7 @@
           <a:bodyPr anchor="t"/>
           <a:lstStyle>
             <a:lvl1pPr algn="l">
-              <a:defRPr sz="2350" b="1" cap="all"/>
+              <a:defRPr sz="1850" b="1" cap="all"/>
             </a:lvl1pPr>
           </a:lstStyle>
           <a:p>
@@ -974,7 +974,7 @@
           <a:lstStyle>
             <a:lvl1pPr marL="0" indent="0">
               <a:buNone/>
-              <a:defRPr sz="1150">
+              <a:defRPr sz="950">
                 <a:solidFill>
                   <a:schemeClr val="tx1">
                     <a:tint val="75000"/>
@@ -984,7 +984,7 @@
             </a:lvl1pPr>
             <a:lvl2pPr marL="342900" indent="0">
               <a:buNone/>
-              <a:defRPr sz="1050">
+              <a:defRPr sz="850">
                 <a:solidFill>
                   <a:schemeClr val="tx1">
                     <a:tint val="75000"/>
@@ -994,7 +994,7 @@
             </a:lvl2pPr>
             <a:lvl3pPr marL="685800" indent="0">
               <a:buNone/>
-              <a:defRPr sz="950">
+              <a:defRPr sz="750">
                 <a:solidFill>
                   <a:schemeClr val="tx1">
                     <a:tint val="75000"/>
@@ -1004,7 +1004,7 @@
             </a:lvl3pPr>
             <a:lvl4pPr marL="1028700" indent="0">
               <a:buNone/>
-              <a:defRPr sz="800">
+              <a:defRPr sz="650">
                 <a:solidFill>
                   <a:schemeClr val="tx1">
                     <a:tint val="75000"/>
@@ -1014,7 +1014,7 @@
             </a:lvl4pPr>
             <a:lvl5pPr marL="1371600" indent="0">
               <a:buNone/>
-              <a:defRPr sz="800">
+              <a:defRPr sz="650">
                 <a:solidFill>
                   <a:schemeClr val="tx1">
                     <a:tint val="75000"/>
@@ -1024,7 +1024,7 @@
             </a:lvl5pPr>
             <a:lvl6pPr marL="1714500" indent="0">
               <a:buNone/>
-              <a:defRPr sz="800">
+              <a:defRPr sz="650">
                 <a:solidFill>
                   <a:schemeClr val="tx1">
                     <a:tint val="75000"/>
@@ -1034,7 +1034,7 @@
             </a:lvl6pPr>
             <a:lvl7pPr marL="2057400" indent="0">
               <a:buNone/>
-              <a:defRPr sz="800">
+              <a:defRPr sz="650">
                 <a:solidFill>
                   <a:schemeClr val="tx1">
                     <a:tint val="75000"/>
@@ -1044,7 +1044,7 @@
             </a:lvl7pPr>
             <a:lvl8pPr marL="2400300" indent="0">
               <a:buNone/>
-              <a:defRPr sz="800">
+              <a:defRPr sz="650">
                 <a:solidFill>
                   <a:schemeClr val="tx1">
                     <a:tint val="75000"/>
@@ -1054,7 +1054,7 @@
             </a:lvl8pPr>
             <a:lvl9pPr marL="2743200" indent="0">
               <a:buNone/>
-              <a:defRPr sz="800">
+              <a:defRPr sz="650">
                 <a:solidFill>
                   <a:schemeClr val="tx1">
                     <a:tint val="75000"/>
@@ -1209,31 +1209,31 @@
           <a:bodyPr/>
           <a:lstStyle>
             <a:lvl1pPr>
-              <a:defRPr sz="1650"/>
+              <a:defRPr sz="1300"/>
             </a:lvl1pPr>
             <a:lvl2pPr>
-              <a:defRPr sz="1400"/>
+              <a:defRPr sz="1100"/>
             </a:lvl2pPr>
             <a:lvl3pPr>
-              <a:defRPr sz="1150"/>
+              <a:defRPr sz="950"/>
             </a:lvl3pPr>
             <a:lvl4pPr>
-              <a:defRPr sz="1050"/>
+              <a:defRPr sz="850"/>
             </a:lvl4pPr>
             <a:lvl5pPr>
-              <a:defRPr sz="1050"/>
+              <a:defRPr sz="850"/>
             </a:lvl5pPr>
             <a:lvl6pPr>
-              <a:defRPr sz="1050"/>
+              <a:defRPr sz="850"/>
             </a:lvl6pPr>
             <a:lvl7pPr>
-              <a:defRPr sz="1050"/>
+              <a:defRPr sz="850"/>
             </a:lvl7pPr>
             <a:lvl8pPr>
-              <a:defRPr sz="1050"/>
+              <a:defRPr sz="850"/>
             </a:lvl8pPr>
             <a:lvl9pPr>
-              <a:defRPr sz="1050"/>
+              <a:defRPr sz="850"/>
             </a:lvl9pPr>
           </a:lstStyle>
           <a:p>
@@ -1293,31 +1293,31 @@
           <a:bodyPr/>
           <a:lstStyle>
             <a:lvl1pPr>
-              <a:defRPr sz="1650"/>
+              <a:defRPr sz="1300"/>
             </a:lvl1pPr>
             <a:lvl2pPr>
-              <a:defRPr sz="1400"/>
+              <a:defRPr sz="1100"/>
             </a:lvl2pPr>
             <a:lvl3pPr>
-              <a:defRPr sz="1150"/>
+              <a:defRPr sz="950"/>
             </a:lvl3pPr>
             <a:lvl4pPr>
-              <a:defRPr sz="1050"/>
+              <a:defRPr sz="850"/>
             </a:lvl4pPr>
             <a:lvl5pPr>
-              <a:defRPr sz="1050"/>
+              <a:defRPr sz="850"/>
             </a:lvl5pPr>
             <a:lvl6pPr>
-              <a:defRPr sz="1050"/>
+              <a:defRPr sz="850"/>
             </a:lvl6pPr>
             <a:lvl7pPr>
-              <a:defRPr sz="1050"/>
+              <a:defRPr sz="850"/>
             </a:lvl7pPr>
             <a:lvl8pPr>
-              <a:defRPr sz="1050"/>
+              <a:defRPr sz="850"/>
             </a:lvl8pPr>
             <a:lvl9pPr>
-              <a:defRPr sz="1050"/>
+              <a:defRPr sz="850"/>
             </a:lvl9pPr>
           </a:lstStyle>
           <a:p>
@@ -1499,39 +1499,39 @@
           <a:lstStyle>
             <a:lvl1pPr marL="0" indent="0">
               <a:buNone/>
-              <a:defRPr sz="1400" b="1"/>
+              <a:defRPr sz="1100" b="1"/>
             </a:lvl1pPr>
             <a:lvl2pPr marL="342900" indent="0">
               <a:buNone/>
-              <a:defRPr sz="1150" b="1"/>
+              <a:defRPr sz="950" b="1"/>
             </a:lvl2pPr>
             <a:lvl3pPr marL="685800" indent="0">
               <a:buNone/>
-              <a:defRPr sz="1050" b="1"/>
+              <a:defRPr sz="850" b="1"/>
             </a:lvl3pPr>
             <a:lvl4pPr marL="1028700" indent="0">
               <a:buNone/>
-              <a:defRPr sz="950" b="1"/>
+              <a:defRPr sz="750" b="1"/>
             </a:lvl4pPr>
             <a:lvl5pPr marL="1371600" indent="0">
               <a:buNone/>
-              <a:defRPr sz="950" b="1"/>
+              <a:defRPr sz="750" b="1"/>
             </a:lvl5pPr>
             <a:lvl6pPr marL="1714500" indent="0">
               <a:buNone/>
-              <a:defRPr sz="950" b="1"/>
+              <a:defRPr sz="750" b="1"/>
             </a:lvl6pPr>
             <a:lvl7pPr marL="2057400" indent="0">
               <a:buNone/>
-              <a:defRPr sz="950" b="1"/>
+              <a:defRPr sz="750" b="1"/>
             </a:lvl7pPr>
             <a:lvl8pPr marL="2400300" indent="0">
               <a:buNone/>
-              <a:defRPr sz="950" b="1"/>
+              <a:defRPr sz="750" b="1"/>
             </a:lvl8pPr>
             <a:lvl9pPr marL="2743200" indent="0">
               <a:buNone/>
-              <a:defRPr sz="950" b="1"/>
+              <a:defRPr sz="750" b="1"/>
             </a:lvl9pPr>
           </a:lstStyle>
           <a:p>
@@ -1563,31 +1563,31 @@
           <a:bodyPr/>
           <a:lstStyle>
             <a:lvl1pPr>
-              <a:defRPr sz="1400"/>
+              <a:defRPr sz="1100"/>
             </a:lvl1pPr>
             <a:lvl2pPr>
-              <a:defRPr sz="1150"/>
+              <a:defRPr sz="950"/>
             </a:lvl2pPr>
             <a:lvl3pPr>
-              <a:defRPr sz="1050"/>
+              <a:defRPr sz="850"/>
             </a:lvl3pPr>
             <a:lvl4pPr>
-              <a:defRPr sz="950"/>
+              <a:defRPr sz="750"/>
             </a:lvl4pPr>
             <a:lvl5pPr>
-              <a:defRPr sz="950"/>
+              <a:defRPr sz="750"/>
             </a:lvl5pPr>
             <a:lvl6pPr>
-              <a:defRPr sz="950"/>
+              <a:defRPr sz="750"/>
             </a:lvl6pPr>
             <a:lvl7pPr>
-              <a:defRPr sz="950"/>
+              <a:defRPr sz="750"/>
             </a:lvl7pPr>
             <a:lvl8pPr>
-              <a:defRPr sz="950"/>
+              <a:defRPr sz="750"/>
             </a:lvl8pPr>
             <a:lvl9pPr>
-              <a:defRPr sz="950"/>
+              <a:defRPr sz="750"/>
             </a:lvl9pPr>
           </a:lstStyle>
           <a:p>
@@ -1648,39 +1648,39 @@
           <a:lstStyle>
             <a:lvl1pPr marL="0" indent="0">
               <a:buNone/>
-              <a:defRPr sz="1400" b="1"/>
+              <a:defRPr sz="1100" b="1"/>
             </a:lvl1pPr>
             <a:lvl2pPr marL="342900" indent="0">
               <a:buNone/>
-              <a:defRPr sz="1150" b="1"/>
+              <a:defRPr sz="950" b="1"/>
             </a:lvl2pPr>
             <a:lvl3pPr marL="685800" indent="0">
               <a:buNone/>
-              <a:defRPr sz="1050" b="1"/>
+              <a:defRPr sz="850" b="1"/>
             </a:lvl3pPr>
             <a:lvl4pPr marL="1028700" indent="0">
               <a:buNone/>
-              <a:defRPr sz="950" b="1"/>
+              <a:defRPr sz="750" b="1"/>
             </a:lvl4pPr>
             <a:lvl5pPr marL="1371600" indent="0">
               <a:buNone/>
-              <a:defRPr sz="950" b="1"/>
+              <a:defRPr sz="750" b="1"/>
             </a:lvl5pPr>
             <a:lvl6pPr marL="1714500" indent="0">
               <a:buNone/>
-              <a:defRPr sz="950" b="1"/>
+              <a:defRPr sz="750" b="1"/>
             </a:lvl6pPr>
             <a:lvl7pPr marL="2057400" indent="0">
               <a:buNone/>
-              <a:defRPr sz="950" b="1"/>
+              <a:defRPr sz="750" b="1"/>
             </a:lvl7pPr>
             <a:lvl8pPr marL="2400300" indent="0">
               <a:buNone/>
-              <a:defRPr sz="950" b="1"/>
+              <a:defRPr sz="750" b="1"/>
             </a:lvl8pPr>
             <a:lvl9pPr marL="2743200" indent="0">
               <a:buNone/>
-              <a:defRPr sz="950" b="1"/>
+              <a:defRPr sz="750" b="1"/>
             </a:lvl9pPr>
           </a:lstStyle>
           <a:p>
@@ -1712,31 +1712,31 @@
           <a:bodyPr/>
           <a:lstStyle>
             <a:lvl1pPr>
-              <a:defRPr sz="1400"/>
+              <a:defRPr sz="1100"/>
             </a:lvl1pPr>
             <a:lvl2pPr>
-              <a:defRPr sz="1150"/>
+              <a:defRPr sz="950"/>
             </a:lvl2pPr>
             <a:lvl3pPr>
-              <a:defRPr sz="1050"/>
+              <a:defRPr sz="850"/>
             </a:lvl3pPr>
             <a:lvl4pPr>
-              <a:defRPr sz="950"/>
+              <a:defRPr sz="750"/>
             </a:lvl4pPr>
             <a:lvl5pPr>
-              <a:defRPr sz="950"/>
+              <a:defRPr sz="750"/>
             </a:lvl5pPr>
             <a:lvl6pPr>
-              <a:defRPr sz="950"/>
+              <a:defRPr sz="750"/>
             </a:lvl6pPr>
             <a:lvl7pPr>
-              <a:defRPr sz="950"/>
+              <a:defRPr sz="750"/>
             </a:lvl7pPr>
             <a:lvl8pPr>
-              <a:defRPr sz="950"/>
+              <a:defRPr sz="750"/>
             </a:lvl8pPr>
             <a:lvl9pPr>
-              <a:defRPr sz="950"/>
+              <a:defRPr sz="750"/>
             </a:lvl9pPr>
           </a:lstStyle>
           <a:p>
@@ -2103,7 +2103,7 @@
           <a:bodyPr anchor="b"/>
           <a:lstStyle>
             <a:lvl1pPr algn="l">
-              <a:defRPr sz="1150" b="1"/>
+              <a:defRPr sz="950" b="1"/>
             </a:lvl1pPr>
           </a:lstStyle>
           <a:p>
@@ -2134,31 +2134,31 @@
           <a:bodyPr/>
           <a:lstStyle>
             <a:lvl1pPr>
-              <a:defRPr sz="1850"/>
+              <a:defRPr sz="1500"/>
             </a:lvl1pPr>
             <a:lvl2pPr>
-              <a:defRPr sz="1650"/>
+              <a:defRPr sz="1300"/>
             </a:lvl2pPr>
             <a:lvl3pPr>
-              <a:defRPr sz="1400"/>
+              <a:defRPr sz="1100"/>
             </a:lvl3pPr>
             <a:lvl4pPr>
-              <a:defRPr sz="1150"/>
+              <a:defRPr sz="950"/>
             </a:lvl4pPr>
             <a:lvl5pPr>
-              <a:defRPr sz="1150"/>
+              <a:defRPr sz="950"/>
             </a:lvl5pPr>
             <a:lvl6pPr>
-              <a:defRPr sz="1150"/>
+              <a:defRPr sz="950"/>
             </a:lvl6pPr>
             <a:lvl7pPr>
-              <a:defRPr sz="1150"/>
+              <a:defRPr sz="950"/>
             </a:lvl7pPr>
             <a:lvl8pPr>
-              <a:defRPr sz="1150"/>
+              <a:defRPr sz="950"/>
             </a:lvl8pPr>
             <a:lvl9pPr>
-              <a:defRPr sz="1150"/>
+              <a:defRPr sz="950"/>
             </a:lvl9pPr>
           </a:lstStyle>
           <a:p>
@@ -2219,39 +2219,39 @@
           <a:lstStyle>
             <a:lvl1pPr marL="0" indent="0">
               <a:buNone/>
-              <a:defRPr sz="800"/>
+              <a:defRPr sz="650"/>
             </a:lvl1pPr>
             <a:lvl2pPr marL="342900" indent="0">
               <a:buNone/>
-              <a:defRPr sz="700"/>
+              <a:defRPr sz="550"/>
             </a:lvl2pPr>
             <a:lvl3pPr marL="685800" indent="0">
               <a:buNone/>
-              <a:defRPr sz="700"/>
+              <a:defRPr sz="550"/>
             </a:lvl3pPr>
             <a:lvl4pPr marL="1028700" indent="0">
               <a:buNone/>
-              <a:defRPr sz="700"/>
+              <a:defRPr sz="550"/>
             </a:lvl4pPr>
             <a:lvl5pPr marL="1371600" indent="0">
               <a:buNone/>
-              <a:defRPr sz="700"/>
+              <a:defRPr sz="550"/>
             </a:lvl5pPr>
             <a:lvl6pPr marL="1714500" indent="0">
               <a:buNone/>
-              <a:defRPr sz="700"/>
+              <a:defRPr sz="550"/>
             </a:lvl6pPr>
             <a:lvl7pPr marL="2057400" indent="0">
               <a:buNone/>
-              <a:defRPr sz="700"/>
+              <a:defRPr sz="550"/>
             </a:lvl7pPr>
             <a:lvl8pPr marL="2400300" indent="0">
               <a:buNone/>
-              <a:defRPr sz="700"/>
+              <a:defRPr sz="550"/>
             </a:lvl8pPr>
             <a:lvl9pPr marL="2743200" indent="0">
               <a:buNone/>
-              <a:defRPr sz="700"/>
+              <a:defRPr sz="550"/>
             </a:lvl9pPr>
           </a:lstStyle>
           <a:p>
@@ -2378,7 +2378,7 @@
           <a:bodyPr anchor="b"/>
           <a:lstStyle>
             <a:lvl1pPr algn="l">
-              <a:defRPr sz="1150" b="1"/>
+              <a:defRPr sz="950" b="1"/>
             </a:lvl1pPr>
           </a:lstStyle>
           <a:p>
@@ -2410,39 +2410,39 @@
           <a:lstStyle>
             <a:lvl1pPr marL="0" indent="0">
               <a:buNone/>
-              <a:defRPr sz="1850"/>
+              <a:defRPr sz="1500"/>
             </a:lvl1pPr>
             <a:lvl2pPr marL="342900" indent="0">
               <a:buNone/>
-              <a:defRPr sz="1650"/>
+              <a:defRPr sz="1300"/>
             </a:lvl2pPr>
             <a:lvl3pPr marL="685800" indent="0">
               <a:buNone/>
-              <a:defRPr sz="1400"/>
+              <a:defRPr sz="1100"/>
             </a:lvl3pPr>
             <a:lvl4pPr marL="1028700" indent="0">
               <a:buNone/>
-              <a:defRPr sz="1150"/>
+              <a:defRPr sz="950"/>
             </a:lvl4pPr>
             <a:lvl5pPr marL="1371600" indent="0">
               <a:buNone/>
-              <a:defRPr sz="1150"/>
+              <a:defRPr sz="950"/>
             </a:lvl5pPr>
             <a:lvl6pPr marL="1714500" indent="0">
               <a:buNone/>
-              <a:defRPr sz="1150"/>
+              <a:defRPr sz="950"/>
             </a:lvl6pPr>
             <a:lvl7pPr marL="2057400" indent="0">
               <a:buNone/>
-              <a:defRPr sz="1150"/>
+              <a:defRPr sz="950"/>
             </a:lvl7pPr>
             <a:lvl8pPr marL="2400300" indent="0">
               <a:buNone/>
-              <a:defRPr sz="1150"/>
+              <a:defRPr sz="950"/>
             </a:lvl8pPr>
             <a:lvl9pPr marL="2743200" indent="0">
               <a:buNone/>
-              <a:defRPr sz="1150"/>
+              <a:defRPr sz="950"/>
             </a:lvl9pPr>
           </a:lstStyle>
           <a:p>
@@ -2471,39 +2471,39 @@
           <a:lstStyle>
             <a:lvl1pPr marL="0" indent="0">
               <a:buNone/>
-              <a:defRPr sz="800"/>
+              <a:defRPr sz="650"/>
             </a:lvl1pPr>
             <a:lvl2pPr marL="342900" indent="0">
               <a:buNone/>
-              <a:defRPr sz="700"/>
+              <a:defRPr sz="550"/>
             </a:lvl2pPr>
             <a:lvl3pPr marL="685800" indent="0">
               <a:buNone/>
-              <a:defRPr sz="700"/>
+              <a:defRPr sz="550"/>
             </a:lvl3pPr>
             <a:lvl4pPr marL="1028700" indent="0">
               <a:buNone/>
-              <a:defRPr sz="700"/>
+              <a:defRPr sz="550"/>
             </a:lvl4pPr>
             <a:lvl5pPr marL="1371600" indent="0">
               <a:buNone/>
-              <a:defRPr sz="700"/>
+              <a:defRPr sz="550"/>
             </a:lvl5pPr>
             <a:lvl6pPr marL="1714500" indent="0">
               <a:buNone/>
-              <a:defRPr sz="700"/>
+              <a:defRPr sz="550"/>
             </a:lvl6pPr>
             <a:lvl7pPr marL="2057400" indent="0">
               <a:buNone/>
-              <a:defRPr sz="700"/>
+              <a:defRPr sz="550"/>
             </a:lvl7pPr>
             <a:lvl8pPr marL="2400300" indent="0">
               <a:buNone/>
-              <a:defRPr sz="700"/>
+              <a:defRPr sz="550"/>
             </a:lvl8pPr>
             <a:lvl9pPr marL="2743200" indent="0">
               <a:buNone/>
-              <a:defRPr sz="700"/>
+              <a:defRPr sz="550"/>
             </a:lvl9pPr>
           </a:lstStyle>
           <a:p>
@@ -2731,7 +2731,7 @@
           <a:bodyPr anchor="ctr" bIns="45720" lIns="91440" rIns="91440" rtlCol="0" tIns="45720" vert="horz"/>
           <a:lstStyle>
             <a:lvl1pPr algn="l">
-              <a:defRPr sz="700">
+              <a:defRPr sz="550">
                 <a:solidFill>
                   <a:schemeClr val="tx1">
                     <a:tint val="75000"/>
@@ -2772,7 +2772,7 @@
           <a:bodyPr anchor="ctr" bIns="45720" lIns="91440" rIns="91440" rtlCol="0" tIns="45720" vert="horz"/>
           <a:lstStyle>
             <a:lvl1pPr algn="ctr">
-              <a:defRPr sz="700">
+              <a:defRPr sz="550">
                 <a:solidFill>
                   <a:schemeClr val="tx1">
                     <a:tint val="75000"/>
@@ -2809,7 +2809,7 @@
           <a:bodyPr anchor="ctr" bIns="45720" lIns="91440" rIns="91440" rtlCol="0" tIns="45720" vert="horz"/>
           <a:lstStyle>
             <a:lvl1pPr algn="r">
-              <a:defRPr sz="700">
+              <a:defRPr sz="550">
                 <a:solidFill>
                   <a:schemeClr val="tx1">
                     <a:tint val="75000"/>
@@ -2855,7 +2855,7 @@
           <a:spcPct val="0"/>
         </a:spcBef>
         <a:buNone/>
-        <a:defRPr kern="1200" sz="2550">
+        <a:defRPr kern="1200" sz="2050">
           <a:solidFill>
             <a:schemeClr val="tx1"/>
           </a:solidFill>
@@ -2872,7 +2872,7 @@
         </a:spcBef>
         <a:buFont typeface="Arial"/>
         <a:buChar char="•"/>
-        <a:defRPr kern="1200" sz="1850">
+        <a:defRPr kern="1200" sz="1500">
           <a:solidFill>
             <a:schemeClr val="tx1"/>
           </a:solidFill>
@@ -2887,7 +2887,7 @@
         </a:spcBef>
         <a:buFont typeface="Arial"/>
         <a:buChar char="–"/>
-        <a:defRPr kern="1200" sz="1650">
+        <a:defRPr kern="1200" sz="1300">
           <a:solidFill>
             <a:schemeClr val="tx1"/>
           </a:solidFill>
@@ -2902,7 +2902,7 @@
         </a:spcBef>
         <a:buFont typeface="Arial"/>
         <a:buChar char="•"/>
-        <a:defRPr kern="1200" sz="1400">
+        <a:defRPr kern="1200" sz="1100">
           <a:solidFill>
             <a:schemeClr val="tx1"/>
           </a:solidFill>
@@ -2917,7 +2917,7 @@
         </a:spcBef>
         <a:buFont typeface="Arial"/>
         <a:buChar char="–"/>
-        <a:defRPr kern="1200" sz="1150">
+        <a:defRPr kern="1200" sz="950">
           <a:solidFill>
             <a:schemeClr val="tx1"/>
           </a:solidFill>
@@ -2932,7 +2932,7 @@
         </a:spcBef>
         <a:buFont typeface="Arial"/>
         <a:buChar char="»"/>
-        <a:defRPr kern="1200" sz="1150">
+        <a:defRPr kern="1200" sz="950">
           <a:solidFill>
             <a:schemeClr val="tx1"/>
           </a:solidFill>
@@ -2947,7 +2947,7 @@
         </a:spcBef>
         <a:buFont typeface="Arial"/>
         <a:buChar char="•"/>
-        <a:defRPr kern="1200" sz="1150">
+        <a:defRPr kern="1200" sz="950">
           <a:solidFill>
             <a:schemeClr val="tx1"/>
           </a:solidFill>
@@ -2962,7 +2962,7 @@
         </a:spcBef>
         <a:buFont typeface="Arial"/>
         <a:buChar char="•"/>
-        <a:defRPr kern="1200" sz="1150">
+        <a:defRPr kern="1200" sz="950">
           <a:solidFill>
             <a:schemeClr val="tx1"/>
           </a:solidFill>
@@ -2977,7 +2977,7 @@
         </a:spcBef>
         <a:buFont typeface="Arial"/>
         <a:buChar char="•"/>
-        <a:defRPr kern="1200" sz="1150">
+        <a:defRPr kern="1200" sz="950">
           <a:solidFill>
             <a:schemeClr val="tx1"/>
           </a:solidFill>
@@ -2992,7 +2992,7 @@
         </a:spcBef>
         <a:buFont typeface="Arial"/>
         <a:buChar char="•"/>
-        <a:defRPr kern="1200" sz="1150">
+        <a:defRPr kern="1200" sz="950">
           <a:solidFill>
             <a:schemeClr val="tx1"/>
           </a:solidFill>
@@ -3007,7 +3007,7 @@
         <a:defRPr lang="en-US"/>
       </a:defPPr>
       <a:lvl1pPr algn="l" defTabSz="342900" eaLnBrk="1" hangingPunct="1" latinLnBrk="0" marL="0" rtl="0">
-        <a:defRPr kern="1200" sz="1050">
+        <a:defRPr kern="1200" sz="850">
           <a:solidFill>
             <a:schemeClr val="tx1"/>
           </a:solidFill>
@@ -3017,7 +3017,7 @@
         </a:defRPr>
       </a:lvl1pPr>
       <a:lvl2pPr algn="l" defTabSz="342900" eaLnBrk="1" hangingPunct="1" latinLnBrk="0" marL="342900" rtl="0">
-        <a:defRPr kern="1200" sz="1050">
+        <a:defRPr kern="1200" sz="850">
           <a:solidFill>
             <a:schemeClr val="tx1"/>
           </a:solidFill>
@@ -3027,7 +3027,7 @@
         </a:defRPr>
       </a:lvl2pPr>
       <a:lvl3pPr algn="l" defTabSz="342900" eaLnBrk="1" hangingPunct="1" latinLnBrk="0" marL="685800" rtl="0">
-        <a:defRPr kern="1200" sz="1050">
+        <a:defRPr kern="1200" sz="850">
           <a:solidFill>
             <a:schemeClr val="tx1"/>
           </a:solidFill>
@@ -3037,7 +3037,7 @@
         </a:defRPr>
       </a:lvl3pPr>
       <a:lvl4pPr algn="l" defTabSz="342900" eaLnBrk="1" hangingPunct="1" latinLnBrk="0" marL="1028700" rtl="0">
-        <a:defRPr kern="1200" sz="1050">
+        <a:defRPr kern="1200" sz="850">
           <a:solidFill>
             <a:schemeClr val="tx1"/>
           </a:solidFill>
@@ -3047,7 +3047,7 @@
         </a:defRPr>
       </a:lvl4pPr>
       <a:lvl5pPr algn="l" defTabSz="342900" eaLnBrk="1" hangingPunct="1" latinLnBrk="0" marL="1371600" rtl="0">
-        <a:defRPr kern="1200" sz="1050">
+        <a:defRPr kern="1200" sz="850">
           <a:solidFill>
             <a:schemeClr val="tx1"/>
           </a:solidFill>
@@ -3057,7 +3057,7 @@
         </a:defRPr>
       </a:lvl5pPr>
       <a:lvl6pPr algn="l" defTabSz="342900" eaLnBrk="1" hangingPunct="1" latinLnBrk="0" marL="1714500" rtl="0">
-        <a:defRPr kern="1200" sz="1050">
+        <a:defRPr kern="1200" sz="850">
           <a:solidFill>
             <a:schemeClr val="tx1"/>
           </a:solidFill>
@@ -3067,7 +3067,7 @@
         </a:defRPr>
       </a:lvl6pPr>
       <a:lvl7pPr algn="l" defTabSz="342900" eaLnBrk="1" hangingPunct="1" latinLnBrk="0" marL="2057400" rtl="0">
-        <a:defRPr kern="1200" sz="1050">
+        <a:defRPr kern="1200" sz="850">
           <a:solidFill>
             <a:schemeClr val="tx1"/>
           </a:solidFill>
@@ -3077,7 +3077,7 @@
         </a:defRPr>
       </a:lvl7pPr>
       <a:lvl8pPr algn="l" defTabSz="342900" eaLnBrk="1" hangingPunct="1" latinLnBrk="0" marL="2400300" rtl="0">
-        <a:defRPr kern="1200" sz="1050">
+        <a:defRPr kern="1200" sz="850">
           <a:solidFill>
             <a:schemeClr val="tx1"/>
           </a:solidFill>
@@ -3087,7 +3087,7 @@
         </a:defRPr>
       </a:lvl8pPr>
       <a:lvl9pPr algn="l" defTabSz="342900" eaLnBrk="1" hangingPunct="1" latinLnBrk="0" marL="2743200" rtl="0">
-        <a:defRPr kern="1200" sz="1050">
+        <a:defRPr kern="1200" sz="850">
           <a:solidFill>
             <a:schemeClr val="tx1"/>
           </a:solidFill>

--- a/08-pca-and-factor-models/slides.pptx
+++ b/08-pca-and-factor-models/slides.pptx
@@ -2824,6 +2824,72 @@
               <a:t>‹#›</a:t>
             </a:fld>
             <a:endParaRPr lang="en-US"/>
+          </a:p>
+        </p:txBody>
+      </p:sp>
+      <p:sp>
+        <p:nvSpPr>
+          <p:cNvPr id="7" name="Author Footer"/>
+          <p:cNvSpPr txBox="1"/>
+          <p:nvPr/>
+        </p:nvSpPr>
+        <p:spPr>
+          <a:xfrm>
+            <a:off x="457200" y="4735000"/>
+            <a:ext cx="5000000" cy="260000"/>
+          </a:xfrm>
+          <a:prstGeom prst="rect">
+            <a:avLst/>
+          </a:prstGeom>
+          <a:noFill/>
+        </p:spPr>
+        <p:txBody>
+          <a:bodyPr anchor="ctr" bIns="0" lIns="0" rIns="0" tIns="0" wrap="square"/>
+          <a:lstStyle/>
+          <a:p>
+            <a:pPr algn="l"/>
+            <a:r>
+              <a:rPr dirty="0" lang="en-US" sz="900">
+                <a:solidFill>
+                  <a:srgbClr val="6E7275"/>
+                </a:solidFill>
+                <a:latin typeface="+mn-lt"/>
+              </a:rPr>
+              <a:t>Thierry Warin, PhD</a:t>
+            </a:r>
+          </a:p>
+        </p:txBody>
+      </p:sp>
+      <p:sp>
+        <p:nvSpPr>
+          <p:cNvPr id="8" name="Slide Number Footer"/>
+          <p:cNvSpPr txBox="1"/>
+          <p:nvPr/>
+        </p:nvSpPr>
+        <p:spPr>
+          <a:xfrm>
+            <a:off x="7200000" y="4735000"/>
+            <a:ext cx="1486800" cy="260000"/>
+          </a:xfrm>
+          <a:prstGeom prst="rect">
+            <a:avLst/>
+          </a:prstGeom>
+          <a:noFill/>
+        </p:spPr>
+        <p:txBody>
+          <a:bodyPr anchor="ctr" bIns="0" lIns="0" rIns="0" tIns="0" wrap="square"/>
+          <a:lstStyle/>
+          <a:p>
+            <a:pPr algn="r"/>
+            <a:fld id="{9B1A2C3D-4E5F-6A7B-8C9D-0E1F2A3B4C5D}" type="slidenum">
+              <a:rPr dirty="0" lang="en-US" sz="900">
+                <a:solidFill>
+                  <a:srgbClr val="6E7275"/>
+                </a:solidFill>
+                <a:latin typeface="+mn-lt"/>
+              </a:rPr>
+              <a:t>2</a:t>
+            </a:fld>
           </a:p>
         </p:txBody>
       </p:sp>
@@ -3204,7 +3270,7 @@
             </a:pPr>
             <a:r>
               <a:rPr/>
-              <a:t>18 August 2026</a:t>
+              <a:t>19 August 2026</a:t>
             </a:r>
           </a:p>
         </p:txBody>

--- a/08-pca-and-factor-models/slides.pptx
+++ b/08-pca-and-factor-models/slides.pptx
@@ -32,8 +32,6 @@
     <p:sldId id="280" r:id="rId26"/>
     <p:sldId id="281" r:id="rId27"/>
     <p:sldId id="282" r:id="rId28"/>
-    <p:sldId id="283" r:id="rId29"/>
-    <p:sldId id="284" r:id="rId30"/>
   </p:sldIdLst>
   <p:sldSz cx="9144000" cy="5143500" type="screen16x9"/>
   <p:notesSz cx="6858000" cy="9144000"/>
@@ -3209,7 +3207,7 @@
             </a:pPr>
             <a:r>
               <a:rPr/>
-              <a:t>PCA, the SVD, and Factor Models</a:t>
+              <a:t>Unsupervised I: PCA, the SVD, and Factor Models</a:t>
             </a:r>
           </a:p>
         </p:txBody>
@@ -3239,7 +3237,7 @@
             </a:pPr>
             <a:r>
               <a:rPr/>
-              <a:t>Session 08 · Finding the few things that move everything else</a:t>
+              <a:t>Session 08 · Lecture, first half</a:t>
             </a:r>
             <a:br/>
             <a:br/>
@@ -3270,7 +3268,7 @@
             </a:pPr>
             <a:r>
               <a:rPr/>
-              <a:t>19 August 2026</a:t>
+              <a:t>20 August 2026</a:t>
             </a:r>
           </a:p>
         </p:txBody>
@@ -3307,7 +3305,12 @@
             <p:ph type="title"/>
           </p:nvPr>
         </p:nvSpPr>
-        <p:spPr/>
+        <p:spPr>
+          <a:xfrm>
+            <a:off x="722313" y="3305176"/>
+            <a:ext cx="7772400" cy="1021556"/>
+          </a:xfrm>
+        </p:spPr>
         <p:txBody>
           <a:bodyPr/>
           <a:lstStyle/>
@@ -3317,96 +3320,7 @@
             </a:pPr>
             <a:r>
               <a:rPr/>
-              <a:t>Standardise, or measure in euros</a:t>
-            </a:r>
-          </a:p>
-        </p:txBody>
-      </p:sp>
-      <p:sp>
-        <p:nvSpPr>
-          <p:cNvPr id="3" name="Content Placeholder 2"/>
-          <p:cNvSpPr>
-            <a:spLocks noGrp="1"/>
-          </p:cNvSpPr>
-          <p:nvPr>
-            <p:ph idx="1"/>
-          </p:nvPr>
-        </p:nvSpPr>
-        <p:spPr/>
-        <p:txBody>
-          <a:bodyPr/>
-          <a:lstStyle/>
-          <a:p>
-            <a:pPr lvl="0" indent="0" marL="0">
-              <a:buNone/>
-            </a:pPr>
-            <a:r>
-              <a:rPr/>
-              <a:t>PCA maximises </a:t>
-            </a:r>
-            <a:r>
-              <a:rPr b="1"/>
-              <a:t>variance</a:t>
-            </a:r>
-            <a:r>
-              <a:rPr/>
-              <a:t>. A series measured in millions will dominate one measured in shares, purely through units.</a:t>
-            </a:r>
-          </a:p>
-          <a:p>
-            <a:pPr lvl="0" indent="0" marL="0">
-              <a:buNone/>
-            </a:pPr>
-            <a:r>
-              <a:rPr/>
-              <a:t>On this panel, </a:t>
-            </a:r>
-            <a:r>
-              <a:rPr>
-                <a:latin typeface="Courier"/>
-              </a:rPr>
-              <a:t>population</a:t>
-            </a:r>
-            <a:r>
-              <a:rPr/>
-              <a:t> and </a:t>
-            </a:r>
-            <a:r>
-              <a:rPr>
-                <a:latin typeface="Courier"/>
-              </a:rPr>
-              <a:t>gfcf_meur</a:t>
-            </a:r>
-            <a:r>
-              <a:rPr/>
-              <a:t> are enormous next to </a:t>
-            </a:r>
-            <a:r>
-              <a:rPr>
-                <a:latin typeface="Courier"/>
-              </a:rPr>
-              <a:t>share_renew</a:t>
-            </a:r>
-            <a:r>
-              <a:rPr/>
-              <a:t>. Without standardising, your first component is “country size” and nothing else.</a:t>
-            </a:r>
-          </a:p>
-          <a:p>
-            <a:pPr lvl="0" indent="0" marL="0">
-              <a:buNone/>
-            </a:pPr>
-            <a:r>
-              <a:rPr/>
-              <a:t>Standardising means you are doing PCA on the </a:t>
-            </a:r>
-            <a:r>
-              <a:rPr b="1"/>
-              <a:t>correlation</a:t>
-            </a:r>
-            <a:r>
-              <a:rPr/>
-              <a:t> matrix rather than the covariance matrix. State which.</a:t>
+              <a:t>8.2 Eckart–Young</a:t>
             </a:r>
           </a:p>
         </p:txBody>
@@ -3443,12 +3357,7 @@
             <p:ph type="title"/>
           </p:nvPr>
         </p:nvSpPr>
-        <p:spPr>
-          <a:xfrm>
-            <a:off x="722313" y="3305176"/>
-            <a:ext cx="7772400" cy="1021556"/>
-          </a:xfrm>
-        </p:spPr>
+        <p:spPr/>
         <p:txBody>
           <a:bodyPr/>
           <a:lstStyle/>
@@ -3458,11 +3367,281 @@
             </a:pPr>
             <a:r>
               <a:rPr/>
-              <a:t>How many factors</a:t>
-            </a:r>
-          </a:p>
-        </p:txBody>
-      </p:sp>
+              <a:t>The theorem</a:t>
+            </a:r>
+          </a:p>
+        </p:txBody>
+      </p:sp>
+      <mc:AlternateContent xmlns:mc="http://schemas.openxmlformats.org/markup-compatibility/2006">
+        <mc:Choice xmlns:a14="http://schemas.microsoft.com/office/drawing/2010/main" Requires="a14">
+          <p:sp>
+            <p:nvSpPr>
+              <p:cNvPr id="3" name="Content Placeholder 2"/>
+              <p:cNvSpPr>
+                <a:spLocks noGrp="1"/>
+              </p:cNvSpPr>
+              <p:nvPr>
+                <p:ph idx="1"/>
+              </p:nvPr>
+            </p:nvSpPr>
+            <p:spPr/>
+            <p:txBody>
+              <a:bodyPr/>
+              <a:lstStyle/>
+              <a:p>
+                <a:pPr lvl="0" indent="0" marL="0">
+                  <a:buNone/>
+                </a:pPr>
+                <a:r>
+                  <a:rPr/>
+                  <a:t>Among all matrices of rank </a:t>
+                </a:r>
+                <a14:m>
+                  <m:oMath xmlns:m="http://schemas.openxmlformats.org/officeDocument/2006/math">
+                    <m:r>
+                      <m:rPr>
+                        <m:sty m:val="p"/>
+                      </m:rPr>
+                      <m:t>≤</m:t>
+                    </m:r>
+                    <m:r>
+                      <m:t>k</m:t>
+                    </m:r>
+                  </m:oMath>
+                </a14:m>
+                <a:r>
+                  <a:rPr/>
+                  <a:t>, the one minimising </a:t>
+                </a:r>
+                <a14:m>
+                  <m:oMath xmlns:m="http://schemas.openxmlformats.org/officeDocument/2006/math">
+                    <m:r>
+                      <m:rPr>
+                        <m:sty m:val="p"/>
+                      </m:rPr>
+                      <m:t>∥</m:t>
+                    </m:r>
+                    <m:r>
+                      <m:t>X</m:t>
+                    </m:r>
+                    <m:r>
+                      <m:rPr>
+                        <m:sty m:val="p"/>
+                      </m:rPr>
+                      <m:t>−</m:t>
+                    </m:r>
+                    <m:acc>
+                      <m:accPr>
+                        <m:chr m:val="̃"/>
+                      </m:accPr>
+                      <m:e>
+                        <m:r>
+                          <m:t>X</m:t>
+                        </m:r>
+                      </m:e>
+                    </m:acc>
+                    <m:sSub>
+                      <m:e>
+                        <m:r>
+                          <m:rPr>
+                            <m:sty m:val="p"/>
+                          </m:rPr>
+                          <m:t>∥</m:t>
+                        </m:r>
+                      </m:e>
+                      <m:sub>
+                        <m:r>
+                          <m:t>F</m:t>
+                        </m:r>
+                      </m:sub>
+                    </m:sSub>
+                  </m:oMath>
+                </a14:m>
+                <a:r>
+                  <a:rPr/>
+                  <a:t> is</a:t>
+                </a:r>
+              </a:p>
+              <a:p>
+                <a:pPr lvl="0" indent="0" marL="0">
+                  <a:buNone/>
+                </a:pPr>
+                <a14:m>
+                  <m:oMathPara xmlns:m="http://schemas.openxmlformats.org/officeDocument/2006/math">
+                    <m:oMathParaPr>
+                      <m:jc m:val="center"/>
+                    </m:oMathParaPr>
+                    <m:oMath>
+                      <m:sSub>
+                        <m:e>
+                          <m:acc>
+                            <m:accPr>
+                              <m:chr m:val="̃"/>
+                            </m:accPr>
+                            <m:e>
+                              <m:r>
+                                <m:t>X</m:t>
+                              </m:r>
+                            </m:e>
+                          </m:acc>
+                        </m:e>
+                        <m:sub>
+                          <m:r>
+                            <m:t>k</m:t>
+                          </m:r>
+                        </m:sub>
+                      </m:sSub>
+                      <m:r>
+                        <m:rPr>
+                          <m:sty m:val="p"/>
+                        </m:rPr>
+                        <m:t>=</m:t>
+                      </m:r>
+                      <m:sSub>
+                        <m:e>
+                          <m:r>
+                            <m:t>U</m:t>
+                          </m:r>
+                        </m:e>
+                        <m:sub>
+                          <m:r>
+                            <m:t>k</m:t>
+                          </m:r>
+                        </m:sub>
+                      </m:sSub>
+                      <m:sSub>
+                        <m:e>
+                          <m:r>
+                            <m:t>D</m:t>
+                          </m:r>
+                        </m:e>
+                        <m:sub>
+                          <m:r>
+                            <m:t>k</m:t>
+                          </m:r>
+                        </m:sub>
+                      </m:sSub>
+                      <m:sSubSup>
+                        <m:e>
+                          <m:r>
+                            <m:t>V</m:t>
+                          </m:r>
+                        </m:e>
+                        <m:sub>
+                          <m:r>
+                            <m:t>k</m:t>
+                          </m:r>
+                        </m:sub>
+                        <m:sup>
+                          <m:r>
+                            <m:rPr>
+                              <m:sty m:val="p"/>
+                            </m:rPr>
+                            <m:t>⊤</m:t>
+                          </m:r>
+                        </m:sup>
+                      </m:sSubSup>
+                    </m:oMath>
+                  </m:oMathPara>
+                </a14:m>
+              </a:p>
+              <a:p>
+                <a:pPr lvl="0" indent="0" marL="0">
+                  <a:buNone/>
+                </a:pPr>
+                <a:r>
+                  <a:rPr/>
+                  <a:t>the truncated SVD, and the minimum equals </a:t>
+                </a:r>
+                <a14:m>
+                  <m:oMath xmlns:m="http://schemas.openxmlformats.org/officeDocument/2006/math">
+                    <m:r>
+                      <m:rPr>
+                        <m:sty m:val="p"/>
+                      </m:rPr>
+                      <m:t>(</m:t>
+                    </m:r>
+                    <m:nary>
+                      <m:naryPr>
+                        <m:chr m:val="∑"/>
+                        <m:limLoc m:val="undOvr"/>
+                        <m:subHide m:val="off"/>
+                        <m:supHide m:val="on"/>
+                      </m:naryPr>
+                      <m:sub>
+                        <m:r>
+                          <m:t>j</m:t>
+                        </m:r>
+                        <m:r>
+                          <m:rPr>
+                            <m:sty m:val="p"/>
+                          </m:rPr>
+                          <m:t>&gt;</m:t>
+                        </m:r>
+                        <m:r>
+                          <m:t>k</m:t>
+                        </m:r>
+                      </m:sub>
+                      <m:sup>
+                        <m:r>
+                          <m:t>​</m:t>
+                        </m:r>
+                      </m:sup>
+                      <m:e>
+                        <m:sSubSup>
+                          <m:e>
+                            <m:r>
+                              <m:t>d</m:t>
+                            </m:r>
+                          </m:e>
+                          <m:sub>
+                            <m:r>
+                              <m:t>j</m:t>
+                            </m:r>
+                          </m:sub>
+                          <m:sup>
+                            <m:r>
+                              <m:t>2</m:t>
+                            </m:r>
+                          </m:sup>
+                        </m:sSubSup>
+                      </m:e>
+                    </m:nary>
+                    <m:sSup>
+                      <m:e>
+                        <m:r>
+                          <m:rPr>
+                            <m:sty m:val="p"/>
+                          </m:rPr>
+                          <m:t>)</m:t>
+                        </m:r>
+                      </m:e>
+                      <m:sup>
+                        <m:r>
+                          <m:t>1</m:t>
+                        </m:r>
+                        <m:r>
+                          <m:rPr>
+                            <m:sty m:val="p"/>
+                          </m:rPr>
+                          <m:t>/</m:t>
+                        </m:r>
+                        <m:r>
+                          <m:t>2</m:t>
+                        </m:r>
+                      </m:sup>
+                    </m:sSup>
+                  </m:oMath>
+                </a14:m>
+                <a:r>
+                  <a:rPr/>
+                  <a:t>.</a:t>
+                </a:r>
+              </a:p>
+            </p:txBody>
+          </p:sp>
+        </mc:Choice>
+      </mc:AlternateContent>
     </p:spTree>
   </p:cSld>
 </p:sld>
@@ -3505,96 +3684,79 @@
             </a:pPr>
             <a:r>
               <a:rPr/>
-              <a:t>Four answers, none decisive</a:t>
-            </a:r>
-          </a:p>
-        </p:txBody>
-      </p:sp>
-      <p:sp>
-        <p:nvSpPr>
-          <p:cNvPr id="3" name="Content Placeholder 2"/>
-          <p:cNvSpPr>
-            <a:spLocks noGrp="1"/>
-          </p:cNvSpPr>
-          <p:nvPr>
-            <p:ph idx="1"/>
-          </p:nvPr>
-        </p:nvSpPr>
-        <p:spPr/>
-        <p:txBody>
-          <a:bodyPr/>
-          <a:lstStyle/>
-          <a:p>
-            <a:pPr lvl="0" indent="-342900" marL="342900">
-              <a:buAutoNum type="arabicPeriod"/>
-            </a:pPr>
-            <a:r>
-              <a:rPr b="1"/>
-              <a:t>Scree plot</a:t>
-            </a:r>
-            <a:r>
-              <a:rPr/>
-              <a:t> — look for the elbow. Subjective, and often there isn’t one.</a:t>
-            </a:r>
-          </a:p>
-          <a:p>
-            <a:pPr lvl="0" indent="-342900" marL="342900">
-              <a:buAutoNum type="arabicPeriod"/>
-            </a:pPr>
-            <a:r>
-              <a:rPr b="1"/>
-              <a:t>Cumulative variance</a:t>
-            </a:r>
-            <a:r>
-              <a:rPr/>
-              <a:t> — keep enough for 80%, 90%. Arbitrary threshold.</a:t>
-            </a:r>
-          </a:p>
-          <a:p>
-            <a:pPr lvl="0" indent="-342900" marL="342900">
-              <a:buAutoNum type="arabicPeriod"/>
-            </a:pPr>
-            <a:r>
-              <a:rPr b="1"/>
-              <a:t>Kaiser rule</a:t>
-            </a:r>
-            <a:r>
-              <a:rPr/>
-              <a:t> — eigenvalue &gt; 1 on standardised data. Known to over-select.</a:t>
-            </a:r>
-          </a:p>
-          <a:p>
-            <a:pPr lvl="0" indent="-342900" marL="342900">
-              <a:buAutoNum type="arabicPeriod"/>
-            </a:pPr>
-            <a:r>
-              <a:rPr b="1"/>
-              <a:t>Parallel analysis</a:t>
-            </a:r>
-            <a:r>
-              <a:rPr/>
-              <a:t> — compare against eigenvalues from </a:t>
-            </a:r>
-            <a:r>
-              <a:rPr i="1"/>
-              <a:t>shuffled</a:t>
-            </a:r>
-            <a:r>
-              <a:rPr/>
-              <a:t> data. Keep components that beat noise.</a:t>
-            </a:r>
-          </a:p>
-          <a:p>
-            <a:pPr lvl="0" indent="0" marL="0">
-              <a:buNone/>
-            </a:pPr>
-            <a:r>
-              <a:rPr/>
-              <a:t>Parallel analysis is the one with a defensible logic: it asks whether a component explains more than the same data with its structure destroyed.</a:t>
-            </a:r>
-          </a:p>
-        </p:txBody>
-      </p:sp>
+              <a:t>What it licenses you to say</a:t>
+            </a:r>
+          </a:p>
+        </p:txBody>
+      </p:sp>
+      <mc:AlternateContent xmlns:mc="http://schemas.openxmlformats.org/markup-compatibility/2006">
+        <mc:Choice xmlns:a14="http://schemas.microsoft.com/office/drawing/2010/main" Requires="a14">
+          <p:sp>
+            <p:nvSpPr>
+              <p:cNvPr id="3" name="Content Placeholder 2"/>
+              <p:cNvSpPr>
+                <a:spLocks noGrp="1"/>
+              </p:cNvSpPr>
+              <p:nvPr>
+                <p:ph idx="1"/>
+              </p:nvPr>
+            </p:nvSpPr>
+            <p:spPr/>
+            <p:txBody>
+              <a:bodyPr/>
+              <a:lstStyle/>
+              <a:p>
+                <a:pPr lvl="0" indent="0" marL="0">
+                  <a:buNone/>
+                </a:pPr>
+                <a:r>
+                  <a:rPr/>
+                  <a:t>This is the </a:t>
+                </a:r>
+                <a:r>
+                  <a:rPr b="1"/>
+                  <a:t>formal</a:t>
+                </a:r>
+                <a:r>
+                  <a:rPr/>
+                  <a:t> sense in which “the first </a:t>
+                </a:r>
+                <a14:m>
+                  <m:oMath xmlns:m="http://schemas.openxmlformats.org/officeDocument/2006/math">
+                    <m:r>
+                      <m:t>k</m:t>
+                    </m:r>
+                  </m:oMath>
+                </a14:m>
+                <a:r>
+                  <a:rPr/>
+                  <a:t> components capture the most information”: they give the best rank-</a:t>
+                </a:r>
+                <a14:m>
+                  <m:oMath xmlns:m="http://schemas.openxmlformats.org/officeDocument/2006/math">
+                    <m:r>
+                      <m:t>k</m:t>
+                    </m:r>
+                  </m:oMath>
+                </a14:m>
+                <a:r>
+                  <a:rPr/>
+                  <a:t> reconstruction in Frobenius norm.</a:t>
+                </a:r>
+              </a:p>
+              <a:p>
+                <a:pPr lvl="0" indent="0" marL="0">
+                  <a:buNone/>
+                </a:pPr>
+                <a:r>
+                  <a:rPr/>
+                  <a:t>It also tells you exactly what you lose — the discarded singular values. Not a heuristic; a theorem.</a:t>
+                </a:r>
+              </a:p>
+            </p:txBody>
+          </p:sp>
+        </mc:Choice>
+      </mc:AlternateContent>
     </p:spTree>
   </p:cSld>
 </p:sld>
@@ -3627,7 +3789,12 @@
             <p:ph type="title"/>
           </p:nvPr>
         </p:nvSpPr>
-        <p:spPr/>
+        <p:spPr>
+          <a:xfrm>
+            <a:off x="722313" y="3305176"/>
+            <a:ext cx="7772400" cy="1021556"/>
+          </a:xfrm>
+        </p:spPr>
         <p:txBody>
           <a:bodyPr/>
           <a:lstStyle/>
@@ -3637,496 +3804,7 @@
             </a:pPr>
             <a:r>
               <a:rPr/>
-              <a:t>Parallel analysis, in eight lines</a:t>
-            </a:r>
-          </a:p>
-        </p:txBody>
-      </p:sp>
-      <p:sp>
-        <p:nvSpPr>
-          <p:cNvPr id="3" name="Content Placeholder 2"/>
-          <p:cNvSpPr>
-            <a:spLocks noGrp="1"/>
-          </p:cNvSpPr>
-          <p:nvPr>
-            <p:ph idx="1"/>
-          </p:nvPr>
-        </p:nvSpPr>
-        <p:spPr/>
-        <p:txBody>
-          <a:bodyPr/>
-          <a:lstStyle/>
-          <a:p>
-            <a:pPr lvl="0" indent="0">
-              <a:buNone/>
-            </a:pPr>
-            <a:r>
-              <a:rPr b="1">
-                <a:solidFill>
-                  <a:srgbClr val="008000"/>
-                </a:solidFill>
-                <a:latin typeface="Courier"/>
-              </a:rPr>
-              <a:t>import</a:t>
-            </a:r>
-            <a:r>
-              <a:rPr>
-                <a:latin typeface="Courier"/>
-              </a:rPr>
-              <a:t> numpy </a:t>
-            </a:r>
-            <a:r>
-              <a:rPr b="1">
-                <a:solidFill>
-                  <a:srgbClr val="008000"/>
-                </a:solidFill>
-                <a:latin typeface="Courier"/>
-              </a:rPr>
-              <a:t>as</a:t>
-            </a:r>
-            <a:r>
-              <a:rPr>
-                <a:latin typeface="Courier"/>
-              </a:rPr>
-              <a:t> np</a:t>
-            </a:r>
-            <a:br/>
-            <a:br/>
-            <a:r>
-              <a:rPr b="1">
-                <a:solidFill>
-                  <a:srgbClr val="007020"/>
-                </a:solidFill>
-                <a:latin typeface="Courier"/>
-              </a:rPr>
-              <a:t>def</a:t>
-            </a:r>
-            <a:r>
-              <a:rPr>
-                <a:latin typeface="Courier"/>
-              </a:rPr>
-              <a:t> parallel_analysis(Z, n_iter</a:t>
-            </a:r>
-            <a:r>
-              <a:rPr>
-                <a:solidFill>
-                  <a:srgbClr val="666666"/>
-                </a:solidFill>
-                <a:latin typeface="Courier"/>
-              </a:rPr>
-              <a:t>=</a:t>
-            </a:r>
-            <a:r>
-              <a:rPr>
-                <a:solidFill>
-                  <a:srgbClr val="40A070"/>
-                </a:solidFill>
-                <a:latin typeface="Courier"/>
-              </a:rPr>
-              <a:t>200</a:t>
-            </a:r>
-            <a:r>
-              <a:rPr>
-                <a:latin typeface="Courier"/>
-              </a:rPr>
-              <a:t>, seed</a:t>
-            </a:r>
-            <a:r>
-              <a:rPr>
-                <a:solidFill>
-                  <a:srgbClr val="666666"/>
-                </a:solidFill>
-                <a:latin typeface="Courier"/>
-              </a:rPr>
-              <a:t>=</a:t>
-            </a:r>
-            <a:r>
-              <a:rPr>
-                <a:solidFill>
-                  <a:srgbClr val="40A070"/>
-                </a:solidFill>
-                <a:latin typeface="Courier"/>
-              </a:rPr>
-              <a:t>60033</a:t>
-            </a:r>
-            <a:r>
-              <a:rPr>
-                <a:latin typeface="Courier"/>
-              </a:rPr>
-              <a:t>):</a:t>
-            </a:r>
-            <a:br/>
-            <a:r>
-              <a:rPr>
-                <a:latin typeface="Courier"/>
-              </a:rPr>
-              <a:t>    rng </a:t>
-            </a:r>
-            <a:r>
-              <a:rPr>
-                <a:solidFill>
-                  <a:srgbClr val="666666"/>
-                </a:solidFill>
-                <a:latin typeface="Courier"/>
-              </a:rPr>
-              <a:t>=</a:t>
-            </a:r>
-            <a:r>
-              <a:rPr>
-                <a:latin typeface="Courier"/>
-              </a:rPr>
-              <a:t> np.random.default_rng(seed)</a:t>
-            </a:r>
-            <a:br/>
-            <a:r>
-              <a:rPr>
-                <a:latin typeface="Courier"/>
-              </a:rPr>
-              <a:t>    real </a:t>
-            </a:r>
-            <a:r>
-              <a:rPr>
-                <a:solidFill>
-                  <a:srgbClr val="666666"/>
-                </a:solidFill>
-                <a:latin typeface="Courier"/>
-              </a:rPr>
-              <a:t>=</a:t>
-            </a:r>
-            <a:r>
-              <a:rPr>
-                <a:latin typeface="Courier"/>
-              </a:rPr>
-              <a:t> np.linalg.svd(Z, compute_uv</a:t>
-            </a:r>
-            <a:r>
-              <a:rPr>
-                <a:solidFill>
-                  <a:srgbClr val="666666"/>
-                </a:solidFill>
-                <a:latin typeface="Courier"/>
-              </a:rPr>
-              <a:t>=</a:t>
-            </a:r>
-            <a:r>
-              <a:rPr>
-                <a:solidFill>
-                  <a:srgbClr val="19177C"/>
-                </a:solidFill>
-                <a:latin typeface="Courier"/>
-              </a:rPr>
-              <a:t>False</a:t>
-            </a:r>
-            <a:r>
-              <a:rPr>
-                <a:latin typeface="Courier"/>
-              </a:rPr>
-              <a:t>) </a:t>
-            </a:r>
-            <a:r>
-              <a:rPr>
-                <a:solidFill>
-                  <a:srgbClr val="666666"/>
-                </a:solidFill>
-                <a:latin typeface="Courier"/>
-              </a:rPr>
-              <a:t>**</a:t>
-            </a:r>
-            <a:r>
-              <a:rPr>
-                <a:latin typeface="Courier"/>
-              </a:rPr>
-              <a:t> </a:t>
-            </a:r>
-            <a:r>
-              <a:rPr>
-                <a:solidFill>
-                  <a:srgbClr val="40A070"/>
-                </a:solidFill>
-                <a:latin typeface="Courier"/>
-              </a:rPr>
-              <a:t>2</a:t>
-            </a:r>
-            <a:br/>
-            <a:r>
-              <a:rPr>
-                <a:latin typeface="Courier"/>
-              </a:rPr>
-              <a:t>    null </a:t>
-            </a:r>
-            <a:r>
-              <a:rPr>
-                <a:solidFill>
-                  <a:srgbClr val="666666"/>
-                </a:solidFill>
-                <a:latin typeface="Courier"/>
-              </a:rPr>
-              <a:t>=</a:t>
-            </a:r>
-            <a:r>
-              <a:rPr>
-                <a:latin typeface="Courier"/>
-              </a:rPr>
-              <a:t> np.zeros((n_iter, </a:t>
-            </a:r>
-            <a:r>
-              <a:rPr>
-                <a:solidFill>
-                  <a:srgbClr val="008000"/>
-                </a:solidFill>
-                <a:latin typeface="Courier"/>
-              </a:rPr>
-              <a:t>len</a:t>
-            </a:r>
-            <a:r>
-              <a:rPr>
-                <a:latin typeface="Courier"/>
-              </a:rPr>
-              <a:t>(real)))</a:t>
-            </a:r>
-            <a:br/>
-            <a:r>
-              <a:rPr>
-                <a:latin typeface="Courier"/>
-              </a:rPr>
-              <a:t>    </a:t>
-            </a:r>
-            <a:r>
-              <a:rPr b="1">
-                <a:solidFill>
-                  <a:srgbClr val="007020"/>
-                </a:solidFill>
-                <a:latin typeface="Courier"/>
-              </a:rPr>
-              <a:t>for</a:t>
-            </a:r>
-            <a:r>
-              <a:rPr>
-                <a:latin typeface="Courier"/>
-              </a:rPr>
-              <a:t> b </a:t>
-            </a:r>
-            <a:r>
-              <a:rPr b="1">
-                <a:solidFill>
-                  <a:srgbClr val="007020"/>
-                </a:solidFill>
-                <a:latin typeface="Courier"/>
-              </a:rPr>
-              <a:t>in</a:t>
-            </a:r>
-            <a:r>
-              <a:rPr>
-                <a:latin typeface="Courier"/>
-              </a:rPr>
-              <a:t> </a:t>
-            </a:r>
-            <a:r>
-              <a:rPr>
-                <a:solidFill>
-                  <a:srgbClr val="008000"/>
-                </a:solidFill>
-                <a:latin typeface="Courier"/>
-              </a:rPr>
-              <a:t>range</a:t>
-            </a:r>
-            <a:r>
-              <a:rPr>
-                <a:latin typeface="Courier"/>
-              </a:rPr>
-              <a:t>(n_iter):</a:t>
-            </a:r>
-            <a:br/>
-            <a:r>
-              <a:rPr>
-                <a:latin typeface="Courier"/>
-              </a:rPr>
-              <a:t>        S </a:t>
-            </a:r>
-            <a:r>
-              <a:rPr>
-                <a:solidFill>
-                  <a:srgbClr val="666666"/>
-                </a:solidFill>
-                <a:latin typeface="Courier"/>
-              </a:rPr>
-              <a:t>=</a:t>
-            </a:r>
-            <a:r>
-              <a:rPr>
-                <a:latin typeface="Courier"/>
-              </a:rPr>
-              <a:t> np.column_stack([rng.permutation(col) </a:t>
-            </a:r>
-            <a:r>
-              <a:rPr b="1">
-                <a:solidFill>
-                  <a:srgbClr val="007020"/>
-                </a:solidFill>
-                <a:latin typeface="Courier"/>
-              </a:rPr>
-              <a:t>for</a:t>
-            </a:r>
-            <a:r>
-              <a:rPr>
-                <a:latin typeface="Courier"/>
-              </a:rPr>
-              <a:t> col </a:t>
-            </a:r>
-            <a:r>
-              <a:rPr b="1">
-                <a:solidFill>
-                  <a:srgbClr val="007020"/>
-                </a:solidFill>
-                <a:latin typeface="Courier"/>
-              </a:rPr>
-              <a:t>in</a:t>
-            </a:r>
-            <a:r>
-              <a:rPr>
-                <a:latin typeface="Courier"/>
-              </a:rPr>
-              <a:t> Z.T])</a:t>
-            </a:r>
-            <a:br/>
-            <a:r>
-              <a:rPr>
-                <a:latin typeface="Courier"/>
-              </a:rPr>
-              <a:t>        null[b] </a:t>
-            </a:r>
-            <a:r>
-              <a:rPr>
-                <a:solidFill>
-                  <a:srgbClr val="666666"/>
-                </a:solidFill>
-                <a:latin typeface="Courier"/>
-              </a:rPr>
-              <a:t>=</a:t>
-            </a:r>
-            <a:r>
-              <a:rPr>
-                <a:latin typeface="Courier"/>
-              </a:rPr>
-              <a:t> np.linalg.svd(S, compute_uv</a:t>
-            </a:r>
-            <a:r>
-              <a:rPr>
-                <a:solidFill>
-                  <a:srgbClr val="666666"/>
-                </a:solidFill>
-                <a:latin typeface="Courier"/>
-              </a:rPr>
-              <a:t>=</a:t>
-            </a:r>
-            <a:r>
-              <a:rPr>
-                <a:solidFill>
-                  <a:srgbClr val="19177C"/>
-                </a:solidFill>
-                <a:latin typeface="Courier"/>
-              </a:rPr>
-              <a:t>False</a:t>
-            </a:r>
-            <a:r>
-              <a:rPr>
-                <a:latin typeface="Courier"/>
-              </a:rPr>
-              <a:t>) </a:t>
-            </a:r>
-            <a:r>
-              <a:rPr>
-                <a:solidFill>
-                  <a:srgbClr val="666666"/>
-                </a:solidFill>
-                <a:latin typeface="Courier"/>
-              </a:rPr>
-              <a:t>**</a:t>
-            </a:r>
-            <a:r>
-              <a:rPr>
-                <a:latin typeface="Courier"/>
-              </a:rPr>
-              <a:t> </a:t>
-            </a:r>
-            <a:r>
-              <a:rPr>
-                <a:solidFill>
-                  <a:srgbClr val="40A070"/>
-                </a:solidFill>
-                <a:latin typeface="Courier"/>
-              </a:rPr>
-              <a:t>2</a:t>
-            </a:r>
-            <a:br/>
-            <a:r>
-              <a:rPr>
-                <a:latin typeface="Courier"/>
-              </a:rPr>
-              <a:t>    </a:t>
-            </a:r>
-            <a:r>
-              <a:rPr b="1">
-                <a:solidFill>
-                  <a:srgbClr val="007020"/>
-                </a:solidFill>
-                <a:latin typeface="Courier"/>
-              </a:rPr>
-              <a:t>return</a:t>
-            </a:r>
-            <a:r>
-              <a:rPr>
-                <a:latin typeface="Courier"/>
-              </a:rPr>
-              <a:t> real, np.percentile(null, </a:t>
-            </a:r>
-            <a:r>
-              <a:rPr>
-                <a:solidFill>
-                  <a:srgbClr val="40A070"/>
-                </a:solidFill>
-                <a:latin typeface="Courier"/>
-              </a:rPr>
-              <a:t>95</a:t>
-            </a:r>
-            <a:r>
-              <a:rPr>
-                <a:latin typeface="Courier"/>
-              </a:rPr>
-              <a:t>, axis</a:t>
-            </a:r>
-            <a:r>
-              <a:rPr>
-                <a:solidFill>
-                  <a:srgbClr val="666666"/>
-                </a:solidFill>
-                <a:latin typeface="Courier"/>
-              </a:rPr>
-              <a:t>=</a:t>
-            </a:r>
-            <a:r>
-              <a:rPr>
-                <a:solidFill>
-                  <a:srgbClr val="40A070"/>
-                </a:solidFill>
-                <a:latin typeface="Courier"/>
-              </a:rPr>
-              <a:t>0</a:t>
-            </a:r>
-            <a:r>
-              <a:rPr>
-                <a:latin typeface="Courier"/>
-              </a:rPr>
-              <a:t>)</a:t>
-            </a:r>
-          </a:p>
-          <a:p>
-            <a:pPr lvl="0" indent="0" marL="0">
-              <a:buNone/>
-            </a:pPr>
-            <a:r>
-              <a:rPr/>
-              <a:t>Shuffling each column independently keeps every marginal distribution and destroys every correlation. What survives is real structure.</a:t>
+              <a:t>8.3 The approximate factor model</a:t>
             </a:r>
           </a:p>
         </p:txBody>
@@ -4163,12 +3841,7 @@
             <p:ph type="title"/>
           </p:nvPr>
         </p:nvSpPr>
-        <p:spPr>
-          <a:xfrm>
-            <a:off x="722313" y="3305176"/>
-            <a:ext cx="7772400" cy="1021556"/>
-          </a:xfrm>
-        </p:spPr>
+        <p:spPr/>
         <p:txBody>
           <a:bodyPr/>
           <a:lstStyle/>
@@ -4178,11 +3851,323 @@
             </a:pPr>
             <a:r>
               <a:rPr/>
-              <a:t>What a factor is not</a:t>
-            </a:r>
-          </a:p>
-        </p:txBody>
-      </p:sp>
+              <a:t>Stock and Watson’s insight</a:t>
+            </a:r>
+          </a:p>
+        </p:txBody>
+      </p:sp>
+      <mc:AlternateContent xmlns:mc="http://schemas.openxmlformats.org/markup-compatibility/2006">
+        <mc:Choice xmlns:a14="http://schemas.microsoft.com/office/drawing/2010/main" Requires="a14">
+          <p:sp>
+            <p:nvSpPr>
+              <p:cNvPr id="3" name="Content Placeholder 2"/>
+              <p:cNvSpPr>
+                <a:spLocks noGrp="1"/>
+              </p:cNvSpPr>
+              <p:nvPr>
+                <p:ph idx="1"/>
+              </p:nvPr>
+            </p:nvSpPr>
+            <p:spPr/>
+            <p:txBody>
+              <a:bodyPr/>
+              <a:lstStyle/>
+              <a:p>
+                <a:pPr lvl="0" indent="0" marL="0">
+                  <a:buNone/>
+                </a:pPr>
+                <a:r>
+                  <a:rPr/>
+                  <a:t>A large macro panel is well described by a few common shocks plus idiosyncratic noise:</a:t>
+                </a:r>
+              </a:p>
+              <a:p>
+                <a:pPr lvl="0" indent="0" marL="0">
+                  <a:buNone/>
+                </a:pPr>
+                <a14:m>
+                  <m:oMathPara xmlns:m="http://schemas.openxmlformats.org/officeDocument/2006/math">
+                    <m:oMathParaPr>
+                      <m:jc m:val="center"/>
+                    </m:oMathParaPr>
+                    <m:oMath>
+                      <m:sSub>
+                        <m:e>
+                          <m:r>
+                            <m:t>X</m:t>
+                          </m:r>
+                        </m:e>
+                        <m:sub>
+                          <m:r>
+                            <m:t>i</m:t>
+                          </m:r>
+                          <m:r>
+                            <m:t>t</m:t>
+                          </m:r>
+                        </m:sub>
+                      </m:sSub>
+                      <m:r>
+                        <m:rPr>
+                          <m:sty m:val="p"/>
+                        </m:rPr>
+                        <m:t>=</m:t>
+                      </m:r>
+                      <m:sSubSup>
+                        <m:e>
+                          <m:r>
+                            <m:t>λ</m:t>
+                          </m:r>
+                        </m:e>
+                        <m:sub>
+                          <m:r>
+                            <m:t>i</m:t>
+                          </m:r>
+                        </m:sub>
+                        <m:sup>
+                          <m:r>
+                            <m:rPr>
+                              <m:sty m:val="p"/>
+                            </m:rPr>
+                            <m:t>⊤</m:t>
+                          </m:r>
+                        </m:sup>
+                      </m:sSubSup>
+                      <m:sSub>
+                        <m:e>
+                          <m:r>
+                            <m:t>F</m:t>
+                          </m:r>
+                        </m:e>
+                        <m:sub>
+                          <m:r>
+                            <m:t>t</m:t>
+                          </m:r>
+                        </m:sub>
+                      </m:sSub>
+                      <m:r>
+                        <m:rPr>
+                          <m:sty m:val="p"/>
+                        </m:rPr>
+                        <m:t>+</m:t>
+                      </m:r>
+                      <m:sSub>
+                        <m:e>
+                          <m:r>
+                            <m:t>e</m:t>
+                          </m:r>
+                        </m:e>
+                        <m:sub>
+                          <m:r>
+                            <m:t>i</m:t>
+                          </m:r>
+                          <m:r>
+                            <m:t>t</m:t>
+                          </m:r>
+                        </m:sub>
+                      </m:sSub>
+                      <m:r>
+                        <m:rPr>
+                          <m:sty m:val="p"/>
+                        </m:rPr>
+                        <m:t>,</m:t>
+                      </m:r>
+                      <m:r>
+                        <m:t>  </m:t>
+                      </m:r>
+                      <m:r>
+                        <m:t>i</m:t>
+                      </m:r>
+                      <m:r>
+                        <m:rPr>
+                          <m:sty m:val="p"/>
+                        </m:rPr>
+                        <m:t>=</m:t>
+                      </m:r>
+                      <m:r>
+                        <m:t>1</m:t>
+                      </m:r>
+                      <m:r>
+                        <m:rPr>
+                          <m:sty m:val="p"/>
+                        </m:rPr>
+                        <m:t>,</m:t>
+                      </m:r>
+                      <m:r>
+                        <m:rPr>
+                          <m:sty m:val="p"/>
+                        </m:rPr>
+                        <m:t>…</m:t>
+                      </m:r>
+                      <m:r>
+                        <m:rPr>
+                          <m:sty m:val="p"/>
+                        </m:rPr>
+                        <m:t>,</m:t>
+                      </m:r>
+                      <m:r>
+                        <m:t>N</m:t>
+                      </m:r>
+                      <m:r>
+                        <m:rPr>
+                          <m:sty m:val="p"/>
+                        </m:rPr>
+                        <m:t>,</m:t>
+                      </m:r>
+                      <m:r>
+                        <m:t> </m:t>
+                      </m:r>
+                      <m:r>
+                        <m:t>t</m:t>
+                      </m:r>
+                      <m:r>
+                        <m:rPr>
+                          <m:sty m:val="p"/>
+                        </m:rPr>
+                        <m:t>=</m:t>
+                      </m:r>
+                      <m:r>
+                        <m:t>1</m:t>
+                      </m:r>
+                      <m:r>
+                        <m:rPr>
+                          <m:sty m:val="p"/>
+                        </m:rPr>
+                        <m:t>,</m:t>
+                      </m:r>
+                      <m:r>
+                        <m:rPr>
+                          <m:sty m:val="p"/>
+                        </m:rPr>
+                        <m:t>…</m:t>
+                      </m:r>
+                      <m:r>
+                        <m:rPr>
+                          <m:sty m:val="p"/>
+                        </m:rPr>
+                        <m:t>,</m:t>
+                      </m:r>
+                      <m:r>
+                        <m:t>T</m:t>
+                      </m:r>
+                    </m:oMath>
+                  </m:oMathPara>
+                </a14:m>
+              </a:p>
+              <a:p>
+                <a:pPr lvl="0" indent="0" marL="0">
+                  <a:buNone/>
+                </a:pPr>
+                <a:r>
+                  <a:rPr/>
+                  <a:t>with </a:t>
+                </a:r>
+                <a14:m>
+                  <m:oMath xmlns:m="http://schemas.openxmlformats.org/officeDocument/2006/math">
+                    <m:sSub>
+                      <m:e>
+                        <m:r>
+                          <m:t>F</m:t>
+                        </m:r>
+                      </m:e>
+                      <m:sub>
+                        <m:r>
+                          <m:t>t</m:t>
+                        </m:r>
+                      </m:sub>
+                    </m:sSub>
+                    <m:r>
+                      <m:rPr>
+                        <m:sty m:val="p"/>
+                      </m:rPr>
+                      <m:t>∈</m:t>
+                    </m:r>
+                    <m:sSup>
+                      <m:e>
+                        <m:r>
+                          <m:rPr>
+                            <m:sty m:val="p"/>
+                            <m:scr m:val="double-struck"/>
+                          </m:rPr>
+                          <m:t>R</m:t>
+                        </m:r>
+                      </m:e>
+                      <m:sup>
+                        <m:r>
+                          <m:t>r</m:t>
+                        </m:r>
+                      </m:sup>
+                    </m:sSup>
+                  </m:oMath>
+                </a14:m>
+                <a:r>
+                  <a:rPr/>
+                  <a:t> the common factors and </a:t>
+                </a:r>
+                <a14:m>
+                  <m:oMath xmlns:m="http://schemas.openxmlformats.org/officeDocument/2006/math">
+                    <m:sSub>
+                      <m:e>
+                        <m:r>
+                          <m:t>λ</m:t>
+                        </m:r>
+                      </m:e>
+                      <m:sub>
+                        <m:r>
+                          <m:t>i</m:t>
+                        </m:r>
+                      </m:sub>
+                    </m:sSub>
+                  </m:oMath>
+                </a14:m>
+                <a:r>
+                  <a:rPr/>
+                  <a:t> the loadings.</a:t>
+                </a:r>
+              </a:p>
+              <a:p>
+                <a:pPr lvl="0" indent="0" marL="0">
+                  <a:buNone/>
+                </a:pPr>
+                <a:r>
+                  <a:rPr/>
+                  <a:t>The </a:t>
+                </a:r>
+                <a:r>
+                  <a:rPr b="1"/>
+                  <a:t>approximate</a:t>
+                </a:r>
+                <a:r>
+                  <a:rPr/>
+                  <a:t> factor model (Chamberlain–Rothschild) allows weak cross-sectional and serial correlation in </a:t>
+                </a:r>
+                <a14:m>
+                  <m:oMath xmlns:m="http://schemas.openxmlformats.org/officeDocument/2006/math">
+                    <m:sSub>
+                      <m:e>
+                        <m:r>
+                          <m:t>e</m:t>
+                        </m:r>
+                      </m:e>
+                      <m:sub>
+                        <m:r>
+                          <m:t>i</m:t>
+                        </m:r>
+                        <m:r>
+                          <m:t>t</m:t>
+                        </m:r>
+                      </m:sub>
+                    </m:sSub>
+                  </m:oMath>
+                </a14:m>
+                <a:r>
+                  <a:rPr/>
+                  <a:t> — essential for real data.</a:t>
+                </a:r>
+              </a:p>
+            </p:txBody>
+          </p:sp>
+        </mc:Choice>
+      </mc:AlternateContent>
     </p:spTree>
   </p:cSld>
 </p:sld>
@@ -4225,7 +4210,7 @@
             </a:pPr>
             <a:r>
               <a:rPr/>
-              <a:t>Rotation indeterminacy</a:t>
+              <a:t>The key result</a:t>
             </a:r>
           </a:p>
         </p:txBody>
@@ -4252,105 +4237,214 @@
                 </a:pPr>
                 <a:r>
                   <a:rPr/>
-                  <a:t>For any orthogonal </a:t>
+                  <a:t>The principal-component estimator </a:t>
+                </a:r>
+                <a14:m>
+                  <m:oMath xmlns:m="http://schemas.openxmlformats.org/officeDocument/2006/math">
+                    <m:sSub>
+                      <m:e>
+                        <m:acc>
+                          <m:accPr>
+                            <m:chr m:val="̂"/>
+                          </m:accPr>
+                          <m:e>
+                            <m:r>
+                              <m:t>F</m:t>
+                            </m:r>
+                          </m:e>
+                        </m:acc>
+                      </m:e>
+                      <m:sub>
+                        <m:r>
+                          <m:t>t</m:t>
+                        </m:r>
+                      </m:sub>
+                    </m:sSub>
+                  </m:oMath>
+                </a14:m>
+                <a:r>
+                  <a:rPr/>
+                  <a:t> is consistent for the space spanned by </a:t>
+                </a:r>
+                <a14:m>
+                  <m:oMath xmlns:m="http://schemas.openxmlformats.org/officeDocument/2006/math">
+                    <m:sSub>
+                      <m:e>
+                        <m:r>
+                          <m:t>F</m:t>
+                        </m:r>
+                      </m:e>
+                      <m:sub>
+                        <m:r>
+                          <m:t>t</m:t>
+                        </m:r>
+                      </m:sub>
+                    </m:sSub>
+                  </m:oMath>
+                </a14:m>
+                <a:r>
+                  <a:rPr/>
+                  <a:t> as </a:t>
+                </a:r>
+                <a:r>
+                  <a:rPr b="1"/>
+                  <a:t>both</a:t>
+                </a:r>
+                <a:r>
+                  <a:rPr/>
+                  <a:t> </a:t>
                 </a:r>
                 <a14:m>
                   <m:oMath xmlns:m="http://schemas.openxmlformats.org/officeDocument/2006/math">
                     <m:r>
-                      <m:t>R</m:t>
+                      <m:t>N</m:t>
+                    </m:r>
+                    <m:r>
+                      <m:rPr>
+                        <m:sty m:val="p"/>
+                      </m:rPr>
+                      <m:t>→</m:t>
+                    </m:r>
+                    <m:r>
+                      <m:rPr>
+                        <m:sty m:val="p"/>
+                      </m:rPr>
+                      <m:t>∞</m:t>
                     </m:r>
                   </m:oMath>
                 </a14:m>
                 <a:r>
                   <a:rPr/>
-                  <a:t>:</a:t>
+                  <a:t> and </a:t>
+                </a:r>
+                <a14:m>
+                  <m:oMath xmlns:m="http://schemas.openxmlformats.org/officeDocument/2006/math">
+                    <m:r>
+                      <m:t>T</m:t>
+                    </m:r>
+                    <m:r>
+                      <m:rPr>
+                        <m:sty m:val="p"/>
+                      </m:rPr>
+                      <m:t>→</m:t>
+                    </m:r>
+                    <m:r>
+                      <m:rPr>
+                        <m:sty m:val="p"/>
+                      </m:rPr>
+                      <m:t>∞</m:t>
+                    </m:r>
+                  </m:oMath>
+                </a14:m>
+                <a:r>
+                  <a:rPr/>
+                  <a:t>, at rate </a:t>
+                </a:r>
+                <a14:m>
+                  <m:oMath xmlns:m="http://schemas.openxmlformats.org/officeDocument/2006/math">
+                    <m:r>
+                      <m:rPr>
+                        <m:sty m:val="p"/>
+                      </m:rPr>
+                      <m:t>min</m:t>
+                    </m:r>
+                    <m:d>
+                      <m:dPr>
+                        <m:begChr m:val="("/>
+                        <m:sepChr m:val=""/>
+                        <m:endChr m:val=")"/>
+                        <m:grow/>
+                      </m:dPr>
+                      <m:e>
+                        <m:rad>
+                          <m:radPr>
+                            <m:degHide m:val="on"/>
+                          </m:radPr>
+                          <m:deg/>
+                          <m:e>
+                            <m:r>
+                              <m:t>N</m:t>
+                            </m:r>
+                          </m:e>
+                        </m:rad>
+                        <m:r>
+                          <m:rPr>
+                            <m:sty m:val="p"/>
+                          </m:rPr>
+                          <m:t>,</m:t>
+                        </m:r>
+                        <m:rad>
+                          <m:radPr>
+                            <m:degHide m:val="on"/>
+                          </m:radPr>
+                          <m:deg/>
+                          <m:e>
+                            <m:r>
+                              <m:t>T</m:t>
+                            </m:r>
+                          </m:e>
+                        </m:rad>
+                      </m:e>
+                    </m:d>
+                  </m:oMath>
+                </a14:m>
+                <a:r>
+                  <a:rPr/>
+                  <a:t>.</a:t>
                 </a:r>
               </a:p>
               <a:p>
                 <a:pPr lvl="0" indent="0" marL="0">
                   <a:buNone/>
                 </a:pPr>
+                <a:r>
+                  <a:rPr/>
+                  <a:t>Crucially, if </a:t>
+                </a:r>
                 <a14:m>
-                  <m:oMathPara xmlns:m="http://schemas.openxmlformats.org/officeDocument/2006/math">
-                    <m:oMathParaPr>
-                      <m:jc m:val="center"/>
-                    </m:oMathParaPr>
-                    <m:oMath>
-                      <m:r>
-                        <m:t>F</m:t>
-                      </m:r>
-                      <m:r>
-                        <m:t>Λ</m:t>
-                      </m:r>
-                      <m:r>
-                        <m:rPr>
-                          <m:sty m:val="p"/>
-                        </m:rPr>
-                        <m:t>′</m:t>
-                      </m:r>
-                      <m:r>
-                        <m:rPr>
-                          <m:sty m:val="p"/>
-                        </m:rPr>
-                        <m:t>=</m:t>
-                      </m:r>
-                      <m:d>
-                        <m:dPr>
-                          <m:begChr m:val="("/>
-                          <m:sepChr m:val=""/>
-                          <m:endChr m:val=")"/>
-                          <m:grow/>
-                        </m:dPr>
-                        <m:e>
-                          <m:r>
-                            <m:t>F</m:t>
-                          </m:r>
-                          <m:r>
-                            <m:t>R</m:t>
-                          </m:r>
-                        </m:e>
-                      </m:d>
-                      <m:d>
-                        <m:dPr>
-                          <m:begChr m:val="("/>
-                          <m:sepChr m:val=""/>
-                          <m:endChr m:val=")"/>
-                          <m:grow/>
-                        </m:dPr>
-                        <m:e>
-                          <m:r>
-                            <m:t>Λ</m:t>
-                          </m:r>
-                          <m:r>
-                            <m:t>R</m:t>
-                          </m:r>
-                        </m:e>
-                      </m:d>
-                      <m:r>
-                        <m:rPr>
-                          <m:sty m:val="p"/>
-                        </m:rPr>
-                        <m:t>′</m:t>
-                      </m:r>
-                    </m:oMath>
-                  </m:oMathPara>
+                  <m:oMath xmlns:m="http://schemas.openxmlformats.org/officeDocument/2006/math">
+                    <m:rad>
+                      <m:radPr>
+                        <m:degHide m:val="on"/>
+                      </m:radPr>
+                      <m:deg/>
+                      <m:e>
+                        <m:r>
+                          <m:t>T</m:t>
+                        </m:r>
+                      </m:e>
+                    </m:rad>
+                    <m:r>
+                      <m:rPr>
+                        <m:sty m:val="p"/>
+                      </m:rPr>
+                      <m:t>/</m:t>
+                    </m:r>
+                    <m:r>
+                      <m:t>N</m:t>
+                    </m:r>
+                    <m:r>
+                      <m:rPr>
+                        <m:sty m:val="p"/>
+                      </m:rPr>
+                      <m:t>→</m:t>
+                    </m:r>
+                    <m:r>
+                      <m:t>0</m:t>
+                    </m:r>
+                  </m:oMath>
                 </a14:m>
-              </a:p>
-              <a:p>
-                <a:pPr lvl="0" indent="0" marL="0">
-                  <a:buNone/>
-                </a:pPr>
                 <a:r>
                   <a:rPr/>
-                  <a:t>The factors and loadings are </a:t>
+                  <a:t>, the estimated factors can be treated as </a:t>
                 </a:r>
                 <a:r>
                   <a:rPr b="1"/>
-                  <a:t>not separately identified</a:t>
+                  <a:t>known</a:t>
                 </a:r>
                 <a:r>
                   <a:rPr/>
-                  <a:t>. Any rotation fits exactly as well. “Factor 1” is a coordinate system, not a discovered object.</a:t>
+                  <a:t> in a second-stage regression — the generated-regressor problem vanishes.</a:t>
                 </a:r>
               </a:p>
             </p:txBody>
@@ -4399,7 +4493,7 @@
             </a:pPr>
             <a:r>
               <a:rPr/>
-              <a:t>So what may you say?</a:t>
+              <a:t>More series genuinely helps</a:t>
             </a:r>
           </a:p>
         </p:txBody>
@@ -4419,49 +4513,50 @@
           <a:bodyPr/>
           <a:lstStyle/>
           <a:p>
+            <a:pPr lvl="0" indent="0" marL="0">
+              <a:buNone/>
+            </a:pPr>
+            <a:r>
+              <a:rPr/>
+              <a:t>This is the </a:t>
+            </a:r>
+            <a:r>
+              <a:rPr b="1"/>
+              <a:t>opposite</a:t>
+            </a:r>
+            <a:r>
+              <a:rPr/>
+              <a:t> of the intuition you built in Sessions 05 and 06, and understanding why is the heart of this session.</a:t>
+            </a:r>
+          </a:p>
+          <a:p>
             <a:pPr lvl="0"/>
             <a:r>
               <a:rPr/>
-              <a:t>✅ “Three components explain 71% of the common variation.”</a:t>
+              <a:t>There, extra </a:t>
+            </a:r>
+            <a:r>
+              <a:rPr b="1"/>
+              <a:t>predictors</a:t>
+            </a:r>
+            <a:r>
+              <a:rPr/>
+              <a:t> added variance</a:t>
             </a:r>
           </a:p>
           <a:p>
             <a:pPr lvl="0"/>
             <a:r>
               <a:rPr/>
-              <a:t>✅ “The first component loads positively on all adoption series.”</a:t>
-            </a:r>
-          </a:p>
-          <a:p>
-            <a:pPr lvl="0"/>
+              <a:t>Here, extra </a:t>
+            </a:r>
+            <a:r>
+              <a:rPr b="1"/>
+              <a:t>measurements of the same latent object</a:t>
+            </a:r>
             <a:r>
               <a:rPr/>
-              <a:t>❌ “Factor 1 </a:t>
-            </a:r>
-            <a:r>
-              <a:rPr b="1"/>
-              <a:t>is</a:t>
-            </a:r>
-            <a:r>
-              <a:rPr/>
-              <a:t> institutional capacity.”</a:t>
-            </a:r>
-          </a:p>
-          <a:p>
-            <a:pPr lvl="0" indent="0" marL="0">
-              <a:buNone/>
-            </a:pPr>
-            <a:r>
-              <a:rPr/>
-              <a:t>Naming a factor is an </a:t>
-            </a:r>
-            <a:r>
-              <a:rPr b="1"/>
-              <a:t>interpretation you are advancing</a:t>
-            </a:r>
-            <a:r>
-              <a:rPr/>
-              <a:t>, on the evidence of the loadings. Present it as such, with the loadings visible so a reader can disagree.</a:t>
+              <a:t> average noise away</a:t>
             </a:r>
           </a:p>
         </p:txBody>
@@ -4508,7 +4603,7 @@
             </a:pPr>
             <a:r>
               <a:rPr/>
-              <a:t>Sign is arbitrary too</a:t>
+              <a:t>Normalisation</a:t>
             </a:r>
           </a:p>
         </p:txBody>
@@ -4535,38 +4630,113 @@
                 </a:pPr>
                 <a:r>
                   <a:rPr/>
-                  <a:t>The SVD is unique only up to sign: flip a column of </a:t>
-                </a:r>
-                <a14:m>
-                  <m:oMath xmlns:m="http://schemas.openxmlformats.org/officeDocument/2006/math">
-                    <m:r>
-                      <m:t>U</m:t>
-                    </m:r>
-                  </m:oMath>
-                </a14:m>
-                <a:r>
-                  <a:rPr/>
-                  <a:t> and the matching column of </a:t>
-                </a:r>
-                <a14:m>
-                  <m:oMath xmlns:m="http://schemas.openxmlformats.org/officeDocument/2006/math">
-                    <m:r>
-                      <m:t>V</m:t>
-                    </m:r>
-                  </m:oMath>
-                </a14:m>
-                <a:r>
-                  <a:rPr/>
-                  <a:t> and nothing changes.</a:t>
+                  <a:t>To pin down the rotation, impose</a:t>
                 </a:r>
               </a:p>
               <a:p>
                 <a:pPr lvl="0" indent="0" marL="0">
                   <a:buNone/>
                 </a:pPr>
+                <a14:m>
+                  <m:oMathPara xmlns:m="http://schemas.openxmlformats.org/officeDocument/2006/math">
+                    <m:oMathParaPr>
+                      <m:jc m:val="center"/>
+                    </m:oMathParaPr>
+                    <m:oMath>
+                      <m:sSup>
+                        <m:e>
+                          <m:r>
+                            <m:t>F</m:t>
+                          </m:r>
+                        </m:e>
+                        <m:sup>
+                          <m:r>
+                            <m:rPr>
+                              <m:sty m:val="p"/>
+                            </m:rPr>
+                            <m:t>⊤</m:t>
+                          </m:r>
+                        </m:sup>
+                      </m:sSup>
+                      <m:r>
+                        <m:t>F</m:t>
+                      </m:r>
+                      <m:r>
+                        <m:rPr>
+                          <m:sty m:val="p"/>
+                        </m:rPr>
+                        <m:t>/</m:t>
+                      </m:r>
+                      <m:r>
+                        <m:t>T</m:t>
+                      </m:r>
+                      <m:r>
+                        <m:rPr>
+                          <m:sty m:val="p"/>
+                        </m:rPr>
+                        <m:t>=</m:t>
+                      </m:r>
+                      <m:sSub>
+                        <m:e>
+                          <m:r>
+                            <m:t>I</m:t>
+                          </m:r>
+                        </m:e>
+                        <m:sub>
+                          <m:r>
+                            <m:t>r</m:t>
+                          </m:r>
+                        </m:sub>
+                      </m:sSub>
+                      <m:r>
+                        <m:rPr>
+                          <m:sty m:val="p"/>
+                        </m:rPr>
+                        <m:t>,</m:t>
+                      </m:r>
+                      <m:r>
+                        <m:t>  </m:t>
+                      </m:r>
+                      <m:sSup>
+                        <m:e>
+                          <m:r>
+                            <m:t>Λ</m:t>
+                          </m:r>
+                        </m:e>
+                        <m:sup>
+                          <m:r>
+                            <m:rPr>
+                              <m:sty m:val="p"/>
+                            </m:rPr>
+                            <m:t>⊤</m:t>
+                          </m:r>
+                        </m:sup>
+                      </m:sSup>
+                      <m:r>
+                        <m:t>Λ</m:t>
+                      </m:r>
+                      <m:r>
+                        <m:rPr>
+                          <m:nor/>
+                          <m:sty m:val="p"/>
+                        </m:rPr>
+                        <m:t> diagonal</m:t>
+                      </m:r>
+                    </m:oMath>
+                  </m:oMathPara>
+                </a14:m>
+              </a:p>
+              <a:p>
+                <a:pPr lvl="0" indent="0" marL="0">
+                  <a:buNone/>
+                </a:pPr>
+                <a:r>
+                  <a:rPr b="1"/>
+                  <a:t>This is a choice, not a discovery.</a:t>
+                </a:r>
                 <a:r>
                   <a:rPr/>
-                  <a:t>Rerun on a different machine or library version and your factor may come out upside down. Fix the sign by convention — for example, force the largest loading positive — and say you did.</a:t>
+                  <a:t> Any rotation fits identically well, so “Factor 1” is a coordinate system — never an object you have found.</a:t>
                 </a:r>
               </a:p>
             </p:txBody>
@@ -4620,7 +4790,7 @@
             </a:pPr>
             <a:r>
               <a:rPr/>
-              <a:t>Doing it</a:t>
+              <a:t>8.4 How many factors?</a:t>
             </a:r>
           </a:p>
         </p:txBody>
@@ -4667,7 +4837,7 @@
             </a:pPr>
             <a:r>
               <a:rPr/>
-              <a:t>Build a wide matrix</a:t>
+              <a:t>The informal answers</a:t>
             </a:r>
           </a:p>
         </p:txBody>
@@ -4687,502 +4857,25 @@
           <a:bodyPr/>
           <a:lstStyle/>
           <a:p>
-            <a:pPr lvl="0" indent="0">
-              <a:buNone/>
-            </a:pPr>
-            <a:r>
-              <a:rPr b="1">
-                <a:solidFill>
-                  <a:srgbClr val="008000"/>
-                </a:solidFill>
-                <a:latin typeface="Courier"/>
-              </a:rPr>
-              <a:t>import</a:t>
-            </a:r>
-            <a:r>
-              <a:rPr>
-                <a:latin typeface="Courier"/>
-              </a:rPr>
-              <a:t> pandas </a:t>
-            </a:r>
-            <a:r>
-              <a:rPr b="1">
-                <a:solidFill>
-                  <a:srgbClr val="008000"/>
-                </a:solidFill>
-                <a:latin typeface="Courier"/>
-              </a:rPr>
-              <a:t>as</a:t>
-            </a:r>
-            <a:r>
-              <a:rPr>
-                <a:latin typeface="Courier"/>
-              </a:rPr>
-              <a:t> pd</a:t>
-            </a:r>
-            <a:br/>
-            <a:br/>
-            <a:r>
-              <a:rPr>
-                <a:latin typeface="Courier"/>
-              </a:rPr>
-              <a:t>core </a:t>
-            </a:r>
-            <a:r>
-              <a:rPr>
-                <a:solidFill>
-                  <a:srgbClr val="666666"/>
-                </a:solidFill>
-                <a:latin typeface="Courier"/>
-              </a:rPr>
-              <a:t>=</a:t>
-            </a:r>
-            <a:r>
-              <a:rPr>
-                <a:latin typeface="Courier"/>
-              </a:rPr>
-              <a:t> pd.read_parquet(</a:t>
-            </a:r>
-            <a:r>
-              <a:rPr>
-                <a:solidFill>
-                  <a:srgbClr val="4070A0"/>
-                </a:solidFill>
-                <a:latin typeface="Courier"/>
-              </a:rPr>
-              <a:t>"data/spine/core.parquet"</a:t>
-            </a:r>
-            <a:r>
-              <a:rPr>
-                <a:latin typeface="Courier"/>
-              </a:rPr>
-              <a:t>)</a:t>
-            </a:r>
-            <a:br/>
-            <a:r>
-              <a:rPr>
-                <a:latin typeface="Courier"/>
-              </a:rPr>
-              <a:t>a    </a:t>
-            </a:r>
-            <a:r>
-              <a:rPr>
-                <a:solidFill>
-                  <a:srgbClr val="666666"/>
-                </a:solidFill>
-                <a:latin typeface="Courier"/>
-              </a:rPr>
-              <a:t>=</a:t>
-            </a:r>
-            <a:r>
-              <a:rPr>
-                <a:latin typeface="Courier"/>
-              </a:rPr>
-              <a:t> pd.read_parquet(</a:t>
-            </a:r>
-            <a:r>
-              <a:rPr>
-                <a:solidFill>
-                  <a:srgbClr val="4070A0"/>
-                </a:solidFill>
-                <a:latin typeface="Courier"/>
-              </a:rPr>
-              <a:t>"data/spine/angle_a_country.parquet"</a:t>
-            </a:r>
-            <a:r>
-              <a:rPr>
-                <a:latin typeface="Courier"/>
-              </a:rPr>
-              <a:t>)</a:t>
-            </a:r>
-            <a:br/>
-            <a:br/>
-            <a:r>
-              <a:rPr>
-                <a:latin typeface="Courier"/>
-              </a:rPr>
-              <a:t>df </a:t>
-            </a:r>
-            <a:r>
-              <a:rPr>
-                <a:solidFill>
-                  <a:srgbClr val="666666"/>
-                </a:solidFill>
-                <a:latin typeface="Courier"/>
-              </a:rPr>
-              <a:t>=</a:t>
-            </a:r>
-            <a:r>
-              <a:rPr>
-                <a:latin typeface="Courier"/>
-              </a:rPr>
-              <a:t> core.merge(a.drop(columns</a:t>
-            </a:r>
-            <a:r>
-              <a:rPr>
-                <a:solidFill>
-                  <a:srgbClr val="666666"/>
-                </a:solidFill>
-                <a:latin typeface="Courier"/>
-              </a:rPr>
-              <a:t>=</a:t>
-            </a:r>
-            <a:r>
-              <a:rPr>
-                <a:latin typeface="Courier"/>
-              </a:rPr>
-              <a:t>[</a:t>
-            </a:r>
-            <a:r>
-              <a:rPr>
-                <a:solidFill>
-                  <a:srgbClr val="4070A0"/>
-                </a:solidFill>
-                <a:latin typeface="Courier"/>
-              </a:rPr>
-              <a:t>"flag"</a:t>
-            </a:r>
-            <a:r>
-              <a:rPr>
-                <a:latin typeface="Courier"/>
-              </a:rPr>
-              <a:t>]), on</a:t>
-            </a:r>
-            <a:r>
-              <a:rPr>
-                <a:solidFill>
-                  <a:srgbClr val="666666"/>
-                </a:solidFill>
-                <a:latin typeface="Courier"/>
-              </a:rPr>
-              <a:t>=</a:t>
-            </a:r>
-            <a:r>
-              <a:rPr>
-                <a:latin typeface="Courier"/>
-              </a:rPr>
-              <a:t>[</a:t>
-            </a:r>
-            <a:r>
-              <a:rPr>
-                <a:solidFill>
-                  <a:srgbClr val="4070A0"/>
-                </a:solidFill>
-                <a:latin typeface="Courier"/>
-              </a:rPr>
-              <a:t>"geo"</a:t>
-            </a:r>
-            <a:r>
-              <a:rPr>
-                <a:latin typeface="Courier"/>
-              </a:rPr>
-              <a:t>, </a:t>
-            </a:r>
-            <a:r>
-              <a:rPr>
-                <a:solidFill>
-                  <a:srgbClr val="4070A0"/>
-                </a:solidFill>
-                <a:latin typeface="Courier"/>
-              </a:rPr>
-              <a:t>"time"</a:t>
-            </a:r>
-            <a:r>
-              <a:rPr>
-                <a:latin typeface="Courier"/>
-              </a:rPr>
-              <a:t>])</a:t>
-            </a:r>
-            <a:br/>
-            <a:r>
-              <a:rPr>
-                <a:latin typeface="Courier"/>
-              </a:rPr>
-              <a:t>cols </a:t>
-            </a:r>
-            <a:r>
-              <a:rPr>
-                <a:solidFill>
-                  <a:srgbClr val="666666"/>
-                </a:solidFill>
-                <a:latin typeface="Courier"/>
-              </a:rPr>
-              <a:t>=</a:t>
-            </a:r>
-            <a:r>
-              <a:rPr>
-                <a:latin typeface="Courier"/>
-              </a:rPr>
-              <a:t> [</a:t>
-            </a:r>
-            <a:r>
-              <a:rPr>
-                <a:solidFill>
-                  <a:srgbClr val="4070A0"/>
-                </a:solidFill>
-                <a:latin typeface="Courier"/>
-              </a:rPr>
-              <a:t>"gdp_pc_eur"</a:t>
-            </a:r>
-            <a:r>
-              <a:rPr>
-                <a:latin typeface="Courier"/>
-              </a:rPr>
-              <a:t>, </a:t>
-            </a:r>
-            <a:r>
-              <a:rPr>
-                <a:solidFill>
-                  <a:srgbClr val="4070A0"/>
-                </a:solidFill>
-                <a:latin typeface="Courier"/>
-              </a:rPr>
-              <a:t>"productivity_idx"</a:t>
-            </a:r>
-            <a:r>
-              <a:rPr>
-                <a:latin typeface="Courier"/>
-              </a:rPr>
-              <a:t>, </a:t>
-            </a:r>
-            <a:r>
-              <a:rPr>
-                <a:solidFill>
-                  <a:srgbClr val="4070A0"/>
-                </a:solidFill>
-                <a:latin typeface="Courier"/>
-              </a:rPr>
-              <a:t>"employment_ths"</a:t>
-            </a:r>
-            <a:r>
-              <a:rPr>
-                <a:latin typeface="Courier"/>
-              </a:rPr>
-              <a:t>, </a:t>
-            </a:r>
-            <a:r>
-              <a:rPr>
-                <a:solidFill>
-                  <a:srgbClr val="4070A0"/>
-                </a:solidFill>
-                <a:latin typeface="Courier"/>
-              </a:rPr>
-              <a:t>"gfcf_meur"</a:t>
-            </a:r>
-            <a:r>
-              <a:rPr>
-                <a:latin typeface="Courier"/>
-              </a:rPr>
-              <a:t>,</a:t>
-            </a:r>
-            <a:br/>
-            <a:r>
-              <a:rPr>
-                <a:latin typeface="Courier"/>
-              </a:rPr>
-              <a:t>        </a:t>
-            </a:r>
-            <a:r>
-              <a:rPr>
-                <a:solidFill>
-                  <a:srgbClr val="4070A0"/>
-                </a:solidFill>
-                <a:latin typeface="Courier"/>
-              </a:rPr>
-              <a:t>"share_renew"</a:t>
-            </a:r>
-            <a:r>
-              <a:rPr>
-                <a:latin typeface="Courier"/>
-              </a:rPr>
-              <a:t>, </a:t>
-            </a:r>
-            <a:r>
-              <a:rPr>
-                <a:solidFill>
-                  <a:srgbClr val="4070A0"/>
-                </a:solidFill>
-                <a:latin typeface="Courier"/>
-              </a:rPr>
-              <a:t>"share_fossil"</a:t>
-            </a:r>
-            <a:r>
-              <a:rPr>
-                <a:latin typeface="Courier"/>
-              </a:rPr>
-              <a:t>, </a:t>
-            </a:r>
-            <a:r>
-              <a:rPr>
-                <a:solidFill>
-                  <a:srgbClr val="4070A0"/>
-                </a:solidFill>
-                <a:latin typeface="Courier"/>
-              </a:rPr>
-              <a:t>"energy_intensity"</a:t>
-            </a:r>
-            <a:r>
-              <a:rPr>
-                <a:latin typeface="Courier"/>
-              </a:rPr>
-              <a:t>,</a:t>
-            </a:r>
-            <a:br/>
-            <a:r>
-              <a:rPr>
-                <a:latin typeface="Courier"/>
-              </a:rPr>
-              <a:t>        </a:t>
-            </a:r>
-            <a:r>
-              <a:rPr>
-                <a:solidFill>
-                  <a:srgbClr val="4070A0"/>
-                </a:solidFill>
-                <a:latin typeface="Courier"/>
-              </a:rPr>
-              <a:t>"elec_price_eur_kwh"</a:t>
-            </a:r>
-            <a:r>
-              <a:rPr>
-                <a:latin typeface="Courier"/>
-              </a:rPr>
-              <a:t>, </a:t>
-            </a:r>
-            <a:r>
-              <a:rPr>
-                <a:solidFill>
-                  <a:srgbClr val="4070A0"/>
-                </a:solidFill>
-                <a:latin typeface="Courier"/>
-              </a:rPr>
-              <a:t>"elec_industry_gwh"</a:t>
-            </a:r>
-            <a:r>
-              <a:rPr>
-                <a:latin typeface="Courier"/>
-              </a:rPr>
-              <a:t>]</a:t>
-            </a:r>
-            <a:br/>
-            <a:br/>
-            <a:r>
-              <a:rPr>
-                <a:latin typeface="Courier"/>
-              </a:rPr>
-              <a:t>W </a:t>
-            </a:r>
-            <a:r>
-              <a:rPr>
-                <a:solidFill>
-                  <a:srgbClr val="666666"/>
-                </a:solidFill>
-                <a:latin typeface="Courier"/>
-              </a:rPr>
-              <a:t>=</a:t>
-            </a:r>
-            <a:r>
-              <a:rPr>
-                <a:latin typeface="Courier"/>
-              </a:rPr>
-              <a:t> df.pivot_table(index</a:t>
-            </a:r>
-            <a:r>
-              <a:rPr>
-                <a:solidFill>
-                  <a:srgbClr val="666666"/>
-                </a:solidFill>
-                <a:latin typeface="Courier"/>
-              </a:rPr>
-              <a:t>=</a:t>
-            </a:r>
-            <a:r>
-              <a:rPr>
-                <a:solidFill>
-                  <a:srgbClr val="4070A0"/>
-                </a:solidFill>
-                <a:latin typeface="Courier"/>
-              </a:rPr>
-              <a:t>"time"</a:t>
-            </a:r>
-            <a:r>
-              <a:rPr>
-                <a:latin typeface="Courier"/>
-              </a:rPr>
-              <a:t>, columns</a:t>
-            </a:r>
-            <a:r>
-              <a:rPr>
-                <a:solidFill>
-                  <a:srgbClr val="666666"/>
-                </a:solidFill>
-                <a:latin typeface="Courier"/>
-              </a:rPr>
-              <a:t>=</a:t>
-            </a:r>
-            <a:r>
-              <a:rPr>
-                <a:solidFill>
-                  <a:srgbClr val="4070A0"/>
-                </a:solidFill>
-                <a:latin typeface="Courier"/>
-              </a:rPr>
-              <a:t>"geo"</a:t>
-            </a:r>
-            <a:r>
-              <a:rPr>
-                <a:latin typeface="Courier"/>
-              </a:rPr>
-              <a:t>, values</a:t>
-            </a:r>
-            <a:r>
-              <a:rPr>
-                <a:solidFill>
-                  <a:srgbClr val="666666"/>
-                </a:solidFill>
-                <a:latin typeface="Courier"/>
-              </a:rPr>
-              <a:t>=</a:t>
-            </a:r>
-            <a:r>
-              <a:rPr>
-                <a:solidFill>
-                  <a:srgbClr val="4070A0"/>
-                </a:solidFill>
-                <a:latin typeface="Courier"/>
-              </a:rPr>
-              <a:t>"productivity_idx"</a:t>
-            </a:r>
-            <a:r>
-              <a:rPr>
-                <a:latin typeface="Courier"/>
-              </a:rPr>
-              <a:t>)</a:t>
-            </a:r>
-            <a:br/>
-            <a:r>
-              <a:rPr>
-                <a:solidFill>
-                  <a:srgbClr val="008000"/>
-                </a:solidFill>
-                <a:latin typeface="Courier"/>
-              </a:rPr>
-              <a:t>print</a:t>
-            </a:r>
-            <a:r>
-              <a:rPr>
-                <a:latin typeface="Courier"/>
-              </a:rPr>
-              <a:t>(W.shape)      </a:t>
-            </a:r>
-            <a:r>
-              <a:rPr i="1">
-                <a:solidFill>
-                  <a:srgbClr val="60A0B0"/>
-                </a:solidFill>
-                <a:latin typeface="Courier"/>
-              </a:rPr>
-              <a:t># 15 years x 30 countries</a:t>
+            <a:pPr lvl="0"/>
+            <a:r>
+              <a:rPr b="1"/>
+              <a:t>Scree plot</a:t>
+            </a:r>
+            <a:r>
+              <a:rPr/>
+              <a:t> — look for the elbow. Informal, and often ambiguous.</a:t>
+            </a:r>
+          </a:p>
+          <a:p>
+            <a:pPr lvl="0"/>
+            <a:r>
+              <a:rPr b="1"/>
+              <a:t>Cumulative variance</a:t>
+            </a:r>
+            <a:r>
+              <a:rPr/>
+              <a:t> — retain enough for 80–90%. Arbitrary but transparent.</a:t>
             </a:r>
           </a:p>
         </p:txBody>
@@ -5211,30 +4904,28 @@
       </p:grpSpPr>
       <p:sp>
         <p:nvSpPr>
-          <p:cNvPr id="2" name="Title 1"/>
-          <p:cNvSpPr>
-            <a:spLocks noGrp="1"/>
-          </p:cNvSpPr>
-          <p:nvPr>
-            <p:ph type="title"/>
-          </p:nvPr>
-        </p:nvSpPr>
-        <p:spPr>
-          <a:xfrm>
-            <a:off x="722313" y="3305176"/>
-            <a:ext cx="7772400" cy="1021556"/>
-          </a:xfrm>
-        </p:spPr>
+          <p:cNvPr id="3" name="Content Placeholder 2"/>
+          <p:cNvSpPr>
+            <a:spLocks noGrp="1"/>
+          </p:cNvSpPr>
+          <p:nvPr>
+            <p:ph idx="1"/>
+          </p:nvPr>
+        </p:nvSpPr>
+        <p:spPr/>
         <p:txBody>
           <a:bodyPr/>
           <a:lstStyle/>
           <a:p>
             <a:pPr lvl="0" indent="0" marL="0">
+              <a:spcBef>
+                <a:spcPts val="3000"/>
+              </a:spcBef>
               <a:buNone/>
             </a:pPr>
             <a:r>
-              <a:rPr/>
-              <a:t>Where we are</a:t>
+              <a:rPr b="1"/>
+              <a:t>Two hundred macro series move together. How many things are happening?</a:t>
             </a:r>
           </a:p>
         </p:txBody>
@@ -5281,376 +4972,421 @@
             </a:pPr>
             <a:r>
               <a:rPr/>
-              <a:t>Standardise and decompose</a:t>
-            </a:r>
-          </a:p>
-        </p:txBody>
-      </p:sp>
-      <p:sp>
-        <p:nvSpPr>
-          <p:cNvPr id="3" name="Content Placeholder 2"/>
-          <p:cNvSpPr>
-            <a:spLocks noGrp="1"/>
-          </p:cNvSpPr>
-          <p:nvPr>
-            <p:ph idx="1"/>
-          </p:nvPr>
-        </p:nvSpPr>
-        <p:spPr/>
-        <p:txBody>
-          <a:bodyPr/>
-          <a:lstStyle/>
-          <a:p>
-            <a:pPr lvl="0" indent="0">
-              <a:buNone/>
-            </a:pPr>
-            <a:r>
-              <a:rPr b="1">
-                <a:solidFill>
-                  <a:srgbClr val="008000"/>
-                </a:solidFill>
-                <a:latin typeface="Courier"/>
-              </a:rPr>
-              <a:t>from</a:t>
-            </a:r>
-            <a:r>
-              <a:rPr>
-                <a:latin typeface="Courier"/>
-              </a:rPr>
-              <a:t> sklearn.decomposition </a:t>
-            </a:r>
-            <a:r>
-              <a:rPr b="1">
-                <a:solidFill>
-                  <a:srgbClr val="008000"/>
-                </a:solidFill>
-                <a:latin typeface="Courier"/>
-              </a:rPr>
-              <a:t>import</a:t>
-            </a:r>
-            <a:r>
-              <a:rPr>
-                <a:latin typeface="Courier"/>
-              </a:rPr>
-              <a:t> PCA</a:t>
-            </a:r>
-            <a:br/>
-            <a:r>
-              <a:rPr b="1">
-                <a:solidFill>
-                  <a:srgbClr val="008000"/>
-                </a:solidFill>
-                <a:latin typeface="Courier"/>
-              </a:rPr>
-              <a:t>from</a:t>
-            </a:r>
-            <a:r>
-              <a:rPr>
-                <a:latin typeface="Courier"/>
-              </a:rPr>
-              <a:t> sklearn.preprocessing </a:t>
-            </a:r>
-            <a:r>
-              <a:rPr b="1">
-                <a:solidFill>
-                  <a:srgbClr val="008000"/>
-                </a:solidFill>
-                <a:latin typeface="Courier"/>
-              </a:rPr>
-              <a:t>import</a:t>
-            </a:r>
-            <a:r>
-              <a:rPr>
-                <a:latin typeface="Courier"/>
-              </a:rPr>
-              <a:t> StandardScaler</a:t>
-            </a:r>
-            <a:br/>
-            <a:br/>
-            <a:r>
-              <a:rPr>
-                <a:latin typeface="Courier"/>
-              </a:rPr>
-              <a:t>Z </a:t>
-            </a:r>
-            <a:r>
-              <a:rPr>
-                <a:solidFill>
-                  <a:srgbClr val="666666"/>
-                </a:solidFill>
-                <a:latin typeface="Courier"/>
-              </a:rPr>
-              <a:t>=</a:t>
-            </a:r>
-            <a:r>
-              <a:rPr>
-                <a:latin typeface="Courier"/>
-              </a:rPr>
-              <a:t> StandardScaler().fit_transform(W.dropna(axis</a:t>
-            </a:r>
-            <a:r>
-              <a:rPr>
-                <a:solidFill>
-                  <a:srgbClr val="666666"/>
-                </a:solidFill>
-                <a:latin typeface="Courier"/>
-              </a:rPr>
-              <a:t>=</a:t>
-            </a:r>
-            <a:r>
-              <a:rPr>
-                <a:solidFill>
-                  <a:srgbClr val="40A070"/>
-                </a:solidFill>
-                <a:latin typeface="Courier"/>
-              </a:rPr>
-              <a:t>1</a:t>
-            </a:r>
-            <a:r>
-              <a:rPr>
-                <a:latin typeface="Courier"/>
-              </a:rPr>
-              <a:t>))</a:t>
-            </a:r>
-            <a:br/>
-            <a:r>
-              <a:rPr>
-                <a:latin typeface="Courier"/>
-              </a:rPr>
-              <a:t>p </a:t>
-            </a:r>
-            <a:r>
-              <a:rPr>
-                <a:solidFill>
-                  <a:srgbClr val="666666"/>
-                </a:solidFill>
-                <a:latin typeface="Courier"/>
-              </a:rPr>
-              <a:t>=</a:t>
-            </a:r>
-            <a:r>
-              <a:rPr>
-                <a:latin typeface="Courier"/>
-              </a:rPr>
-              <a:t> PCA().fit(Z)</a:t>
-            </a:r>
-            <a:br/>
-            <a:br/>
-            <a:r>
-              <a:rPr>
-                <a:latin typeface="Courier"/>
-              </a:rPr>
-              <a:t>ev </a:t>
-            </a:r>
-            <a:r>
-              <a:rPr>
-                <a:solidFill>
-                  <a:srgbClr val="666666"/>
-                </a:solidFill>
-                <a:latin typeface="Courier"/>
-              </a:rPr>
-              <a:t>=</a:t>
-            </a:r>
-            <a:r>
-              <a:rPr>
-                <a:latin typeface="Courier"/>
-              </a:rPr>
-              <a:t> p.explained_variance_ratio_</a:t>
-            </a:r>
-            <a:br/>
-            <a:r>
-              <a:rPr>
-                <a:solidFill>
-                  <a:srgbClr val="008000"/>
-                </a:solidFill>
-                <a:latin typeface="Courier"/>
-              </a:rPr>
-              <a:t>print</a:t>
-            </a:r>
-            <a:r>
-              <a:rPr>
-                <a:latin typeface="Courier"/>
-              </a:rPr>
-              <a:t>((ev[:</a:t>
-            </a:r>
-            <a:r>
-              <a:rPr>
-                <a:solidFill>
-                  <a:srgbClr val="40A070"/>
-                </a:solidFill>
-                <a:latin typeface="Courier"/>
-              </a:rPr>
-              <a:t>6</a:t>
-            </a:r>
-            <a:r>
-              <a:rPr>
-                <a:latin typeface="Courier"/>
-              </a:rPr>
-              <a:t>] </a:t>
-            </a:r>
-            <a:r>
-              <a:rPr>
-                <a:solidFill>
-                  <a:srgbClr val="666666"/>
-                </a:solidFill>
-                <a:latin typeface="Courier"/>
-              </a:rPr>
-              <a:t>*</a:t>
-            </a:r>
-            <a:r>
-              <a:rPr>
-                <a:latin typeface="Courier"/>
-              </a:rPr>
-              <a:t> </a:t>
-            </a:r>
-            <a:r>
-              <a:rPr>
-                <a:solidFill>
-                  <a:srgbClr val="40A070"/>
-                </a:solidFill>
-                <a:latin typeface="Courier"/>
-              </a:rPr>
-              <a:t>100</a:t>
-            </a:r>
-            <a:r>
-              <a:rPr>
-                <a:latin typeface="Courier"/>
-              </a:rPr>
-              <a:t>).</a:t>
-            </a:r>
-            <a:r>
-              <a:rPr>
-                <a:solidFill>
-                  <a:srgbClr val="008000"/>
-                </a:solidFill>
-                <a:latin typeface="Courier"/>
-              </a:rPr>
-              <a:t>round</a:t>
-            </a:r>
-            <a:r>
-              <a:rPr>
-                <a:latin typeface="Courier"/>
-              </a:rPr>
-              <a:t>(</a:t>
-            </a:r>
-            <a:r>
-              <a:rPr>
-                <a:solidFill>
-                  <a:srgbClr val="40A070"/>
-                </a:solidFill>
-                <a:latin typeface="Courier"/>
-              </a:rPr>
-              <a:t>1</a:t>
-            </a:r>
-            <a:r>
-              <a:rPr>
-                <a:latin typeface="Courier"/>
-              </a:rPr>
-              <a:t>))</a:t>
-            </a:r>
-            <a:br/>
-            <a:r>
-              <a:rPr>
-                <a:solidFill>
-                  <a:srgbClr val="008000"/>
-                </a:solidFill>
-                <a:latin typeface="Courier"/>
-              </a:rPr>
-              <a:t>print</a:t>
-            </a:r>
-            <a:r>
-              <a:rPr>
-                <a:latin typeface="Courier"/>
-              </a:rPr>
-              <a:t>((ev[:</a:t>
-            </a:r>
-            <a:r>
-              <a:rPr>
-                <a:solidFill>
-                  <a:srgbClr val="40A070"/>
-                </a:solidFill>
-                <a:latin typeface="Courier"/>
-              </a:rPr>
-              <a:t>6</a:t>
-            </a:r>
-            <a:r>
-              <a:rPr>
-                <a:latin typeface="Courier"/>
-              </a:rPr>
-              <a:t>].cumsum() </a:t>
-            </a:r>
-            <a:r>
-              <a:rPr>
-                <a:solidFill>
-                  <a:srgbClr val="666666"/>
-                </a:solidFill>
-                <a:latin typeface="Courier"/>
-              </a:rPr>
-              <a:t>*</a:t>
-            </a:r>
-            <a:r>
-              <a:rPr>
-                <a:latin typeface="Courier"/>
-              </a:rPr>
-              <a:t> </a:t>
-            </a:r>
-            <a:r>
-              <a:rPr>
-                <a:solidFill>
-                  <a:srgbClr val="40A070"/>
-                </a:solidFill>
-                <a:latin typeface="Courier"/>
-              </a:rPr>
-              <a:t>100</a:t>
-            </a:r>
-            <a:r>
-              <a:rPr>
-                <a:latin typeface="Courier"/>
-              </a:rPr>
-              <a:t>).</a:t>
-            </a:r>
-            <a:r>
-              <a:rPr>
-                <a:solidFill>
-                  <a:srgbClr val="008000"/>
-                </a:solidFill>
-                <a:latin typeface="Courier"/>
-              </a:rPr>
-              <a:t>round</a:t>
-            </a:r>
-            <a:r>
-              <a:rPr>
-                <a:latin typeface="Courier"/>
-              </a:rPr>
-              <a:t>(</a:t>
-            </a:r>
-            <a:r>
-              <a:rPr>
-                <a:solidFill>
-                  <a:srgbClr val="40A070"/>
-                </a:solidFill>
-                <a:latin typeface="Courier"/>
-              </a:rPr>
-              <a:t>1</a:t>
-            </a:r>
-            <a:r>
-              <a:rPr>
-                <a:latin typeface="Courier"/>
-              </a:rPr>
-              <a:t>))</a:t>
-            </a:r>
-          </a:p>
-          <a:p>
-            <a:pPr lvl="0" indent="0" marL="0">
-              <a:buNone/>
-            </a:pPr>
-            <a:r>
-              <a:rPr/>
-              <a:t>The spine was built from three factors. See how much of the variation the first three components recover before you look at any rule.</a:t>
-            </a:r>
-          </a:p>
-        </p:txBody>
-      </p:sp>
+              <a:t>Bai–Ng criteria</a:t>
+            </a:r>
+          </a:p>
+        </p:txBody>
+      </p:sp>
+      <mc:AlternateContent xmlns:mc="http://schemas.openxmlformats.org/markup-compatibility/2006">
+        <mc:Choice xmlns:a14="http://schemas.microsoft.com/office/drawing/2010/main" Requires="a14">
+          <p:sp>
+            <p:nvSpPr>
+              <p:cNvPr id="3" name="Content Placeholder 2"/>
+              <p:cNvSpPr>
+                <a:spLocks noGrp="1"/>
+              </p:cNvSpPr>
+              <p:nvPr>
+                <p:ph idx="1"/>
+              </p:nvPr>
+            </p:nvSpPr>
+            <p:spPr/>
+            <p:txBody>
+              <a:bodyPr/>
+              <a:lstStyle/>
+              <a:p>
+                <a:pPr lvl="0" indent="0" marL="0">
+                  <a:buNone/>
+                </a:pPr>
+                <a:r>
+                  <a:rPr/>
+                  <a:t>Minimise</a:t>
+                </a:r>
+              </a:p>
+              <a:p>
+                <a:pPr lvl="0" indent="0" marL="0">
+                  <a:buNone/>
+                </a:pPr>
+                <a14:m>
+                  <m:oMathPara xmlns:m="http://schemas.openxmlformats.org/officeDocument/2006/math">
+                    <m:oMathParaPr>
+                      <m:jc m:val="center"/>
+                    </m:oMathParaPr>
+                    <m:oMath>
+                      <m:r>
+                        <m:t>I</m:t>
+                      </m:r>
+                      <m:sSub>
+                        <m:e>
+                          <m:r>
+                            <m:t>C</m:t>
+                          </m:r>
+                        </m:e>
+                        <m:sub>
+                          <m:r>
+                            <m:t>p</m:t>
+                          </m:r>
+                          <m:r>
+                            <m:t>1</m:t>
+                          </m:r>
+                        </m:sub>
+                      </m:sSub>
+                      <m:d>
+                        <m:dPr>
+                          <m:begChr m:val="("/>
+                          <m:sepChr m:val=""/>
+                          <m:endChr m:val=")"/>
+                          <m:grow/>
+                        </m:dPr>
+                        <m:e>
+                          <m:r>
+                            <m:t>k</m:t>
+                          </m:r>
+                        </m:e>
+                      </m:d>
+                      <m:r>
+                        <m:rPr>
+                          <m:sty m:val="p"/>
+                        </m:rPr>
+                        <m:t>=</m:t>
+                      </m:r>
+                      <m:r>
+                        <m:rPr>
+                          <m:sty m:val="p"/>
+                        </m:rPr>
+                        <m:t>log</m:t>
+                      </m:r>
+                      <m:r>
+                        <m:t>V</m:t>
+                      </m:r>
+                      <m:d>
+                        <m:dPr>
+                          <m:begChr m:val="("/>
+                          <m:sepChr m:val=""/>
+                          <m:endChr m:val=")"/>
+                          <m:grow/>
+                        </m:dPr>
+                        <m:e>
+                          <m:r>
+                            <m:t>k</m:t>
+                          </m:r>
+                          <m:r>
+                            <m:rPr>
+                              <m:sty m:val="p"/>
+                            </m:rPr>
+                            <m:t>,</m:t>
+                          </m:r>
+                          <m:sSup>
+                            <m:e>
+                              <m:acc>
+                                <m:accPr>
+                                  <m:chr m:val="̂"/>
+                                </m:accPr>
+                                <m:e>
+                                  <m:r>
+                                    <m:t>F</m:t>
+                                  </m:r>
+                                </m:e>
+                              </m:acc>
+                            </m:e>
+                            <m:sup>
+                              <m:r>
+                                <m:t>k</m:t>
+                              </m:r>
+                            </m:sup>
+                          </m:sSup>
+                        </m:e>
+                      </m:d>
+                      <m:r>
+                        <m:rPr>
+                          <m:sty m:val="p"/>
+                        </m:rPr>
+                        <m:t>+</m:t>
+                      </m:r>
+                      <m:r>
+                        <m:t>k</m:t>
+                      </m:r>
+                      <m:d>
+                        <m:dPr>
+                          <m:begChr m:val="("/>
+                          <m:sepChr m:val=""/>
+                          <m:endChr m:val=")"/>
+                          <m:grow/>
+                        </m:dPr>
+                        <m:e>
+                          <m:f>
+                            <m:fPr>
+                              <m:type m:val="bar"/>
+                            </m:fPr>
+                            <m:num>
+                              <m:r>
+                                <m:t>N</m:t>
+                              </m:r>
+                              <m:r>
+                                <m:rPr>
+                                  <m:sty m:val="p"/>
+                                </m:rPr>
+                                <m:t>+</m:t>
+                              </m:r>
+                              <m:r>
+                                <m:t>T</m:t>
+                              </m:r>
+                            </m:num>
+                            <m:den>
+                              <m:r>
+                                <m:t>N</m:t>
+                              </m:r>
+                              <m:r>
+                                <m:t>T</m:t>
+                              </m:r>
+                            </m:den>
+                          </m:f>
+                        </m:e>
+                      </m:d>
+                      <m:r>
+                        <m:rPr>
+                          <m:sty m:val="p"/>
+                        </m:rPr>
+                        <m:t>log</m:t>
+                      </m:r>
+                      <m:d>
+                        <m:dPr>
+                          <m:begChr m:val="("/>
+                          <m:sepChr m:val=""/>
+                          <m:endChr m:val=")"/>
+                          <m:grow/>
+                        </m:dPr>
+                        <m:e>
+                          <m:f>
+                            <m:fPr>
+                              <m:type m:val="bar"/>
+                            </m:fPr>
+                            <m:num>
+                              <m:r>
+                                <m:t>N</m:t>
+                              </m:r>
+                              <m:r>
+                                <m:t>T</m:t>
+                              </m:r>
+                            </m:num>
+                            <m:den>
+                              <m:r>
+                                <m:t>N</m:t>
+                              </m:r>
+                              <m:r>
+                                <m:rPr>
+                                  <m:sty m:val="p"/>
+                                </m:rPr>
+                                <m:t>+</m:t>
+                              </m:r>
+                              <m:r>
+                                <m:t>T</m:t>
+                              </m:r>
+                            </m:den>
+                          </m:f>
+                        </m:e>
+                      </m:d>
+                    </m:oMath>
+                  </m:oMathPara>
+                </a14:m>
+              </a:p>
+              <a:p>
+                <a:pPr lvl="0" indent="0" marL="0">
+                  <a:buNone/>
+                </a:pPr>
+                <a:r>
+                  <a:rPr/>
+                  <a:t>where </a:t>
+                </a:r>
+                <a14:m>
+                  <m:oMath xmlns:m="http://schemas.openxmlformats.org/officeDocument/2006/math">
+                    <m:r>
+                      <m:t>V</m:t>
+                    </m:r>
+                    <m:d>
+                      <m:dPr>
+                        <m:begChr m:val="("/>
+                        <m:sepChr m:val=""/>
+                        <m:endChr m:val=")"/>
+                        <m:grow/>
+                      </m:dPr>
+                      <m:e>
+                        <m:r>
+                          <m:t>k</m:t>
+                        </m:r>
+                        <m:r>
+                          <m:rPr>
+                            <m:sty m:val="p"/>
+                          </m:rPr>
+                          <m:t>,</m:t>
+                        </m:r>
+                        <m:sSup>
+                          <m:e>
+                            <m:acc>
+                              <m:accPr>
+                                <m:chr m:val="̂"/>
+                              </m:accPr>
+                              <m:e>
+                                <m:r>
+                                  <m:t>F</m:t>
+                                </m:r>
+                              </m:e>
+                            </m:acc>
+                          </m:e>
+                          <m:sup>
+                            <m:r>
+                              <m:t>k</m:t>
+                            </m:r>
+                          </m:sup>
+                        </m:sSup>
+                      </m:e>
+                    </m:d>
+                  </m:oMath>
+                </a14:m>
+                <a:r>
+                  <a:rPr/>
+                  <a:t> is the average residual sum of squares from a </a:t>
+                </a:r>
+                <a14:m>
+                  <m:oMath xmlns:m="http://schemas.openxmlformats.org/officeDocument/2006/math">
+                    <m:r>
+                      <m:t>k</m:t>
+                    </m:r>
+                  </m:oMath>
+                </a14:m>
+                <a:r>
+                  <a:rPr/>
+                  <a:t>-factor fit.</a:t>
+                </a:r>
+              </a:p>
+              <a:p>
+                <a:pPr lvl="0" indent="0" marL="0">
+                  <a:buNone/>
+                </a:pPr>
+                <a:r>
+                  <a:rPr/>
+                  <a:t>The penalty must vanish slower than </a:t>
+                </a:r>
+                <a14:m>
+                  <m:oMath xmlns:m="http://schemas.openxmlformats.org/officeDocument/2006/math">
+                    <m:r>
+                      <m:rPr>
+                        <m:sty m:val="p"/>
+                      </m:rPr>
+                      <m:t>min</m:t>
+                    </m:r>
+                    <m:sSup>
+                      <m:e>
+                        <m:d>
+                          <m:dPr>
+                            <m:begChr m:val="("/>
+                            <m:sepChr m:val=""/>
+                            <m:endChr m:val=")"/>
+                            <m:grow/>
+                          </m:dPr>
+                          <m:e>
+                            <m:r>
+                              <m:t>N</m:t>
+                            </m:r>
+                            <m:r>
+                              <m:rPr>
+                                <m:sty m:val="p"/>
+                              </m:rPr>
+                              <m:t>,</m:t>
+                            </m:r>
+                            <m:r>
+                              <m:t>T</m:t>
+                            </m:r>
+                          </m:e>
+                        </m:d>
+                      </m:e>
+                      <m:sup>
+                        <m:r>
+                          <m:rPr>
+                            <m:sty m:val="p"/>
+                          </m:rPr>
+                          <m:t>−</m:t>
+                        </m:r>
+                        <m:r>
+                          <m:t>1</m:t>
+                        </m:r>
+                      </m:sup>
+                    </m:sSup>
+                  </m:oMath>
+                </a14:m>
+                <a:r>
+                  <a:rPr/>
+                  <a:t>. </a:t>
+                </a:r>
+                <a14:m>
+                  <m:oMath xmlns:m="http://schemas.openxmlformats.org/officeDocument/2006/math">
+                    <m:r>
+                      <m:t>I</m:t>
+                    </m:r>
+                    <m:sSub>
+                      <m:e>
+                        <m:r>
+                          <m:t>C</m:t>
+                        </m:r>
+                      </m:e>
+                      <m:sub>
+                        <m:r>
+                          <m:t>p</m:t>
+                        </m:r>
+                        <m:r>
+                          <m:t>2</m:t>
+                        </m:r>
+                      </m:sub>
+                    </m:sSub>
+                  </m:oMath>
+                </a14:m>
+                <a:r>
+                  <a:rPr/>
+                  <a:t> and </a:t>
+                </a:r>
+                <a14:m>
+                  <m:oMath xmlns:m="http://schemas.openxmlformats.org/officeDocument/2006/math">
+                    <m:r>
+                      <m:t>I</m:t>
+                    </m:r>
+                    <m:sSub>
+                      <m:e>
+                        <m:r>
+                          <m:t>C</m:t>
+                        </m:r>
+                      </m:e>
+                      <m:sub>
+                        <m:r>
+                          <m:t>p</m:t>
+                        </m:r>
+                        <m:r>
+                          <m:t>3</m:t>
+                        </m:r>
+                      </m:sub>
+                    </m:sSub>
+                  </m:oMath>
+                </a14:m>
+                <a:r>
+                  <a:rPr/>
+                  <a:t> use alternative penalty forms.</a:t>
+                </a:r>
+              </a:p>
+              <a:p>
+                <a:pPr lvl="0" indent="0" marL="0">
+                  <a:buNone/>
+                </a:pPr>
+                <a:r>
+                  <a:rPr b="1"/>
+                  <a:t>Report all three.</a:t>
+                </a:r>
+                <a:r>
+                  <a:rPr/>
+                  <a:t> If they disagree, say so.</a:t>
+                </a:r>
+              </a:p>
+            </p:txBody>
+          </p:sp>
+        </mc:Choice>
+      </mc:AlternateContent>
     </p:spTree>
   </p:cSld>
 </p:sld>
@@ -5693,403 +5429,150 @@
             </a:pPr>
             <a:r>
               <a:rPr/>
-              <a:t>The scree plot</a:t>
-            </a:r>
-          </a:p>
-        </p:txBody>
-      </p:sp>
-      <p:sp>
-        <p:nvSpPr>
-          <p:cNvPr id="3" name="Content Placeholder 2"/>
-          <p:cNvSpPr>
-            <a:spLocks noGrp="1"/>
-          </p:cNvSpPr>
-          <p:nvPr>
-            <p:ph idx="1"/>
-          </p:nvPr>
-        </p:nvSpPr>
-        <p:spPr/>
-        <p:txBody>
-          <a:bodyPr/>
-          <a:lstStyle/>
-          <a:p>
-            <a:pPr lvl="0" indent="0">
-              <a:buNone/>
-            </a:pPr>
-            <a:r>
-              <a:rPr b="1">
-                <a:solidFill>
-                  <a:srgbClr val="008000"/>
-                </a:solidFill>
-                <a:latin typeface="Courier"/>
-              </a:rPr>
-              <a:t>import</a:t>
-            </a:r>
-            <a:r>
-              <a:rPr>
-                <a:latin typeface="Courier"/>
-              </a:rPr>
-              <a:t> matplotlib.pyplot </a:t>
-            </a:r>
-            <a:r>
-              <a:rPr b="1">
-                <a:solidFill>
-                  <a:srgbClr val="008000"/>
-                </a:solidFill>
-                <a:latin typeface="Courier"/>
-              </a:rPr>
-              <a:t>as</a:t>
-            </a:r>
-            <a:r>
-              <a:rPr>
-                <a:latin typeface="Courier"/>
-              </a:rPr>
-              <a:t> plt</a:t>
-            </a:r>
-            <a:br/>
-            <a:br/>
-            <a:r>
-              <a:rPr>
-                <a:latin typeface="Courier"/>
-              </a:rPr>
-              <a:t>real, null95 </a:t>
-            </a:r>
-            <a:r>
-              <a:rPr>
-                <a:solidFill>
-                  <a:srgbClr val="666666"/>
-                </a:solidFill>
-                <a:latin typeface="Courier"/>
-              </a:rPr>
-              <a:t>=</a:t>
-            </a:r>
-            <a:r>
-              <a:rPr>
-                <a:latin typeface="Courier"/>
-              </a:rPr>
-              <a:t> parallel_analysis(Z)</a:t>
-            </a:r>
-            <a:br/>
-            <a:r>
-              <a:rPr>
-                <a:latin typeface="Courier"/>
-              </a:rPr>
-              <a:t>plt.plot(</a:t>
-            </a:r>
-            <a:r>
-              <a:rPr>
-                <a:solidFill>
-                  <a:srgbClr val="008000"/>
-                </a:solidFill>
-                <a:latin typeface="Courier"/>
-              </a:rPr>
-              <a:t>range</a:t>
-            </a:r>
-            <a:r>
-              <a:rPr>
-                <a:latin typeface="Courier"/>
-              </a:rPr>
-              <a:t>(</a:t>
-            </a:r>
-            <a:r>
-              <a:rPr>
-                <a:solidFill>
-                  <a:srgbClr val="40A070"/>
-                </a:solidFill>
-                <a:latin typeface="Courier"/>
-              </a:rPr>
-              <a:t>1</a:t>
-            </a:r>
-            <a:r>
-              <a:rPr>
-                <a:latin typeface="Courier"/>
-              </a:rPr>
-              <a:t>, </a:t>
-            </a:r>
-            <a:r>
-              <a:rPr>
-                <a:solidFill>
-                  <a:srgbClr val="008000"/>
-                </a:solidFill>
-                <a:latin typeface="Courier"/>
-              </a:rPr>
-              <a:t>len</a:t>
-            </a:r>
-            <a:r>
-              <a:rPr>
-                <a:latin typeface="Courier"/>
-              </a:rPr>
-              <a:t>(real) </a:t>
-            </a:r>
-            <a:r>
-              <a:rPr>
-                <a:solidFill>
-                  <a:srgbClr val="666666"/>
-                </a:solidFill>
-                <a:latin typeface="Courier"/>
-              </a:rPr>
-              <a:t>+</a:t>
-            </a:r>
-            <a:r>
-              <a:rPr>
-                <a:latin typeface="Courier"/>
-              </a:rPr>
-              <a:t> </a:t>
-            </a:r>
-            <a:r>
-              <a:rPr>
-                <a:solidFill>
-                  <a:srgbClr val="40A070"/>
-                </a:solidFill>
-                <a:latin typeface="Courier"/>
-              </a:rPr>
-              <a:t>1</a:t>
-            </a:r>
-            <a:r>
-              <a:rPr>
-                <a:latin typeface="Courier"/>
-              </a:rPr>
-              <a:t>), real, </a:t>
-            </a:r>
-            <a:r>
-              <a:rPr>
-                <a:solidFill>
-                  <a:srgbClr val="4070A0"/>
-                </a:solidFill>
-                <a:latin typeface="Courier"/>
-              </a:rPr>
-              <a:t>"o-"</a:t>
-            </a:r>
-            <a:r>
-              <a:rPr>
-                <a:latin typeface="Courier"/>
-              </a:rPr>
-              <a:t>, label</a:t>
-            </a:r>
-            <a:r>
-              <a:rPr>
-                <a:solidFill>
-                  <a:srgbClr val="666666"/>
-                </a:solidFill>
-                <a:latin typeface="Courier"/>
-              </a:rPr>
-              <a:t>=</a:t>
-            </a:r>
-            <a:r>
-              <a:rPr>
-                <a:solidFill>
-                  <a:srgbClr val="4070A0"/>
-                </a:solidFill>
-                <a:latin typeface="Courier"/>
-              </a:rPr>
-              <a:t>"observed"</a:t>
-            </a:r>
-            <a:r>
-              <a:rPr>
-                <a:latin typeface="Courier"/>
-              </a:rPr>
-              <a:t>)</a:t>
-            </a:r>
-            <a:br/>
-            <a:r>
-              <a:rPr>
-                <a:latin typeface="Courier"/>
-              </a:rPr>
-              <a:t>plt.plot(</a:t>
-            </a:r>
-            <a:r>
-              <a:rPr>
-                <a:solidFill>
-                  <a:srgbClr val="008000"/>
-                </a:solidFill>
-                <a:latin typeface="Courier"/>
-              </a:rPr>
-              <a:t>range</a:t>
-            </a:r>
-            <a:r>
-              <a:rPr>
-                <a:latin typeface="Courier"/>
-              </a:rPr>
-              <a:t>(</a:t>
-            </a:r>
-            <a:r>
-              <a:rPr>
-                <a:solidFill>
-                  <a:srgbClr val="40A070"/>
-                </a:solidFill>
-                <a:latin typeface="Courier"/>
-              </a:rPr>
-              <a:t>1</a:t>
-            </a:r>
-            <a:r>
-              <a:rPr>
-                <a:latin typeface="Courier"/>
-              </a:rPr>
-              <a:t>, </a:t>
-            </a:r>
-            <a:r>
-              <a:rPr>
-                <a:solidFill>
-                  <a:srgbClr val="008000"/>
-                </a:solidFill>
-                <a:latin typeface="Courier"/>
-              </a:rPr>
-              <a:t>len</a:t>
-            </a:r>
-            <a:r>
-              <a:rPr>
-                <a:latin typeface="Courier"/>
-              </a:rPr>
-              <a:t>(null95) </a:t>
-            </a:r>
-            <a:r>
-              <a:rPr>
-                <a:solidFill>
-                  <a:srgbClr val="666666"/>
-                </a:solidFill>
-                <a:latin typeface="Courier"/>
-              </a:rPr>
-              <a:t>+</a:t>
-            </a:r>
-            <a:r>
-              <a:rPr>
-                <a:latin typeface="Courier"/>
-              </a:rPr>
-              <a:t> </a:t>
-            </a:r>
-            <a:r>
-              <a:rPr>
-                <a:solidFill>
-                  <a:srgbClr val="40A070"/>
-                </a:solidFill>
-                <a:latin typeface="Courier"/>
-              </a:rPr>
-              <a:t>1</a:t>
-            </a:r>
-            <a:r>
-              <a:rPr>
-                <a:latin typeface="Courier"/>
-              </a:rPr>
-              <a:t>), null95, </a:t>
-            </a:r>
-            <a:r>
-              <a:rPr>
-                <a:solidFill>
-                  <a:srgbClr val="4070A0"/>
-                </a:solidFill>
-                <a:latin typeface="Courier"/>
-              </a:rPr>
-              <a:t>"s--"</a:t>
-            </a:r>
-            <a:r>
-              <a:rPr>
-                <a:latin typeface="Courier"/>
-              </a:rPr>
-              <a:t>, label</a:t>
-            </a:r>
-            <a:r>
-              <a:rPr>
-                <a:solidFill>
-                  <a:srgbClr val="666666"/>
-                </a:solidFill>
-                <a:latin typeface="Courier"/>
-              </a:rPr>
-              <a:t>=</a:t>
-            </a:r>
-            <a:r>
-              <a:rPr>
-                <a:solidFill>
-                  <a:srgbClr val="4070A0"/>
-                </a:solidFill>
-                <a:latin typeface="Courier"/>
-              </a:rPr>
-              <a:t>"95th pct of shuffled"</a:t>
-            </a:r>
-            <a:r>
-              <a:rPr>
-                <a:latin typeface="Courier"/>
-              </a:rPr>
-              <a:t>)</a:t>
-            </a:r>
-            <a:br/>
-            <a:r>
-              <a:rPr>
-                <a:latin typeface="Courier"/>
-              </a:rPr>
-              <a:t>plt.xlabel(</a:t>
-            </a:r>
-            <a:r>
-              <a:rPr>
-                <a:solidFill>
-                  <a:srgbClr val="4070A0"/>
-                </a:solidFill>
-                <a:latin typeface="Courier"/>
-              </a:rPr>
-              <a:t>"component"</a:t>
-            </a:r>
-            <a:r>
-              <a:rPr>
-                <a:latin typeface="Courier"/>
-              </a:rPr>
-              <a:t>)</a:t>
-            </a:r>
-            <a:r>
-              <a:rPr>
-                <a:solidFill>
-                  <a:srgbClr val="666666"/>
-                </a:solidFill>
-                <a:latin typeface="Courier"/>
-              </a:rPr>
-              <a:t>;</a:t>
-            </a:r>
-            <a:r>
-              <a:rPr>
-                <a:latin typeface="Courier"/>
-              </a:rPr>
-              <a:t> plt.ylabel(</a:t>
-            </a:r>
-            <a:r>
-              <a:rPr>
-                <a:solidFill>
-                  <a:srgbClr val="4070A0"/>
-                </a:solidFill>
-                <a:latin typeface="Courier"/>
-              </a:rPr>
-              <a:t>"eigenvalue"</a:t>
-            </a:r>
-            <a:r>
-              <a:rPr>
-                <a:latin typeface="Courier"/>
-              </a:rPr>
-              <a:t>)</a:t>
-            </a:r>
-            <a:r>
-              <a:rPr>
-                <a:solidFill>
-                  <a:srgbClr val="666666"/>
-                </a:solidFill>
-                <a:latin typeface="Courier"/>
-              </a:rPr>
-              <a:t>;</a:t>
-            </a:r>
-            <a:r>
-              <a:rPr>
-                <a:latin typeface="Courier"/>
-              </a:rPr>
-              <a:t> plt.legend()</a:t>
-            </a:r>
-          </a:p>
-          <a:p>
-            <a:pPr lvl="0" indent="0" marL="0">
-              <a:buNone/>
-            </a:pPr>
-            <a:r>
-              <a:rPr/>
-              <a:t>Keep the components whose eigenvalue sits above the dashed line. Count them before you read the next slide.</a:t>
-            </a:r>
-          </a:p>
-        </p:txBody>
-      </p:sp>
+              <a:t>Cross-checks</a:t>
+            </a:r>
+          </a:p>
+        </p:txBody>
+      </p:sp>
+      <mc:AlternateContent xmlns:mc="http://schemas.openxmlformats.org/markup-compatibility/2006">
+        <mc:Choice xmlns:a14="http://schemas.microsoft.com/office/drawing/2010/main" Requires="a14">
+          <p:sp>
+            <p:nvSpPr>
+              <p:cNvPr id="3" name="Content Placeholder 2"/>
+              <p:cNvSpPr>
+                <a:spLocks noGrp="1"/>
+              </p:cNvSpPr>
+              <p:nvPr>
+                <p:ph idx="1"/>
+              </p:nvPr>
+            </p:nvSpPr>
+            <p:spPr/>
+            <p:txBody>
+              <a:bodyPr/>
+              <a:lstStyle/>
+              <a:p>
+                <a:pPr lvl="0"/>
+                <a:r>
+                  <a:rPr b="1"/>
+                  <a:t>Onatski’s test</a:t>
+                </a:r>
+              </a:p>
+              <a:p>
+                <a:pPr lvl="0"/>
+                <a:r>
+                  <a:rPr/>
+                  <a:t>the </a:t>
+                </a:r>
+                <a:r>
+                  <a:rPr b="1"/>
+                  <a:t>eigenvalue-ratio</a:t>
+                </a:r>
+                <a:r>
+                  <a:rPr/>
+                  <a:t> criterion of Ahn &amp; Horenstein: </a:t>
+                </a:r>
+                <a14:m>
+                  <m:oMath xmlns:m="http://schemas.openxmlformats.org/officeDocument/2006/math">
+                    <m:acc>
+                      <m:accPr>
+                        <m:chr m:val="̂"/>
+                      </m:accPr>
+                      <m:e>
+                        <m:r>
+                          <m:t>r</m:t>
+                        </m:r>
+                      </m:e>
+                    </m:acc>
+                    <m:r>
+                      <m:rPr>
+                        <m:sty m:val="p"/>
+                      </m:rPr>
+                      <m:t>=</m:t>
+                    </m:r>
+                    <m:r>
+                      <m:rPr>
+                        <m:sty m:val="p"/>
+                      </m:rPr>
+                      <m:t>arg</m:t>
+                    </m:r>
+                    <m:sSub>
+                      <m:e>
+                        <m:r>
+                          <m:rPr>
+                            <m:sty m:val="p"/>
+                          </m:rPr>
+                          <m:t>max</m:t>
+                        </m:r>
+                      </m:e>
+                      <m:sub>
+                        <m:r>
+                          <m:t>k</m:t>
+                        </m:r>
+                      </m:sub>
+                    </m:sSub>
+                    <m:sSub>
+                      <m:e>
+                        <m:r>
+                          <m:t>d</m:t>
+                        </m:r>
+                      </m:e>
+                      <m:sub>
+                        <m:r>
+                          <m:t>k</m:t>
+                        </m:r>
+                      </m:sub>
+                    </m:sSub>
+                    <m:r>
+                      <m:rPr>
+                        <m:sty m:val="p"/>
+                      </m:rPr>
+                      <m:t>/</m:t>
+                    </m:r>
+                    <m:sSub>
+                      <m:e>
+                        <m:r>
+                          <m:t>d</m:t>
+                        </m:r>
+                      </m:e>
+                      <m:sub>
+                        <m:r>
+                          <m:t>k</m:t>
+                        </m:r>
+                        <m:r>
+                          <m:rPr>
+                            <m:sty m:val="p"/>
+                          </m:rPr>
+                          <m:t>+</m:t>
+                        </m:r>
+                        <m:r>
+                          <m:t>1</m:t>
+                        </m:r>
+                      </m:sub>
+                    </m:sSub>
+                  </m:oMath>
+                </a14:m>
+              </a:p>
+              <a:p>
+                <a:pPr lvl="0" indent="0" marL="0">
+                  <a:buNone/>
+                </a:pPr>
+                <a:r>
+                  <a:rPr/>
+                  <a:t>The course spine was generated from </a:t>
+                </a:r>
+                <a:r>
+                  <a:rPr b="1"/>
+                  <a:t>three</a:t>
+                </a:r>
+                <a:r>
+                  <a:rPr/>
+                  <a:t> factors. Check what each criterion tells you — and notice that a criterion can be confidently wrong.</a:t>
+                </a:r>
+              </a:p>
+            </p:txBody>
+          </p:sp>
+        </mc:Choice>
+      </mc:AlternateContent>
     </p:spTree>
   </p:cSld>
 </p:sld>
@@ -6122,7 +5605,12 @@
             <p:ph type="title"/>
           </p:nvPr>
         </p:nvSpPr>
-        <p:spPr/>
+        <p:spPr>
+          <a:xfrm>
+            <a:off x="722313" y="3305176"/>
+            <a:ext cx="7772400" cy="1021556"/>
+          </a:xfrm>
+        </p:spPr>
         <p:txBody>
           <a:bodyPr/>
           <a:lstStyle/>
@@ -6132,331 +5620,7 @@
             </a:pPr>
             <a:r>
               <a:rPr/>
-              <a:t>Read the loadings</a:t>
-            </a:r>
-          </a:p>
-        </p:txBody>
-      </p:sp>
-      <p:sp>
-        <p:nvSpPr>
-          <p:cNvPr id="3" name="Content Placeholder 2"/>
-          <p:cNvSpPr>
-            <a:spLocks noGrp="1"/>
-          </p:cNvSpPr>
-          <p:nvPr>
-            <p:ph idx="1"/>
-          </p:nvPr>
-        </p:nvSpPr>
-        <p:spPr/>
-        <p:txBody>
-          <a:bodyPr/>
-          <a:lstStyle/>
-          <a:p>
-            <a:pPr lvl="0" indent="0">
-              <a:buNone/>
-            </a:pPr>
-            <a:r>
-              <a:rPr>
-                <a:latin typeface="Courier"/>
-              </a:rPr>
-              <a:t>L </a:t>
-            </a:r>
-            <a:r>
-              <a:rPr>
-                <a:solidFill>
-                  <a:srgbClr val="666666"/>
-                </a:solidFill>
-                <a:latin typeface="Courier"/>
-              </a:rPr>
-              <a:t>=</a:t>
-            </a:r>
-            <a:r>
-              <a:rPr>
-                <a:latin typeface="Courier"/>
-              </a:rPr>
-              <a:t> pd.DataFrame(p.components_[:</a:t>
-            </a:r>
-            <a:r>
-              <a:rPr>
-                <a:solidFill>
-                  <a:srgbClr val="40A070"/>
-                </a:solidFill>
-                <a:latin typeface="Courier"/>
-              </a:rPr>
-              <a:t>3</a:t>
-            </a:r>
-            <a:r>
-              <a:rPr>
-                <a:latin typeface="Courier"/>
-              </a:rPr>
-              <a:t>].T, index</a:t>
-            </a:r>
-            <a:r>
-              <a:rPr>
-                <a:solidFill>
-                  <a:srgbClr val="666666"/>
-                </a:solidFill>
-                <a:latin typeface="Courier"/>
-              </a:rPr>
-              <a:t>=</a:t>
-            </a:r>
-            <a:r>
-              <a:rPr>
-                <a:latin typeface="Courier"/>
-              </a:rPr>
-              <a:t>W.dropna(axis</a:t>
-            </a:r>
-            <a:r>
-              <a:rPr>
-                <a:solidFill>
-                  <a:srgbClr val="666666"/>
-                </a:solidFill>
-                <a:latin typeface="Courier"/>
-              </a:rPr>
-              <a:t>=</a:t>
-            </a:r>
-            <a:r>
-              <a:rPr>
-                <a:solidFill>
-                  <a:srgbClr val="40A070"/>
-                </a:solidFill>
-                <a:latin typeface="Courier"/>
-              </a:rPr>
-              <a:t>1</a:t>
-            </a:r>
-            <a:r>
-              <a:rPr>
-                <a:latin typeface="Courier"/>
-              </a:rPr>
-              <a:t>).columns,</a:t>
-            </a:r>
-            <a:br/>
-            <a:r>
-              <a:rPr>
-                <a:latin typeface="Courier"/>
-              </a:rPr>
-              <a:t>                 columns</a:t>
-            </a:r>
-            <a:r>
-              <a:rPr>
-                <a:solidFill>
-                  <a:srgbClr val="666666"/>
-                </a:solidFill>
-                <a:latin typeface="Courier"/>
-              </a:rPr>
-              <a:t>=</a:t>
-            </a:r>
-            <a:r>
-              <a:rPr>
-                <a:latin typeface="Courier"/>
-              </a:rPr>
-              <a:t>[</a:t>
-            </a:r>
-            <a:r>
-              <a:rPr>
-                <a:solidFill>
-                  <a:srgbClr val="4070A0"/>
-                </a:solidFill>
-                <a:latin typeface="Courier"/>
-              </a:rPr>
-              <a:t>"PC1"</a:t>
-            </a:r>
-            <a:r>
-              <a:rPr>
-                <a:latin typeface="Courier"/>
-              </a:rPr>
-              <a:t>, </a:t>
-            </a:r>
-            <a:r>
-              <a:rPr>
-                <a:solidFill>
-                  <a:srgbClr val="4070A0"/>
-                </a:solidFill>
-                <a:latin typeface="Courier"/>
-              </a:rPr>
-              <a:t>"PC2"</a:t>
-            </a:r>
-            <a:r>
-              <a:rPr>
-                <a:latin typeface="Courier"/>
-              </a:rPr>
-              <a:t>, </a:t>
-            </a:r>
-            <a:r>
-              <a:rPr>
-                <a:solidFill>
-                  <a:srgbClr val="4070A0"/>
-                </a:solidFill>
-                <a:latin typeface="Courier"/>
-              </a:rPr>
-              <a:t>"PC3"</a:t>
-            </a:r>
-            <a:r>
-              <a:rPr>
-                <a:latin typeface="Courier"/>
-              </a:rPr>
-              <a:t>])</a:t>
-            </a:r>
-            <a:br/>
-            <a:r>
-              <a:rPr>
-                <a:solidFill>
-                  <a:srgbClr val="008000"/>
-                </a:solidFill>
-                <a:latin typeface="Courier"/>
-              </a:rPr>
-              <a:t>print</a:t>
-            </a:r>
-            <a:r>
-              <a:rPr>
-                <a:latin typeface="Courier"/>
-              </a:rPr>
-              <a:t>(L.sort_values(</a:t>
-            </a:r>
-            <a:r>
-              <a:rPr>
-                <a:solidFill>
-                  <a:srgbClr val="4070A0"/>
-                </a:solidFill>
-                <a:latin typeface="Courier"/>
-              </a:rPr>
-              <a:t>"PC1"</a:t>
-            </a:r>
-            <a:r>
-              <a:rPr>
-                <a:latin typeface="Courier"/>
-              </a:rPr>
-              <a:t>).head(</a:t>
-            </a:r>
-            <a:r>
-              <a:rPr>
-                <a:solidFill>
-                  <a:srgbClr val="40A070"/>
-                </a:solidFill>
-                <a:latin typeface="Courier"/>
-              </a:rPr>
-              <a:t>6</a:t>
-            </a:r>
-            <a:r>
-              <a:rPr>
-                <a:latin typeface="Courier"/>
-              </a:rPr>
-              <a:t>).</a:t>
-            </a:r>
-            <a:r>
-              <a:rPr>
-                <a:solidFill>
-                  <a:srgbClr val="008000"/>
-                </a:solidFill>
-                <a:latin typeface="Courier"/>
-              </a:rPr>
-              <a:t>round</a:t>
-            </a:r>
-            <a:r>
-              <a:rPr>
-                <a:latin typeface="Courier"/>
-              </a:rPr>
-              <a:t>(</a:t>
-            </a:r>
-            <a:r>
-              <a:rPr>
-                <a:solidFill>
-                  <a:srgbClr val="40A070"/>
-                </a:solidFill>
-                <a:latin typeface="Courier"/>
-              </a:rPr>
-              <a:t>2</a:t>
-            </a:r>
-            <a:r>
-              <a:rPr>
-                <a:latin typeface="Courier"/>
-              </a:rPr>
-              <a:t>))</a:t>
-            </a:r>
-            <a:br/>
-            <a:r>
-              <a:rPr>
-                <a:solidFill>
-                  <a:srgbClr val="008000"/>
-                </a:solidFill>
-                <a:latin typeface="Courier"/>
-              </a:rPr>
-              <a:t>print</a:t>
-            </a:r>
-            <a:r>
-              <a:rPr>
-                <a:latin typeface="Courier"/>
-              </a:rPr>
-              <a:t>(L.sort_values(</a:t>
-            </a:r>
-            <a:r>
-              <a:rPr>
-                <a:solidFill>
-                  <a:srgbClr val="4070A0"/>
-                </a:solidFill>
-                <a:latin typeface="Courier"/>
-              </a:rPr>
-              <a:t>"PC1"</a:t>
-            </a:r>
-            <a:r>
-              <a:rPr>
-                <a:latin typeface="Courier"/>
-              </a:rPr>
-              <a:t>).tail(</a:t>
-            </a:r>
-            <a:r>
-              <a:rPr>
-                <a:solidFill>
-                  <a:srgbClr val="40A070"/>
-                </a:solidFill>
-                <a:latin typeface="Courier"/>
-              </a:rPr>
-              <a:t>6</a:t>
-            </a:r>
-            <a:r>
-              <a:rPr>
-                <a:latin typeface="Courier"/>
-              </a:rPr>
-              <a:t>).</a:t>
-            </a:r>
-            <a:r>
-              <a:rPr>
-                <a:solidFill>
-                  <a:srgbClr val="008000"/>
-                </a:solidFill>
-                <a:latin typeface="Courier"/>
-              </a:rPr>
-              <a:t>round</a:t>
-            </a:r>
-            <a:r>
-              <a:rPr>
-                <a:latin typeface="Courier"/>
-              </a:rPr>
-              <a:t>(</a:t>
-            </a:r>
-            <a:r>
-              <a:rPr>
-                <a:solidFill>
-                  <a:srgbClr val="40A070"/>
-                </a:solidFill>
-                <a:latin typeface="Courier"/>
-              </a:rPr>
-              <a:t>2</a:t>
-            </a:r>
-            <a:r>
-              <a:rPr>
-                <a:latin typeface="Courier"/>
-              </a:rPr>
-              <a:t>))</a:t>
-            </a:r>
-          </a:p>
-          <a:p>
-            <a:pPr lvl="0" indent="0" marL="0">
-              <a:buNone/>
-            </a:pPr>
-            <a:r>
-              <a:rPr/>
-              <a:t>Look at which countries sit at each end of PC1. If the ordering is recognisable as an economic gradient, you have grounds for an interpretation — and you should still write it as an interpretation.</a:t>
+              <a:t>8.5 Diffusion-index forecasting</a:t>
             </a:r>
           </a:p>
         </p:txBody>
@@ -6493,12 +5657,7 @@
             <p:ph type="title"/>
           </p:nvPr>
         </p:nvSpPr>
-        <p:spPr>
-          <a:xfrm>
-            <a:off x="722313" y="3305176"/>
-            <a:ext cx="7772400" cy="1021556"/>
-          </a:xfrm>
-        </p:spPr>
+        <p:spPr/>
         <p:txBody>
           <a:bodyPr/>
           <a:lstStyle/>
@@ -6508,11 +5667,305 @@
             </a:pPr>
             <a:r>
               <a:rPr/>
-              <a:t>Using factors</a:t>
-            </a:r>
-          </a:p>
-        </p:txBody>
-      </p:sp>
+              <a:t>Two stages</a:t>
+            </a:r>
+          </a:p>
+        </p:txBody>
+      </p:sp>
+      <mc:AlternateContent xmlns:mc="http://schemas.openxmlformats.org/markup-compatibility/2006">
+        <mc:Choice xmlns:a14="http://schemas.microsoft.com/office/drawing/2010/main" Requires="a14">
+          <p:sp>
+            <p:nvSpPr>
+              <p:cNvPr id="3" name="Content Placeholder 2"/>
+              <p:cNvSpPr>
+                <a:spLocks noGrp="1"/>
+              </p:cNvSpPr>
+              <p:nvPr>
+                <p:ph idx="1"/>
+              </p:nvPr>
+            </p:nvSpPr>
+            <p:spPr/>
+            <p:txBody>
+              <a:bodyPr/>
+              <a:lstStyle/>
+              <a:p>
+                <a:pPr lvl="0" indent="-342900" marL="342900">
+                  <a:buAutoNum type="arabicPeriod"/>
+                </a:pPr>
+                <a:r>
+                  <a:rPr/>
+                  <a:t>Extract </a:t>
+                </a:r>
+                <a14:m>
+                  <m:oMath xmlns:m="http://schemas.openxmlformats.org/officeDocument/2006/math">
+                    <m:sSub>
+                      <m:e>
+                        <m:acc>
+                          <m:accPr>
+                            <m:chr m:val="̂"/>
+                          </m:accPr>
+                          <m:e>
+                            <m:r>
+                              <m:t>F</m:t>
+                            </m:r>
+                          </m:e>
+                        </m:acc>
+                      </m:e>
+                      <m:sub>
+                        <m:r>
+                          <m:t>t</m:t>
+                        </m:r>
+                      </m:sub>
+                    </m:sSub>
+                  </m:oMath>
+                </a14:m>
+                <a:r>
+                  <a:rPr/>
+                  <a:t> by PCA from the standardised, stationary panel of </a:t>
+                </a:r>
+                <a14:m>
+                  <m:oMath xmlns:m="http://schemas.openxmlformats.org/officeDocument/2006/math">
+                    <m:r>
+                      <m:t>N</m:t>
+                    </m:r>
+                  </m:oMath>
+                </a14:m>
+                <a:r>
+                  <a:rPr/>
+                  <a:t> series.</a:t>
+                </a:r>
+              </a:p>
+              <a:p>
+                <a:pPr lvl="0" indent="-342900" marL="342900">
+                  <a:buAutoNum type="arabicPeriod"/>
+                </a:pPr>
+                <a:r>
+                  <a:rPr/>
+                  <a:t>Forecast the target with a small regression on the factors:</a:t>
+                </a:r>
+              </a:p>
+              <a:p>
+                <a:pPr lvl="0" indent="0" marL="0">
+                  <a:buNone/>
+                </a:pPr>
+                <a14:m>
+                  <m:oMathPara xmlns:m="http://schemas.openxmlformats.org/officeDocument/2006/math">
+                    <m:oMathParaPr>
+                      <m:jc m:val="center"/>
+                    </m:oMathParaPr>
+                    <m:oMath>
+                      <m:sSub>
+                        <m:e>
+                          <m:acc>
+                            <m:accPr>
+                              <m:chr m:val="̂"/>
+                            </m:accPr>
+                            <m:e>
+                              <m:r>
+                                <m:t>y</m:t>
+                              </m:r>
+                            </m:e>
+                          </m:acc>
+                        </m:e>
+                        <m:sub>
+                          <m:r>
+                            <m:t>t</m:t>
+                          </m:r>
+                          <m:r>
+                            <m:rPr>
+                              <m:sty m:val="p"/>
+                            </m:rPr>
+                            <m:t>+</m:t>
+                          </m:r>
+                          <m:r>
+                            <m:t>h</m:t>
+                          </m:r>
+                        </m:sub>
+                      </m:sSub>
+                      <m:r>
+                        <m:rPr>
+                          <m:sty m:val="p"/>
+                        </m:rPr>
+                        <m:t>=</m:t>
+                      </m:r>
+                      <m:acc>
+                        <m:accPr>
+                          <m:chr m:val="̂"/>
+                        </m:accPr>
+                        <m:e>
+                          <m:r>
+                            <m:t>α</m:t>
+                          </m:r>
+                        </m:e>
+                      </m:acc>
+                      <m:r>
+                        <m:rPr>
+                          <m:sty m:val="p"/>
+                        </m:rPr>
+                        <m:t>+</m:t>
+                      </m:r>
+                      <m:nary>
+                        <m:naryPr>
+                          <m:chr m:val="∑"/>
+                          <m:limLoc m:val="undOvr"/>
+                          <m:subHide m:val="off"/>
+                          <m:supHide m:val="off"/>
+                        </m:naryPr>
+                        <m:sub>
+                          <m:r>
+                            <m:t>j</m:t>
+                          </m:r>
+                          <m:r>
+                            <m:rPr>
+                              <m:sty m:val="p"/>
+                            </m:rPr>
+                            <m:t>=</m:t>
+                          </m:r>
+                          <m:r>
+                            <m:t>1</m:t>
+                          </m:r>
+                        </m:sub>
+                        <m:sup>
+                          <m:r>
+                            <m:t>r</m:t>
+                          </m:r>
+                        </m:sup>
+                        <m:e>
+                          <m:sSub>
+                            <m:e>
+                              <m:acc>
+                                <m:accPr>
+                                  <m:chr m:val="̂"/>
+                                </m:accPr>
+                                <m:e>
+                                  <m:r>
+                                    <m:t>β</m:t>
+                                  </m:r>
+                                </m:e>
+                              </m:acc>
+                            </m:e>
+                            <m:sub>
+                              <m:r>
+                                <m:t>j</m:t>
+                              </m:r>
+                            </m:sub>
+                          </m:sSub>
+                        </m:e>
+                      </m:nary>
+                      <m:sSub>
+                        <m:e>
+                          <m:acc>
+                            <m:accPr>
+                              <m:chr m:val="̂"/>
+                            </m:accPr>
+                            <m:e>
+                              <m:r>
+                                <m:t>F</m:t>
+                              </m:r>
+                            </m:e>
+                          </m:acc>
+                        </m:e>
+                        <m:sub>
+                          <m:r>
+                            <m:t>j</m:t>
+                          </m:r>
+                          <m:r>
+                            <m:t>t</m:t>
+                          </m:r>
+                        </m:sub>
+                      </m:sSub>
+                      <m:r>
+                        <m:rPr>
+                          <m:sty m:val="p"/>
+                        </m:rPr>
+                        <m:t>+</m:t>
+                      </m:r>
+                      <m:nary>
+                        <m:naryPr>
+                          <m:chr m:val="∑"/>
+                          <m:limLoc m:val="undOvr"/>
+                          <m:subHide m:val="off"/>
+                          <m:supHide m:val="off"/>
+                        </m:naryPr>
+                        <m:sub>
+                          <m:r>
+                            <m:rPr>
+                              <m:sty m:val="p"/>
+                            </m:rPr>
+                            <m:t>ℓ</m:t>
+                          </m:r>
+                          <m:r>
+                            <m:rPr>
+                              <m:sty m:val="p"/>
+                            </m:rPr>
+                            <m:t>=</m:t>
+                          </m:r>
+                          <m:r>
+                            <m:t>0</m:t>
+                          </m:r>
+                        </m:sub>
+                        <m:sup>
+                          <m:r>
+                            <m:t>L</m:t>
+                          </m:r>
+                        </m:sup>
+                        <m:e>
+                          <m:sSub>
+                            <m:e>
+                              <m:acc>
+                                <m:accPr>
+                                  <m:chr m:val="̂"/>
+                                </m:accPr>
+                                <m:e>
+                                  <m:r>
+                                    <m:t>γ</m:t>
+                                  </m:r>
+                                </m:e>
+                              </m:acc>
+                            </m:e>
+                            <m:sub>
+                              <m:r>
+                                <m:rPr>
+                                  <m:sty m:val="p"/>
+                                </m:rPr>
+                                <m:t>ℓ</m:t>
+                              </m:r>
+                            </m:sub>
+                          </m:sSub>
+                        </m:e>
+                      </m:nary>
+                      <m:sSub>
+                        <m:e>
+                          <m:r>
+                            <m:t>y</m:t>
+                          </m:r>
+                        </m:e>
+                        <m:sub>
+                          <m:r>
+                            <m:t>t</m:t>
+                          </m:r>
+                          <m:r>
+                            <m:rPr>
+                              <m:sty m:val="p"/>
+                            </m:rPr>
+                            <m:t>−</m:t>
+                          </m:r>
+                          <m:r>
+                            <m:rPr>
+                              <m:sty m:val="p"/>
+                            </m:rPr>
+                            <m:t>ℓ</m:t>
+                          </m:r>
+                        </m:sub>
+                      </m:sSub>
+                    </m:oMath>
+                  </m:oMathPara>
+                </a14:m>
+              </a:p>
+            </p:txBody>
+          </p:sp>
+        </mc:Choice>
+      </mc:AlternateContent>
     </p:spTree>
   </p:cSld>
 </p:sld>
@@ -6555,187 +6008,70 @@
             </a:pPr>
             <a:r>
               <a:rPr/>
-              <a:t>Factor-augmented regression</a:t>
-            </a:r>
-          </a:p>
-        </p:txBody>
-      </p:sp>
-      <mc:AlternateContent xmlns:mc="http://schemas.openxmlformats.org/markup-compatibility/2006">
-        <mc:Choice xmlns:a14="http://schemas.microsoft.com/office/drawing/2010/main" Requires="a14">
-          <p:sp>
-            <p:nvSpPr>
-              <p:cNvPr id="3" name="Content Placeholder 2"/>
-              <p:cNvSpPr>
-                <a:spLocks noGrp="1"/>
-              </p:cNvSpPr>
-              <p:nvPr>
-                <p:ph idx="1"/>
-              </p:nvPr>
-            </p:nvSpPr>
-            <p:spPr/>
-            <p:txBody>
-              <a:bodyPr/>
-              <a:lstStyle/>
-              <a:p>
-                <a:pPr lvl="0" indent="0" marL="0">
-                  <a:buNone/>
-                </a:pPr>
-                <a:r>
-                  <a:rPr/>
-                  <a:t>Rather than choosing among 30 correlated series, regress on a few factors:</a:t>
-                </a:r>
-              </a:p>
-              <a:p>
-                <a:pPr lvl="0" indent="0" marL="0">
-                  <a:buNone/>
-                </a:pPr>
-                <a14:m>
-                  <m:oMathPara xmlns:m="http://schemas.openxmlformats.org/officeDocument/2006/math">
-                    <m:oMathParaPr>
-                      <m:jc m:val="center"/>
-                    </m:oMathParaPr>
-                    <m:oMath>
-                      <m:sSub>
-                        <m:e>
-                          <m:r>
-                            <m:t>y</m:t>
-                          </m:r>
-                        </m:e>
-                        <m:sub>
-                          <m:r>
-                            <m:t>t</m:t>
-                          </m:r>
-                        </m:sub>
-                      </m:sSub>
-                      <m:r>
-                        <m:rPr>
-                          <m:sty m:val="p"/>
-                        </m:rPr>
-                        <m:t>=</m:t>
-                      </m:r>
-                      <m:r>
-                        <m:t>α</m:t>
-                      </m:r>
-                      <m:r>
-                        <m:rPr>
-                          <m:sty m:val="p"/>
-                        </m:rPr>
-                        <m:t>+</m:t>
-                      </m:r>
-                      <m:r>
-                        <m:t>β</m:t>
-                      </m:r>
-                      <m:r>
-                        <m:rPr>
-                          <m:sty m:val="p"/>
-                        </m:rPr>
-                        <m:t>′</m:t>
-                      </m:r>
-                      <m:sSub>
-                        <m:e>
-                          <m:acc>
-                            <m:accPr>
-                              <m:chr m:val="̂"/>
-                            </m:accPr>
-                            <m:e>
-                              <m:r>
-                                <m:t>F</m:t>
-                              </m:r>
-                            </m:e>
-                          </m:acc>
-                        </m:e>
-                        <m:sub>
-                          <m:r>
-                            <m:t>t</m:t>
-                          </m:r>
-                        </m:sub>
-                      </m:sSub>
-                      <m:r>
-                        <m:rPr>
-                          <m:sty m:val="p"/>
-                        </m:rPr>
-                        <m:t>+</m:t>
-                      </m:r>
-                      <m:sSub>
-                        <m:e>
-                          <m:r>
-                            <m:t>ε</m:t>
-                          </m:r>
-                        </m:e>
-                        <m:sub>
-                          <m:r>
-                            <m:t>t</m:t>
-                          </m:r>
-                        </m:sub>
-                      </m:sSub>
-                    </m:oMath>
-                  </m:oMathPara>
-                </a14:m>
-              </a:p>
-              <a:p>
-                <a:pPr lvl="0"/>
-                <a:r>
-                  <a:rPr/>
-                  <a:t>Sidesteps the collinearity of Session 05 entirely</a:t>
-                </a:r>
-              </a:p>
-              <a:p>
-                <a:pPr lvl="0"/>
-                <a:r>
-                  <a:rPr/>
-                  <a:t>Costs you interpretability — </a:t>
-                </a:r>
-                <a14:m>
-                  <m:oMath xmlns:m="http://schemas.openxmlformats.org/officeDocument/2006/math">
-                    <m:r>
-                      <m:t>β</m:t>
-                    </m:r>
-                  </m:oMath>
-                </a14:m>
-                <a:r>
-                  <a:rPr/>
-                  <a:t> is the effect of a </a:t>
-                </a:r>
-                <a:r>
-                  <a:rPr i="1"/>
-                  <a:t>coordinate</a:t>
-                </a:r>
-              </a:p>
-              <a:p>
-                <a:pPr lvl="0"/>
-                <a:r>
-                  <a:rPr/>
-                  <a:t>The factors are </a:t>
-                </a:r>
-                <a:r>
-                  <a:rPr b="1"/>
-                  <a:t>estimated</a:t>
-                </a:r>
-                <a:r>
-                  <a:rPr/>
-                  <a:t>, so their error propagates into </a:t>
-                </a:r>
-                <a14:m>
-                  <m:oMath xmlns:m="http://schemas.openxmlformats.org/officeDocument/2006/math">
-                    <m:r>
-                      <m:t>β</m:t>
-                    </m:r>
-                  </m:oMath>
-                </a14:m>
-              </a:p>
-              <a:p>
-                <a:pPr lvl="0" indent="0" marL="0">
-                  <a:buNone/>
-                </a:pPr>
-                <a:r>
-                  <a:rPr/>
-                  <a:t>This is the “factor augmentation” approach the Session 05 paper compared variable selection against. Now you have seen both.</a:t>
-                </a:r>
-              </a:p>
-            </p:txBody>
-          </p:sp>
-        </mc:Choice>
-      </mc:AlternateContent>
+              <a:t>The rule you must not break</a:t>
+            </a:r>
+          </a:p>
+        </p:txBody>
+      </p:sp>
+      <p:sp>
+        <p:nvSpPr>
+          <p:cNvPr id="3" name="Content Placeholder 2"/>
+          <p:cNvSpPr>
+            <a:spLocks noGrp="1"/>
+          </p:cNvSpPr>
+          <p:nvPr>
+            <p:ph idx="1"/>
+          </p:nvPr>
+        </p:nvSpPr>
+        <p:spPr/>
+        <p:txBody>
+          <a:bodyPr/>
+          <a:lstStyle/>
+          <a:p>
+            <a:pPr lvl="0" indent="0" marL="1270000">
+              <a:buNone/>
+            </a:pPr>
+            <a:r>
+              <a:rPr sz="2000" b="1"/>
+              <a:t>Factors must be re-estimated at each forecast origin, using only data available at that time.</a:t>
+            </a:r>
+          </a:p>
+          <a:p>
+            <a:pPr lvl="0" indent="0" marL="0">
+              <a:buNone/>
+            </a:pPr>
+            <a:r>
+              <a:rPr/>
+              <a:t>Extracting factors from the full sample and then backtesting is </a:t>
+            </a:r>
+            <a:r>
+              <a:rPr b="1"/>
+              <a:t>look-ahead bias</a:t>
+            </a:r>
+            <a:r>
+              <a:rPr/>
+              <a:t> — and it is the single most common flaw in student factor-model projects.</a:t>
+            </a:r>
+          </a:p>
+          <a:p>
+            <a:pPr lvl="0" indent="0" marL="0">
+              <a:buNone/>
+            </a:pPr>
+            <a:r>
+              <a:rPr/>
+              <a:t>Session 04’s rolling-origin discipline applies to </a:t>
+            </a:r>
+            <a:r>
+              <a:rPr b="1"/>
+              <a:t>every</a:t>
+            </a:r>
+            <a:r>
+              <a:rPr/>
+              <a:t> step, including the unsupervised one.</a:t>
+            </a:r>
+          </a:p>
+        </p:txBody>
+      </p:sp>
     </p:spTree>
   </p:cSld>
 </p:sld>
@@ -6768,7 +6104,12 @@
             <p:ph type="title"/>
           </p:nvPr>
         </p:nvSpPr>
-        <p:spPr/>
+        <p:spPr>
+          <a:xfrm>
+            <a:off x="722313" y="3305176"/>
+            <a:ext cx="7772400" cy="1021556"/>
+          </a:xfrm>
+        </p:spPr>
         <p:txBody>
           <a:bodyPr/>
           <a:lstStyle/>
@@ -6778,272 +6119,11 @@
             </a:pPr>
             <a:r>
               <a:rPr/>
-              <a:t>Factors versus the lasso</a:t>
-            </a:r>
-          </a:p>
-        </p:txBody>
-      </p:sp>
-      <p:graphicFrame>
-        <p:nvGraphicFramePr>
-          <p:cNvPr id="6" name="Content Placeholder 5"/>
-          <p:cNvGraphicFramePr>
-            <a:graphicFrameLocks noGrp="1"/>
-          </p:cNvGraphicFramePr>
-          <p:nvPr>
-            <p:ph idx="1"/>
-          </p:nvPr>
-        </p:nvGraphicFramePr>
-        <p:xfrm>
-          <a:off x="457200" y="1193800"/>
-          <a:ext cx="8229600" cy="3390900"/>
-        </p:xfrm>
-        <a:graphic>
-          <a:graphicData uri="http://schemas.openxmlformats.org/drawingml/2006/table">
-            <a:tbl>
-              <a:tblPr firstRow="1" bandRow="1">
-                <a:tableStyleId>{5C22544A-7EE6-4342-B048-85BDC9FD1C3A}</a:tableStyleId>
-              </a:tblPr>
-              <a:tblGrid>
-                <a:gridCol w="2743200"/>
-                <a:gridCol w="2743200"/>
-                <a:gridCol w="2743200"/>
-              </a:tblGrid>
-              <a:tr h="0">
-                <a:tc>
-                  <a:txBody>
-                    <a:bodyPr/>
-                    <a:lstStyle/>
-                    <a:p>
-                      <a:endParaRPr/>
-                    </a:p>
-                  </a:txBody>
-                  <a:tcPr/>
-                </a:tc>
-                <a:tc>
-                  <a:txBody>
-                    <a:bodyPr/>
-                    <a:lstStyle/>
-                    <a:p>
-                      <a:pPr lvl="0" indent="0" marL="0">
-                        <a:buNone/>
-                      </a:pPr>
-                      <a:r>
-                        <a:rPr/>
-                        <a:t>Factors</a:t>
-                      </a:r>
-                    </a:p>
-                  </a:txBody>
-                  <a:tcPr/>
-                </a:tc>
-                <a:tc>
-                  <a:txBody>
-                    <a:bodyPr/>
-                    <a:lstStyle/>
-                    <a:p>
-                      <a:pPr lvl="0" indent="0" marL="0">
-                        <a:buNone/>
-                      </a:pPr>
-                      <a:r>
-                        <a:rPr/>
-                        <a:t>Lasso</a:t>
-                      </a:r>
-                    </a:p>
-                  </a:txBody>
-                  <a:tcPr/>
-                </a:tc>
-              </a:tr>
-              <a:tr h="0">
-                <a:tc>
-                  <a:txBody>
-                    <a:bodyPr/>
-                    <a:lstStyle/>
-                    <a:p>
-                      <a:pPr lvl="0" indent="0" marL="0">
-                        <a:buNone/>
-                      </a:pPr>
-                      <a:r>
-                        <a:rPr/>
-                        <a:t>Handles correlation</a:t>
-                      </a:r>
-                    </a:p>
-                  </a:txBody>
-                </a:tc>
-                <a:tc>
-                  <a:txBody>
-                    <a:bodyPr/>
-                    <a:lstStyle/>
-                    <a:p>
-                      <a:pPr lvl="0" indent="0" marL="0">
-                        <a:buNone/>
-                      </a:pPr>
-                      <a:r>
-                        <a:rPr/>
-                        <a:t>By combining</a:t>
-                      </a:r>
-                    </a:p>
-                  </a:txBody>
-                </a:tc>
-                <a:tc>
-                  <a:txBody>
-                    <a:bodyPr/>
-                    <a:lstStyle/>
-                    <a:p>
-                      <a:pPr lvl="0" indent="0" marL="0">
-                        <a:buNone/>
-                      </a:pPr>
-                      <a:r>
-                        <a:rPr/>
-                        <a:t>By choosing one</a:t>
-                      </a:r>
-                    </a:p>
-                  </a:txBody>
-                </a:tc>
-              </a:tr>
-              <a:tr h="0">
-                <a:tc>
-                  <a:txBody>
-                    <a:bodyPr/>
-                    <a:lstStyle/>
-                    <a:p>
-                      <a:pPr lvl="0" indent="0" marL="0">
-                        <a:buNone/>
-                      </a:pPr>
-                      <a:r>
-                        <a:rPr/>
-                        <a:t>Output</a:t>
-                      </a:r>
-                    </a:p>
-                  </a:txBody>
-                </a:tc>
-                <a:tc>
-                  <a:txBody>
-                    <a:bodyPr/>
-                    <a:lstStyle/>
-                    <a:p>
-                      <a:pPr lvl="0" indent="0" marL="0">
-                        <a:buNone/>
-                      </a:pPr>
-                      <a:r>
-                        <a:rPr/>
-                        <a:t>Dense coordinates</a:t>
-                      </a:r>
-                    </a:p>
-                  </a:txBody>
-                </a:tc>
-                <a:tc>
-                  <a:txBody>
-                    <a:bodyPr/>
-                    <a:lstStyle/>
-                    <a:p>
-                      <a:pPr lvl="0" indent="0" marL="0">
-                        <a:buNone/>
-                      </a:pPr>
-                      <a:r>
-                        <a:rPr/>
-                        <a:t>A short list</a:t>
-                      </a:r>
-                    </a:p>
-                  </a:txBody>
-                </a:tc>
-              </a:tr>
-              <a:tr h="0">
-                <a:tc>
-                  <a:txBody>
-                    <a:bodyPr/>
-                    <a:lstStyle/>
-                    <a:p>
-                      <a:pPr lvl="0" indent="0" marL="0">
-                        <a:buNone/>
-                      </a:pPr>
-                      <a:r>
-                        <a:rPr/>
-                        <a:t>Interpretable</a:t>
-                      </a:r>
-                    </a:p>
-                  </a:txBody>
-                </a:tc>
-                <a:tc>
-                  <a:txBody>
-                    <a:bodyPr/>
-                    <a:lstStyle/>
-                    <a:p>
-                      <a:pPr lvl="0" indent="0" marL="0">
-                        <a:buNone/>
-                      </a:pPr>
-                      <a:r>
-                        <a:rPr/>
-                        <a:t>Only after argument</a:t>
-                      </a:r>
-                    </a:p>
-                  </a:txBody>
-                </a:tc>
-                <a:tc>
-                  <a:txBody>
-                    <a:bodyPr/>
-                    <a:lstStyle/>
-                    <a:p>
-                      <a:pPr lvl="0" indent="0" marL="0">
-                        <a:buNone/>
-                      </a:pPr>
-                      <a:r>
-                        <a:rPr/>
-                        <a:t>Named variables</a:t>
-                      </a:r>
-                    </a:p>
-                  </a:txBody>
-                </a:tc>
-              </a:tr>
-              <a:tr h="0">
-                <a:tc>
-                  <a:txBody>
-                    <a:bodyPr/>
-                    <a:lstStyle/>
-                    <a:p>
-                      <a:pPr lvl="0" indent="0" marL="0">
-                        <a:buNone/>
-                      </a:pPr>
-                      <a:r>
-                        <a:rPr/>
-                        <a:t>Stable</a:t>
-                      </a:r>
-                    </a:p>
-                  </a:txBody>
-                </a:tc>
-                <a:tc>
-                  <a:txBody>
-                    <a:bodyPr/>
-                    <a:lstStyle/>
-                    <a:p>
-                      <a:pPr lvl="0" indent="0" marL="0">
-                        <a:buNone/>
-                      </a:pPr>
-                      <a:r>
-                        <a:rPr/>
-                        <a:t>Reasonably</a:t>
-                      </a:r>
-                    </a:p>
-                  </a:txBody>
-                </a:tc>
-                <a:tc>
-                  <a:txBody>
-                    <a:bodyPr/>
-                    <a:lstStyle/>
-                    <a:p>
-                      <a:pPr lvl="0" indent="0" marL="0">
-                        <a:buNone/>
-                      </a:pPr>
-                      <a:r>
-                        <a:rPr/>
-                        <a:t>Often not</a:t>
-                      </a:r>
-                    </a:p>
-                  </a:txBody>
-                </a:tc>
-              </a:tr>
-            </a:tbl>
-          </a:graphicData>
-        </a:graphic>
-      </p:graphicFrame>
+              <a:t>The lab</a:t>
+            </a:r>
+          </a:p>
+        </p:txBody>
+      </p:sp>
     </p:spTree>
   </p:cSld>
 </p:sld>
@@ -7068,12 +6148,12 @@
       </p:grpSpPr>
       <p:sp>
         <p:nvSpPr>
-          <p:cNvPr id="3" name="Content Placeholder 2"/>
-          <p:cNvSpPr>
-            <a:spLocks noGrp="1"/>
-          </p:cNvSpPr>
-          <p:nvPr>
-            <p:ph idx="1"/>
+          <p:cNvPr id="2" name="Title 1"/>
+          <p:cNvSpPr>
+            <a:spLocks noGrp="1"/>
+          </p:cNvSpPr>
+          <p:nvPr>
+            <p:ph type="title"/>
           </p:nvPr>
         </p:nvSpPr>
         <p:spPr/>
@@ -7086,11 +6166,119 @@
             </a:pPr>
             <a:r>
               <a:rPr/>
-              <a:t>When predictors move together for a real common reason, factors are the honest representation. When you believe a few specific things matter, the lasso is.</a:t>
-            </a:r>
-          </a:p>
-        </p:txBody>
-      </p:sp>
+              <a:t>What you do</a:t>
+            </a:r>
+          </a:p>
+        </p:txBody>
+      </p:sp>
+      <mc:AlternateContent xmlns:mc="http://schemas.openxmlformats.org/markup-compatibility/2006">
+        <mc:Choice xmlns:a14="http://schemas.microsoft.com/office/drawing/2010/main" Requires="a14">
+          <p:sp>
+            <p:nvSpPr>
+              <p:cNvPr id="3" name="Content Placeholder 2"/>
+              <p:cNvSpPr>
+                <a:spLocks noGrp="1"/>
+              </p:cNvSpPr>
+              <p:nvPr>
+                <p:ph idx="1"/>
+              </p:nvPr>
+            </p:nvSpPr>
+            <p:spPr/>
+            <p:txBody>
+              <a:bodyPr/>
+              <a:lstStyle/>
+              <a:p>
+                <a:pPr lvl="0" indent="-342900" marL="342900">
+                  <a:buAutoNum type="arabicPeriod"/>
+                </a:pPr>
+                <a:r>
+                  <a:rPr/>
+                  <a:t>Build the wide panel for your angle; standardise it</a:t>
+                </a:r>
+              </a:p>
+              <a:p>
+                <a:pPr lvl="0" indent="-342900" marL="342900">
+                  <a:buAutoNum type="arabicPeriod"/>
+                </a:pPr>
+                <a:r>
+                  <a:rPr/>
+                  <a:t>Run PCA; report variance explained and </a:t>
+                </a:r>
+                <a:r>
+                  <a:rPr b="1"/>
+                  <a:t>all three</a:t>
+                </a:r>
+                <a:r>
+                  <a:rPr/>
+                  <a:t> Bai–Ng criteria</a:t>
+                </a:r>
+              </a:p>
+              <a:p>
+                <a:pPr lvl="0" indent="-342900" marL="342900">
+                  <a:buAutoNum type="arabicPeriod"/>
+                </a:pPr>
+                <a:r>
+                  <a:rPr/>
+                  <a:t>Decide </a:t>
+                </a:r>
+                <a14:m>
+                  <m:oMath xmlns:m="http://schemas.openxmlformats.org/officeDocument/2006/math">
+                    <m:r>
+                      <m:t>r</m:t>
+                    </m:r>
+                  </m:oMath>
+                </a14:m>
+                <a:r>
+                  <a:rPr/>
+                  <a:t> in writing </a:t>
+                </a:r>
+                <a:r>
+                  <a:rPr b="1"/>
+                  <a:t>before</a:t>
+                </a:r>
+                <a:r>
+                  <a:rPr/>
+                  <a:t> looking at the forecast results</a:t>
+                </a:r>
+              </a:p>
+              <a:p>
+                <a:pPr lvl="0" indent="-342900" marL="342900">
+                  <a:buAutoNum type="arabicPeriod"/>
+                </a:pPr>
+                <a:r>
+                  <a:rPr/>
+                  <a:t>Run a diffusion-index forecast, re-estimating factors at each origin</a:t>
+                </a:r>
+              </a:p>
+              <a:p>
+                <a:pPr lvl="0" indent="0" marL="0">
+                  <a:buNone/>
+                </a:pPr>
+                <a:r>
+                  <a:rPr/>
+                  <a:t>State your </a:t>
+                </a:r>
+                <a:r>
+                  <a:rPr b="1"/>
+                  <a:t>normalisation</a:t>
+                </a:r>
+                <a:r>
+                  <a:rPr/>
+                  <a:t> and your </a:t>
+                </a:r>
+                <a:r>
+                  <a:rPr b="1"/>
+                  <a:t>sign convention</a:t>
+                </a:r>
+                <a:r>
+                  <a:rPr/>
+                  <a:t>. Without them the loadings are not reproducible.</a:t>
+                </a:r>
+              </a:p>
+            </p:txBody>
+          </p:sp>
+        </mc:Choice>
+      </mc:AlternateContent>
     </p:spTree>
   </p:cSld>
 </p:sld>
@@ -7133,468 +6321,93 @@
             </a:pPr>
             <a:r>
               <a:rPr/>
-              <a:t>What to report</a:t>
-            </a:r>
-          </a:p>
-        </p:txBody>
-      </p:sp>
-      <p:sp>
-        <p:nvSpPr>
-          <p:cNvPr id="3" name="Content Placeholder 2"/>
-          <p:cNvSpPr>
-            <a:spLocks noGrp="1"/>
-          </p:cNvSpPr>
-          <p:nvPr>
-            <p:ph idx="1"/>
-          </p:nvPr>
-        </p:nvSpPr>
-        <p:spPr/>
-        <p:txBody>
-          <a:bodyPr/>
-          <a:lstStyle/>
-          <a:p>
-            <a:pPr lvl="0"/>
-            <a:r>
-              <a:rPr/>
-              <a:t>Whether you used the </a:t>
-            </a:r>
-            <a:r>
-              <a:rPr b="1"/>
-              <a:t>correlation or covariance</a:t>
-            </a:r>
-            <a:r>
-              <a:rPr/>
-              <a:t> matrix</a:t>
-            </a:r>
-          </a:p>
-          <a:p>
-            <a:pPr lvl="0"/>
-            <a:r>
-              <a:rPr/>
-              <a:t>The variance explained, and how many components you kept </a:t>
-            </a:r>
-            <a:r>
-              <a:rPr b="1"/>
-              <a:t>and why</a:t>
-            </a:r>
-          </a:p>
-          <a:p>
-            <a:pPr lvl="0"/>
-            <a:r>
-              <a:rPr/>
-              <a:t>The loadings, so a reader can judge your naming</a:t>
-            </a:r>
-          </a:p>
-          <a:p>
-            <a:pPr lvl="0"/>
-            <a:r>
-              <a:rPr/>
-              <a:t>Your sign convention</a:t>
-            </a:r>
-          </a:p>
-          <a:p>
-            <a:pPr lvl="0"/>
-            <a:r>
-              <a:rPr/>
-              <a:t>That factors are coordinates, not objects</a:t>
-            </a:r>
-          </a:p>
-        </p:txBody>
-      </p:sp>
-    </p:spTree>
-  </p:cSld>
-</p:sld>
-</file>
-
-<file path=ppt/slides/slide28.xml><?xml version="1.0" encoding="utf-8"?>
-<p:sld xmlns:a="http://schemas.openxmlformats.org/drawingml/2006/main" xmlns:r="http://schemas.openxmlformats.org/officeDocument/2006/relationships" xmlns:p="http://schemas.openxmlformats.org/presentationml/2006/main">
-  <p:cSld>
-    <p:spTree>
-      <p:nvGrpSpPr>
-        <p:cNvPr id="1" name=""/>
-        <p:cNvGrpSpPr/>
-        <p:nvPr/>
-      </p:nvGrpSpPr>
-      <p:grpSpPr>
-        <a:xfrm>
-          <a:off x="0" y="0"/>
-          <a:ext cx="0" cy="0"/>
-          <a:chOff x="0" y="0"/>
-          <a:chExt cx="0" cy="0"/>
-        </a:xfrm>
-      </p:grpSpPr>
-      <p:sp>
-        <p:nvSpPr>
-          <p:cNvPr id="2" name="Title 1"/>
-          <p:cNvSpPr>
-            <a:spLocks noGrp="1"/>
-          </p:cNvSpPr>
-          <p:nvPr>
-            <p:ph type="title"/>
-          </p:nvPr>
-        </p:nvSpPr>
-        <p:spPr/>
-        <p:txBody>
-          <a:bodyPr/>
-          <a:lstStyle/>
-          <a:p>
-            <a:pPr lvl="0" indent="0" marL="0">
-              <a:buNone/>
-            </a:pPr>
-            <a:r>
-              <a:rPr/>
-              <a:t>Common mistakes</a:t>
-            </a:r>
-          </a:p>
-        </p:txBody>
-      </p:sp>
-      <p:graphicFrame>
-        <p:nvGraphicFramePr>
-          <p:cNvPr id="6" name="Content Placeholder 5"/>
-          <p:cNvGraphicFramePr>
-            <a:graphicFrameLocks noGrp="1"/>
-          </p:cNvGraphicFramePr>
-          <p:nvPr>
-            <p:ph idx="1"/>
-          </p:nvPr>
-        </p:nvGraphicFramePr>
-        <p:xfrm>
-          <a:off x="457200" y="1193800"/>
-          <a:ext cx="8229600" cy="3390900"/>
-        </p:xfrm>
-        <a:graphic>
-          <a:graphicData uri="http://schemas.openxmlformats.org/drawingml/2006/table">
-            <a:tbl>
-              <a:tblPr firstRow="1" bandRow="1">
-                <a:tableStyleId>{5C22544A-7EE6-4342-B048-85BDC9FD1C3A}</a:tableStyleId>
-              </a:tblPr>
-              <a:tblGrid>
-                <a:gridCol w="4114800"/>
-                <a:gridCol w="4114800"/>
-              </a:tblGrid>
-              <a:tr h="0">
-                <a:tc>
-                  <a:txBody>
-                    <a:bodyPr/>
-                    <a:lstStyle/>
-                    <a:p>
-                      <a:pPr lvl="0" indent="0" marL="0">
-                        <a:buNone/>
-                      </a:pPr>
-                      <a:r>
-                        <a:rPr/>
-                        <a:t>Mistake</a:t>
-                      </a:r>
-                    </a:p>
-                  </a:txBody>
-                  <a:tcPr/>
-                </a:tc>
-                <a:tc>
-                  <a:txBody>
-                    <a:bodyPr/>
-                    <a:lstStyle/>
-                    <a:p>
-                      <a:pPr lvl="0" indent="0" marL="0">
-                        <a:buNone/>
-                      </a:pPr>
-                      <a:r>
-                        <a:rPr/>
-                        <a:t>Consequence</a:t>
-                      </a:r>
-                    </a:p>
-                  </a:txBody>
-                  <a:tcPr/>
-                </a:tc>
-              </a:tr>
-              <a:tr h="0">
-                <a:tc>
-                  <a:txBody>
-                    <a:bodyPr/>
-                    <a:lstStyle/>
-                    <a:p>
-                      <a:pPr lvl="0" indent="0" marL="0">
-                        <a:buNone/>
-                      </a:pPr>
-                      <a:r>
-                        <a:rPr/>
-                        <a:t>No standardising</a:t>
-                      </a:r>
-                    </a:p>
-                  </a:txBody>
-                </a:tc>
-                <a:tc>
-                  <a:txBody>
-                    <a:bodyPr/>
-                    <a:lstStyle/>
-                    <a:p>
-                      <a:pPr lvl="0" indent="0" marL="0">
-                        <a:buNone/>
-                      </a:pPr>
-                      <a:r>
-                        <a:rPr/>
-                        <a:t>PC1 is whichever series is largest</a:t>
-                      </a:r>
-                    </a:p>
-                  </a:txBody>
-                </a:tc>
-              </a:tr>
-              <a:tr h="0">
-                <a:tc>
-                  <a:txBody>
-                    <a:bodyPr/>
-                    <a:lstStyle/>
-                    <a:p>
-                      <a:pPr lvl="0" indent="0" marL="0">
-                        <a:buNone/>
-                      </a:pPr>
-                      <a:r>
-                        <a:rPr/>
-                        <a:t>Naming factors as facts</a:t>
-                      </a:r>
-                    </a:p>
-                  </a:txBody>
-                </a:tc>
-                <a:tc>
-                  <a:txBody>
-                    <a:bodyPr/>
-                    <a:lstStyle/>
-                    <a:p>
-                      <a:pPr lvl="0" indent="0" marL="0">
-                        <a:buNone/>
-                      </a:pPr>
-                      <a:r>
-                        <a:rPr/>
-                        <a:t>Rotation makes the name arbitrary</a:t>
-                      </a:r>
-                    </a:p>
-                  </a:txBody>
-                </a:tc>
-              </a:tr>
-              <a:tr h="0">
-                <a:tc>
-                  <a:txBody>
-                    <a:bodyPr/>
-                    <a:lstStyle/>
-                    <a:p>
-                      <a:pPr lvl="0" indent="0" marL="0">
-                        <a:buNone/>
-                      </a:pPr>
-                      <a:r>
-                        <a:rPr/>
-                        <a:t>Kaiser rule alone</a:t>
-                      </a:r>
-                    </a:p>
-                  </a:txBody>
-                </a:tc>
-                <a:tc>
-                  <a:txBody>
-                    <a:bodyPr/>
-                    <a:lstStyle/>
-                    <a:p>
-                      <a:pPr lvl="0" indent="0" marL="0">
-                        <a:buNone/>
-                      </a:pPr>
-                      <a:r>
-                        <a:rPr/>
-                        <a:t>Over-selects</a:t>
-                      </a:r>
-                    </a:p>
-                  </a:txBody>
-                </a:tc>
-              </a:tr>
-              <a:tr h="0">
-                <a:tc>
-                  <a:txBody>
-                    <a:bodyPr/>
-                    <a:lstStyle/>
-                    <a:p>
-                      <a:pPr lvl="0" indent="0" marL="0">
-                        <a:buNone/>
-                      </a:pPr>
-                      <a:r>
-                        <a:rPr/>
-                        <a:t>Ignoring sign flips</a:t>
-                      </a:r>
-                    </a:p>
-                  </a:txBody>
-                </a:tc>
-                <a:tc>
-                  <a:txBody>
-                    <a:bodyPr/>
-                    <a:lstStyle/>
-                    <a:p>
-                      <a:pPr lvl="0" indent="0" marL="0">
-                        <a:buNone/>
-                      </a:pPr>
-                      <a:r>
-                        <a:rPr/>
-                        <a:t>Results do not reproduce</a:t>
-                      </a:r>
-                    </a:p>
-                  </a:txBody>
-                </a:tc>
-              </a:tr>
-              <a:tr h="0">
-                <a:tc>
-                  <a:txBody>
-                    <a:bodyPr/>
-                    <a:lstStyle/>
-                    <a:p>
-                      <a:pPr lvl="0" indent="0" marL="0">
-                        <a:buNone/>
-                      </a:pPr>
-                      <a:r>
-                        <a:rPr/>
-                        <a:t>Fitting PCA before the CV split</a:t>
-                      </a:r>
-                    </a:p>
-                  </a:txBody>
-                </a:tc>
-                <a:tc>
-                  <a:txBody>
-                    <a:bodyPr/>
-                    <a:lstStyle/>
-                    <a:p>
-                      <a:pPr lvl="0" indent="0" marL="0">
-                        <a:buNone/>
-                      </a:pPr>
-                      <a:r>
-                        <a:rPr/>
-                        <a:t>Leakage — it learned from the test fold</a:t>
-                      </a:r>
-                    </a:p>
-                  </a:txBody>
-                </a:tc>
-              </a:tr>
-            </a:tbl>
-          </a:graphicData>
-        </a:graphic>
-      </p:graphicFrame>
-    </p:spTree>
-  </p:cSld>
-</p:sld>
-</file>
-
-<file path=ppt/slides/slide29.xml><?xml version="1.0" encoding="utf-8"?>
-<p:sld xmlns:a="http://schemas.openxmlformats.org/drawingml/2006/main" xmlns:r="http://schemas.openxmlformats.org/officeDocument/2006/relationships" xmlns:p="http://schemas.openxmlformats.org/presentationml/2006/main">
-  <p:cSld>
-    <p:spTree>
-      <p:nvGrpSpPr>
-        <p:cNvPr id="1" name=""/>
-        <p:cNvGrpSpPr/>
-        <p:nvPr/>
-      </p:nvGrpSpPr>
-      <p:grpSpPr>
-        <a:xfrm>
-          <a:off x="0" y="0"/>
-          <a:ext cx="0" cy="0"/>
-          <a:chOff x="0" y="0"/>
-          <a:chExt cx="0" cy="0"/>
-        </a:xfrm>
-      </p:grpSpPr>
-      <p:sp>
-        <p:nvSpPr>
-          <p:cNvPr id="2" name="Title 1"/>
-          <p:cNvSpPr>
-            <a:spLocks noGrp="1"/>
-          </p:cNvSpPr>
-          <p:nvPr>
-            <p:ph type="title"/>
-          </p:nvPr>
-        </p:nvSpPr>
-        <p:spPr/>
-        <p:txBody>
-          <a:bodyPr/>
-          <a:lstStyle/>
-          <a:p>
-            <a:pPr lvl="0" indent="0" marL="0">
-              <a:buNone/>
-            </a:pPr>
-            <a:r>
-              <a:rPr/>
-              <a:t>In the lab</a:t>
-            </a:r>
-          </a:p>
-        </p:txBody>
-      </p:sp>
-      <p:sp>
-        <p:nvSpPr>
-          <p:cNvPr id="3" name="Content Placeholder 2"/>
-          <p:cNvSpPr>
-            <a:spLocks noGrp="1"/>
-          </p:cNvSpPr>
-          <p:nvPr>
-            <p:ph idx="1"/>
-          </p:nvPr>
-        </p:nvSpPr>
-        <p:spPr/>
-        <p:txBody>
-          <a:bodyPr/>
-          <a:lstStyle/>
-          <a:p>
-            <a:pPr lvl="0" indent="-342900" marL="342900">
-              <a:buAutoNum type="arabicPeriod"/>
-            </a:pPr>
-            <a:r>
-              <a:rPr/>
-              <a:t>Build the wide matrix and standardise it</a:t>
-            </a:r>
-          </a:p>
-          <a:p>
-            <a:pPr lvl="0" indent="-342900" marL="342900">
-              <a:buAutoNum type="arabicPeriod"/>
-            </a:pPr>
-            <a:r>
-              <a:rPr/>
-              <a:t>Run PCA and parallel analysis; decide how many factors, in writing, first</a:t>
-            </a:r>
-          </a:p>
-          <a:p>
-            <a:pPr lvl="0" indent="-342900" marL="342900">
-              <a:buAutoNum type="arabicPeriod"/>
-            </a:pPr>
-            <a:r>
-              <a:rPr/>
-              <a:t>Compare your answer to the </a:t>
-            </a:r>
-            <a:r>
-              <a:rPr b="1"/>
-              <a:t>three</a:t>
-            </a:r>
-            <a:r>
-              <a:rPr/>
-              <a:t> the spine was built from</a:t>
-            </a:r>
-          </a:p>
-          <a:p>
-            <a:pPr lvl="0" indent="-342900" marL="342900">
-              <a:buAutoNum type="arabicPeriod"/>
-            </a:pPr>
-            <a:r>
-              <a:rPr/>
-              <a:t>Interpret PC1 from its loadings — and flag it as interpretation</a:t>
-            </a:r>
-          </a:p>
-          <a:p>
-            <a:pPr lvl="0" indent="-342900" marL="342900">
-              <a:buAutoNum type="arabicPeriod"/>
-            </a:pPr>
-            <a:r>
-              <a:rPr/>
-              <a:t>Run one factor-augmented regression and compare with Session 05’s lasso</a:t>
-            </a:r>
-          </a:p>
-          <a:p>
-            <a:pPr lvl="0" indent="0" marL="0">
-              <a:buNone/>
-            </a:pPr>
-            <a:r>
-              <a:rPr/>
-              <a:t>This is the only session where you can check your answer against the truth. Use it to calibrate how much to trust the same procedure when you cannot.</a:t>
-            </a:r>
-          </a:p>
-        </p:txBody>
-      </p:sp>
+              <a:t>The two-minute report</a:t>
+            </a:r>
+          </a:p>
+        </p:txBody>
+      </p:sp>
+      <mc:AlternateContent xmlns:mc="http://schemas.openxmlformats.org/markup-compatibility/2006">
+        <mc:Choice xmlns:a14="http://schemas.microsoft.com/office/drawing/2010/main" Requires="a14">
+          <p:sp>
+            <p:nvSpPr>
+              <p:cNvPr id="3" name="Content Placeholder 2"/>
+              <p:cNvSpPr>
+                <a:spLocks noGrp="1"/>
+              </p:cNvSpPr>
+              <p:nvPr>
+                <p:ph idx="1"/>
+              </p:nvPr>
+            </p:nvSpPr>
+            <p:spPr/>
+            <p:txBody>
+              <a:bodyPr/>
+              <a:lstStyle/>
+              <a:p>
+                <a:pPr lvl="0" indent="-342900" marL="342900">
+                  <a:buAutoNum type="arabicPeriod"/>
+                </a:pPr>
+                <a:r>
+                  <a:rPr b="1"/>
+                  <a:t>What I did</a:t>
+                </a:r>
+                <a:r>
+                  <a:rPr/>
+                  <a:t> — the panel, the normalisation, how you chose </a:t>
+                </a:r>
+                <a14:m>
+                  <m:oMath xmlns:m="http://schemas.openxmlformats.org/officeDocument/2006/math">
+                    <m:r>
+                      <m:t>r</m:t>
+                    </m:r>
+                  </m:oMath>
+                </a14:m>
+              </a:p>
+              <a:p>
+                <a:pPr lvl="0" indent="-342900" marL="342900">
+                  <a:buAutoNum type="arabicPeriod"/>
+                </a:pPr>
+                <a:r>
+                  <a:rPr b="1"/>
+                  <a:t>The number</a:t>
+                </a:r>
+                <a:r>
+                  <a:rPr/>
+                  <a:t> — variance explained, and forecast error against a benchmark</a:t>
+                </a:r>
+              </a:p>
+              <a:p>
+                <a:pPr lvl="0" indent="-342900" marL="342900">
+                  <a:buAutoNum type="arabicPeriod"/>
+                </a:pPr>
+                <a:r>
+                  <a:rPr b="1"/>
+                  <a:t>The catch</a:t>
+                </a:r>
+                <a:r>
+                  <a:rPr/>
+                  <a:t> — that factors are coordinates, and naming them is an interpretation</a:t>
+                </a:r>
+              </a:p>
+              <a:p>
+                <a:pPr lvl="0" indent="0" marL="0">
+                  <a:buNone/>
+                </a:pPr>
+                <a:r>
+                  <a:rPr/>
+                  <a:t>Full brief: </a:t>
+                </a:r>
+                <a:r>
+                  <a:rPr>
+                    <a:hlinkClick r:id="rId2"/>
+                    <a:latin typeface="Courier"/>
+                  </a:rPr>
+                  <a:t>02-lab/README.md</a:t>
+                </a:r>
+              </a:p>
+            </p:txBody>
+          </p:sp>
+        </mc:Choice>
+      </mc:AlternateContent>
     </p:spTree>
   </p:cSld>
 </p:sld>
@@ -7637,7 +6450,7 @@
             </a:pPr>
             <a:r>
               <a:rPr/>
-              <a:t>The 90 minutes ahead</a:t>
+              <a:t>These slides follow the notes</a:t>
             </a:r>
           </a:p>
         </p:txBody>
@@ -7677,7 +6490,7 @@
                       </a:pPr>
                       <a:r>
                         <a:rPr b="1"/>
-                        <a:t>0–10</a:t>
+                        <a:t>8.1</a:t>
                       </a:r>
                     </a:p>
                   </a:txBody>
@@ -7692,7 +6505,7 @@
                       </a:pPr>
                       <a:r>
                         <a:rPr/>
-                        <a:t>The macroeconomist’s problem: many series, few forces</a:t>
+                        <a:t>PCA as variance maximisation</a:t>
                       </a:r>
                     </a:p>
                   </a:txBody>
@@ -7709,7 +6522,7 @@
                       </a:pPr>
                       <a:r>
                         <a:rPr b="1"/>
-                        <a:t>10–30</a:t>
+                        <a:t>8.2</a:t>
                       </a:r>
                     </a:p>
                   </a:txBody>
@@ -7724,7 +6537,7 @@
                       </a:pPr>
                       <a:r>
                         <a:rPr/>
-                        <a:t>The SVD, and PCA as its consequence</a:t>
+                        <a:t>Eckart–Young: best low-rank approximation</a:t>
                       </a:r>
                     </a:p>
                   </a:txBody>
@@ -7741,7 +6554,39 @@
                       </a:pPr>
                       <a:r>
                         <a:rPr b="1"/>
-                        <a:t>30–50</a:t>
+                        <a:t>8.3</a:t>
+                      </a:r>
+                    </a:p>
+                  </a:txBody>
+                </a:tc>
+                <a:tc>
+                  <a:txBody>
+                    <a:bodyPr/>
+                    <a:lstStyle/>
+                    <a:p>
+                      <a:pPr lvl="0" indent="0" marL="0">
+                        <a:buNone/>
+                      </a:pPr>
+                      <a:r>
+                        <a:rPr/>
+                        <a:t>The approximate factor model</a:t>
+                      </a:r>
+                    </a:p>
+                  </a:txBody>
+                </a:tc>
+              </a:tr>
+              <a:tr h="0">
+                <a:tc>
+                  <a:txBody>
+                    <a:bodyPr/>
+                    <a:lstStyle/>
+                    <a:p>
+                      <a:pPr lvl="0" indent="0" marL="0">
+                        <a:buNone/>
+                      </a:pPr>
+                      <a:r>
+                        <a:rPr b="1"/>
+                        <a:t>8.4</a:t>
                       </a:r>
                     </a:p>
                   </a:txBody>
@@ -7773,7 +6618,7 @@
                       </a:pPr>
                       <a:r>
                         <a:rPr b="1"/>
-                        <a:t>50–70</a:t>
+                        <a:t>8.5</a:t>
                       </a:r>
                     </a:p>
                   </a:txBody>
@@ -7788,79 +6633,7 @@
                       </a:pPr>
                       <a:r>
                         <a:rPr/>
-                        <a:t>What a factor </a:t>
-                      </a:r>
-                      <a:r>
-                        <a:rPr i="1"/>
-                        <a:t>is</a:t>
-                      </a:r>
-                      <a:r>
-                        <a:rPr/>
-                        <a:t> — and is not</a:t>
-                      </a:r>
-                    </a:p>
-                  </a:txBody>
-                </a:tc>
-              </a:tr>
-              <a:tr h="0">
-                <a:tc>
-                  <a:txBody>
-                    <a:bodyPr/>
-                    <a:lstStyle/>
-                    <a:p>
-                      <a:pPr lvl="0" indent="0" marL="0">
-                        <a:buNone/>
-                      </a:pPr>
-                      <a:r>
-                        <a:rPr b="1"/>
-                        <a:t>70–85</a:t>
-                      </a:r>
-                    </a:p>
-                  </a:txBody>
-                </a:tc>
-                <a:tc>
-                  <a:txBody>
-                    <a:bodyPr/>
-                    <a:lstStyle/>
-                    <a:p>
-                      <a:pPr lvl="0" indent="0" marL="0">
-                        <a:buNone/>
-                      </a:pPr>
-                      <a:r>
-                        <a:rPr/>
-                        <a:t>Factor-augmented regression</a:t>
-                      </a:r>
-                    </a:p>
-                  </a:txBody>
-                </a:tc>
-              </a:tr>
-              <a:tr h="0">
-                <a:tc>
-                  <a:txBody>
-                    <a:bodyPr/>
-                    <a:lstStyle/>
-                    <a:p>
-                      <a:pPr lvl="0" indent="0" marL="0">
-                        <a:buNone/>
-                      </a:pPr>
-                      <a:r>
-                        <a:rPr b="1"/>
-                        <a:t>85–90</a:t>
-                      </a:r>
-                    </a:p>
-                  </a:txBody>
-                </a:tc>
-                <a:tc>
-                  <a:txBody>
-                    <a:bodyPr/>
-                    <a:lstStyle/>
-                    <a:p>
-                      <a:pPr lvl="0" indent="0" marL="0">
-                        <a:buNone/>
-                      </a:pPr>
-                      <a:r>
-                        <a:rPr/>
-                        <a:t>Handoff to the lab</a:t>
+                        <a:t>Diffusion-index forecasting</a:t>
                       </a:r>
                     </a:p>
                   </a:txBody>
@@ -7894,12 +6667,12 @@
       </p:grpSpPr>
       <p:sp>
         <p:nvSpPr>
-          <p:cNvPr id="2" name="Title 1"/>
-          <p:cNvSpPr>
-            <a:spLocks noGrp="1"/>
-          </p:cNvSpPr>
-          <p:nvPr>
-            <p:ph type="title"/>
+          <p:cNvPr id="3" name="Content Placeholder 2"/>
+          <p:cNvSpPr>
+            <a:spLocks noGrp="1"/>
+          </p:cNvSpPr>
+          <p:nvPr>
+            <p:ph idx="1"/>
           </p:nvPr>
         </p:nvSpPr>
         <p:spPr/>
@@ -7912,70 +6685,18 @@
             </a:pPr>
             <a:r>
               <a:rPr/>
-              <a:t>Before class you read</a:t>
-            </a:r>
-          </a:p>
-        </p:txBody>
-      </p:sp>
-      <p:sp>
-        <p:nvSpPr>
-          <p:cNvPr id="3" name="Content Placeholder 2"/>
-          <p:cNvSpPr>
-            <a:spLocks noGrp="1"/>
-          </p:cNvSpPr>
-          <p:nvPr>
-            <p:ph idx="1"/>
-          </p:nvPr>
-        </p:nvSpPr>
-        <p:spPr/>
-        <p:txBody>
-          <a:bodyPr/>
-          <a:lstStyle/>
-          <a:p>
-            <a:pPr lvl="0" indent="0" marL="0">
-              <a:buNone/>
-            </a:pPr>
-            <a:r>
-              <a:rPr b="1"/>
-              <a:t>Koopman &amp; Mesters</a:t>
-            </a:r>
-            <a:r>
-              <a:rPr/>
-              <a:t>, </a:t>
-            </a:r>
-            <a:r>
-              <a:rPr i="1"/>
-              <a:t>Empirical Bayes Methods for Dynamic Factor Models</a:t>
+              <a:t>Same numbering as </a:t>
+            </a:r>
+            <a:r>
+              <a:rPr>
+                <a:hlinkClick r:id="rId2"/>
+                <a:latin typeface="Courier"/>
+              </a:rPr>
+              <a:t>01-lecture/README.md</a:t>
             </a:r>
             <a:r>
               <a:rPr/>
               <a:t>.</a:t>
-            </a:r>
-          </a:p>
-          <a:p>
-            <a:pPr lvl="0" indent="0" marL="0">
-              <a:buNone/>
-            </a:pPr>
-            <a:r>
-              <a:rPr/>
-              <a:t>Harvard Dataverse, DOI 10.7910/DVN/NKWMQM · CC0</a:t>
-            </a:r>
-          </a:p>
-          <a:p>
-            <a:pPr lvl="0" indent="0" marL="0">
-              <a:buNone/>
-            </a:pPr>
-            <a:r>
-              <a:rPr/>
-              <a:t>You are not expected to follow the empirical-Bayes machinery. Read it for the </a:t>
-            </a:r>
-            <a:r>
-              <a:rPr b="1"/>
-              <a:t>setup</a:t>
-            </a:r>
-            <a:r>
-              <a:rPr/>
-              <a:t>: why a macroeconomist wants a small number of unobserved factors behind a large number of observed series.</a:t>
             </a:r>
           </a:p>
         </p:txBody>
@@ -8012,7 +6733,12 @@
             <p:ph type="title"/>
           </p:nvPr>
         </p:nvSpPr>
-        <p:spPr/>
+        <p:spPr>
+          <a:xfrm>
+            <a:off x="722313" y="3305176"/>
+            <a:ext cx="7772400" cy="1021556"/>
+          </a:xfrm>
+        </p:spPr>
         <p:txBody>
           <a:bodyPr/>
           <a:lstStyle/>
@@ -8022,49 +6748,7 @@
             </a:pPr>
             <a:r>
               <a:rPr/>
-              <a:t>Today’s question</a:t>
-            </a:r>
-          </a:p>
-        </p:txBody>
-      </p:sp>
-      <p:sp>
-        <p:nvSpPr>
-          <p:cNvPr id="3" name="Content Placeholder 2"/>
-          <p:cNvSpPr>
-            <a:spLocks noGrp="1"/>
-          </p:cNvSpPr>
-          <p:nvPr>
-            <p:ph idx="1"/>
-          </p:nvPr>
-        </p:nvSpPr>
-        <p:spPr/>
-        <p:txBody>
-          <a:bodyPr/>
-          <a:lstStyle/>
-          <a:p>
-            <a:pPr lvl="0" indent="0" marL="1270000">
-              <a:buNone/>
-            </a:pPr>
-            <a:r>
-              <a:rPr sz="2000" i="1"/>
-              <a:t>Do European economies move on a few common forces, and can you recover them without being told what they are?</a:t>
-            </a:r>
-          </a:p>
-          <a:p>
-            <a:pPr lvl="0" indent="0" marL="0">
-              <a:buNone/>
-            </a:pPr>
-            <a:r>
-              <a:rPr/>
-              <a:t>For once, we know the answer. The spine was generated from </a:t>
-            </a:r>
-            <a:r>
-              <a:rPr b="1"/>
-              <a:t>three</a:t>
-            </a:r>
-            <a:r>
-              <a:rPr/>
-              <a:t> latent factors. Today you try to find them — and you can check whether you did.</a:t>
+              <a:t>8.1 PCA as variance maximisation</a:t>
             </a:r>
           </a:p>
         </p:txBody>
@@ -8101,12 +6785,7 @@
             <p:ph type="title"/>
           </p:nvPr>
         </p:nvSpPr>
-        <p:spPr>
-          <a:xfrm>
-            <a:off x="722313" y="3305176"/>
-            <a:ext cx="7772400" cy="1021556"/>
-          </a:xfrm>
-        </p:spPr>
+        <p:spPr/>
         <p:txBody>
           <a:bodyPr/>
           <a:lstStyle/>
@@ -8116,11 +6795,253 @@
             </a:pPr>
             <a:r>
               <a:rPr/>
-              <a:t>The SVD</a:t>
-            </a:r>
-          </a:p>
-        </p:txBody>
-      </p:sp>
+              <a:t>The problem</a:t>
+            </a:r>
+          </a:p>
+        </p:txBody>
+      </p:sp>
+      <mc:AlternateContent xmlns:mc="http://schemas.openxmlformats.org/markup-compatibility/2006">
+        <mc:Choice xmlns:a14="http://schemas.microsoft.com/office/drawing/2010/main" Requires="a14">
+          <p:sp>
+            <p:nvSpPr>
+              <p:cNvPr id="3" name="Content Placeholder 2"/>
+              <p:cNvSpPr>
+                <a:spLocks noGrp="1"/>
+              </p:cNvSpPr>
+              <p:nvPr>
+                <p:ph idx="1"/>
+              </p:nvPr>
+            </p:nvSpPr>
+            <p:spPr/>
+            <p:txBody>
+              <a:bodyPr/>
+              <a:lstStyle/>
+              <a:p>
+                <a:pPr lvl="0" indent="0" marL="0">
+                  <a:buNone/>
+                </a:pPr>
+                <a14:m>
+                  <m:oMath xmlns:m="http://schemas.openxmlformats.org/officeDocument/2006/math">
+                    <m:r>
+                      <m:t>X</m:t>
+                    </m:r>
+                  </m:oMath>
+                </a14:m>
+                <a:r>
+                  <a:rPr/>
+                  <a:t> is </a:t>
+                </a:r>
+                <a14:m>
+                  <m:oMath xmlns:m="http://schemas.openxmlformats.org/officeDocument/2006/math">
+                    <m:r>
+                      <m:t>n</m:t>
+                    </m:r>
+                    <m:r>
+                      <m:rPr>
+                        <m:sty m:val="p"/>
+                      </m:rPr>
+                      <m:t>×</m:t>
+                    </m:r>
+                    <m:r>
+                      <m:t>p</m:t>
+                    </m:r>
+                  </m:oMath>
+                </a14:m>
+                <a:r>
+                  <a:rPr/>
+                  <a:t>, columns centred and standardised. Seek a unit vector </a:t>
+                </a:r>
+                <a14:m>
+                  <m:oMath xmlns:m="http://schemas.openxmlformats.org/officeDocument/2006/math">
+                    <m:sSub>
+                      <m:e>
+                        <m:r>
+                          <m:t>v</m:t>
+                        </m:r>
+                      </m:e>
+                      <m:sub>
+                        <m:r>
+                          <m:t>1</m:t>
+                        </m:r>
+                      </m:sub>
+                    </m:sSub>
+                  </m:oMath>
+                </a14:m>
+                <a:r>
+                  <a:rPr/>
+                  <a:t> maximising the variance of the projection:</a:t>
+                </a:r>
+              </a:p>
+              <a:p>
+                <a:pPr lvl="0" indent="0" marL="0">
+                  <a:buNone/>
+                </a:pPr>
+                <a14:m>
+                  <m:oMathPara xmlns:m="http://schemas.openxmlformats.org/officeDocument/2006/math">
+                    <m:oMathParaPr>
+                      <m:jc m:val="center"/>
+                    </m:oMathParaPr>
+                    <m:oMath>
+                      <m:sSub>
+                        <m:e>
+                          <m:r>
+                            <m:t>v</m:t>
+                          </m:r>
+                        </m:e>
+                        <m:sub>
+                          <m:r>
+                            <m:t>1</m:t>
+                          </m:r>
+                        </m:sub>
+                      </m:sSub>
+                      <m:r>
+                        <m:rPr>
+                          <m:sty m:val="p"/>
+                        </m:rPr>
+                        <m:t>=</m:t>
+                      </m:r>
+                      <m:r>
+                        <m:rPr>
+                          <m:sty m:val="p"/>
+                        </m:rPr>
+                        <m:t>arg</m:t>
+                      </m:r>
+                      <m:limLow>
+                        <m:e>
+                          <m:r>
+                            <m:rPr>
+                              <m:sty m:val="p"/>
+                            </m:rPr>
+                            <m:t>max</m:t>
+                          </m:r>
+                        </m:e>
+                        <m:lim>
+                          <m:r>
+                            <m:rPr>
+                              <m:sty m:val="p"/>
+                            </m:rPr>
+                            <m:t>∥</m:t>
+                          </m:r>
+                          <m:r>
+                            <m:t>v</m:t>
+                          </m:r>
+                          <m:r>
+                            <m:rPr>
+                              <m:sty m:val="p"/>
+                            </m:rPr>
+                            <m:t>∥</m:t>
+                          </m:r>
+                          <m:r>
+                            <m:rPr>
+                              <m:sty m:val="p"/>
+                            </m:rPr>
+                            <m:t>=</m:t>
+                          </m:r>
+                          <m:r>
+                            <m:t>1</m:t>
+                          </m:r>
+                        </m:lim>
+                      </m:limLow>
+                      <m:r>
+                        <m:t> </m:t>
+                      </m:r>
+                      <m:sSup>
+                        <m:e>
+                          <m:r>
+                            <m:t>v</m:t>
+                          </m:r>
+                        </m:e>
+                        <m:sup>
+                          <m:r>
+                            <m:rPr>
+                              <m:sty m:val="p"/>
+                            </m:rPr>
+                            <m:t>⊤</m:t>
+                          </m:r>
+                        </m:sup>
+                      </m:sSup>
+                      <m:acc>
+                        <m:accPr>
+                          <m:chr m:val="̂"/>
+                        </m:accPr>
+                        <m:e>
+                          <m:r>
+                            <m:t>Σ</m:t>
+                          </m:r>
+                        </m:e>
+                      </m:acc>
+                      <m:r>
+                        <m:t> </m:t>
+                      </m:r>
+                      <m:r>
+                        <m:t>v</m:t>
+                      </m:r>
+                      <m:r>
+                        <m:rPr>
+                          <m:sty m:val="p"/>
+                        </m:rPr>
+                        <m:t>,</m:t>
+                      </m:r>
+                      <m:r>
+                        <m:t>  </m:t>
+                      </m:r>
+                      <m:acc>
+                        <m:accPr>
+                          <m:chr m:val="̂"/>
+                        </m:accPr>
+                        <m:e>
+                          <m:r>
+                            <m:t>Σ</m:t>
+                          </m:r>
+                        </m:e>
+                      </m:acc>
+                      <m:r>
+                        <m:rPr>
+                          <m:sty m:val="p"/>
+                        </m:rPr>
+                        <m:t>=</m:t>
+                      </m:r>
+                      <m:f>
+                        <m:fPr>
+                          <m:type m:val="lin"/>
+                        </m:fPr>
+                        <m:num>
+                          <m:r>
+                            <m:t>1</m:t>
+                          </m:r>
+                        </m:num>
+                        <m:den>
+                          <m:r>
+                            <m:t>n</m:t>
+                          </m:r>
+                        </m:den>
+                      </m:f>
+                      <m:sSup>
+                        <m:e>
+                          <m:r>
+                            <m:t>X</m:t>
+                          </m:r>
+                        </m:e>
+                        <m:sup>
+                          <m:r>
+                            <m:rPr>
+                              <m:sty m:val="p"/>
+                            </m:rPr>
+                            <m:t>⊤</m:t>
+                          </m:r>
+                        </m:sup>
+                      </m:sSup>
+                      <m:r>
+                        <m:t>X</m:t>
+                      </m:r>
+                    </m:oMath>
+                  </m:oMathPara>
+                </a14:m>
+              </a:p>
+            </p:txBody>
+          </p:sp>
+        </mc:Choice>
+      </mc:AlternateContent>
     </p:spTree>
   </p:cSld>
 </p:sld>
@@ -8163,7 +7084,7 @@
             </a:pPr>
             <a:r>
               <a:rPr/>
-              <a:t>Every matrix factorises</a:t>
+              <a:t>The Lagrangian gives an eigenproblem</a:t>
             </a:r>
           </a:p>
         </p:txBody>
@@ -8188,46 +7109,6 @@
                 <a:pPr lvl="0" indent="0" marL="0">
                   <a:buNone/>
                 </a:pPr>
-                <a:r>
-                  <a:rPr/>
-                  <a:t>For any </a:t>
-                </a:r>
-                <a14:m>
-                  <m:oMath xmlns:m="http://schemas.openxmlformats.org/officeDocument/2006/math">
-                    <m:r>
-                      <m:t>n</m:t>
-                    </m:r>
-                    <m:r>
-                      <m:rPr>
-                        <m:sty m:val="p"/>
-                      </m:rPr>
-                      <m:t>×</m:t>
-                    </m:r>
-                    <m:r>
-                      <m:t>p</m:t>
-                    </m:r>
-                  </m:oMath>
-                </a14:m>
-                <a:r>
-                  <a:rPr/>
-                  <a:t> matrix </a:t>
-                </a:r>
-                <a14:m>
-                  <m:oMath xmlns:m="http://schemas.openxmlformats.org/officeDocument/2006/math">
-                    <m:r>
-                      <m:t>X</m:t>
-                    </m:r>
-                  </m:oMath>
-                </a14:m>
-                <a:r>
-                  <a:rPr/>
-                  <a:t>:</a:t>
-                </a:r>
-              </a:p>
-              <a:p>
-                <a:pPr lvl="0" indent="0" marL="0">
-                  <a:buNone/>
-                </a:pPr>
                 <a14:m>
                   <m:oMathPara xmlns:m="http://schemas.openxmlformats.org/officeDocument/2006/math">
                     <m:oMathParaPr>
@@ -8235,7 +7116,116 @@
                     </m:oMathParaPr>
                     <m:oMath>
                       <m:r>
-                        <m:t>X</m:t>
+                        <m:rPr>
+                          <m:sty m:val="p"/>
+                          <m:scr m:val="script"/>
+                        </m:rPr>
+                        <m:t>L</m:t>
+                      </m:r>
+                      <m:r>
+                        <m:rPr>
+                          <m:sty m:val="p"/>
+                        </m:rPr>
+                        <m:t>=</m:t>
+                      </m:r>
+                      <m:sSup>
+                        <m:e>
+                          <m:r>
+                            <m:t>v</m:t>
+                          </m:r>
+                        </m:e>
+                        <m:sup>
+                          <m:r>
+                            <m:rPr>
+                              <m:sty m:val="p"/>
+                            </m:rPr>
+                            <m:t>⊤</m:t>
+                          </m:r>
+                        </m:sup>
+                      </m:sSup>
+                      <m:acc>
+                        <m:accPr>
+                          <m:chr m:val="̂"/>
+                        </m:accPr>
+                        <m:e>
+                          <m:r>
+                            <m:t>Σ</m:t>
+                          </m:r>
+                        </m:e>
+                      </m:acc>
+                      <m:r>
+                        <m:t>v</m:t>
+                      </m:r>
+                      <m:r>
+                        <m:rPr>
+                          <m:sty m:val="p"/>
+                        </m:rPr>
+                        <m:t>−</m:t>
+                      </m:r>
+                      <m:r>
+                        <m:t>ϕ</m:t>
+                      </m:r>
+                      <m:d>
+                        <m:dPr>
+                          <m:begChr m:val="("/>
+                          <m:sepChr m:val=""/>
+                          <m:endChr m:val=")"/>
+                          <m:grow/>
+                        </m:dPr>
+                        <m:e>
+                          <m:sSup>
+                            <m:e>
+                              <m:r>
+                                <m:t>v</m:t>
+                              </m:r>
+                            </m:e>
+                            <m:sup>
+                              <m:r>
+                                <m:rPr>
+                                  <m:sty m:val="p"/>
+                                </m:rPr>
+                                <m:t>⊤</m:t>
+                              </m:r>
+                            </m:sup>
+                          </m:sSup>
+                          <m:r>
+                            <m:t>v</m:t>
+                          </m:r>
+                          <m:r>
+                            <m:rPr>
+                              <m:sty m:val="p"/>
+                            </m:rPr>
+                            <m:t>−</m:t>
+                          </m:r>
+                          <m:r>
+                            <m:t>1</m:t>
+                          </m:r>
+                        </m:e>
+                      </m:d>
+                      <m:r>
+                        <m:t> </m:t>
+                      </m:r>
+                      <m:r>
+                        <m:rPr>
+                          <m:sty m:val="p"/>
+                        </m:rPr>
+                        <m:t>⇒</m:t>
+                      </m:r>
+                      <m:r>
+                        <m:t> </m:t>
+                      </m:r>
+                      <m:acc>
+                        <m:accPr>
+                          <m:chr m:val="̂"/>
+                        </m:accPr>
+                        <m:e>
+                          <m:r>
+                            <m:t>Σ</m:t>
+                          </m:r>
+                        </m:e>
+                      </m:acc>
+                      <m:r>
+                        <m:t>v</m:t>
                       </m:r>
                       <m:r>
                         <m:rPr>
@@ -8244,167 +7234,41 @@
                         <m:t>=</m:t>
                       </m:r>
                       <m:r>
-                        <m:t>U</m:t>
+                        <m:t>ϕ</m:t>
                       </m:r>
                       <m:r>
-                        <m:t>D</m:t>
-                      </m:r>
-                      <m:r>
-                        <m:t>V</m:t>
-                      </m:r>
-                      <m:r>
-                        <m:rPr>
-                          <m:sty m:val="p"/>
-                        </m:rPr>
-                        <m:t>′</m:t>
+                        <m:t>v</m:t>
                       </m:r>
                     </m:oMath>
                   </m:oMathPara>
                 </a14:m>
               </a:p>
               <a:p>
-                <a:pPr lvl="0"/>
+                <a:pPr lvl="0" indent="0" marL="0">
+                  <a:buNone/>
+                </a:pPr>
+                <a:r>
+                  <a:rPr/>
+                  <a:t>So </a:t>
+                </a:r>
                 <a14:m>
                   <m:oMath xmlns:m="http://schemas.openxmlformats.org/officeDocument/2006/math">
                     <m:r>
-                      <m:t>U</m:t>
+                      <m:t>v</m:t>
                     </m:r>
                   </m:oMath>
                 </a14:m>
                 <a:r>
                   <a:rPr/>
-                  <a:t> — </a:t>
-                </a:r>
-                <a14:m>
-                  <m:oMath xmlns:m="http://schemas.openxmlformats.org/officeDocument/2006/math">
-                    <m:r>
-                      <m:t>n</m:t>
-                    </m:r>
-                    <m:r>
-                      <m:rPr>
-                        <m:sty m:val="p"/>
-                      </m:rPr>
-                      <m:t>×</m:t>
-                    </m:r>
-                    <m:r>
-                      <m:t>r</m:t>
-                    </m:r>
-                  </m:oMath>
-                </a14:m>
+                  <a:t> must be an </a:t>
+                </a:r>
+                <a:r>
+                  <a:rPr b="1"/>
+                  <a:t>eigenvector</a:t>
+                </a:r>
                 <a:r>
                   <a:rPr/>
-                  <a:t>, orthonormal: the observations’ coordinates</a:t>
-                </a:r>
-              </a:p>
-              <a:p>
-                <a:pPr lvl="0"/>
-                <a14:m>
-                  <m:oMath xmlns:m="http://schemas.openxmlformats.org/officeDocument/2006/math">
-                    <m:r>
-                      <m:t>D</m:t>
-                    </m:r>
-                  </m:oMath>
-                </a14:m>
-                <a:r>
-                  <a:rPr/>
-                  <a:t> — diagonal, </a:t>
-                </a:r>
-                <a14:m>
-                  <m:oMath xmlns:m="http://schemas.openxmlformats.org/officeDocument/2006/math">
-                    <m:sSub>
-                      <m:e>
-                        <m:r>
-                          <m:t>d</m:t>
-                        </m:r>
-                      </m:e>
-                      <m:sub>
-                        <m:r>
-                          <m:t>1</m:t>
-                        </m:r>
-                      </m:sub>
-                    </m:sSub>
-                    <m:r>
-                      <m:rPr>
-                        <m:sty m:val="p"/>
-                      </m:rPr>
-                      <m:t>≥</m:t>
-                    </m:r>
-                    <m:sSub>
-                      <m:e>
-                        <m:r>
-                          <m:t>d</m:t>
-                        </m:r>
-                      </m:e>
-                      <m:sub>
-                        <m:r>
-                          <m:t>2</m:t>
-                        </m:r>
-                      </m:sub>
-                    </m:sSub>
-                    <m:r>
-                      <m:rPr>
-                        <m:sty m:val="p"/>
-                      </m:rPr>
-                      <m:t>≥</m:t>
-                    </m:r>
-                    <m:r>
-                      <m:rPr>
-                        <m:sty m:val="p"/>
-                      </m:rPr>
-                      <m:t>…</m:t>
-                    </m:r>
-                    <m:r>
-                      <m:rPr>
-                        <m:sty m:val="p"/>
-                      </m:rPr>
-                      <m:t>≥</m:t>
-                    </m:r>
-                    <m:r>
-                      <m:t>0</m:t>
-                    </m:r>
-                  </m:oMath>
-                </a14:m>
-                <a:r>
-                  <a:rPr/>
-                  <a:t>: the strength of each direction</a:t>
-                </a:r>
-              </a:p>
-              <a:p>
-                <a:pPr lvl="0"/>
-                <a14:m>
-                  <m:oMath xmlns:m="http://schemas.openxmlformats.org/officeDocument/2006/math">
-                    <m:r>
-                      <m:t>V</m:t>
-                    </m:r>
-                  </m:oMath>
-                </a14:m>
-                <a:r>
-                  <a:rPr/>
-                  <a:t> — </a:t>
-                </a:r>
-                <a14:m>
-                  <m:oMath xmlns:m="http://schemas.openxmlformats.org/officeDocument/2006/math">
-                    <m:r>
-                      <m:t>p</m:t>
-                    </m:r>
-                    <m:r>
-                      <m:rPr>
-                        <m:sty m:val="p"/>
-                      </m:rPr>
-                      <m:t>×</m:t>
-                    </m:r>
-                    <m:r>
-                      <m:t>r</m:t>
-                    </m:r>
-                  </m:oMath>
-                </a14:m>
-                <a:r>
-                  <a:rPr/>
-                  <a:t>, orthonormal: the </a:t>
-                </a:r>
-                <a:r>
-                  <a:rPr b="1"/>
-                  <a:t>loadings</a:t>
+                  <a:t> — and since the objective at an eigenvector equals its eigenvalue, we take the largest.</a:t>
                 </a:r>
               </a:p>
               <a:p>
@@ -8413,7 +7277,7 @@
                 </a:pPr>
                 <a:r>
                   <a:rPr/>
-                  <a:t>This is not a statistical model. It is an identity, true of every matrix.</a:t>
+                  <a:t>Subsequent components solve the same problem subject to orthogonality to those already found, giving the eigenvectors in decreasing eigenvalue order.</a:t>
                 </a:r>
               </a:p>
             </p:txBody>
@@ -8462,7 +7326,7 @@
             </a:pPr>
             <a:r>
               <a:rPr/>
-              <a:t>PCA is the SVD of centred data</a:t>
+              <a:t>Via the SVD</a:t>
             </a:r>
           </a:p>
         </p:txBody>
@@ -8489,25 +7353,173 @@
                 </a:pPr>
                 <a:r>
                   <a:rPr/>
-                  <a:t>Centre each column, then take the SVD.</a:t>
-                </a:r>
+                  <a:t>Cleaner, and what software actually computes. With </a:t>
+                </a:r>
+                <a14:m>
+                  <m:oMath xmlns:m="http://schemas.openxmlformats.org/officeDocument/2006/math">
+                    <m:r>
+                      <m:t>X</m:t>
+                    </m:r>
+                    <m:r>
+                      <m:rPr>
+                        <m:sty m:val="p"/>
+                      </m:rPr>
+                      <m:t>=</m:t>
+                    </m:r>
+                    <m:r>
+                      <m:t>U</m:t>
+                    </m:r>
+                    <m:r>
+                      <m:t>D</m:t>
+                    </m:r>
+                    <m:sSup>
+                      <m:e>
+                        <m:r>
+                          <m:t>V</m:t>
+                        </m:r>
+                      </m:e>
+                      <m:sup>
+                        <m:r>
+                          <m:rPr>
+                            <m:sty m:val="p"/>
+                          </m:rPr>
+                          <m:t>⊤</m:t>
+                        </m:r>
+                      </m:sup>
+                    </m:sSup>
+                  </m:oMath>
+                </a14:m>
+                <a:r>
+                  <a:rPr/>
+                  <a:t>:</a:t>
+                </a:r>
+              </a:p>
+              <a:p>
+                <a:pPr lvl="0" indent="0" marL="0">
+                  <a:buNone/>
+                </a:pPr>
+                <a14:m>
+                  <m:oMathPara xmlns:m="http://schemas.openxmlformats.org/officeDocument/2006/math">
+                    <m:oMathParaPr>
+                      <m:jc m:val="center"/>
+                    </m:oMathParaPr>
+                    <m:oMath>
+                      <m:acc>
+                        <m:accPr>
+                          <m:chr m:val="̂"/>
+                        </m:accPr>
+                        <m:e>
+                          <m:r>
+                            <m:t>Σ</m:t>
+                          </m:r>
+                        </m:e>
+                      </m:acc>
+                      <m:r>
+                        <m:rPr>
+                          <m:sty m:val="p"/>
+                        </m:rPr>
+                        <m:t>=</m:t>
+                      </m:r>
+                      <m:f>
+                        <m:fPr>
+                          <m:type m:val="lin"/>
+                        </m:fPr>
+                        <m:num>
+                          <m:r>
+                            <m:t>1</m:t>
+                          </m:r>
+                        </m:num>
+                        <m:den>
+                          <m:r>
+                            <m:t>n</m:t>
+                          </m:r>
+                        </m:den>
+                      </m:f>
+                      <m:r>
+                        <m:t>V</m:t>
+                      </m:r>
+                      <m:sSup>
+                        <m:e>
+                          <m:r>
+                            <m:t>D</m:t>
+                          </m:r>
+                        </m:e>
+                        <m:sup>
+                          <m:r>
+                            <m:t>2</m:t>
+                          </m:r>
+                        </m:sup>
+                      </m:sSup>
+                      <m:sSup>
+                        <m:e>
+                          <m:r>
+                            <m:t>V</m:t>
+                          </m:r>
+                        </m:e>
+                        <m:sup>
+                          <m:r>
+                            <m:rPr>
+                              <m:sty m:val="p"/>
+                            </m:rPr>
+                            <m:t>⊤</m:t>
+                          </m:r>
+                        </m:sup>
+                      </m:sSup>
+                    </m:oMath>
+                  </m:oMathPara>
+                </a14:m>
               </a:p>
               <a:p>
                 <a:pPr lvl="0"/>
                 <a:r>
+                  <a:rPr b="1"/>
+                  <a:t>loadings</a:t>
+                </a:r>
+                <a:r>
                   <a:rPr/>
-                  <a:t>The </a:t>
-                </a:r>
-                <a:r>
-                  <a:rPr b="1"/>
-                  <a:t>principal components</a:t>
-                </a:r>
-                <a:r>
-                  <a:rPr/>
-                  <a:t> are the columns of </a:t>
+                  <a:t> — the columns of </a:t>
                 </a:r>
                 <a14:m>
                   <m:oMath xmlns:m="http://schemas.openxmlformats.org/officeDocument/2006/math">
+                    <m:r>
+                      <m:t>V</m:t>
+                    </m:r>
+                  </m:oMath>
+                </a14:m>
+              </a:p>
+              <a:p>
+                <a:pPr lvl="0"/>
+                <a:r>
+                  <a:rPr b="1"/>
+                  <a:t>scores</a:t>
+                </a:r>
+                <a:r>
+                  <a:rPr/>
+                  <a:t> — </a:t>
+                </a:r>
+                <a14:m>
+                  <m:oMath xmlns:m="http://schemas.openxmlformats.org/officeDocument/2006/math">
+                    <m:r>
+                      <m:t>Z</m:t>
+                    </m:r>
+                    <m:r>
+                      <m:rPr>
+                        <m:sty m:val="p"/>
+                      </m:rPr>
+                      <m:t>=</m:t>
+                    </m:r>
+                    <m:r>
+                      <m:t>X</m:t>
+                    </m:r>
+                    <m:r>
+                      <m:t>V</m:t>
+                    </m:r>
+                    <m:r>
+                      <m:rPr>
+                        <m:sty m:val="p"/>
+                      </m:rPr>
+                      <m:t>=</m:t>
+                    </m:r>
                     <m:r>
                       <m:t>U</m:t>
                     </m:r>
@@ -8520,30 +7532,12 @@
               <a:p>
                 <a:pPr lvl="0"/>
                 <a:r>
+                  <a:rPr b="1"/>
+                  <a:t>variance explained</a:t>
+                </a:r>
+                <a:r>
                   <a:rPr/>
-                  <a:t>The </a:t>
-                </a:r>
-                <a:r>
-                  <a:rPr b="1"/>
-                  <a:t>loadings</a:t>
-                </a:r>
-                <a:r>
-                  <a:rPr/>
-                  <a:t> are the columns of </a:t>
-                </a:r>
-                <a14:m>
-                  <m:oMath xmlns:m="http://schemas.openxmlformats.org/officeDocument/2006/math">
-                    <m:r>
-                      <m:t>V</m:t>
-                    </m:r>
-                  </m:oMath>
-                </a14:m>
-              </a:p>
-              <a:p>
-                <a:pPr lvl="0"/>
-                <a:r>
-                  <a:rPr/>
-                  <a:t>The variance explained by component </a:t>
+                  <a:t> by component </a:t>
                 </a:r>
                 <a14:m>
                   <m:oMath xmlns:m="http://schemas.openxmlformats.org/officeDocument/2006/math">
@@ -8554,7 +7548,7 @@
                 </a14:m>
                 <a:r>
                   <a:rPr/>
-                  <a:t> is </a:t>
+                  <a:t> — </a:t>
                 </a:r>
                 <a14:m>
                   <m:oMath xmlns:m="http://schemas.openxmlformats.org/officeDocument/2006/math">
@@ -8621,134 +7615,6 @@
                   </m:oMath>
                 </a14:m>
               </a:p>
-              <a:p>
-                <a:pPr lvl="0" indent="0" marL="0">
-                  <a:buNone/>
-                </a:pPr>
-                <a14:m>
-                  <m:oMathPara xmlns:m="http://schemas.openxmlformats.org/officeDocument/2006/math">
-                    <m:oMathParaPr>
-                      <m:jc m:val="center"/>
-                    </m:oMathParaPr>
-                    <m:oMath>
-                      <m:r>
-                        <m:rPr>
-                          <m:sty m:val="p"/>
-                        </m:rPr>
-                        <m:t>Var</m:t>
-                      </m:r>
-                      <m:d>
-                        <m:dPr>
-                          <m:begChr m:val="("/>
-                          <m:sepChr m:val=""/>
-                          <m:endChr m:val=")"/>
-                          <m:grow/>
-                        </m:dPr>
-                        <m:e>
-                          <m:r>
-                            <m:t>X</m:t>
-                          </m:r>
-                          <m:r>
-                            <m:rPr>
-                              <m:sty m:val="p"/>
-                            </m:rPr>
-                            <m:t>′</m:t>
-                          </m:r>
-                          <m:r>
-                            <m:t>X</m:t>
-                          </m:r>
-                          <m:r>
-                            <m:rPr>
-                              <m:sty m:val="p"/>
-                            </m:rPr>
-                            <m:t>/</m:t>
-                          </m:r>
-                          <m:r>
-                            <m:t>n</m:t>
-                          </m:r>
-                        </m:e>
-                      </m:d>
-                      <m:r>
-                        <m:t> </m:t>
-                      </m:r>
-                      <m:r>
-                        <m:rPr>
-                          <m:sty m:val="p"/>
-                        </m:rPr>
-                        <m:t>=</m:t>
-                      </m:r>
-                      <m:r>
-                        <m:t> </m:t>
-                      </m:r>
-                      <m:r>
-                        <m:t>V</m:t>
-                      </m:r>
-                      <m:f>
-                        <m:fPr>
-                          <m:type m:val="bar"/>
-                        </m:fPr>
-                        <m:num>
-                          <m:sSup>
-                            <m:e>
-                              <m:r>
-                                <m:t>D</m:t>
-                              </m:r>
-                            </m:e>
-                            <m:sup>
-                              <m:r>
-                                <m:t>2</m:t>
-                              </m:r>
-                            </m:sup>
-                          </m:sSup>
-                        </m:num>
-                        <m:den>
-                          <m:r>
-                            <m:t>n</m:t>
-                          </m:r>
-                        </m:den>
-                      </m:f>
-                      <m:r>
-                        <m:t>V</m:t>
-                      </m:r>
-                      <m:r>
-                        <m:rPr>
-                          <m:sty m:val="p"/>
-                        </m:rPr>
-                        <m:t>′</m:t>
-                      </m:r>
-                    </m:oMath>
-                  </m:oMathPara>
-                </a14:m>
-              </a:p>
-              <a:p>
-                <a:pPr lvl="0" indent="0" marL="0">
-                  <a:buNone/>
-                </a:pPr>
-                <a:r>
-                  <a:rPr/>
-                  <a:t>PCA is an eigendecomposition of the covariance matrix. The SVD gets you there without ever forming </a:t>
-                </a:r>
-                <a14:m>
-                  <m:oMath xmlns:m="http://schemas.openxmlformats.org/officeDocument/2006/math">
-                    <m:r>
-                      <m:t>X</m:t>
-                    </m:r>
-                    <m:r>
-                      <m:rPr>
-                        <m:sty m:val="p"/>
-                      </m:rPr>
-                      <m:t>′</m:t>
-                    </m:r>
-                    <m:r>
-                      <m:t>X</m:t>
-                    </m:r>
-                  </m:oMath>
-                </a14:m>
-                <a:r>
-                  <a:rPr/>
-                  <a:t>, which is numerically better.</a:t>
-                </a:r>
-              </a:p>
             </p:txBody>
           </p:sp>
         </mc:Choice>
@@ -8795,7 +7661,7 @@
             </a:pPr>
             <a:r>
               <a:rPr/>
-              <a:t>Why the truncation is optimal</a:t>
+              <a:t>The connection to Session 05</a:t>
             </a:r>
           </a:p>
         </p:txBody>
@@ -8822,58 +7688,38 @@
                 </a:pPr>
                 <a:r>
                   <a:rPr/>
-                  <a:t>The Eckart–Young theorem: among all rank-</a:t>
+                  <a:t>Ridge shrank along the </a:t>
+                </a:r>
+                <a:r>
+                  <a:rPr b="1"/>
+                  <a:t>same </a:t>
                 </a:r>
                 <a14:m>
                   <m:oMath xmlns:m="http://schemas.openxmlformats.org/officeDocument/2006/math">
                     <m:r>
-                      <m:t>k</m:t>
+                      <m:t>V</m:t>
                     </m:r>
                   </m:oMath>
                 </a14:m>
                 <a:r>
+                  <a:rPr b="1"/>
+                  <a:t> basis</a:t>
+                </a:r>
+                <a:r>
                   <a:rPr/>
-                  <a:t> matrices, the one minimising </a:t>
+                  <a:t>, damping small-</a:t>
                 </a:r>
                 <a14:m>
                   <m:oMath xmlns:m="http://schemas.openxmlformats.org/officeDocument/2006/math">
-                    <m:r>
-                      <m:rPr>
-                        <m:sty m:val="p"/>
-                      </m:rPr>
-                      <m:t>∥</m:t>
-                    </m:r>
-                    <m:r>
-                      <m:t>X</m:t>
-                    </m:r>
-                    <m:r>
-                      <m:rPr>
-                        <m:sty m:val="p"/>
-                      </m:rPr>
-                      <m:t>−</m:t>
-                    </m:r>
-                    <m:acc>
-                      <m:accPr>
-                        <m:chr m:val="̂"/>
-                      </m:accPr>
-                      <m:e>
-                        <m:r>
-                          <m:t>X</m:t>
-                        </m:r>
-                      </m:e>
-                    </m:acc>
                     <m:sSub>
                       <m:e>
                         <m:r>
-                          <m:rPr>
-                            <m:sty m:val="p"/>
-                          </m:rPr>
-                          <m:t>∥</m:t>
+                          <m:t>d</m:t>
                         </m:r>
                       </m:e>
                       <m:sub>
                         <m:r>
-                          <m:t>F</m:t>
+                          <m:t>j</m:t>
                         </m:r>
                       </m:sub>
                     </m:sSub>
@@ -8881,18 +7727,16 @@
                 </a14:m>
                 <a:r>
                   <a:rPr/>
-                  <a:t> is the SVD truncated to its first </a:t>
-                </a:r>
-                <a14:m>
-                  <m:oMath xmlns:m="http://schemas.openxmlformats.org/officeDocument/2006/math">
-                    <m:r>
-                      <m:t>k</m:t>
-                    </m:r>
-                  </m:oMath>
-                </a14:m>
-                <a:r>
-                  <a:rPr/>
-                  <a:t> terms.</a:t>
+                  <a:t> directions.</a:t>
+                </a:r>
+              </a:p>
+              <a:p>
+                <a:pPr lvl="0" indent="0" marL="1270000">
+                  <a:buNone/>
+                </a:pPr>
+                <a:r>
+                  <a:rPr sz="2000" b="1"/>
+                  <a:t>PCA truncates exactly the directions ridge shrinks.</a:t>
                 </a:r>
               </a:p>
               <a:p>
@@ -8901,29 +7745,7 @@
                 </a:pPr>
                 <a:r>
                   <a:rPr/>
-                  <a:t>Keeping the largest </a:t>
-                </a:r>
-                <a14:m>
-                  <m:oMath xmlns:m="http://schemas.openxmlformats.org/officeDocument/2006/math">
-                    <m:r>
-                      <m:t>k</m:t>
-                    </m:r>
-                  </m:oMath>
-                </a14:m>
-                <a:r>
-                  <a:rPr/>
-                  <a:t> singular values is not a heuristic. It is provably the best rank-</a:t>
-                </a:r>
-                <a14:m>
-                  <m:oMath xmlns:m="http://schemas.openxmlformats.org/officeDocument/2006/math">
-                    <m:r>
-                      <m:t>k</m:t>
-                    </m:r>
-                  </m:oMath>
-                </a14:m>
-                <a:r>
-                  <a:rPr/>
-                  <a:t> approximation there is.</a:t>
+                  <a:t>Principal components regression is, in this light, a hard-thresholded ridge.</a:t>
                 </a:r>
               </a:p>
             </p:txBody>

--- a/08-pca-and-factor-models/slides.pptx
+++ b/08-pca-and-factor-models/slides.pptx
@@ -6193,7 +6193,7 @@
                 </a:pPr>
                 <a:r>
                   <a:rPr/>
-                  <a:t>Build the wide panel for your angle; standardise it</a:t>
+                  <a:t>Build the wide panel for your project; standardise it</a:t>
                 </a:r>
               </a:p>
               <a:p>

--- a/08-pca-and-factor-models/slides.pptx
+++ b/08-pca-and-factor-models/slides.pptx
@@ -6119,7 +6119,7 @@
             </a:pPr>
             <a:r>
               <a:rPr/>
-              <a:t>The lab</a:t>
+              <a:t>The practice</a:t>
             </a:r>
           </a:p>
         </p:txBody>
@@ -6401,7 +6401,7 @@
                     <a:hlinkClick r:id="rId2"/>
                     <a:latin typeface="Courier"/>
                   </a:rPr>
-                  <a:t>02-lab/README.md</a:t>
+                  <a:t>02-practice/README.md</a:t>
                 </a:r>
               </a:p>
             </p:txBody>

--- a/08-pca-and-factor-models/slides.pptx
+++ b/08-pca-and-factor-models/slides.pptx
@@ -932,15 +932,15 @@
         </p:nvSpPr>
         <p:spPr>
           <a:xfrm>
-            <a:off x="722313" y="3305176"/>
-            <a:ext cx="7772400" cy="1021556"/>
+            <a:off x="722313" y="1850000"/>
+            <a:ext cx="7772400" cy="1300000"/>
           </a:xfrm>
         </p:spPr>
         <p:txBody>
           <a:bodyPr anchor="t"/>
           <a:lstStyle>
             <a:lvl1pPr algn="l">
-              <a:defRPr sz="1850" b="1" cap="all"/>
+              <a:defRPr sz="2800" b="1" cap="none"/>
             </a:lvl1pPr>
           </a:lstStyle>
           <a:p>
@@ -963,8 +963,8 @@
         </p:nvSpPr>
         <p:spPr>
           <a:xfrm>
-            <a:off x="722313" y="2180035"/>
-            <a:ext cx="7772400" cy="1125140"/>
+            <a:off x="722313" y="3250000"/>
+            <a:ext cx="7772400" cy="700000"/>
           </a:xfrm>
         </p:spPr>
         <p:txBody>
@@ -3307,8 +3307,8 @@
         </p:nvSpPr>
         <p:spPr>
           <a:xfrm>
-            <a:off x="722313" y="3305176"/>
-            <a:ext cx="7772400" cy="1021556"/>
+            <a:off x="722313" y="1850000"/>
+            <a:ext cx="7772400" cy="1300000"/>
           </a:xfrm>
         </p:spPr>
         <p:txBody>
@@ -3791,8 +3791,8 @@
         </p:nvSpPr>
         <p:spPr>
           <a:xfrm>
-            <a:off x="722313" y="3305176"/>
-            <a:ext cx="7772400" cy="1021556"/>
+            <a:off x="722313" y="1850000"/>
+            <a:ext cx="7772400" cy="1300000"/>
           </a:xfrm>
         </p:spPr>
         <p:txBody>
@@ -4777,8 +4777,8 @@
         </p:nvSpPr>
         <p:spPr>
           <a:xfrm>
-            <a:off x="722313" y="3305176"/>
-            <a:ext cx="7772400" cy="1021556"/>
+            <a:off x="722313" y="1850000"/>
+            <a:ext cx="7772400" cy="1300000"/>
           </a:xfrm>
         </p:spPr>
         <p:txBody>
@@ -5607,8 +5607,8 @@
         </p:nvSpPr>
         <p:spPr>
           <a:xfrm>
-            <a:off x="722313" y="3305176"/>
-            <a:ext cx="7772400" cy="1021556"/>
+            <a:off x="722313" y="1850000"/>
+            <a:ext cx="7772400" cy="1300000"/>
           </a:xfrm>
         </p:spPr>
         <p:txBody>
@@ -6106,8 +6106,8 @@
         </p:nvSpPr>
         <p:spPr>
           <a:xfrm>
-            <a:off x="722313" y="3305176"/>
-            <a:ext cx="7772400" cy="1021556"/>
+            <a:off x="722313" y="1850000"/>
+            <a:ext cx="7772400" cy="1300000"/>
           </a:xfrm>
         </p:spPr>
         <p:txBody>
@@ -6735,8 +6735,8 @@
         </p:nvSpPr>
         <p:spPr>
           <a:xfrm>
-            <a:off x="722313" y="3305176"/>
-            <a:ext cx="7772400" cy="1021556"/>
+            <a:off x="722313" y="1850000"/>
+            <a:ext cx="7772400" cy="1300000"/>
           </a:xfrm>
         </p:spPr>
         <p:txBody>

--- a/08-pca-and-factor-models/slides.pptx
+++ b/08-pca-and-factor-models/slides.pptx
@@ -32,6 +32,27 @@
     <p:sldId id="280" r:id="rId26"/>
     <p:sldId id="281" r:id="rId27"/>
     <p:sldId id="282" r:id="rId28"/>
+    <p:sldId id="283" r:id="rId29"/>
+    <p:sldId id="284" r:id="rId30"/>
+    <p:sldId id="285" r:id="rId31"/>
+    <p:sldId id="286" r:id="rId32"/>
+    <p:sldId id="287" r:id="rId33"/>
+    <p:sldId id="288" r:id="rId34"/>
+    <p:sldId id="289" r:id="rId35"/>
+    <p:sldId id="290" r:id="rId36"/>
+    <p:sldId id="291" r:id="rId37"/>
+    <p:sldId id="292" r:id="rId38"/>
+    <p:sldId id="293" r:id="rId39"/>
+    <p:sldId id="294" r:id="rId40"/>
+    <p:sldId id="295" r:id="rId41"/>
+    <p:sldId id="296" r:id="rId42"/>
+    <p:sldId id="297" r:id="rId43"/>
+    <p:sldId id="298" r:id="rId44"/>
+    <p:sldId id="299" r:id="rId45"/>
+    <p:sldId id="300" r:id="rId46"/>
+    <p:sldId id="301" r:id="rId47"/>
+    <p:sldId id="302" r:id="rId48"/>
+    <p:sldId id="303" r:id="rId49"/>
   </p:sldIdLst>
   <p:sldSz cx="9144000" cy="5143500" type="screen16x9"/>
   <p:notesSz cx="6858000" cy="9144000"/>
@@ -3207,7 +3228,7 @@
             </a:pPr>
             <a:r>
               <a:rPr/>
-              <a:t>Unsupervised I: PCA, the SVD, and Factor Models</a:t>
+              <a:t>PCA, the SVD, and Factor Models</a:t>
             </a:r>
           </a:p>
         </p:txBody>
@@ -3268,7 +3289,7 @@
             </a:pPr>
             <a:r>
               <a:rPr/>
-              <a:t>20 August 2026</a:t>
+              <a:t>22 August 2026</a:t>
             </a:r>
           </a:p>
         </p:txBody>
@@ -3320,7 +3341,7 @@
             </a:pPr>
             <a:r>
               <a:rPr/>
-              <a:t>8.2 Eckart–Young</a:t>
+              <a:t>2 · PCA as maximisation</a:t>
             </a:r>
           </a:p>
         </p:txBody>
@@ -3367,7 +3388,7 @@
             </a:pPr>
             <a:r>
               <a:rPr/>
-              <a:t>The theorem</a:t>
+              <a:t>The problem</a:t>
             </a:r>
           </a:p>
         </p:txBody>
@@ -3394,7 +3415,1681 @@
                 </a:pPr>
                 <a:r>
                   <a:rPr/>
-                  <a:t>Among all matrices of rank </a:t>
+                  <a:t>Let </a:t>
+                </a:r>
+                <a14:m>
+                  <m:oMath xmlns:m="http://schemas.openxmlformats.org/officeDocument/2006/math">
+                    <m:r>
+                      <m:t>X</m:t>
+                    </m:r>
+                  </m:oMath>
+                </a14:m>
+                <a:r>
+                  <a:rPr/>
+                  <a:t> be </a:t>
+                </a:r>
+                <a14:m>
+                  <m:oMath xmlns:m="http://schemas.openxmlformats.org/officeDocument/2006/math">
+                    <m:r>
+                      <m:t>n</m:t>
+                    </m:r>
+                    <m:r>
+                      <m:rPr>
+                        <m:sty m:val="p"/>
+                      </m:rPr>
+                      <m:t>×</m:t>
+                    </m:r>
+                    <m:r>
+                      <m:t>p</m:t>
+                    </m:r>
+                  </m:oMath>
+                </a14:m>
+                <a:r>
+                  <a:rPr/>
+                  <a:t>, columns </a:t>
+                </a:r>
+                <a:r>
+                  <a:rPr b="1"/>
+                  <a:t>centred and standardised</a:t>
+                </a:r>
+                <a:r>
+                  <a:rPr/>
+                  <a:t>. Find the unit vector maximising the variance of the projection:</a:t>
+                </a:r>
+              </a:p>
+              <a:p>
+                <a:pPr lvl="0" indent="0" marL="0">
+                  <a:buNone/>
+                </a:pPr>
+                <a14:m>
+                  <m:oMathPara xmlns:m="http://schemas.openxmlformats.org/officeDocument/2006/math">
+                    <m:oMathParaPr>
+                      <m:jc m:val="center"/>
+                    </m:oMathParaPr>
+                    <m:oMath>
+                      <m:sSub>
+                        <m:e>
+                          <m:r>
+                            <m:t>v</m:t>
+                          </m:r>
+                        </m:e>
+                        <m:sub>
+                          <m:r>
+                            <m:t>1</m:t>
+                          </m:r>
+                        </m:sub>
+                      </m:sSub>
+                      <m:r>
+                        <m:rPr>
+                          <m:sty m:val="p"/>
+                        </m:rPr>
+                        <m:t>=</m:t>
+                      </m:r>
+                      <m:r>
+                        <m:rPr>
+                          <m:sty m:val="p"/>
+                        </m:rPr>
+                        <m:t>arg</m:t>
+                      </m:r>
+                      <m:limLow>
+                        <m:e>
+                          <m:r>
+                            <m:rPr>
+                              <m:sty m:val="p"/>
+                            </m:rPr>
+                            <m:t>max</m:t>
+                          </m:r>
+                        </m:e>
+                        <m:lim>
+                          <m:r>
+                            <m:rPr>
+                              <m:sty m:val="p"/>
+                            </m:rPr>
+                            <m:t>∥</m:t>
+                          </m:r>
+                          <m:r>
+                            <m:t>v</m:t>
+                          </m:r>
+                          <m:r>
+                            <m:rPr>
+                              <m:sty m:val="p"/>
+                            </m:rPr>
+                            <m:t>∥</m:t>
+                          </m:r>
+                          <m:r>
+                            <m:rPr>
+                              <m:sty m:val="p"/>
+                            </m:rPr>
+                            <m:t>=</m:t>
+                          </m:r>
+                          <m:r>
+                            <m:t>1</m:t>
+                          </m:r>
+                        </m:lim>
+                      </m:limLow>
+                      <m:sSup>
+                        <m:e>
+                          <m:r>
+                            <m:t>v</m:t>
+                          </m:r>
+                        </m:e>
+                        <m:sup>
+                          <m:r>
+                            <m:rPr>
+                              <m:sty m:val="p"/>
+                            </m:rPr>
+                            <m:t>⊤</m:t>
+                          </m:r>
+                        </m:sup>
+                      </m:sSup>
+                      <m:acc>
+                        <m:accPr>
+                          <m:chr m:val="̂"/>
+                        </m:accPr>
+                        <m:e>
+                          <m:r>
+                            <m:t>Σ</m:t>
+                          </m:r>
+                        </m:e>
+                      </m:acc>
+                      <m:r>
+                        <m:t>v</m:t>
+                      </m:r>
+                      <m:r>
+                        <m:rPr>
+                          <m:sty m:val="p"/>
+                        </m:rPr>
+                        <m:t>,</m:t>
+                      </m:r>
+                      <m:r>
+                        <m:t>  </m:t>
+                      </m:r>
+                      <m:acc>
+                        <m:accPr>
+                          <m:chr m:val="̂"/>
+                        </m:accPr>
+                        <m:e>
+                          <m:r>
+                            <m:t>Σ</m:t>
+                          </m:r>
+                        </m:e>
+                      </m:acc>
+                      <m:r>
+                        <m:rPr>
+                          <m:sty m:val="p"/>
+                        </m:rPr>
+                        <m:t>=</m:t>
+                      </m:r>
+                      <m:f>
+                        <m:fPr>
+                          <m:type m:val="lin"/>
+                        </m:fPr>
+                        <m:num>
+                          <m:r>
+                            <m:t>1</m:t>
+                          </m:r>
+                        </m:num>
+                        <m:den>
+                          <m:r>
+                            <m:t>n</m:t>
+                          </m:r>
+                        </m:den>
+                      </m:f>
+                      <m:sSup>
+                        <m:e>
+                          <m:r>
+                            <m:t>X</m:t>
+                          </m:r>
+                        </m:e>
+                        <m:sup>
+                          <m:r>
+                            <m:rPr>
+                              <m:sty m:val="p"/>
+                            </m:rPr>
+                            <m:t>⊤</m:t>
+                          </m:r>
+                        </m:sup>
+                      </m:sSup>
+                      <m:r>
+                        <m:t>X</m:t>
+                      </m:r>
+                    </m:oMath>
+                  </m:oMathPara>
+                </a14:m>
+              </a:p>
+              <a:p>
+                <a:pPr lvl="0" indent="0" marL="0">
+                  <a:buNone/>
+                </a:pPr>
+                <a:r>
+                  <a:rPr/>
+                  <a:t>Standardisation is </a:t>
+                </a:r>
+                <a:r>
+                  <a:rPr b="1"/>
+                  <a:t>not optional</a:t>
+                </a:r>
+                <a:r>
+                  <a:rPr/>
+                  <a:t>. Without it, whichever series is measured in the largest units becomes “the first factor”. PCA has no idea what a euro is.</a:t>
+                </a:r>
+              </a:p>
+            </p:txBody>
+          </p:sp>
+        </mc:Choice>
+      </mc:AlternateContent>
+    </p:spTree>
+  </p:cSld>
+</p:sld>
+</file>
+
+<file path=ppt/slides/slide12.xml><?xml version="1.0" encoding="utf-8"?>
+<p:sld xmlns:a="http://schemas.openxmlformats.org/drawingml/2006/main" xmlns:r="http://schemas.openxmlformats.org/officeDocument/2006/relationships" xmlns:p="http://schemas.openxmlformats.org/presentationml/2006/main">
+  <p:cSld>
+    <p:spTree>
+      <p:nvGrpSpPr>
+        <p:cNvPr id="1" name=""/>
+        <p:cNvGrpSpPr/>
+        <p:nvPr/>
+      </p:nvGrpSpPr>
+      <p:grpSpPr>
+        <a:xfrm>
+          <a:off x="0" y="0"/>
+          <a:ext cx="0" cy="0"/>
+          <a:chOff x="0" y="0"/>
+          <a:chExt cx="0" cy="0"/>
+        </a:xfrm>
+      </p:grpSpPr>
+      <p:sp>
+        <p:nvSpPr>
+          <p:cNvPr id="2" name="Title 1"/>
+          <p:cNvSpPr>
+            <a:spLocks noGrp="1"/>
+          </p:cNvSpPr>
+          <p:nvPr>
+            <p:ph type="title"/>
+          </p:nvPr>
+        </p:nvSpPr>
+        <p:spPr/>
+        <p:txBody>
+          <a:bodyPr/>
+          <a:lstStyle/>
+          <a:p>
+            <a:pPr lvl="0" indent="0" marL="0">
+              <a:buNone/>
+            </a:pPr>
+            <a:r>
+              <a:rPr/>
+              <a:t>Solve it: two lines of Lagrangian</a:t>
+            </a:r>
+          </a:p>
+        </p:txBody>
+      </p:sp>
+      <mc:AlternateContent xmlns:mc="http://schemas.openxmlformats.org/markup-compatibility/2006">
+        <mc:Choice xmlns:a14="http://schemas.microsoft.com/office/drawing/2010/main" Requires="a14">
+          <p:sp>
+            <p:nvSpPr>
+              <p:cNvPr id="3" name="Content Placeholder 2"/>
+              <p:cNvSpPr>
+                <a:spLocks noGrp="1"/>
+              </p:cNvSpPr>
+              <p:nvPr>
+                <p:ph idx="1"/>
+              </p:nvPr>
+            </p:nvSpPr>
+            <p:spPr/>
+            <p:txBody>
+              <a:bodyPr/>
+              <a:lstStyle/>
+              <a:p>
+                <a:pPr lvl="0" indent="0" marL="0">
+                  <a:buNone/>
+                </a:pPr>
+                <a14:m>
+                  <m:oMathPara xmlns:m="http://schemas.openxmlformats.org/officeDocument/2006/math">
+                    <m:oMathParaPr>
+                      <m:jc m:val="center"/>
+                    </m:oMathParaPr>
+                    <m:oMath>
+                      <m:r>
+                        <m:rPr>
+                          <m:sty m:val="p"/>
+                          <m:scr m:val="script"/>
+                        </m:rPr>
+                        <m:t>L</m:t>
+                      </m:r>
+                      <m:r>
+                        <m:rPr>
+                          <m:sty m:val="p"/>
+                        </m:rPr>
+                        <m:t>=</m:t>
+                      </m:r>
+                      <m:sSup>
+                        <m:e>
+                          <m:r>
+                            <m:t>v</m:t>
+                          </m:r>
+                        </m:e>
+                        <m:sup>
+                          <m:r>
+                            <m:rPr>
+                              <m:sty m:val="p"/>
+                            </m:rPr>
+                            <m:t>⊤</m:t>
+                          </m:r>
+                        </m:sup>
+                      </m:sSup>
+                      <m:acc>
+                        <m:accPr>
+                          <m:chr m:val="̂"/>
+                        </m:accPr>
+                        <m:e>
+                          <m:r>
+                            <m:t>Σ</m:t>
+                          </m:r>
+                        </m:e>
+                      </m:acc>
+                      <m:r>
+                        <m:t>v</m:t>
+                      </m:r>
+                      <m:r>
+                        <m:rPr>
+                          <m:sty m:val="p"/>
+                        </m:rPr>
+                        <m:t>−</m:t>
+                      </m:r>
+                      <m:r>
+                        <m:t>ϕ</m:t>
+                      </m:r>
+                      <m:d>
+                        <m:dPr>
+                          <m:begChr m:val="("/>
+                          <m:sepChr m:val=""/>
+                          <m:endChr m:val=")"/>
+                          <m:grow/>
+                        </m:dPr>
+                        <m:e>
+                          <m:sSup>
+                            <m:e>
+                              <m:r>
+                                <m:t>v</m:t>
+                              </m:r>
+                            </m:e>
+                            <m:sup>
+                              <m:r>
+                                <m:rPr>
+                                  <m:sty m:val="p"/>
+                                </m:rPr>
+                                <m:t>⊤</m:t>
+                              </m:r>
+                            </m:sup>
+                          </m:sSup>
+                          <m:r>
+                            <m:t>v</m:t>
+                          </m:r>
+                          <m:r>
+                            <m:rPr>
+                              <m:sty m:val="p"/>
+                            </m:rPr>
+                            <m:t>−</m:t>
+                          </m:r>
+                          <m:r>
+                            <m:t>1</m:t>
+                          </m:r>
+                        </m:e>
+                      </m:d>
+                      <m:r>
+                        <m:t>  </m:t>
+                      </m:r>
+                      <m:r>
+                        <m:rPr>
+                          <m:sty m:val="p"/>
+                        </m:rPr>
+                        <m:t>⇒</m:t>
+                      </m:r>
+                      <m:r>
+                        <m:t>  </m:t>
+                      </m:r>
+                      <m:acc>
+                        <m:accPr>
+                          <m:chr m:val="̂"/>
+                        </m:accPr>
+                        <m:e>
+                          <m:r>
+                            <m:t>Σ</m:t>
+                          </m:r>
+                        </m:e>
+                      </m:acc>
+                      <m:r>
+                        <m:t>v</m:t>
+                      </m:r>
+                      <m:r>
+                        <m:rPr>
+                          <m:sty m:val="p"/>
+                        </m:rPr>
+                        <m:t>=</m:t>
+                      </m:r>
+                      <m:r>
+                        <m:t>ϕ</m:t>
+                      </m:r>
+                      <m:r>
+                        <m:t>v</m:t>
+                      </m:r>
+                    </m:oMath>
+                  </m:oMathPara>
+                </a14:m>
+              </a:p>
+              <a:p>
+                <a:pPr lvl="0" indent="0" marL="0">
+                  <a:buNone/>
+                </a:pPr>
+                <a:r>
+                  <a:rPr/>
+                  <a:t>So </a:t>
+                </a:r>
+                <a14:m>
+                  <m:oMath xmlns:m="http://schemas.openxmlformats.org/officeDocument/2006/math">
+                    <m:r>
+                      <m:t>v</m:t>
+                    </m:r>
+                  </m:oMath>
+                </a14:m>
+                <a:r>
+                  <a:rPr/>
+                  <a:t> </a:t>
+                </a:r>
+                <a:r>
+                  <a:rPr b="1"/>
+                  <a:t>must be an eigenvector</a:t>
+                </a:r>
+                <a:r>
+                  <a:rPr/>
+                  <a:t> of </a:t>
+                </a:r>
+                <a14:m>
+                  <m:oMath xmlns:m="http://schemas.openxmlformats.org/officeDocument/2006/math">
+                    <m:acc>
+                      <m:accPr>
+                        <m:chr m:val="̂"/>
+                      </m:accPr>
+                      <m:e>
+                        <m:r>
+                          <m:t>Σ</m:t>
+                        </m:r>
+                      </m:e>
+                    </m:acc>
+                  </m:oMath>
+                </a14:m>
+                <a:r>
+                  <a:rPr/>
+                  <a:t>. And the objective evaluated at an eigenvector is its own eigenvalue — so take the </a:t>
+                </a:r>
+                <a:r>
+                  <a:rPr b="1"/>
+                  <a:t>largest</a:t>
+                </a:r>
+                <a:r>
+                  <a:rPr/>
+                  <a:t> one.</a:t>
+                </a:r>
+              </a:p>
+              <a:p>
+                <a:pPr lvl="0" indent="0" marL="0">
+                  <a:buNone/>
+                </a:pPr>
+                <a:r>
+                  <a:rPr/>
+                  <a:t>Subsequent components solve the same problem subject to orthogonality to those already found. You get the eigenvectors in decreasing eigenvalue order.</a:t>
+                </a:r>
+              </a:p>
+              <a:p>
+                <a:pPr lvl="0" indent="0" marL="0">
+                  <a:buNone/>
+                </a:pPr>
+                <a:r>
+                  <a:rPr/>
+                  <a:t>PCA is not an algorithm someone invented. It is the </a:t>
+                </a:r>
+                <a:r>
+                  <a:rPr b="1"/>
+                  <a:t>solution</a:t>
+                </a:r>
+                <a:r>
+                  <a:rPr/>
+                  <a:t> to a one-line optimisation problem.</a:t>
+                </a:r>
+              </a:p>
+            </p:txBody>
+          </p:sp>
+        </mc:Choice>
+      </mc:AlternateContent>
+    </p:spTree>
+  </p:cSld>
+</p:sld>
+</file>
+
+<file path=ppt/slides/slide13.xml><?xml version="1.0" encoding="utf-8"?>
+<p:sld xmlns:a="http://schemas.openxmlformats.org/drawingml/2006/main" xmlns:r="http://schemas.openxmlformats.org/officeDocument/2006/relationships" xmlns:p="http://schemas.openxmlformats.org/presentationml/2006/main">
+  <p:cSld>
+    <p:spTree>
+      <p:nvGrpSpPr>
+        <p:cNvPr id="1" name=""/>
+        <p:cNvGrpSpPr/>
+        <p:nvPr/>
+      </p:nvGrpSpPr>
+      <p:grpSpPr>
+        <a:xfrm>
+          <a:off x="0" y="0"/>
+          <a:ext cx="0" cy="0"/>
+          <a:chOff x="0" y="0"/>
+          <a:chExt cx="0" cy="0"/>
+        </a:xfrm>
+      </p:grpSpPr>
+      <p:sp>
+        <p:nvSpPr>
+          <p:cNvPr id="2" name="Title 1"/>
+          <p:cNvSpPr>
+            <a:spLocks noGrp="1"/>
+          </p:cNvSpPr>
+          <p:nvPr>
+            <p:ph type="title"/>
+          </p:nvPr>
+        </p:nvSpPr>
+        <p:spPr/>
+        <p:txBody>
+          <a:bodyPr/>
+          <a:lstStyle/>
+          <a:p>
+            <a:pPr lvl="0" indent="0" marL="0">
+              <a:buNone/>
+            </a:pPr>
+            <a:r>
+              <a:rPr/>
+              <a:t>Do it by hand, once</a:t>
+            </a:r>
+          </a:p>
+        </p:txBody>
+      </p:sp>
+      <mc:AlternateContent xmlns:mc="http://schemas.openxmlformats.org/markup-compatibility/2006">
+        <mc:Choice xmlns:a14="http://schemas.microsoft.com/office/drawing/2010/main" Requires="a14">
+          <p:sp>
+            <p:nvSpPr>
+              <p:cNvPr id="3" name="Content Placeholder 2"/>
+              <p:cNvSpPr>
+                <a:spLocks noGrp="1"/>
+              </p:cNvSpPr>
+              <p:nvPr>
+                <p:ph idx="1"/>
+              </p:nvPr>
+            </p:nvSpPr>
+            <p:spPr/>
+            <p:txBody>
+              <a:bodyPr/>
+              <a:lstStyle/>
+              <a:p>
+                <a:pPr lvl="0" indent="0" marL="0">
+                  <a:buNone/>
+                </a:pPr>
+                <a14:m>
+                  <m:oMathPara xmlns:m="http://schemas.openxmlformats.org/officeDocument/2006/math">
+                    <m:oMathParaPr>
+                      <m:jc m:val="center"/>
+                    </m:oMathParaPr>
+                    <m:oMath>
+                      <m:acc>
+                        <m:accPr>
+                          <m:chr m:val="̂"/>
+                        </m:accPr>
+                        <m:e>
+                          <m:r>
+                            <m:t>Σ</m:t>
+                          </m:r>
+                        </m:e>
+                      </m:acc>
+                      <m:r>
+                        <m:rPr>
+                          <m:sty m:val="p"/>
+                        </m:rPr>
+                        <m:t>=</m:t>
+                      </m:r>
+                      <m:d>
+                        <m:dPr>
+                          <m:begChr m:val="("/>
+                          <m:sepChr m:val=""/>
+                          <m:endChr m:val=")"/>
+                          <m:grow/>
+                        </m:dPr>
+                        <m:e>
+                          <m:m>
+                            <m:mPr>
+                              <m:baseJc m:val="center"/>
+                              <m:plcHide m:val="on"/>
+                              <m:mcs>
+                                <m:mc>
+                                  <m:mcPr>
+                                    <m:mcJc m:val="center"/>
+                                    <m:count m:val="1"/>
+                                  </m:mcPr>
+                                </m:mc>
+                                <m:mc>
+                                  <m:mcPr>
+                                    <m:mcJc m:val="center"/>
+                                    <m:count m:val="1"/>
+                                  </m:mcPr>
+                                </m:mc>
+                              </m:mcs>
+                            </m:mPr>
+                            <m:mr>
+                              <m:e>
+                                <m:r>
+                                  <m:t>2</m:t>
+                                </m:r>
+                              </m:e>
+                              <m:e>
+                                <m:r>
+                                  <m:t>1</m:t>
+                                </m:r>
+                              </m:e>
+                            </m:mr>
+                            <m:mr>
+                              <m:e>
+                                <m:r>
+                                  <m:t>1</m:t>
+                                </m:r>
+                              </m:e>
+                              <m:e>
+                                <m:r>
+                                  <m:t>2</m:t>
+                                </m:r>
+                              </m:e>
+                            </m:mr>
+                          </m:m>
+                        </m:e>
+                      </m:d>
+                      <m:r>
+                        <m:t> </m:t>
+                      </m:r>
+                      <m:r>
+                        <m:rPr>
+                          <m:sty m:val="p"/>
+                        </m:rPr>
+                        <m:t>⇒</m:t>
+                      </m:r>
+                      <m:r>
+                        <m:t> </m:t>
+                      </m:r>
+                      <m:sSub>
+                        <m:e>
+                          <m:r>
+                            <m:t>ϕ</m:t>
+                          </m:r>
+                        </m:e>
+                        <m:sub>
+                          <m:r>
+                            <m:t>1</m:t>
+                          </m:r>
+                        </m:sub>
+                      </m:sSub>
+                      <m:r>
+                        <m:rPr>
+                          <m:sty m:val="p"/>
+                        </m:rPr>
+                        <m:t>=</m:t>
+                      </m:r>
+                      <m:r>
+                        <m:t>3</m:t>
+                      </m:r>
+                      <m:r>
+                        <m:rPr>
+                          <m:sty m:val="p"/>
+                        </m:rPr>
+                        <m:t>,</m:t>
+                      </m:r>
+                      <m:r>
+                        <m:t> </m:t>
+                      </m:r>
+                      <m:sSub>
+                        <m:e>
+                          <m:r>
+                            <m:t>v</m:t>
+                          </m:r>
+                        </m:e>
+                        <m:sub>
+                          <m:r>
+                            <m:t>1</m:t>
+                          </m:r>
+                        </m:sub>
+                      </m:sSub>
+                      <m:r>
+                        <m:rPr>
+                          <m:sty m:val="p"/>
+                        </m:rPr>
+                        <m:t>=</m:t>
+                      </m:r>
+                      <m:f>
+                        <m:fPr>
+                          <m:type m:val="lin"/>
+                        </m:fPr>
+                        <m:num>
+                          <m:r>
+                            <m:t>1</m:t>
+                          </m:r>
+                        </m:num>
+                        <m:den>
+                          <m:rad>
+                            <m:radPr>
+                              <m:degHide m:val="on"/>
+                            </m:radPr>
+                            <m:deg/>
+                            <m:e>
+                              <m:r>
+                                <m:t>2</m:t>
+                              </m:r>
+                            </m:e>
+                          </m:rad>
+                        </m:den>
+                      </m:f>
+                      <m:d>
+                        <m:dPr>
+                          <m:begChr m:val="("/>
+                          <m:sepChr m:val=""/>
+                          <m:endChr m:val=")"/>
+                          <m:grow/>
+                        </m:dPr>
+                        <m:e>
+                          <m:f>
+                            <m:fPr>
+                              <m:type m:val="noBar"/>
+                            </m:fPr>
+                            <m:num>
+                              <m:r>
+                                <m:t>1</m:t>
+                              </m:r>
+                            </m:num>
+                            <m:den>
+                              <m:r>
+                                <m:t>1</m:t>
+                              </m:r>
+                            </m:den>
+                          </m:f>
+                        </m:e>
+                      </m:d>
+                      <m:r>
+                        <m:rPr>
+                          <m:sty m:val="p"/>
+                        </m:rPr>
+                        <m:t>;</m:t>
+                      </m:r>
+                      <m:r>
+                        <m:t> </m:t>
+                      </m:r>
+                      <m:sSub>
+                        <m:e>
+                          <m:r>
+                            <m:t>ϕ</m:t>
+                          </m:r>
+                        </m:e>
+                        <m:sub>
+                          <m:r>
+                            <m:t>2</m:t>
+                          </m:r>
+                        </m:sub>
+                      </m:sSub>
+                      <m:r>
+                        <m:rPr>
+                          <m:sty m:val="p"/>
+                        </m:rPr>
+                        <m:t>=</m:t>
+                      </m:r>
+                      <m:r>
+                        <m:t>1</m:t>
+                      </m:r>
+                      <m:r>
+                        <m:rPr>
+                          <m:sty m:val="p"/>
+                        </m:rPr>
+                        <m:t>,</m:t>
+                      </m:r>
+                      <m:r>
+                        <m:t> </m:t>
+                      </m:r>
+                      <m:sSub>
+                        <m:e>
+                          <m:r>
+                            <m:t>v</m:t>
+                          </m:r>
+                        </m:e>
+                        <m:sub>
+                          <m:r>
+                            <m:t>2</m:t>
+                          </m:r>
+                        </m:sub>
+                      </m:sSub>
+                      <m:r>
+                        <m:rPr>
+                          <m:sty m:val="p"/>
+                        </m:rPr>
+                        <m:t>=</m:t>
+                      </m:r>
+                      <m:f>
+                        <m:fPr>
+                          <m:type m:val="lin"/>
+                        </m:fPr>
+                        <m:num>
+                          <m:r>
+                            <m:t>1</m:t>
+                          </m:r>
+                        </m:num>
+                        <m:den>
+                          <m:rad>
+                            <m:radPr>
+                              <m:degHide m:val="on"/>
+                            </m:radPr>
+                            <m:deg/>
+                            <m:e>
+                              <m:r>
+                                <m:t>2</m:t>
+                              </m:r>
+                            </m:e>
+                          </m:rad>
+                        </m:den>
+                      </m:f>
+                      <m:d>
+                        <m:dPr>
+                          <m:begChr m:val="("/>
+                          <m:sepChr m:val=""/>
+                          <m:endChr m:val=")"/>
+                          <m:grow/>
+                        </m:dPr>
+                        <m:e>
+                          <m:f>
+                            <m:fPr>
+                              <m:type m:val="noBar"/>
+                            </m:fPr>
+                            <m:num>
+                              <m:r>
+                                <m:t>1</m:t>
+                              </m:r>
+                            </m:num>
+                            <m:den>
+                              <m:r>
+                                <m:rPr>
+                                  <m:sty m:val="p"/>
+                                </m:rPr>
+                                <m:t>−</m:t>
+                              </m:r>
+                              <m:r>
+                                <m:t>1</m:t>
+                              </m:r>
+                            </m:den>
+                          </m:f>
+                        </m:e>
+                      </m:d>
+                    </m:oMath>
+                  </m:oMathPara>
+                </a14:m>
+              </a:p>
+              <a:p>
+                <a:pPr lvl="0" indent="0" marL="0">
+                  <a:buNone/>
+                </a:pPr>
+                <a:r>
+                  <a:rPr/>
+                  <a:t>First component explains </a:t>
+                </a:r>
+                <a14:m>
+                  <m:oMath xmlns:m="http://schemas.openxmlformats.org/officeDocument/2006/math">
+                    <m:r>
+                      <m:t>3</m:t>
+                    </m:r>
+                    <m:r>
+                      <m:rPr>
+                        <m:sty m:val="p"/>
+                      </m:rPr>
+                      <m:t>/</m:t>
+                    </m:r>
+                    <m:d>
+                      <m:dPr>
+                        <m:begChr m:val="("/>
+                        <m:sepChr m:val=""/>
+                        <m:endChr m:val=")"/>
+                        <m:grow/>
+                      </m:dPr>
+                      <m:e>
+                        <m:r>
+                          <m:t>3</m:t>
+                        </m:r>
+                        <m:r>
+                          <m:rPr>
+                            <m:sty m:val="p"/>
+                          </m:rPr>
+                          <m:t>+</m:t>
+                        </m:r>
+                        <m:r>
+                          <m:t>1</m:t>
+                        </m:r>
+                      </m:e>
+                    </m:d>
+                    <m:r>
+                      <m:rPr>
+                        <m:sty m:val="p"/>
+                      </m:rPr>
+                      <m:t>=</m:t>
+                    </m:r>
+                    <m:r>
+                      <m:t>75</m:t>
+                    </m:r>
+                    <m:r>
+                      <m:rPr>
+                        <m:sty m:val="p"/>
+                      </m:rPr>
+                      <m:t>%</m:t>
+                    </m:r>
+                  </m:oMath>
+                </a14:m>
+                <a:r>
+                  <a:rPr/>
+                  <a:t> of the variance. Its loading is </a:t>
+                </a:r>
+                <a14:m>
+                  <m:oMath xmlns:m="http://schemas.openxmlformats.org/officeDocument/2006/math">
+                    <m:d>
+                      <m:dPr>
+                        <m:begChr m:val="("/>
+                        <m:sepChr m:val=""/>
+                        <m:endChr m:val=")"/>
+                        <m:grow/>
+                      </m:dPr>
+                      <m:e>
+                        <m:r>
+                          <m:t>1</m:t>
+                        </m:r>
+                        <m:r>
+                          <m:rPr>
+                            <m:sty m:val="p"/>
+                          </m:rPr>
+                          <m:t>,</m:t>
+                        </m:r>
+                        <m:r>
+                          <m:t>1</m:t>
+                        </m:r>
+                      </m:e>
+                    </m:d>
+                  </m:oMath>
+                </a14:m>
+                <a:r>
+                  <a:rPr/>
+                  <a:t>: </a:t>
+                </a:r>
+                <a:r>
+                  <a:rPr b="1"/>
+                  <a:t>the average of the two series</a:t>
+                </a:r>
+                <a:r>
+                  <a:rPr/>
+                  <a:t>. The second is their difference.</a:t>
+                </a:r>
+              </a:p>
+              <a:p>
+                <a:pPr lvl="0" indent="0" marL="0">
+                  <a:buNone/>
+                </a:pPr>
+                <a:r>
+                  <a:rPr/>
+                  <a:t>Thirty seconds of arithmetic, and PCA stops being magic. This is a midterm question.</a:t>
+                </a:r>
+              </a:p>
+            </p:txBody>
+          </p:sp>
+        </mc:Choice>
+      </mc:AlternateContent>
+    </p:spTree>
+  </p:cSld>
+</p:sld>
+</file>
+
+<file path=ppt/slides/slide14.xml><?xml version="1.0" encoding="utf-8"?>
+<p:sld xmlns:a="http://schemas.openxmlformats.org/drawingml/2006/main" xmlns:r="http://schemas.openxmlformats.org/officeDocument/2006/relationships" xmlns:p="http://schemas.openxmlformats.org/presentationml/2006/main">
+  <p:cSld>
+    <p:spTree>
+      <p:nvGrpSpPr>
+        <p:cNvPr id="1" name=""/>
+        <p:cNvGrpSpPr/>
+        <p:nvPr/>
+      </p:nvGrpSpPr>
+      <p:grpSpPr>
+        <a:xfrm>
+          <a:off x="0" y="0"/>
+          <a:ext cx="0" cy="0"/>
+          <a:chOff x="0" y="0"/>
+          <a:chExt cx="0" cy="0"/>
+        </a:xfrm>
+      </p:grpSpPr>
+      <p:sp>
+        <p:nvSpPr>
+          <p:cNvPr id="2" name="Title 1"/>
+          <p:cNvSpPr>
+            <a:spLocks noGrp="1"/>
+          </p:cNvSpPr>
+          <p:nvPr>
+            <p:ph type="title"/>
+          </p:nvPr>
+        </p:nvSpPr>
+        <p:spPr/>
+        <p:txBody>
+          <a:bodyPr/>
+          <a:lstStyle/>
+          <a:p>
+            <a:pPr lvl="0" indent="0" marL="0">
+              <a:buNone/>
+            </a:pPr>
+            <a:r>
+              <a:rPr/>
+              <a:t>What that looks like on real series</a:t>
+            </a:r>
+          </a:p>
+        </p:txBody>
+      </p:sp>
+      <p:pic>
+        <p:nvPicPr>
+          <p:cNvPr descr="slides_files/figure-pptx/cell-3-output-1.png" id="0" name="Picture 1"/>
+          <p:cNvPicPr>
+            <a:picLocks noGrp="1" noChangeAspect="1"/>
+          </p:cNvPicPr>
+          <p:nvPr/>
+        </p:nvPicPr>
+        <p:blipFill>
+          <a:blip r:embed="rId2"/>
+          <a:stretch>
+            <a:fillRect/>
+          </a:stretch>
+        </p:blipFill>
+        <p:spPr bwMode="auto">
+          <a:xfrm>
+            <a:off x="2857500" y="1193800"/>
+            <a:ext cx="3416300" cy="3390900"/>
+          </a:xfrm>
+          <a:prstGeom prst="rect">
+            <a:avLst/>
+          </a:prstGeom>
+          <a:noFill/>
+          <a:ln w="9525">
+            <a:noFill/>
+            <a:headEnd/>
+            <a:tailEnd/>
+          </a:ln>
+        </p:spPr>
+      </p:pic>
+    </p:spTree>
+  </p:cSld>
+</p:sld>
+</file>
+
+<file path=ppt/slides/slide15.xml><?xml version="1.0" encoding="utf-8"?>
+<p:sld xmlns:a="http://schemas.openxmlformats.org/drawingml/2006/main" xmlns:r="http://schemas.openxmlformats.org/officeDocument/2006/relationships" xmlns:p="http://schemas.openxmlformats.org/presentationml/2006/main">
+  <p:cSld>
+    <p:spTree>
+      <p:nvGrpSpPr>
+        <p:cNvPr id="1" name=""/>
+        <p:cNvGrpSpPr/>
+        <p:nvPr/>
+      </p:nvGrpSpPr>
+      <p:grpSpPr>
+        <a:xfrm>
+          <a:off x="0" y="0"/>
+          <a:ext cx="0" cy="0"/>
+          <a:chOff x="0" y="0"/>
+          <a:chExt cx="0" cy="0"/>
+        </a:xfrm>
+      </p:grpSpPr>
+      <p:sp>
+        <p:nvSpPr>
+          <p:cNvPr id="3" name="Content Placeholder 2"/>
+          <p:cNvSpPr>
+            <a:spLocks noGrp="1"/>
+          </p:cNvSpPr>
+          <p:nvPr>
+            <p:ph idx="1"/>
+          </p:nvPr>
+        </p:nvSpPr>
+        <p:spPr/>
+        <p:txBody>
+          <a:bodyPr/>
+          <a:lstStyle/>
+          <a:p>
+            <a:pPr lvl="0" indent="0" marL="0">
+              <a:buNone/>
+            </a:pPr>
+            <a:r>
+              <a:rPr/>
+              <a:t>Thin grey lines are what PC1 throws away. Two series, one thing happening: the </a:t>
+            </a:r>
+            <a:r>
+              <a:rPr i="1"/>
+              <a:t>level</a:t>
+            </a:r>
+            <a:r>
+              <a:rPr/>
+              <a:t> of energy prices in that country-year.</a:t>
+            </a:r>
+          </a:p>
+        </p:txBody>
+      </p:sp>
+    </p:spTree>
+  </p:cSld>
+</p:sld>
+</file>
+
+<file path=ppt/slides/slide16.xml><?xml version="1.0" encoding="utf-8"?>
+<p:sld xmlns:a="http://schemas.openxmlformats.org/drawingml/2006/main" xmlns:r="http://schemas.openxmlformats.org/officeDocument/2006/relationships" xmlns:p="http://schemas.openxmlformats.org/presentationml/2006/main">
+  <p:cSld>
+    <p:spTree>
+      <p:nvGrpSpPr>
+        <p:cNvPr id="1" name=""/>
+        <p:cNvGrpSpPr/>
+        <p:nvPr/>
+      </p:nvGrpSpPr>
+      <p:grpSpPr>
+        <a:xfrm>
+          <a:off x="0" y="0"/>
+          <a:ext cx="0" cy="0"/>
+          <a:chOff x="0" y="0"/>
+          <a:chExt cx="0" cy="0"/>
+        </a:xfrm>
+      </p:grpSpPr>
+      <p:sp>
+        <p:nvSpPr>
+          <p:cNvPr id="2" name="Title 1"/>
+          <p:cNvSpPr>
+            <a:spLocks noGrp="1"/>
+          </p:cNvSpPr>
+          <p:nvPr>
+            <p:ph type="title"/>
+          </p:nvPr>
+        </p:nvSpPr>
+        <p:spPr>
+          <a:xfrm>
+            <a:off x="722313" y="1850000"/>
+            <a:ext cx="7772400" cy="1300000"/>
+          </a:xfrm>
+        </p:spPr>
+        <p:txBody>
+          <a:bodyPr/>
+          <a:lstStyle/>
+          <a:p>
+            <a:pPr lvl="0" indent="0" marL="0">
+              <a:buNone/>
+            </a:pPr>
+            <a:r>
+              <a:rPr/>
+              <a:t>3 · The SVD</a:t>
+            </a:r>
+          </a:p>
+        </p:txBody>
+      </p:sp>
+    </p:spTree>
+  </p:cSld>
+</p:sld>
+</file>
+
+<file path=ppt/slides/slide17.xml><?xml version="1.0" encoding="utf-8"?>
+<p:sld xmlns:a="http://schemas.openxmlformats.org/drawingml/2006/main" xmlns:r="http://schemas.openxmlformats.org/officeDocument/2006/relationships" xmlns:p="http://schemas.openxmlformats.org/presentationml/2006/main">
+  <p:cSld>
+    <p:spTree>
+      <p:nvGrpSpPr>
+        <p:cNvPr id="1" name=""/>
+        <p:cNvGrpSpPr/>
+        <p:nvPr/>
+      </p:nvGrpSpPr>
+      <p:grpSpPr>
+        <a:xfrm>
+          <a:off x="0" y="0"/>
+          <a:ext cx="0" cy="0"/>
+          <a:chOff x="0" y="0"/>
+          <a:chExt cx="0" cy="0"/>
+        </a:xfrm>
+      </p:grpSpPr>
+      <p:sp>
+        <p:nvSpPr>
+          <p:cNvPr id="2" name="Title 1"/>
+          <p:cNvSpPr>
+            <a:spLocks noGrp="1"/>
+          </p:cNvSpPr>
+          <p:nvPr>
+            <p:ph type="title"/>
+          </p:nvPr>
+        </p:nvSpPr>
+        <p:spPr/>
+        <p:txBody>
+          <a:bodyPr/>
+          <a:lstStyle/>
+          <a:p>
+            <a:pPr lvl="0" indent="0" marL="0">
+              <a:buNone/>
+            </a:pPr>
+            <a:r>
+              <a:rPr/>
+              <a:t>What software actually computes</a:t>
+            </a:r>
+          </a:p>
+        </p:txBody>
+      </p:sp>
+      <mc:AlternateContent xmlns:mc="http://schemas.openxmlformats.org/markup-compatibility/2006">
+        <mc:Choice xmlns:a14="http://schemas.microsoft.com/office/drawing/2010/main" Requires="a14">
+          <p:sp>
+            <p:nvSpPr>
+              <p:cNvPr id="3" name="Content Placeholder 2"/>
+              <p:cNvSpPr>
+                <a:spLocks noGrp="1"/>
+              </p:cNvSpPr>
+              <p:nvPr>
+                <p:ph idx="1"/>
+              </p:nvPr>
+            </p:nvSpPr>
+            <p:spPr/>
+            <p:txBody>
+              <a:bodyPr/>
+              <a:lstStyle/>
+              <a:p>
+                <a:pPr lvl="0" indent="0" marL="0">
+                  <a:buNone/>
+                </a:pPr>
+                <a:r>
+                  <a:rPr/>
+                  <a:t>With </a:t>
+                </a:r>
+                <a14:m>
+                  <m:oMath xmlns:m="http://schemas.openxmlformats.org/officeDocument/2006/math">
+                    <m:r>
+                      <m:t>X</m:t>
+                    </m:r>
+                    <m:r>
+                      <m:rPr>
+                        <m:sty m:val="p"/>
+                      </m:rPr>
+                      <m:t>=</m:t>
+                    </m:r>
+                    <m:r>
+                      <m:t>U</m:t>
+                    </m:r>
+                    <m:r>
+                      <m:t>D</m:t>
+                    </m:r>
+                    <m:sSup>
+                      <m:e>
+                        <m:r>
+                          <m:t>V</m:t>
+                        </m:r>
+                      </m:e>
+                      <m:sup>
+                        <m:r>
+                          <m:rPr>
+                            <m:sty m:val="p"/>
+                          </m:rPr>
+                          <m:t>⊤</m:t>
+                        </m:r>
+                      </m:sup>
+                    </m:sSup>
+                  </m:oMath>
+                </a14:m>
+                <a:r>
+                  <a:rPr/>
+                  <a:t>:</a:t>
+                </a:r>
+              </a:p>
+              <a:p>
+                <a:pPr lvl="0" indent="0" marL="0">
+                  <a:buNone/>
+                </a:pPr>
+                <a14:m>
+                  <m:oMathPara xmlns:m="http://schemas.openxmlformats.org/officeDocument/2006/math">
+                    <m:oMathParaPr>
+                      <m:jc m:val="center"/>
+                    </m:oMathParaPr>
+                    <m:oMath>
+                      <m:acc>
+                        <m:accPr>
+                          <m:chr m:val="̂"/>
+                        </m:accPr>
+                        <m:e>
+                          <m:r>
+                            <m:t>Σ</m:t>
+                          </m:r>
+                        </m:e>
+                      </m:acc>
+                      <m:r>
+                        <m:rPr>
+                          <m:sty m:val="p"/>
+                        </m:rPr>
+                        <m:t>=</m:t>
+                      </m:r>
+                      <m:f>
+                        <m:fPr>
+                          <m:type m:val="lin"/>
+                        </m:fPr>
+                        <m:num>
+                          <m:r>
+                            <m:t>1</m:t>
+                          </m:r>
+                        </m:num>
+                        <m:den>
+                          <m:r>
+                            <m:t>n</m:t>
+                          </m:r>
+                        </m:den>
+                      </m:f>
+                      <m:r>
+                        <m:t>V</m:t>
+                      </m:r>
+                      <m:sSup>
+                        <m:e>
+                          <m:r>
+                            <m:t>D</m:t>
+                          </m:r>
+                        </m:e>
+                        <m:sup>
+                          <m:r>
+                            <m:t>2</m:t>
+                          </m:r>
+                        </m:sup>
+                      </m:sSup>
+                      <m:sSup>
+                        <m:e>
+                          <m:r>
+                            <m:t>V</m:t>
+                          </m:r>
+                        </m:e>
+                        <m:sup>
+                          <m:r>
+                            <m:rPr>
+                              <m:sty m:val="p"/>
+                            </m:rPr>
+                            <m:t>⊤</m:t>
+                          </m:r>
+                        </m:sup>
+                      </m:sSup>
+                      <m:r>
+                        <m:rPr>
+                          <m:sty m:val="p"/>
+                        </m:rPr>
+                        <m:t>,</m:t>
+                      </m:r>
+                      <m:r>
+                        <m:t>  </m:t>
+                      </m:r>
+                      <m:limLow>
+                        <m:e>
+                          <m:limLow>
+                            <m:e>
+                              <m:r>
+                                <m:t>V</m:t>
+                              </m:r>
+                            </m:e>
+                            <m:lim>
+                              <m:r>
+                                <m:rPr>
+                                  <m:sty m:val="p"/>
+                                </m:rPr>
+                                <m:t>⏟</m:t>
+                              </m:r>
+                            </m:lim>
+                          </m:limLow>
+                        </m:e>
+                        <m:lim>
+                          <m:r>
+                            <m:rPr>
+                              <m:nor/>
+                              <m:sty m:val="p"/>
+                            </m:rPr>
+                            <m:t>loadings</m:t>
+                          </m:r>
+                        </m:lim>
+                      </m:limLow>
+                      <m:r>
+                        <m:rPr>
+                          <m:sty m:val="p"/>
+                        </m:rPr>
+                        <m:t>,</m:t>
+                      </m:r>
+                      <m:r>
+                        <m:t>  </m:t>
+                      </m:r>
+                      <m:limLow>
+                        <m:e>
+                          <m:limLow>
+                            <m:e>
+                              <m:r>
+                                <m:t>Z</m:t>
+                              </m:r>
+                              <m:r>
+                                <m:rPr>
+                                  <m:sty m:val="p"/>
+                                </m:rPr>
+                                <m:t>=</m:t>
+                              </m:r>
+                              <m:r>
+                                <m:t>X</m:t>
+                              </m:r>
+                              <m:r>
+                                <m:t>V</m:t>
+                              </m:r>
+                              <m:r>
+                                <m:rPr>
+                                  <m:sty m:val="p"/>
+                                </m:rPr>
+                                <m:t>=</m:t>
+                              </m:r>
+                              <m:r>
+                                <m:t>U</m:t>
+                              </m:r>
+                              <m:r>
+                                <m:t>D</m:t>
+                              </m:r>
+                            </m:e>
+                            <m:lim>
+                              <m:r>
+                                <m:rPr>
+                                  <m:sty m:val="p"/>
+                                </m:rPr>
+                                <m:t>⏟</m:t>
+                              </m:r>
+                            </m:lim>
+                          </m:limLow>
+                        </m:e>
+                        <m:lim>
+                          <m:r>
+                            <m:rPr>
+                              <m:nor/>
+                              <m:sty m:val="p"/>
+                            </m:rPr>
+                            <m:t>scores</m:t>
+                          </m:r>
+                        </m:lim>
+                      </m:limLow>
+                      <m:r>
+                        <m:rPr>
+                          <m:sty m:val="p"/>
+                        </m:rPr>
+                        <m:t>,</m:t>
+                      </m:r>
+                      <m:r>
+                        <m:t>  </m:t>
+                      </m:r>
+                      <m:limLow>
+                        <m:e>
+                          <m:limLow>
+                            <m:e>
+                              <m:f>
+                                <m:fPr>
+                                  <m:type m:val="bar"/>
+                                </m:fPr>
+                                <m:num>
+                                  <m:sSubSup>
+                                    <m:e>
+                                      <m:r>
+                                        <m:t>d</m:t>
+                                      </m:r>
+                                    </m:e>
+                                    <m:sub>
+                                      <m:r>
+                                        <m:t>j</m:t>
+                                      </m:r>
+                                    </m:sub>
+                                    <m:sup>
+                                      <m:r>
+                                        <m:t>2</m:t>
+                                      </m:r>
+                                    </m:sup>
+                                  </m:sSubSup>
+                                </m:num>
+                                <m:den>
+                                  <m:nary>
+                                    <m:naryPr>
+                                      <m:chr m:val="∑"/>
+                                      <m:limLoc m:val="undOvr"/>
+                                      <m:subHide m:val="off"/>
+                                      <m:supHide m:val="on"/>
+                                    </m:naryPr>
+                                    <m:sub>
+                                      <m:r>
+                                        <m:t>k</m:t>
+                                      </m:r>
+                                    </m:sub>
+                                    <m:sup>
+                                      <m:r>
+                                        <m:t>​</m:t>
+                                      </m:r>
+                                    </m:sup>
+                                    <m:e>
+                                      <m:sSubSup>
+                                        <m:e>
+                                          <m:r>
+                                            <m:t>d</m:t>
+                                          </m:r>
+                                        </m:e>
+                                        <m:sub>
+                                          <m:r>
+                                            <m:t>k</m:t>
+                                          </m:r>
+                                        </m:sub>
+                                        <m:sup>
+                                          <m:r>
+                                            <m:t>2</m:t>
+                                          </m:r>
+                                        </m:sup>
+                                      </m:sSubSup>
+                                    </m:e>
+                                  </m:nary>
+                                </m:den>
+                              </m:f>
+                            </m:e>
+                            <m:lim>
+                              <m:r>
+                                <m:rPr>
+                                  <m:sty m:val="p"/>
+                                </m:rPr>
+                                <m:t>⏟</m:t>
+                              </m:r>
+                            </m:lim>
+                          </m:limLow>
+                        </m:e>
+                        <m:lim>
+                          <m:r>
+                            <m:rPr>
+                              <m:nor/>
+                              <m:sty m:val="p"/>
+                            </m:rPr>
+                            <m:t>variance share</m:t>
+                          </m:r>
+                        </m:lim>
+                      </m:limLow>
+                    </m:oMath>
+                  </m:oMathPara>
+                </a14:m>
+              </a:p>
+              <a:p>
+                <a:pPr lvl="0" indent="0" marL="0">
+                  <a:buNone/>
+                </a:pPr>
+                <a:r>
+                  <a:rPr/>
+                  <a:t>No covariance matrix is ever formed. Forming </a:t>
+                </a:r>
+                <a14:m>
+                  <m:oMath xmlns:m="http://schemas.openxmlformats.org/officeDocument/2006/math">
+                    <m:sSup>
+                      <m:e>
+                        <m:r>
+                          <m:t>X</m:t>
+                        </m:r>
+                      </m:e>
+                      <m:sup>
+                        <m:r>
+                          <m:rPr>
+                            <m:sty m:val="p"/>
+                          </m:rPr>
+                          <m:t>⊤</m:t>
+                        </m:r>
+                      </m:sup>
+                    </m:sSup>
+                    <m:r>
+                      <m:t>X</m:t>
+                    </m:r>
+                  </m:oMath>
+                </a14:m>
+                <a:r>
+                  <a:rPr/>
+                  <a:t> squares the condition number — Session 02’s warning, and the reason </a:t>
+                </a:r>
+                <a:r>
+                  <a:rPr>
+                    <a:latin typeface="Courier"/>
+                  </a:rPr>
+                  <a:t>numpy.linalg.svd</a:t>
+                </a:r>
+                <a:r>
+                  <a:rPr/>
+                  <a:t> is the right entry point.</a:t>
+                </a:r>
+              </a:p>
+            </p:txBody>
+          </p:sp>
+        </mc:Choice>
+      </mc:AlternateContent>
+    </p:spTree>
+  </p:cSld>
+</p:sld>
+</file>
+
+<file path=ppt/slides/slide18.xml><?xml version="1.0" encoding="utf-8"?>
+<p:sld xmlns:a="http://schemas.openxmlformats.org/drawingml/2006/main" xmlns:r="http://schemas.openxmlformats.org/officeDocument/2006/relationships" xmlns:p="http://schemas.openxmlformats.org/presentationml/2006/main">
+  <p:cSld>
+    <p:spTree>
+      <p:nvGrpSpPr>
+        <p:cNvPr id="1" name=""/>
+        <p:cNvGrpSpPr/>
+        <p:nvPr/>
+      </p:nvGrpSpPr>
+      <p:grpSpPr>
+        <a:xfrm>
+          <a:off x="0" y="0"/>
+          <a:ext cx="0" cy="0"/>
+          <a:chOff x="0" y="0"/>
+          <a:chExt cx="0" cy="0"/>
+        </a:xfrm>
+      </p:grpSpPr>
+      <p:sp>
+        <p:nvSpPr>
+          <p:cNvPr id="2" name="Title 1"/>
+          <p:cNvSpPr>
+            <a:spLocks noGrp="1"/>
+          </p:cNvSpPr>
+          <p:nvPr>
+            <p:ph type="title"/>
+          </p:nvPr>
+        </p:nvSpPr>
+        <p:spPr/>
+        <p:txBody>
+          <a:bodyPr/>
+          <a:lstStyle/>
+          <a:p>
+            <a:pPr lvl="0" indent="0" marL="0">
+              <a:buNone/>
+            </a:pPr>
+            <a:r>
+              <a:rPr/>
+              <a:t>Eckart–Young</a:t>
+            </a:r>
+          </a:p>
+        </p:txBody>
+      </p:sp>
+      <mc:AlternateContent xmlns:mc="http://schemas.openxmlformats.org/markup-compatibility/2006">
+        <mc:Choice xmlns:a14="http://schemas.microsoft.com/office/drawing/2010/main" Requires="a14">
+          <p:sp>
+            <p:nvSpPr>
+              <p:cNvPr id="3" name="Content Placeholder 2"/>
+              <p:cNvSpPr>
+                <a:spLocks noGrp="1"/>
+              </p:cNvSpPr>
+              <p:nvPr>
+                <p:ph idx="1"/>
+              </p:nvPr>
+            </p:nvSpPr>
+            <p:spPr/>
+            <p:txBody>
+              <a:bodyPr/>
+              <a:lstStyle/>
+              <a:p>
+                <a:pPr lvl="0" indent="0" marL="0">
+                  <a:buNone/>
+                </a:pPr>
+                <a:r>
+                  <a:rPr b="1"/>
+                  <a:t>Theorem.</a:t>
+                </a:r>
+                <a:r>
+                  <a:rPr/>
+                  <a:t> Among all matrices of rank </a:t>
                 </a:r>
                 <a14:m>
                   <m:oMath xmlns:m="http://schemas.openxmlformats.org/officeDocument/2006/math">
@@ -3459,7 +5154,84 @@
                 </a14:m>
                 <a:r>
                   <a:rPr/>
-                  <a:t> is</a:t>
+                  <a:t> is the truncated SVD </a:t>
+                </a:r>
+                <a14:m>
+                  <m:oMath xmlns:m="http://schemas.openxmlformats.org/officeDocument/2006/math">
+                    <m:sSub>
+                      <m:e>
+                        <m:acc>
+                          <m:accPr>
+                            <m:chr m:val="̃"/>
+                          </m:accPr>
+                          <m:e>
+                            <m:r>
+                              <m:t>X</m:t>
+                            </m:r>
+                          </m:e>
+                        </m:acc>
+                      </m:e>
+                      <m:sub>
+                        <m:r>
+                          <m:t>k</m:t>
+                        </m:r>
+                      </m:sub>
+                    </m:sSub>
+                    <m:r>
+                      <m:rPr>
+                        <m:sty m:val="p"/>
+                      </m:rPr>
+                      <m:t>=</m:t>
+                    </m:r>
+                    <m:sSub>
+                      <m:e>
+                        <m:r>
+                          <m:t>U</m:t>
+                        </m:r>
+                      </m:e>
+                      <m:sub>
+                        <m:r>
+                          <m:t>k</m:t>
+                        </m:r>
+                      </m:sub>
+                    </m:sSub>
+                    <m:sSub>
+                      <m:e>
+                        <m:r>
+                          <m:t>D</m:t>
+                        </m:r>
+                      </m:e>
+                      <m:sub>
+                        <m:r>
+                          <m:t>k</m:t>
+                        </m:r>
+                      </m:sub>
+                    </m:sSub>
+                    <m:sSubSup>
+                      <m:e>
+                        <m:r>
+                          <m:t>V</m:t>
+                        </m:r>
+                      </m:e>
+                      <m:sub>
+                        <m:r>
+                          <m:t>k</m:t>
+                        </m:r>
+                      </m:sub>
+                      <m:sup>
+                        <m:r>
+                          <m:rPr>
+                            <m:sty m:val="p"/>
+                          </m:rPr>
+                          <m:t>⊤</m:t>
+                        </m:r>
+                      </m:sup>
+                    </m:sSubSup>
+                  </m:oMath>
+                </a14:m>
+                <a:r>
+                  <a:rPr/>
+                  <a:t>, and</a:t>
                 </a:r>
               </a:p>
               <a:p>
@@ -3472,22 +5244,108 @@
                       <m:jc m:val="center"/>
                     </m:oMathParaPr>
                     <m:oMath>
+                      <m:limLow>
+                        <m:e>
+                          <m:r>
+                            <m:rPr>
+                              <m:sty m:val="p"/>
+                            </m:rPr>
+                            <m:t>min</m:t>
+                          </m:r>
+                        </m:e>
+                        <m:lim>
+                          <m:r>
+                            <m:rPr>
+                              <m:sty m:val="p"/>
+                            </m:rPr>
+                            <m:t>r</m:t>
+                          </m:r>
+                          <m:r>
+                            <m:rPr>
+                              <m:sty m:val="p"/>
+                            </m:rPr>
+                            <m:t>a</m:t>
+                          </m:r>
+                          <m:r>
+                            <m:rPr>
+                              <m:sty m:val="p"/>
+                            </m:rPr>
+                            <m:t>n</m:t>
+                          </m:r>
+                          <m:r>
+                            <m:rPr>
+                              <m:sty m:val="p"/>
+                            </m:rPr>
+                            <m:t>k</m:t>
+                          </m:r>
+                          <m:d>
+                            <m:dPr>
+                              <m:begChr m:val="("/>
+                              <m:sepChr m:val=""/>
+                              <m:endChr m:val=")"/>
+                              <m:grow/>
+                            </m:dPr>
+                            <m:e>
+                              <m:acc>
+                                <m:accPr>
+                                  <m:chr m:val="̃"/>
+                                </m:accPr>
+                                <m:e>
+                                  <m:r>
+                                    <m:t>X</m:t>
+                                  </m:r>
+                                </m:e>
+                              </m:acc>
+                            </m:e>
+                          </m:d>
+                          <m:r>
+                            <m:rPr>
+                              <m:sty m:val="p"/>
+                            </m:rPr>
+                            <m:t>≤</m:t>
+                          </m:r>
+                          <m:r>
+                            <m:t>k</m:t>
+                          </m:r>
+                        </m:lim>
+                      </m:limLow>
+                      <m:r>
+                        <m:rPr>
+                          <m:sty m:val="p"/>
+                        </m:rPr>
+                        <m:t>∥</m:t>
+                      </m:r>
+                      <m:r>
+                        <m:t>X</m:t>
+                      </m:r>
+                      <m:r>
+                        <m:rPr>
+                          <m:sty m:val="p"/>
+                        </m:rPr>
+                        <m:t>−</m:t>
+                      </m:r>
+                      <m:acc>
+                        <m:accPr>
+                          <m:chr m:val="̃"/>
+                        </m:accPr>
+                        <m:e>
+                          <m:r>
+                            <m:t>X</m:t>
+                          </m:r>
+                        </m:e>
+                      </m:acc>
                       <m:sSub>
                         <m:e>
-                          <m:acc>
-                            <m:accPr>
-                              <m:chr m:val="̃"/>
-                            </m:accPr>
-                            <m:e>
-                              <m:r>
-                                <m:t>X</m:t>
-                              </m:r>
-                            </m:e>
-                          </m:acc>
+                          <m:r>
+                            <m:rPr>
+                              <m:sty m:val="p"/>
+                            </m:rPr>
+                            <m:t>∥</m:t>
+                          </m:r>
                         </m:e>
                         <m:sub>
                           <m:r>
-                            <m:t>k</m:t>
+                            <m:t>F</m:t>
                           </m:r>
                         </m:sub>
                       </m:sSub>
@@ -3497,50 +5355,82 @@
                         </m:rPr>
                         <m:t>=</m:t>
                       </m:r>
-                      <m:sSub>
-                        <m:e>
-                          <m:r>
-                            <m:t>U</m:t>
-                          </m:r>
-                        </m:e>
+                      <m:r>
+                        <m:rPr>
+                          <m:sty m:val="p"/>
+                        </m:rPr>
+                        <m:t>(</m:t>
+                      </m:r>
+                      <m:nary>
+                        <m:naryPr>
+                          <m:chr m:val="∑"/>
+                          <m:limLoc m:val="undOvr"/>
+                          <m:subHide m:val="off"/>
+                          <m:supHide m:val="on"/>
+                        </m:naryPr>
                         <m:sub>
                           <m:r>
-                            <m:t>k</m:t>
+                            <m:t>j</m:t>
                           </m:r>
-                        </m:sub>
-                      </m:sSub>
-                      <m:sSub>
-                        <m:e>
                           <m:r>
-                            <m:t>D</m:t>
+                            <m:rPr>
+                              <m:sty m:val="p"/>
+                            </m:rPr>
+                            <m:t>&gt;</m:t>
                           </m:r>
-                        </m:e>
-                        <m:sub>
-                          <m:r>
-                            <m:t>k</m:t>
-                          </m:r>
-                        </m:sub>
-                      </m:sSub>
-                      <m:sSubSup>
-                        <m:e>
-                          <m:r>
-                            <m:t>V</m:t>
-                          </m:r>
-                        </m:e>
-                        <m:sub>
                           <m:r>
                             <m:t>k</m:t>
                           </m:r>
                         </m:sub>
                         <m:sup>
                           <m:r>
+                            <m:t>​</m:t>
+                          </m:r>
+                        </m:sup>
+                        <m:e>
+                          <m:sSubSup>
+                            <m:e>
+                              <m:r>
+                                <m:t>d</m:t>
+                              </m:r>
+                            </m:e>
+                            <m:sub>
+                              <m:r>
+                                <m:t>j</m:t>
+                              </m:r>
+                            </m:sub>
+                            <m:sup>
+                              <m:r>
+                                <m:t>2</m:t>
+                              </m:r>
+                            </m:sup>
+                          </m:sSubSup>
+                        </m:e>
+                      </m:nary>
+                      <m:sSup>
+                        <m:e>
+                          <m:r>
                             <m:rPr>
                               <m:sty m:val="p"/>
                             </m:rPr>
-                            <m:t>⊤</m:t>
+                            <m:t>)</m:t>
+                          </m:r>
+                        </m:e>
+                        <m:sup>
+                          <m:r>
+                            <m:t>1</m:t>
+                          </m:r>
+                          <m:r>
+                            <m:rPr>
+                              <m:sty m:val="p"/>
+                            </m:rPr>
+                            <m:t>/</m:t>
+                          </m:r>
+                          <m:r>
+                            <m:t>2</m:t>
                           </m:r>
                         </m:sup>
-                      </m:sSubSup>
+                      </m:sSup>
                     </m:oMath>
                   </m:oMathPara>
                 </a14:m>
@@ -3551,91 +5441,26 @@
                 </a:pPr>
                 <a:r>
                   <a:rPr/>
-                  <a:t>the truncated SVD, and the minimum equals </a:t>
+                  <a:t>This is the </a:t>
+                </a:r>
+                <a:r>
+                  <a:rPr b="1"/>
+                  <a:t>precise</a:t>
+                </a:r>
+                <a:r>
+                  <a:rPr/>
+                  <a:t> sense in which “the first </a:t>
                 </a:r>
                 <a14:m>
                   <m:oMath xmlns:m="http://schemas.openxmlformats.org/officeDocument/2006/math">
                     <m:r>
-                      <m:rPr>
-                        <m:sty m:val="p"/>
-                      </m:rPr>
-                      <m:t>(</m:t>
+                      <m:t>k</m:t>
                     </m:r>
-                    <m:nary>
-                      <m:naryPr>
-                        <m:chr m:val="∑"/>
-                        <m:limLoc m:val="undOvr"/>
-                        <m:subHide m:val="off"/>
-                        <m:supHide m:val="on"/>
-                      </m:naryPr>
-                      <m:sub>
-                        <m:r>
-                          <m:t>j</m:t>
-                        </m:r>
-                        <m:r>
-                          <m:rPr>
-                            <m:sty m:val="p"/>
-                          </m:rPr>
-                          <m:t>&gt;</m:t>
-                        </m:r>
-                        <m:r>
-                          <m:t>k</m:t>
-                        </m:r>
-                      </m:sub>
-                      <m:sup>
-                        <m:r>
-                          <m:t>​</m:t>
-                        </m:r>
-                      </m:sup>
-                      <m:e>
-                        <m:sSubSup>
-                          <m:e>
-                            <m:r>
-                              <m:t>d</m:t>
-                            </m:r>
-                          </m:e>
-                          <m:sub>
-                            <m:r>
-                              <m:t>j</m:t>
-                            </m:r>
-                          </m:sub>
-                          <m:sup>
-                            <m:r>
-                              <m:t>2</m:t>
-                            </m:r>
-                          </m:sup>
-                        </m:sSubSup>
-                      </m:e>
-                    </m:nary>
-                    <m:sSup>
-                      <m:e>
-                        <m:r>
-                          <m:rPr>
-                            <m:sty m:val="p"/>
-                          </m:rPr>
-                          <m:t>)</m:t>
-                        </m:r>
-                      </m:e>
-                      <m:sup>
-                        <m:r>
-                          <m:t>1</m:t>
-                        </m:r>
-                        <m:r>
-                          <m:rPr>
-                            <m:sty m:val="p"/>
-                          </m:rPr>
-                          <m:t>/</m:t>
-                        </m:r>
-                        <m:r>
-                          <m:t>2</m:t>
-                        </m:r>
-                      </m:sup>
-                    </m:sSup>
                   </m:oMath>
                 </a14:m>
                 <a:r>
                   <a:rPr/>
-                  <a:t>.</a:t>
+                  <a:t> components capture the most information”. And it tells you exactly what you lost: the discarded singular values.</a:t>
                 </a:r>
               </a:p>
             </p:txBody>
@@ -3647,7 +5472,7 @@
 </p:sld>
 </file>
 
-<file path=ppt/slides/slide12.xml><?xml version="1.0" encoding="utf-8"?>
+<file path=ppt/slides/slide19.xml><?xml version="1.0" encoding="utf-8"?>
 <p:sld xmlns:a="http://schemas.openxmlformats.org/drawingml/2006/main" xmlns:r="http://schemas.openxmlformats.org/officeDocument/2006/relationships" xmlns:p="http://schemas.openxmlformats.org/presentationml/2006/main">
   <p:cSld>
     <p:spTree>
@@ -3684,85 +5509,908 @@
             </a:pPr>
             <a:r>
               <a:rPr/>
-              <a:t>What it licenses you to say</a:t>
+              <a:t>Check it on our panel</a:t>
             </a:r>
           </a:p>
         </p:txBody>
       </p:sp>
-      <mc:AlternateContent xmlns:mc="http://schemas.openxmlformats.org/markup-compatibility/2006">
-        <mc:Choice xmlns:a14="http://schemas.microsoft.com/office/drawing/2010/main" Requires="a14">
-          <p:sp>
-            <p:nvSpPr>
-              <p:cNvPr id="3" name="Content Placeholder 2"/>
-              <p:cNvSpPr>
-                <a:spLocks noGrp="1"/>
-              </p:cNvSpPr>
-              <p:nvPr>
-                <p:ph idx="1"/>
-              </p:nvPr>
-            </p:nvSpPr>
-            <p:spPr/>
-            <p:txBody>
-              <a:bodyPr/>
-              <a:lstStyle/>
-              <a:p>
-                <a:pPr lvl="0" indent="0" marL="0">
-                  <a:buNone/>
-                </a:pPr>
-                <a:r>
-                  <a:rPr/>
-                  <a:t>This is the </a:t>
-                </a:r>
-                <a:r>
-                  <a:rPr b="1"/>
-                  <a:t>formal</a:t>
-                </a:r>
-                <a:r>
-                  <a:rPr/>
-                  <a:t> sense in which “the first </a:t>
-                </a:r>
-                <a14:m>
-                  <m:oMath xmlns:m="http://schemas.openxmlformats.org/officeDocument/2006/math">
-                    <m:r>
-                      <m:t>k</m:t>
-                    </m:r>
-                  </m:oMath>
-                </a14:m>
-                <a:r>
-                  <a:rPr/>
-                  <a:t> components capture the most information”: they give the best rank-</a:t>
-                </a:r>
-                <a14:m>
-                  <m:oMath xmlns:m="http://schemas.openxmlformats.org/officeDocument/2006/math">
-                    <m:r>
-                      <m:t>k</m:t>
-                    </m:r>
-                  </m:oMath>
-                </a14:m>
-                <a:r>
-                  <a:rPr/>
-                  <a:t> reconstruction in Frobenius norm.</a:t>
-                </a:r>
-              </a:p>
-              <a:p>
-                <a:pPr lvl="0" indent="0" marL="0">
-                  <a:buNone/>
-                </a:pPr>
-                <a:r>
-                  <a:rPr/>
-                  <a:t>It also tells you exactly what you lose — the discarded singular values. Not a heuristic; a theorem.</a:t>
-                </a:r>
-              </a:p>
-            </p:txBody>
-          </p:sp>
-        </mc:Choice>
-      </mc:AlternateContent>
+      <p:sp>
+        <p:nvSpPr>
+          <p:cNvPr id="3" name="Content Placeholder 2"/>
+          <p:cNvSpPr>
+            <a:spLocks noGrp="1"/>
+          </p:cNvSpPr>
+          <p:nvPr>
+            <p:ph idx="1"/>
+          </p:nvPr>
+        </p:nvSpPr>
+        <p:spPr/>
+        <p:txBody>
+          <a:bodyPr/>
+          <a:lstStyle/>
+          <a:p>
+            <a:pPr lvl="0" indent="0">
+              <a:buNone/>
+            </a:pPr>
+            <a:r>
+              <a:rPr b="1">
+                <a:solidFill>
+                  <a:srgbClr val="007020"/>
+                </a:solidFill>
+                <a:latin typeface="Courier"/>
+              </a:rPr>
+              <a:t>def</a:t>
+            </a:r>
+            <a:r>
+              <a:rPr>
+                <a:latin typeface="Courier"/>
+              </a:rPr>
+              <a:t> reconstruct(k):</a:t>
+            </a:r>
+            <a:br/>
+            <a:r>
+              <a:rPr>
+                <a:latin typeface="Courier"/>
+              </a:rPr>
+              <a:t>    </a:t>
+            </a:r>
+            <a:r>
+              <a:rPr i="1">
+                <a:solidFill>
+                  <a:srgbClr val="60A0B0"/>
+                </a:solidFill>
+                <a:latin typeface="Courier"/>
+              </a:rPr>
+              <a:t>"""The rank-k truncated SVD of the standardised panel."""</a:t>
+            </a:r>
+            <a:br/>
+            <a:r>
+              <a:rPr>
+                <a:latin typeface="Courier"/>
+              </a:rPr>
+              <a:t>    </a:t>
+            </a:r>
+            <a:r>
+              <a:rPr b="1">
+                <a:solidFill>
+                  <a:srgbClr val="007020"/>
+                </a:solidFill>
+                <a:latin typeface="Courier"/>
+              </a:rPr>
+              <a:t>return</a:t>
+            </a:r>
+            <a:r>
+              <a:rPr>
+                <a:latin typeface="Courier"/>
+              </a:rPr>
+              <a:t> (U[:, :k] </a:t>
+            </a:r>
+            <a:r>
+              <a:rPr>
+                <a:solidFill>
+                  <a:srgbClr val="666666"/>
+                </a:solidFill>
+                <a:latin typeface="Courier"/>
+              </a:rPr>
+              <a:t>*</a:t>
+            </a:r>
+            <a:r>
+              <a:rPr>
+                <a:latin typeface="Courier"/>
+              </a:rPr>
+              <a:t> D[:k]) </a:t>
+            </a:r>
+            <a:r>
+              <a:rPr>
+                <a:solidFill>
+                  <a:srgbClr val="666666"/>
+                </a:solidFill>
+                <a:latin typeface="Courier"/>
+              </a:rPr>
+              <a:t>@</a:t>
+            </a:r>
+            <a:r>
+              <a:rPr>
+                <a:latin typeface="Courier"/>
+              </a:rPr>
+              <a:t> Vt[:k]</a:t>
+            </a:r>
+            <a:br/>
+            <a:br/>
+            <a:r>
+              <a:rPr b="1">
+                <a:solidFill>
+                  <a:srgbClr val="007020"/>
+                </a:solidFill>
+                <a:latin typeface="Courier"/>
+              </a:rPr>
+              <a:t>for</a:t>
+            </a:r>
+            <a:r>
+              <a:rPr>
+                <a:latin typeface="Courier"/>
+              </a:rPr>
+              <a:t> k </a:t>
+            </a:r>
+            <a:r>
+              <a:rPr b="1">
+                <a:solidFill>
+                  <a:srgbClr val="007020"/>
+                </a:solidFill>
+                <a:latin typeface="Courier"/>
+              </a:rPr>
+              <a:t>in</a:t>
+            </a:r>
+            <a:r>
+              <a:rPr>
+                <a:latin typeface="Courier"/>
+              </a:rPr>
+              <a:t> (</a:t>
+            </a:r>
+            <a:r>
+              <a:rPr>
+                <a:solidFill>
+                  <a:srgbClr val="40A070"/>
+                </a:solidFill>
+                <a:latin typeface="Courier"/>
+              </a:rPr>
+              <a:t>1</a:t>
+            </a:r>
+            <a:r>
+              <a:rPr>
+                <a:latin typeface="Courier"/>
+              </a:rPr>
+              <a:t>, </a:t>
+            </a:r>
+            <a:r>
+              <a:rPr>
+                <a:solidFill>
+                  <a:srgbClr val="40A070"/>
+                </a:solidFill>
+                <a:latin typeface="Courier"/>
+              </a:rPr>
+              <a:t>2</a:t>
+            </a:r>
+            <a:r>
+              <a:rPr>
+                <a:latin typeface="Courier"/>
+              </a:rPr>
+              <a:t>, </a:t>
+            </a:r>
+            <a:r>
+              <a:rPr>
+                <a:solidFill>
+                  <a:srgbClr val="40A070"/>
+                </a:solidFill>
+                <a:latin typeface="Courier"/>
+              </a:rPr>
+              <a:t>3</a:t>
+            </a:r>
+            <a:r>
+              <a:rPr>
+                <a:latin typeface="Courier"/>
+              </a:rPr>
+              <a:t>, </a:t>
+            </a:r>
+            <a:r>
+              <a:rPr>
+                <a:solidFill>
+                  <a:srgbClr val="40A070"/>
+                </a:solidFill>
+                <a:latin typeface="Courier"/>
+              </a:rPr>
+              <a:t>5</a:t>
+            </a:r>
+            <a:r>
+              <a:rPr>
+                <a:latin typeface="Courier"/>
+              </a:rPr>
+              <a:t>):</a:t>
+            </a:r>
+            <a:br/>
+            <a:r>
+              <a:rPr>
+                <a:latin typeface="Courier"/>
+              </a:rPr>
+              <a:t>    actual </a:t>
+            </a:r>
+            <a:r>
+              <a:rPr>
+                <a:solidFill>
+                  <a:srgbClr val="666666"/>
+                </a:solidFill>
+                <a:latin typeface="Courier"/>
+              </a:rPr>
+              <a:t>=</a:t>
+            </a:r>
+            <a:r>
+              <a:rPr>
+                <a:latin typeface="Courier"/>
+              </a:rPr>
+              <a:t> np.linalg.norm(Z </a:t>
+            </a:r>
+            <a:r>
+              <a:rPr>
+                <a:solidFill>
+                  <a:srgbClr val="666666"/>
+                </a:solidFill>
+                <a:latin typeface="Courier"/>
+              </a:rPr>
+              <a:t>-</a:t>
+            </a:r>
+            <a:r>
+              <a:rPr>
+                <a:latin typeface="Courier"/>
+              </a:rPr>
+              <a:t> reconstruct(k))</a:t>
+            </a:r>
+            <a:br/>
+            <a:r>
+              <a:rPr>
+                <a:latin typeface="Courier"/>
+              </a:rPr>
+              <a:t>    theory </a:t>
+            </a:r>
+            <a:r>
+              <a:rPr>
+                <a:solidFill>
+                  <a:srgbClr val="666666"/>
+                </a:solidFill>
+                <a:latin typeface="Courier"/>
+              </a:rPr>
+              <a:t>=</a:t>
+            </a:r>
+            <a:r>
+              <a:rPr>
+                <a:latin typeface="Courier"/>
+              </a:rPr>
+              <a:t> np.sqrt((D[k:]</a:t>
+            </a:r>
+            <a:r>
+              <a:rPr>
+                <a:solidFill>
+                  <a:srgbClr val="666666"/>
+                </a:solidFill>
+                <a:latin typeface="Courier"/>
+              </a:rPr>
+              <a:t>**</a:t>
+            </a:r>
+            <a:r>
+              <a:rPr>
+                <a:solidFill>
+                  <a:srgbClr val="40A070"/>
+                </a:solidFill>
+                <a:latin typeface="Courier"/>
+              </a:rPr>
+              <a:t>2</a:t>
+            </a:r>
+            <a:r>
+              <a:rPr>
+                <a:latin typeface="Courier"/>
+              </a:rPr>
+              <a:t>).</a:t>
+            </a:r>
+            <a:r>
+              <a:rPr>
+                <a:solidFill>
+                  <a:srgbClr val="008000"/>
+                </a:solidFill>
+                <a:latin typeface="Courier"/>
+              </a:rPr>
+              <a:t>sum</a:t>
+            </a:r>
+            <a:r>
+              <a:rPr>
+                <a:latin typeface="Courier"/>
+              </a:rPr>
+              <a:t>())</a:t>
+            </a:r>
+            <a:br/>
+            <a:r>
+              <a:rPr>
+                <a:latin typeface="Courier"/>
+              </a:rPr>
+              <a:t>    </a:t>
+            </a:r>
+            <a:r>
+              <a:rPr>
+                <a:solidFill>
+                  <a:srgbClr val="008000"/>
+                </a:solidFill>
+                <a:latin typeface="Courier"/>
+              </a:rPr>
+              <a:t>print</a:t>
+            </a:r>
+            <a:r>
+              <a:rPr>
+                <a:latin typeface="Courier"/>
+              </a:rPr>
+              <a:t>(</a:t>
+            </a:r>
+            <a:r>
+              <a:rPr>
+                <a:solidFill>
+                  <a:srgbClr val="BB6688"/>
+                </a:solidFill>
+                <a:latin typeface="Courier"/>
+              </a:rPr>
+              <a:t>f"k=</a:t>
+            </a:r>
+            <a:r>
+              <a:rPr>
+                <a:solidFill>
+                  <a:srgbClr val="4070A0"/>
+                </a:solidFill>
+                <a:latin typeface="Courier"/>
+              </a:rPr>
+              <a:t>{</a:t>
+            </a:r>
+            <a:r>
+              <a:rPr>
+                <a:latin typeface="Courier"/>
+              </a:rPr>
+              <a:t>k</a:t>
+            </a:r>
+            <a:r>
+              <a:rPr>
+                <a:solidFill>
+                  <a:srgbClr val="4070A0"/>
+                </a:solidFill>
+                <a:latin typeface="Courier"/>
+              </a:rPr>
+              <a:t>}</a:t>
+            </a:r>
+            <a:r>
+              <a:rPr>
+                <a:solidFill>
+                  <a:srgbClr val="BB6688"/>
+                </a:solidFill>
+                <a:latin typeface="Courier"/>
+              </a:rPr>
+              <a:t>:  ||X - Xk||_F = </a:t>
+            </a:r>
+            <a:r>
+              <a:rPr>
+                <a:solidFill>
+                  <a:srgbClr val="4070A0"/>
+                </a:solidFill>
+                <a:latin typeface="Courier"/>
+              </a:rPr>
+              <a:t>{</a:t>
+            </a:r>
+            <a:r>
+              <a:rPr>
+                <a:latin typeface="Courier"/>
+              </a:rPr>
+              <a:t>actual</a:t>
+            </a:r>
+            <a:r>
+              <a:rPr>
+                <a:solidFill>
+                  <a:srgbClr val="4070A0"/>
+                </a:solidFill>
+                <a:latin typeface="Courier"/>
+              </a:rPr>
+              <a:t>:7.3f}</a:t>
+            </a:r>
+            <a:r>
+              <a:rPr>
+                <a:solidFill>
+                  <a:srgbClr val="BB6688"/>
+                </a:solidFill>
+                <a:latin typeface="Courier"/>
+              </a:rPr>
+              <a:t>   sqrt(sum d_j^2, j&gt;k) = </a:t>
+            </a:r>
+            <a:r>
+              <a:rPr>
+                <a:solidFill>
+                  <a:srgbClr val="4070A0"/>
+                </a:solidFill>
+                <a:latin typeface="Courier"/>
+              </a:rPr>
+              <a:t>{</a:t>
+            </a:r>
+            <a:r>
+              <a:rPr>
+                <a:latin typeface="Courier"/>
+              </a:rPr>
+              <a:t>theory</a:t>
+            </a:r>
+            <a:r>
+              <a:rPr>
+                <a:solidFill>
+                  <a:srgbClr val="4070A0"/>
+                </a:solidFill>
+                <a:latin typeface="Courier"/>
+              </a:rPr>
+              <a:t>:7.3f}</a:t>
+            </a:r>
+            <a:r>
+              <a:rPr>
+                <a:solidFill>
+                  <a:srgbClr val="BB6688"/>
+                </a:solidFill>
+                <a:latin typeface="Courier"/>
+              </a:rPr>
+              <a:t>"</a:t>
+            </a:r>
+            <a:r>
+              <a:rPr>
+                <a:latin typeface="Courier"/>
+              </a:rPr>
+              <a:t>)</a:t>
+            </a:r>
+          </a:p>
+          <a:p>
+            <a:pPr lvl="0" indent="0">
+              <a:buNone/>
+            </a:pPr>
+            <a:r>
+              <a:rPr>
+                <a:latin typeface="Courier"/>
+              </a:rPr>
+              <a:t>k=1:  ||X - Xk||_F =  40.246   sqrt(sum d_j^2, j&gt;k) =  40.246
+k=2:  ||X - Xk||_F =  28.492   sqrt(sum d_j^2, j&gt;k) =  28.492
+k=3:  ||X - Xk||_F =  22.630   sqrt(sum d_j^2, j&gt;k) =  22.630
+k=5:  ||X - Xk||_F =  10.588   sqrt(sum d_j^2, j&gt;k) =  10.588</a:t>
+            </a:r>
+          </a:p>
+          <a:p>
+            <a:pPr lvl="0" indent="0" marL="0">
+              <a:buNone/>
+            </a:pPr>
+            <a:r>
+              <a:rPr/>
+              <a:t>Identical to three decimals, as the theorem requires. When a formula and a computation agree to machine precision, you have understood both.</a:t>
+            </a:r>
+          </a:p>
+        </p:txBody>
+      </p:sp>
     </p:spTree>
   </p:cSld>
 </p:sld>
 </file>
 
-<file path=ppt/slides/slide13.xml><?xml version="1.0" encoding="utf-8"?>
+<file path=ppt/slides/slide2.xml><?xml version="1.0" encoding="utf-8"?>
+<p:sld xmlns:a="http://schemas.openxmlformats.org/drawingml/2006/main" xmlns:r="http://schemas.openxmlformats.org/officeDocument/2006/relationships" xmlns:p="http://schemas.openxmlformats.org/presentationml/2006/main">
+  <p:cSld>
+    <p:spTree>
+      <p:nvGrpSpPr>
+        <p:cNvPr id="1" name=""/>
+        <p:cNvGrpSpPr/>
+        <p:nvPr/>
+      </p:nvGrpSpPr>
+      <p:grpSpPr>
+        <a:xfrm>
+          <a:off x="0" y="0"/>
+          <a:ext cx="0" cy="0"/>
+          <a:chOff x="0" y="0"/>
+          <a:chExt cx="0" cy="0"/>
+        </a:xfrm>
+      </p:grpSpPr>
+      <p:sp>
+        <p:nvSpPr>
+          <p:cNvPr id="3" name="Content Placeholder 2"/>
+          <p:cNvSpPr>
+            <a:spLocks noGrp="1"/>
+          </p:cNvSpPr>
+          <p:nvPr>
+            <p:ph idx="1"/>
+          </p:nvPr>
+        </p:nvSpPr>
+        <p:spPr/>
+        <p:txBody>
+          <a:bodyPr/>
+          <a:lstStyle/>
+          <a:p>
+            <a:pPr lvl="0" indent="0" marL="0">
+              <a:spcBef>
+                <a:spcPts val="3000"/>
+              </a:spcBef>
+              <a:buNone/>
+            </a:pPr>
+            <a:r>
+              <a:rPr b="1"/>
+              <a:t>Two hundred macro series move together. How many things are actually happening?</a:t>
+            </a:r>
+          </a:p>
+        </p:txBody>
+      </p:sp>
+    </p:spTree>
+  </p:cSld>
+</p:sld>
+</file>
+
+<file path=ppt/slides/slide20.xml><?xml version="1.0" encoding="utf-8"?>
+<p:sld xmlns:a="http://schemas.openxmlformats.org/drawingml/2006/main" xmlns:r="http://schemas.openxmlformats.org/officeDocument/2006/relationships" xmlns:p="http://schemas.openxmlformats.org/presentationml/2006/main">
+  <p:cSld>
+    <p:spTree>
+      <p:nvGrpSpPr>
+        <p:cNvPr id="1" name=""/>
+        <p:cNvGrpSpPr/>
+        <p:nvPr/>
+      </p:nvGrpSpPr>
+      <p:grpSpPr>
+        <a:xfrm>
+          <a:off x="0" y="0"/>
+          <a:ext cx="0" cy="0"/>
+          <a:chOff x="0" y="0"/>
+          <a:chExt cx="0" cy="0"/>
+        </a:xfrm>
+      </p:grpSpPr>
+      <p:sp>
+        <p:nvSpPr>
+          <p:cNvPr id="2" name="Title 1"/>
+          <p:cNvSpPr>
+            <a:spLocks noGrp="1"/>
+          </p:cNvSpPr>
+          <p:nvPr>
+            <p:ph type="title"/>
+          </p:nvPr>
+        </p:nvSpPr>
+        <p:spPr/>
+        <p:txBody>
+          <a:bodyPr/>
+          <a:lstStyle/>
+          <a:p>
+            <a:pPr lvl="0" indent="0" marL="0">
+              <a:buNone/>
+            </a:pPr>
+            <a:r>
+              <a:rPr/>
+              <a:t>The scree plot, and its elbow</a:t>
+            </a:r>
+          </a:p>
+        </p:txBody>
+      </p:sp>
+      <p:pic>
+        <p:nvPicPr>
+          <p:cNvPr descr="slides_files/figure-pptx/cell-5-output-1.png" id="0" name="Picture 1"/>
+          <p:cNvPicPr>
+            <a:picLocks noGrp="1" noChangeAspect="1"/>
+          </p:cNvPicPr>
+          <p:nvPr/>
+        </p:nvPicPr>
+        <p:blipFill>
+          <a:blip r:embed="rId2"/>
+          <a:stretch>
+            <a:fillRect/>
+          </a:stretch>
+        </p:blipFill>
+        <p:spPr bwMode="auto">
+          <a:xfrm>
+            <a:off x="457200" y="1358900"/>
+            <a:ext cx="8229600" cy="3048000"/>
+          </a:xfrm>
+          <a:prstGeom prst="rect">
+            <a:avLst/>
+          </a:prstGeom>
+          <a:noFill/>
+          <a:ln w="9525">
+            <a:noFill/>
+            <a:headEnd/>
+            <a:tailEnd/>
+          </a:ln>
+        </p:spPr>
+      </p:pic>
+    </p:spTree>
+  </p:cSld>
+</p:sld>
+</file>
+
+<file path=ppt/slides/slide21.xml><?xml version="1.0" encoding="utf-8"?>
+<p:sld xmlns:a="http://schemas.openxmlformats.org/drawingml/2006/main" xmlns:r="http://schemas.openxmlformats.org/officeDocument/2006/relationships" xmlns:p="http://schemas.openxmlformats.org/presentationml/2006/main">
+  <p:cSld>
+    <p:spTree>
+      <p:nvGrpSpPr>
+        <p:cNvPr id="1" name=""/>
+        <p:cNvGrpSpPr/>
+        <p:nvPr/>
+      </p:nvGrpSpPr>
+      <p:grpSpPr>
+        <a:xfrm>
+          <a:off x="0" y="0"/>
+          <a:ext cx="0" cy="0"/>
+          <a:chOff x="0" y="0"/>
+          <a:chExt cx="0" cy="0"/>
+        </a:xfrm>
+      </p:grpSpPr>
+      <p:sp>
+        <p:nvSpPr>
+          <p:cNvPr id="3" name="Content Placeholder 2"/>
+          <p:cNvSpPr>
+            <a:spLocks noGrp="1"/>
+          </p:cNvSpPr>
+          <p:nvPr>
+            <p:ph idx="1"/>
+          </p:nvPr>
+        </p:nvSpPr>
+        <p:spPr/>
+        <p:txBody>
+          <a:bodyPr/>
+          <a:lstStyle/>
+          <a:p>
+            <a:pPr lvl="0" indent="0" marL="0">
+              <a:buNone/>
+            </a:pPr>
+            <a:r>
+              <a:rPr/>
+              <a:t>Thirteen standardised indicators. Three components carry </a:t>
+            </a:r>
+            <a:r>
+              <a:rPr b="1"/>
+              <a:t>83%</a:t>
+            </a:r>
+            <a:r>
+              <a:rPr/>
+              <a:t> of the total variance; the fourth adds eight more, and everything after it is under five.</a:t>
+            </a:r>
+          </a:p>
+        </p:txBody>
+      </p:sp>
+    </p:spTree>
+  </p:cSld>
+</p:sld>
+</file>
+
+<file path=ppt/slides/slide22.xml><?xml version="1.0" encoding="utf-8"?>
+<p:sld xmlns:a="http://schemas.openxmlformats.org/drawingml/2006/main" xmlns:r="http://schemas.openxmlformats.org/officeDocument/2006/relationships" xmlns:p="http://schemas.openxmlformats.org/presentationml/2006/main">
+  <p:cSld>
+    <p:spTree>
+      <p:nvGrpSpPr>
+        <p:cNvPr id="1" name=""/>
+        <p:cNvGrpSpPr/>
+        <p:nvPr/>
+      </p:nvGrpSpPr>
+      <p:grpSpPr>
+        <a:xfrm>
+          <a:off x="0" y="0"/>
+          <a:ext cx="0" cy="0"/>
+          <a:chOff x="0" y="0"/>
+          <a:chExt cx="0" cy="0"/>
+        </a:xfrm>
+      </p:grpSpPr>
+      <p:sp>
+        <p:nvSpPr>
+          <p:cNvPr id="2" name="Title 1"/>
+          <p:cNvSpPr>
+            <a:spLocks noGrp="1"/>
+          </p:cNvSpPr>
+          <p:nvPr>
+            <p:ph type="title"/>
+          </p:nvPr>
+        </p:nvSpPr>
+        <p:spPr/>
+        <p:txBody>
+          <a:bodyPr/>
+          <a:lstStyle/>
+          <a:p>
+            <a:pPr lvl="0" indent="0" marL="0">
+              <a:buNone/>
+            </a:pPr>
+            <a:r>
+              <a:rPr/>
+              <a:t>Ridge damps; PCA truncates</a:t>
+            </a:r>
+          </a:p>
+        </p:txBody>
+      </p:sp>
+      <p:pic>
+        <p:nvPicPr>
+          <p:cNvPr descr="slides_files/figure-pptx/cell-6-output-1.png" id="0" name="Picture 1"/>
+          <p:cNvPicPr>
+            <a:picLocks noGrp="1" noChangeAspect="1"/>
+          </p:cNvPicPr>
+          <p:nvPr/>
+        </p:nvPicPr>
+        <p:blipFill>
+          <a:blip r:embed="rId2"/>
+          <a:stretch>
+            <a:fillRect/>
+          </a:stretch>
+        </p:blipFill>
+        <p:spPr bwMode="auto">
+          <a:xfrm>
+            <a:off x="774700" y="1193800"/>
+            <a:ext cx="7594600" cy="3390900"/>
+          </a:xfrm>
+          <a:prstGeom prst="rect">
+            <a:avLst/>
+          </a:prstGeom>
+          <a:noFill/>
+          <a:ln w="9525">
+            <a:noFill/>
+            <a:headEnd/>
+            <a:tailEnd/>
+          </a:ln>
+        </p:spPr>
+      </p:pic>
+    </p:spTree>
+  </p:cSld>
+</p:sld>
+</file>
+
+<file path=ppt/slides/slide23.xml><?xml version="1.0" encoding="utf-8"?>
+<p:sld xmlns:a="http://schemas.openxmlformats.org/drawingml/2006/main" xmlns:r="http://schemas.openxmlformats.org/officeDocument/2006/relationships" xmlns:p="http://schemas.openxmlformats.org/presentationml/2006/main">
+  <p:cSld>
+    <p:spTree>
+      <p:nvGrpSpPr>
+        <p:cNvPr id="1" name=""/>
+        <p:cNvGrpSpPr/>
+        <p:nvPr/>
+      </p:nvGrpSpPr>
+      <p:grpSpPr>
+        <a:xfrm>
+          <a:off x="0" y="0"/>
+          <a:ext cx="0" cy="0"/>
+          <a:chOff x="0" y="0"/>
+          <a:chExt cx="0" cy="0"/>
+        </a:xfrm>
+      </p:grpSpPr>
+      <p:sp>
+        <p:nvSpPr>
+          <p:cNvPr id="3" name="Content Placeholder 2"/>
+          <p:cNvSpPr>
+            <a:spLocks noGrp="1"/>
+          </p:cNvSpPr>
+          <p:nvPr>
+            <p:ph idx="1"/>
+          </p:nvPr>
+        </p:nvSpPr>
+        <p:spPr/>
+        <p:txBody>
+          <a:bodyPr/>
+          <a:lstStyle/>
+          <a:p>
+            <a:pPr lvl="0" indent="0" marL="0">
+              <a:buNone/>
+            </a:pPr>
+            <a:r>
+              <a:rPr b="1"/>
+              <a:t>Same basis, different rule.</a:t>
+            </a:r>
+            <a:r>
+              <a:rPr/>
+              <a:t> Ridge applies a smooth weight; principal components regression applies a step function. Principal components regression is a hard-thresholded ridge.</a:t>
+            </a:r>
+          </a:p>
+        </p:txBody>
+      </p:sp>
+    </p:spTree>
+  </p:cSld>
+</p:sld>
+</file>
+
+<file path=ppt/slides/slide24.xml><?xml version="1.0" encoding="utf-8"?>
+<p:sld xmlns:a="http://schemas.openxmlformats.org/drawingml/2006/main" xmlns:r="http://schemas.openxmlformats.org/officeDocument/2006/relationships" xmlns:p="http://schemas.openxmlformats.org/presentationml/2006/main">
+  <p:cSld>
+    <p:spTree>
+      <p:nvGrpSpPr>
+        <p:cNvPr id="1" name=""/>
+        <p:cNvGrpSpPr/>
+        <p:nvPr/>
+      </p:nvGrpSpPr>
+      <p:grpSpPr>
+        <a:xfrm>
+          <a:off x="0" y="0"/>
+          <a:ext cx="0" cy="0"/>
+          <a:chOff x="0" y="0"/>
+          <a:chExt cx="0" cy="0"/>
+        </a:xfrm>
+      </p:grpSpPr>
+      <p:sp>
+        <p:nvSpPr>
+          <p:cNvPr id="2" name="Title 1"/>
+          <p:cNvSpPr>
+            <a:spLocks noGrp="1"/>
+          </p:cNvSpPr>
+          <p:nvPr>
+            <p:ph type="title"/>
+          </p:nvPr>
+        </p:nvSpPr>
+        <p:spPr/>
+        <p:txBody>
+          <a:bodyPr/>
+          <a:lstStyle/>
+          <a:p>
+            <a:pPr lvl="0" indent="0" marL="0">
+              <a:buNone/>
+            </a:pPr>
+            <a:r>
+              <a:rPr/>
+              <a:t>The loadings tell you what a factor </a:t>
+            </a:r>
+            <a:r>
+              <a:rPr i="1"/>
+              <a:t>is</a:t>
+            </a:r>
+          </a:p>
+        </p:txBody>
+      </p:sp>
+      <p:pic>
+        <p:nvPicPr>
+          <p:cNvPr descr="slides_files/figure-pptx/cell-7-output-1.png" id="0" name="Picture 1"/>
+          <p:cNvPicPr>
+            <a:picLocks noGrp="1" noChangeAspect="1"/>
+          </p:cNvPicPr>
+          <p:nvPr/>
+        </p:nvPicPr>
+        <p:blipFill>
+          <a:blip r:embed="rId2"/>
+          <a:stretch>
+            <a:fillRect/>
+          </a:stretch>
+        </p:blipFill>
+        <p:spPr bwMode="auto">
+          <a:xfrm>
+            <a:off x="1244600" y="1193800"/>
+            <a:ext cx="6654800" cy="3390900"/>
+          </a:xfrm>
+          <a:prstGeom prst="rect">
+            <a:avLst/>
+          </a:prstGeom>
+          <a:noFill/>
+          <a:ln w="9525">
+            <a:noFill/>
+            <a:headEnd/>
+            <a:tailEnd/>
+          </a:ln>
+        </p:spPr>
+      </p:pic>
+    </p:spTree>
+  </p:cSld>
+</p:sld>
+</file>
+
+<file path=ppt/slides/slide25.xml><?xml version="1.0" encoding="utf-8"?>
+<p:sld xmlns:a="http://schemas.openxmlformats.org/drawingml/2006/main" xmlns:r="http://schemas.openxmlformats.org/officeDocument/2006/relationships" xmlns:p="http://schemas.openxmlformats.org/presentationml/2006/main">
+  <p:cSld>
+    <p:spTree>
+      <p:nvGrpSpPr>
+        <p:cNvPr id="1" name=""/>
+        <p:cNvGrpSpPr/>
+        <p:nvPr/>
+      </p:nvGrpSpPr>
+      <p:grpSpPr>
+        <a:xfrm>
+          <a:off x="0" y="0"/>
+          <a:ext cx="0" cy="0"/>
+          <a:chOff x="0" y="0"/>
+          <a:chExt cx="0" cy="0"/>
+        </a:xfrm>
+      </p:grpSpPr>
+      <p:sp>
+        <p:nvSpPr>
+          <p:cNvPr id="3" name="Content Placeholder 2"/>
+          <p:cNvSpPr>
+            <a:spLocks noGrp="1"/>
+          </p:cNvSpPr>
+          <p:nvPr>
+            <p:ph idx="1"/>
+          </p:nvPr>
+        </p:nvSpPr>
+        <p:spPr/>
+        <p:txBody>
+          <a:bodyPr/>
+          <a:lstStyle/>
+          <a:p>
+            <a:pPr lvl="0" indent="0" marL="0">
+              <a:buNone/>
+            </a:pPr>
+            <a:r>
+              <a:rPr/>
+              <a:t>Read down a column: which series move together. That is all a factor is — a weighted average of series that happen to co-move.</a:t>
+            </a:r>
+          </a:p>
+        </p:txBody>
+      </p:sp>
+    </p:spTree>
+  </p:cSld>
+</p:sld>
+</file>
+
+<file path=ppt/slides/slide26.xml><?xml version="1.0" encoding="utf-8"?>
 <p:sld xmlns:a="http://schemas.openxmlformats.org/drawingml/2006/main" xmlns:r="http://schemas.openxmlformats.org/officeDocument/2006/relationships" xmlns:p="http://schemas.openxmlformats.org/presentationml/2006/main">
   <p:cSld>
     <p:spTree>
@@ -3804,7 +6452,7 @@
             </a:pPr>
             <a:r>
               <a:rPr/>
-              <a:t>8.3 The approximate factor model</a:t>
+              <a:t>4 · Why more series helps</a:t>
             </a:r>
           </a:p>
         </p:txBody>
@@ -3814,7 +6462,7 @@
 </p:sld>
 </file>
 
-<file path=ppt/slides/slide14.xml><?xml version="1.0" encoding="utf-8"?>
+<file path=ppt/slides/slide27.xml><?xml version="1.0" encoding="utf-8"?>
 <p:sld xmlns:a="http://schemas.openxmlformats.org/drawingml/2006/main" xmlns:r="http://schemas.openxmlformats.org/officeDocument/2006/relationships" xmlns:p="http://schemas.openxmlformats.org/presentationml/2006/main">
   <p:cSld>
     <p:spTree>
@@ -3851,7 +6499,7 @@
             </a:pPr>
             <a:r>
               <a:rPr/>
-              <a:t>Stock and Watson’s insight</a:t>
+              <a:t>The approximate factor model</a:t>
             </a:r>
           </a:p>
         </p:txBody>
@@ -3878,7 +6526,7 @@
                 </a:pPr>
                 <a:r>
                   <a:rPr/>
-                  <a:t>A large macro panel is well described by a few common shocks plus idiosyncratic noise:</a:t>
+                  <a:t>Stock and Watson: a large macro panel is a few common shocks plus idiosyncratic noise.</a:t>
                 </a:r>
               </a:p>
               <a:p>
@@ -4011,10 +6659,10 @@
                         <m:rPr>
                           <m:sty m:val="p"/>
                         </m:rPr>
-                        <m:t>,</m:t>
+                        <m:t>;</m:t>
                       </m:r>
                       <m:r>
-                        <m:t> </m:t>
+                        <m:t> </m:t>
                       </m:r>
                       <m:r>
                         <m:t>t</m:t>
@@ -4057,10 +6705,6 @@
                 <a:pPr lvl="0" indent="0" marL="0">
                   <a:buNone/>
                 </a:pPr>
-                <a:r>
-                  <a:rPr/>
-                  <a:t>with </a:t>
-                </a:r>
                 <a14:m>
                   <m:oMath xmlns:m="http://schemas.openxmlformats.org/officeDocument/2006/math">
                     <m:sSub>
@@ -4101,7 +6745,7 @@
                 </a14:m>
                 <a:r>
                   <a:rPr/>
-                  <a:t> the common factors and </a:t>
+                  <a:t> are the common factors; </a:t>
                 </a:r>
                 <a14:m>
                   <m:oMath xmlns:m="http://schemas.openxmlformats.org/officeDocument/2006/math">
@@ -4121,16 +6765,7 @@
                 </a14:m>
                 <a:r>
                   <a:rPr/>
-                  <a:t> the loadings.</a:t>
-                </a:r>
-              </a:p>
-              <a:p>
-                <a:pPr lvl="0" indent="0" marL="0">
-                  <a:buNone/>
-                </a:pPr>
-                <a:r>
-                  <a:rPr/>
-                  <a:t>The </a:t>
+                  <a:t> the loadings. The </a:t>
                 </a:r>
                 <a:r>
                   <a:rPr b="1"/>
@@ -4138,7 +6773,7 @@
                 </a:r>
                 <a:r>
                   <a:rPr/>
-                  <a:t> factor model (Chamberlain–Rothschild) allows weak cross-sectional and serial correlation in </a:t>
+                  <a:t> version (Chamberlain–Rothschild) allows weak cross-sectional and serial correlation in </a:t>
                 </a:r>
                 <a14:m>
                   <m:oMath xmlns:m="http://schemas.openxmlformats.org/officeDocument/2006/math">
@@ -4161,7 +6796,7 @@
                 </a14:m>
                 <a:r>
                   <a:rPr/>
-                  <a:t> — essential for real data.</a:t>
+                  <a:t> — which is what makes it usable on real data.</a:t>
                 </a:r>
               </a:p>
             </p:txBody>
@@ -4173,7 +6808,7 @@
 </p:sld>
 </file>
 
-<file path=ppt/slides/slide15.xml><?xml version="1.0" encoding="utf-8"?>
+<file path=ppt/slides/slide28.xml><?xml version="1.0" encoding="utf-8"?>
 <p:sld xmlns:a="http://schemas.openxmlformats.org/drawingml/2006/main" xmlns:r="http://schemas.openxmlformats.org/officeDocument/2006/relationships" xmlns:p="http://schemas.openxmlformats.org/presentationml/2006/main">
   <p:cSld>
     <p:spTree>
@@ -4210,7 +6845,7 @@
             </a:pPr>
             <a:r>
               <a:rPr/>
-              <a:t>The key result</a:t>
+              <a:t>The result that should surprise you</a:t>
             </a:r>
           </a:p>
         </p:txBody>
@@ -4264,7 +6899,15 @@
                 </a14:m>
                 <a:r>
                   <a:rPr/>
-                  <a:t> is consistent for the space spanned by </a:t>
+                  <a:t> is consistent for the </a:t>
+                </a:r>
+                <a:r>
+                  <a:rPr b="1"/>
+                  <a:t>space spanned by</a:t>
+                </a:r>
+                <a:r>
+                  <a:rPr/>
+                  <a:t> </a:t>
                 </a:r>
                 <a14:m>
                   <m:oMath xmlns:m="http://schemas.openxmlformats.org/officeDocument/2006/math">
@@ -4399,7 +7042,7 @@
                 </a:pPr>
                 <a:r>
                   <a:rPr/>
-                  <a:t>Crucially, if </a:t>
+                  <a:t>And if </a:t>
                 </a:r>
                 <a14:m>
                   <m:oMath xmlns:m="http://schemas.openxmlformats.org/officeDocument/2006/math">
@@ -4444,7 +7087,20 @@
                 </a:r>
                 <a:r>
                   <a:rPr/>
-                  <a:t> in a second-stage regression — the generated-regressor problem vanishes.</a:t>
+                  <a:t> in a second-stage regression. The generated-regressor problem simply vanishes.</a:t>
+                </a:r>
+              </a:p>
+              <a:p>
+                <a:pPr lvl="0" indent="0" marL="0">
+                  <a:buNone/>
+                </a:pPr>
+                <a:r>
+                  <a:rPr b="1"/>
+                  <a:t>More series genuinely helps.</a:t>
+                </a:r>
+                <a:r>
+                  <a:rPr/>
+                  <a:t> That is the opposite of everything Sessions 05 and 06 taught you. Why?</a:t>
                 </a:r>
               </a:p>
             </p:txBody>
@@ -4456,7 +7112,7 @@
 </p:sld>
 </file>
 
-<file path=ppt/slides/slide16.xml><?xml version="1.0" encoding="utf-8"?>
+<file path=ppt/slides/slide29.xml><?xml version="1.0" encoding="utf-8"?>
 <p:sld xmlns:a="http://schemas.openxmlformats.org/drawingml/2006/main" xmlns:r="http://schemas.openxmlformats.org/officeDocument/2006/relationships" xmlns:p="http://schemas.openxmlformats.org/presentationml/2006/main">
   <p:cSld>
     <p:spTree>
@@ -4493,80 +7149,47 @@
             </a:pPr>
             <a:r>
               <a:rPr/>
-              <a:t>More series genuinely helps</a:t>
+              <a:t>Both effects, side by side</a:t>
             </a:r>
           </a:p>
         </p:txBody>
       </p:sp>
-      <p:sp>
-        <p:nvSpPr>
-          <p:cNvPr id="3" name="Content Placeholder 2"/>
-          <p:cNvSpPr>
-            <a:spLocks noGrp="1"/>
-          </p:cNvSpPr>
-          <p:nvPr>
-            <p:ph idx="1"/>
-          </p:nvPr>
-        </p:nvSpPr>
-        <p:spPr/>
-        <p:txBody>
-          <a:bodyPr/>
-          <a:lstStyle/>
-          <a:p>
-            <a:pPr lvl="0" indent="0" marL="0">
-              <a:buNone/>
-            </a:pPr>
-            <a:r>
-              <a:rPr/>
-              <a:t>This is the </a:t>
-            </a:r>
-            <a:r>
-              <a:rPr b="1"/>
-              <a:t>opposite</a:t>
-            </a:r>
-            <a:r>
-              <a:rPr/>
-              <a:t> of the intuition you built in Sessions 05 and 06, and understanding why is the heart of this session.</a:t>
-            </a:r>
-          </a:p>
-          <a:p>
-            <a:pPr lvl="0"/>
-            <a:r>
-              <a:rPr/>
-              <a:t>There, extra </a:t>
-            </a:r>
-            <a:r>
-              <a:rPr b="1"/>
-              <a:t>predictors</a:t>
-            </a:r>
-            <a:r>
-              <a:rPr/>
-              <a:t> added variance</a:t>
-            </a:r>
-          </a:p>
-          <a:p>
-            <a:pPr lvl="0"/>
-            <a:r>
-              <a:rPr/>
-              <a:t>Here, extra </a:t>
-            </a:r>
-            <a:r>
-              <a:rPr b="1"/>
-              <a:t>measurements of the same latent object</a:t>
-            </a:r>
-            <a:r>
-              <a:rPr/>
-              <a:t> average noise away</a:t>
-            </a:r>
-          </a:p>
-        </p:txBody>
-      </p:sp>
+      <p:pic>
+        <p:nvPicPr>
+          <p:cNvPr descr="slides_files/figure-pptx/cell-8-output-1.png" id="0" name="Picture 1"/>
+          <p:cNvPicPr>
+            <a:picLocks noGrp="1" noChangeAspect="1"/>
+          </p:cNvPicPr>
+          <p:nvPr/>
+        </p:nvPicPr>
+        <p:blipFill>
+          <a:blip r:embed="rId2"/>
+          <a:stretch>
+            <a:fillRect/>
+          </a:stretch>
+        </p:blipFill>
+        <p:spPr bwMode="auto">
+          <a:xfrm>
+            <a:off x="457200" y="1397000"/>
+            <a:ext cx="8229600" cy="2971800"/>
+          </a:xfrm>
+          <a:prstGeom prst="rect">
+            <a:avLst/>
+          </a:prstGeom>
+          <a:noFill/>
+          <a:ln w="9525">
+            <a:noFill/>
+            <a:headEnd/>
+            <a:tailEnd/>
+          </a:ln>
+        </p:spPr>
+      </p:pic>
     </p:spTree>
   </p:cSld>
 </p:sld>
 </file>
 
-<file path=ppt/slides/slide17.xml><?xml version="1.0" encoding="utf-8"?>
+<file path=ppt/slides/slide3.xml><?xml version="1.0" encoding="utf-8"?>
 <p:sld xmlns:a="http://schemas.openxmlformats.org/drawingml/2006/main" xmlns:r="http://schemas.openxmlformats.org/officeDocument/2006/relationships" xmlns:p="http://schemas.openxmlformats.org/presentationml/2006/main">
   <p:cSld>
     <p:spTree>
@@ -4603,7 +7226,373 @@
             </a:pPr>
             <a:r>
               <a:rPr/>
-              <a:t>Normalisation</a:t>
+              <a:t>Outline</a:t>
+            </a:r>
+          </a:p>
+        </p:txBody>
+      </p:sp>
+      <p:graphicFrame>
+        <p:nvGraphicFramePr>
+          <p:cNvPr id="6" name="Content Placeholder 5"/>
+          <p:cNvGraphicFramePr>
+            <a:graphicFrameLocks noGrp="1"/>
+          </p:cNvGraphicFramePr>
+          <p:nvPr>
+            <p:ph idx="1"/>
+          </p:nvPr>
+        </p:nvGraphicFramePr>
+        <p:xfrm>
+          <a:off x="457200" y="1193800"/>
+          <a:ext cx="8229600" cy="3390900"/>
+        </p:xfrm>
+        <a:graphic>
+          <a:graphicData uri="http://schemas.openxmlformats.org/drawingml/2006/table">
+            <a:tbl>
+              <a:tblPr firstRow="0" bandRow="1">
+                <a:tableStyleId>{5C22544A-7EE6-4342-B048-85BDC9FD1C3A}</a:tableStyleId>
+              </a:tblPr>
+              <a:tblGrid>
+                <a:gridCol w="4114800"/>
+                <a:gridCol w="4114800"/>
+              </a:tblGrid>
+              <a:tr h="0">
+                <a:tc>
+                  <a:txBody>
+                    <a:bodyPr/>
+                    <a:lstStyle/>
+                    <a:p>
+                      <a:pPr lvl="0" indent="0" marL="0">
+                        <a:buNone/>
+                      </a:pPr>
+                      <a:r>
+                        <a:rPr b="1"/>
+                        <a:t>1</a:t>
+                      </a:r>
+                    </a:p>
+                  </a:txBody>
+                </a:tc>
+                <a:tc>
+                  <a:txBody>
+                    <a:bodyPr/>
+                    <a:lstStyle/>
+                    <a:p>
+                      <a:pPr lvl="0" indent="0" marL="0">
+                        <a:buNone/>
+                      </a:pPr>
+                      <a:r>
+                        <a:rPr/>
+                        <a:t>Where we are, and what this adds</a:t>
+                      </a:r>
+                    </a:p>
+                  </a:txBody>
+                </a:tc>
+              </a:tr>
+              <a:tr h="0">
+                <a:tc>
+                  <a:txBody>
+                    <a:bodyPr/>
+                    <a:lstStyle/>
+                    <a:p>
+                      <a:pPr lvl="0" indent="0" marL="0">
+                        <a:buNone/>
+                      </a:pPr>
+                      <a:r>
+                        <a:rPr b="1"/>
+                        <a:t>2</a:t>
+                      </a:r>
+                    </a:p>
+                  </a:txBody>
+                </a:tc>
+                <a:tc>
+                  <a:txBody>
+                    <a:bodyPr/>
+                    <a:lstStyle/>
+                    <a:p>
+                      <a:pPr lvl="0" indent="0" marL="0">
+                        <a:buNone/>
+                      </a:pPr>
+                      <a:r>
+                        <a:rPr/>
+                        <a:t>PCA as variance maximisation</a:t>
+                      </a:r>
+                    </a:p>
+                  </a:txBody>
+                </a:tc>
+              </a:tr>
+              <a:tr h="0">
+                <a:tc>
+                  <a:txBody>
+                    <a:bodyPr/>
+                    <a:lstStyle/>
+                    <a:p>
+                      <a:pPr lvl="0" indent="0" marL="0">
+                        <a:buNone/>
+                      </a:pPr>
+                      <a:r>
+                        <a:rPr b="1"/>
+                        <a:t>3</a:t>
+                      </a:r>
+                    </a:p>
+                  </a:txBody>
+                </a:tc>
+                <a:tc>
+                  <a:txBody>
+                    <a:bodyPr/>
+                    <a:lstStyle/>
+                    <a:p>
+                      <a:pPr lvl="0" indent="0" marL="0">
+                        <a:buNone/>
+                      </a:pPr>
+                      <a:r>
+                        <a:rPr/>
+                        <a:t>The SVD, and the best low-rank approximation</a:t>
+                      </a:r>
+                    </a:p>
+                  </a:txBody>
+                </a:tc>
+              </a:tr>
+              <a:tr h="0">
+                <a:tc>
+                  <a:txBody>
+                    <a:bodyPr/>
+                    <a:lstStyle/>
+                    <a:p>
+                      <a:pPr lvl="0" indent="0" marL="0">
+                        <a:buNone/>
+                      </a:pPr>
+                      <a:r>
+                        <a:rPr b="1"/>
+                        <a:t>4</a:t>
+                      </a:r>
+                    </a:p>
+                  </a:txBody>
+                </a:tc>
+                <a:tc>
+                  <a:txBody>
+                    <a:bodyPr/>
+                    <a:lstStyle/>
+                    <a:p>
+                      <a:pPr lvl="0" indent="0" marL="0">
+                        <a:buNone/>
+                      </a:pPr>
+                      <a:r>
+                        <a:rPr/>
+                        <a:t>Why more series </a:t>
+                      </a:r>
+                      <a:r>
+                        <a:rPr i="1"/>
+                        <a:t>helps</a:t>
+                      </a:r>
+                    </a:p>
+                  </a:txBody>
+                </a:tc>
+              </a:tr>
+              <a:tr h="0">
+                <a:tc>
+                  <a:txBody>
+                    <a:bodyPr/>
+                    <a:lstStyle/>
+                    <a:p>
+                      <a:pPr lvl="0" indent="0" marL="0">
+                        <a:buNone/>
+                      </a:pPr>
+                      <a:r>
+                        <a:rPr b="1"/>
+                        <a:t>5</a:t>
+                      </a:r>
+                    </a:p>
+                  </a:txBody>
+                </a:tc>
+                <a:tc>
+                  <a:txBody>
+                    <a:bodyPr/>
+                    <a:lstStyle/>
+                    <a:p>
+                      <a:pPr lvl="0" indent="0" marL="0">
+                        <a:buNone/>
+                      </a:pPr>
+                      <a:r>
+                        <a:rPr/>
+                        <a:t>How many factors?</a:t>
+                      </a:r>
+                    </a:p>
+                  </a:txBody>
+                </a:tc>
+              </a:tr>
+              <a:tr h="0">
+                <a:tc>
+                  <a:txBody>
+                    <a:bodyPr/>
+                    <a:lstStyle/>
+                    <a:p>
+                      <a:pPr lvl="0" indent="0" marL="0">
+                        <a:buNone/>
+                      </a:pPr>
+                      <a:r>
+                        <a:rPr b="1"/>
+                        <a:t>6</a:t>
+                      </a:r>
+                    </a:p>
+                  </a:txBody>
+                </a:tc>
+                <a:tc>
+                  <a:txBody>
+                    <a:bodyPr/>
+                    <a:lstStyle/>
+                    <a:p>
+                      <a:pPr lvl="0" indent="0" marL="0">
+                        <a:buNone/>
+                      </a:pPr>
+                      <a:r>
+                        <a:rPr/>
+                        <a:t>Diffusion-index forecasting</a:t>
+                      </a:r>
+                    </a:p>
+                  </a:txBody>
+                </a:tc>
+              </a:tr>
+              <a:tr h="0">
+                <a:tc>
+                  <a:txBody>
+                    <a:bodyPr/>
+                    <a:lstStyle/>
+                    <a:p>
+                      <a:pPr lvl="0" indent="0" marL="0">
+                        <a:buNone/>
+                      </a:pPr>
+                      <a:r>
+                        <a:rPr b="1"/>
+                        <a:t>7</a:t>
+                      </a:r>
+                    </a:p>
+                  </a:txBody>
+                </a:tc>
+                <a:tc>
+                  <a:txBody>
+                    <a:bodyPr/>
+                    <a:lstStyle/>
+                    <a:p>
+                      <a:pPr lvl="0" indent="0" marL="0">
+                        <a:buNone/>
+                      </a:pPr>
+                      <a:r>
+                        <a:rPr/>
+                        <a:t>Key takeaways</a:t>
+                      </a:r>
+                    </a:p>
+                  </a:txBody>
+                </a:tc>
+              </a:tr>
+            </a:tbl>
+          </a:graphicData>
+        </a:graphic>
+      </p:graphicFrame>
+    </p:spTree>
+  </p:cSld>
+</p:sld>
+</file>
+
+<file path=ppt/slides/slide30.xml><?xml version="1.0" encoding="utf-8"?>
+<p:sld xmlns:a="http://schemas.openxmlformats.org/drawingml/2006/main" xmlns:r="http://schemas.openxmlformats.org/officeDocument/2006/relationships" xmlns:p="http://schemas.openxmlformats.org/presentationml/2006/main">
+  <p:cSld>
+    <p:spTree>
+      <p:nvGrpSpPr>
+        <p:cNvPr id="1" name=""/>
+        <p:cNvGrpSpPr/>
+        <p:nvPr/>
+      </p:nvGrpSpPr>
+      <p:grpSpPr>
+        <a:xfrm>
+          <a:off x="0" y="0"/>
+          <a:ext cx="0" cy="0"/>
+          <a:chOff x="0" y="0"/>
+          <a:chExt cx="0" cy="0"/>
+        </a:xfrm>
+      </p:grpSpPr>
+      <p:sp>
+        <p:nvSpPr>
+          <p:cNvPr id="3" name="Content Placeholder 2"/>
+          <p:cNvSpPr>
+            <a:spLocks noGrp="1"/>
+          </p:cNvSpPr>
+          <p:nvPr>
+            <p:ph idx="1"/>
+          </p:nvPr>
+        </p:nvSpPr>
+        <p:spPr/>
+        <p:txBody>
+          <a:bodyPr/>
+          <a:lstStyle/>
+          <a:p>
+            <a:pPr lvl="0" indent="0" marL="0">
+              <a:buNone/>
+            </a:pPr>
+            <a:r>
+              <a:rPr/>
+              <a:t>Left: each extra series is another </a:t>
+            </a:r>
+            <a:r>
+              <a:rPr b="1"/>
+              <a:t>measurement of the same thing</a:t>
+            </a:r>
+            <a:r>
+              <a:rPr/>
+              <a:t>, so its noise averages away. Right: each extra predictor is another </a:t>
+            </a:r>
+            <a:r>
+              <a:rPr b="1"/>
+              <a:t>free parameter</a:t>
+            </a:r>
+            <a:r>
+              <a:rPr/>
+              <a:t>, so its noise is fitted.</a:t>
+            </a:r>
+          </a:p>
+        </p:txBody>
+      </p:sp>
+    </p:spTree>
+  </p:cSld>
+</p:sld>
+</file>
+
+<file path=ppt/slides/slide31.xml><?xml version="1.0" encoding="utf-8"?>
+<p:sld xmlns:a="http://schemas.openxmlformats.org/drawingml/2006/main" xmlns:r="http://schemas.openxmlformats.org/officeDocument/2006/relationships" xmlns:p="http://schemas.openxmlformats.org/presentationml/2006/main">
+  <p:cSld>
+    <p:spTree>
+      <p:nvGrpSpPr>
+        <p:cNvPr id="1" name=""/>
+        <p:cNvGrpSpPr/>
+        <p:nvPr/>
+      </p:nvGrpSpPr>
+      <p:grpSpPr>
+        <a:xfrm>
+          <a:off x="0" y="0"/>
+          <a:ext cx="0" cy="0"/>
+          <a:chOff x="0" y="0"/>
+          <a:chExt cx="0" cy="0"/>
+        </a:xfrm>
+      </p:grpSpPr>
+      <p:sp>
+        <p:nvSpPr>
+          <p:cNvPr id="2" name="Title 1"/>
+          <p:cNvSpPr>
+            <a:spLocks noGrp="1"/>
+          </p:cNvSpPr>
+          <p:nvPr>
+            <p:ph type="title"/>
+          </p:nvPr>
+        </p:nvSpPr>
+        <p:spPr/>
+        <p:txBody>
+          <a:bodyPr/>
+          <a:lstStyle/>
+          <a:p>
+            <a:pPr lvl="0" indent="0" marL="0">
+              <a:buNone/>
+            </a:pPr>
+            <a:r>
+              <a:rPr/>
+              <a:t>Say the distinction out loud</a:t>
             </a:r>
           </a:p>
         </p:txBody>
@@ -4630,113 +7619,77 @@
                 </a:pPr>
                 <a:r>
                   <a:rPr/>
-                  <a:t>To pin down the rotation, impose</a:t>
+                  <a:t>Sessions 05–06: an extra column is an extra </a:t>
+                </a:r>
+                <a:r>
+                  <a:rPr b="1"/>
+                  <a:t>coefficient to estimate</a:t>
+                </a:r>
+                <a:r>
+                  <a:rPr/>
+                  <a:t>. Variance goes up.</a:t>
                 </a:r>
               </a:p>
               <a:p>
                 <a:pPr lvl="0" indent="0" marL="0">
                   <a:buNone/>
                 </a:pPr>
+                <a:r>
+                  <a:rPr/>
+                  <a:t>Session 08: an extra column is an extra </a:t>
+                </a:r>
+                <a:r>
+                  <a:rPr b="1"/>
+                  <a:t>noisy reading of a latent quantity</a:t>
+                </a:r>
+                <a:r>
+                  <a:rPr/>
+                  <a:t>. Averaging drives its noise down like </a:t>
+                </a:r>
                 <a14:m>
-                  <m:oMathPara xmlns:m="http://schemas.openxmlformats.org/officeDocument/2006/math">
-                    <m:oMathParaPr>
-                      <m:jc m:val="center"/>
-                    </m:oMathParaPr>
-                    <m:oMath>
-                      <m:sSup>
-                        <m:e>
-                          <m:r>
-                            <m:t>F</m:t>
-                          </m:r>
-                        </m:e>
-                        <m:sup>
-                          <m:r>
-                            <m:rPr>
-                              <m:sty m:val="p"/>
-                            </m:rPr>
-                            <m:t>⊤</m:t>
-                          </m:r>
-                        </m:sup>
-                      </m:sSup>
-                      <m:r>
-                        <m:t>F</m:t>
-                      </m:r>
-                      <m:r>
-                        <m:rPr>
-                          <m:sty m:val="p"/>
-                        </m:rPr>
-                        <m:t>/</m:t>
-                      </m:r>
-                      <m:r>
-                        <m:t>T</m:t>
-                      </m:r>
-                      <m:r>
-                        <m:rPr>
-                          <m:sty m:val="p"/>
-                        </m:rPr>
-                        <m:t>=</m:t>
-                      </m:r>
-                      <m:sSub>
-                        <m:e>
-                          <m:r>
-                            <m:t>I</m:t>
-                          </m:r>
-                        </m:e>
-                        <m:sub>
-                          <m:r>
-                            <m:t>r</m:t>
-                          </m:r>
-                        </m:sub>
-                      </m:sSub>
-                      <m:r>
-                        <m:rPr>
-                          <m:sty m:val="p"/>
-                        </m:rPr>
-                        <m:t>,</m:t>
-                      </m:r>
-                      <m:r>
-                        <m:t>  </m:t>
-                      </m:r>
-                      <m:sSup>
-                        <m:e>
-                          <m:r>
-                            <m:t>Λ</m:t>
-                          </m:r>
-                        </m:e>
-                        <m:sup>
-                          <m:r>
-                            <m:rPr>
-                              <m:sty m:val="p"/>
-                            </m:rPr>
-                            <m:t>⊤</m:t>
-                          </m:r>
-                        </m:sup>
-                      </m:sSup>
-                      <m:r>
-                        <m:t>Λ</m:t>
-                      </m:r>
-                      <m:r>
-                        <m:rPr>
-                          <m:nor/>
-                          <m:sty m:val="p"/>
-                        </m:rPr>
-                        <m:t> diagonal</m:t>
-                      </m:r>
-                    </m:oMath>
-                  </m:oMathPara>
+                  <m:oMath xmlns:m="http://schemas.openxmlformats.org/officeDocument/2006/math">
+                    <m:r>
+                      <m:t>1</m:t>
+                    </m:r>
+                    <m:r>
+                      <m:rPr>
+                        <m:sty m:val="p"/>
+                      </m:rPr>
+                      <m:t>/</m:t>
+                    </m:r>
+                    <m:rad>
+                      <m:radPr>
+                        <m:degHide m:val="on"/>
+                      </m:radPr>
+                      <m:deg/>
+                      <m:e>
+                        <m:r>
+                          <m:t>N</m:t>
+                        </m:r>
+                      </m:e>
+                    </m:rad>
+                  </m:oMath>
                 </a14:m>
+                <a:r>
+                  <a:rPr/>
+                  <a:t>.</a:t>
+                </a:r>
               </a:p>
               <a:p>
                 <a:pPr lvl="0" indent="0" marL="0">
                   <a:buNone/>
                 </a:pPr>
                 <a:r>
-                  <a:rPr b="1"/>
-                  <a:t>This is a choice, not a discovery.</a:t>
-                </a:r>
-                <a:r>
                   <a:rPr/>
-                  <a:t> Any rotation fits identically well, so “Factor 1” is a coordinate system — never an object you have found.</a:t>
+                  <a:t>Same table, opposite conclusion — because the </a:t>
+                </a:r>
+                <a:r>
+                  <a:rPr i="1"/>
+                  <a:t>object being estimated</a:t>
+                </a:r>
+                <a:r>
+                  <a:rPr/>
+                  <a:t> is different. This is the best question of the semester, and the answer is “what are you estimating?”</a:t>
                 </a:r>
               </a:p>
             </p:txBody>
@@ -4748,7 +7701,196 @@
 </p:sld>
 </file>
 
-<file path=ppt/slides/slide18.xml><?xml version="1.0" encoding="utf-8"?>
+<file path=ppt/slides/slide32.xml><?xml version="1.0" encoding="utf-8"?>
+<p:sld xmlns:a="http://schemas.openxmlformats.org/drawingml/2006/main" xmlns:r="http://schemas.openxmlformats.org/officeDocument/2006/relationships" xmlns:p="http://schemas.openxmlformats.org/presentationml/2006/main">
+  <p:cSld>
+    <p:spTree>
+      <p:nvGrpSpPr>
+        <p:cNvPr id="1" name=""/>
+        <p:cNvGrpSpPr/>
+        <p:nvPr/>
+      </p:nvGrpSpPr>
+      <p:grpSpPr>
+        <a:xfrm>
+          <a:off x="0" y="0"/>
+          <a:ext cx="0" cy="0"/>
+          <a:chOff x="0" y="0"/>
+          <a:chExt cx="0" cy="0"/>
+        </a:xfrm>
+      </p:grpSpPr>
+      <p:sp>
+        <p:nvSpPr>
+          <p:cNvPr id="2" name="Title 1"/>
+          <p:cNvSpPr>
+            <a:spLocks noGrp="1"/>
+          </p:cNvSpPr>
+          <p:nvPr>
+            <p:ph type="title"/>
+          </p:nvPr>
+        </p:nvSpPr>
+        <p:spPr/>
+        <p:txBody>
+          <a:bodyPr/>
+          <a:lstStyle/>
+          <a:p>
+            <a:pPr lvl="0" indent="0" marL="0">
+              <a:buNone/>
+            </a:pPr>
+            <a:r>
+              <a:rPr/>
+              <a:t>Normalisation is a choice, not a discovery</a:t>
+            </a:r>
+          </a:p>
+        </p:txBody>
+      </p:sp>
+      <mc:AlternateContent xmlns:mc="http://schemas.openxmlformats.org/markup-compatibility/2006">
+        <mc:Choice xmlns:a14="http://schemas.microsoft.com/office/drawing/2010/main" Requires="a14">
+          <p:sp>
+            <p:nvSpPr>
+              <p:cNvPr id="3" name="Content Placeholder 2"/>
+              <p:cNvSpPr>
+                <a:spLocks noGrp="1"/>
+              </p:cNvSpPr>
+              <p:nvPr>
+                <p:ph idx="1"/>
+              </p:nvPr>
+            </p:nvSpPr>
+            <p:spPr/>
+            <p:txBody>
+              <a:bodyPr/>
+              <a:lstStyle/>
+              <a:p>
+                <a:pPr lvl="0" indent="0" marL="0">
+                  <a:buNone/>
+                </a:pPr>
+                <a:r>
+                  <a:rPr/>
+                  <a:t>To pin down the rotation we impose </a:t>
+                </a:r>
+                <a14:m>
+                  <m:oMath xmlns:m="http://schemas.openxmlformats.org/officeDocument/2006/math">
+                    <m:sSup>
+                      <m:e>
+                        <m:r>
+                          <m:t>F</m:t>
+                        </m:r>
+                      </m:e>
+                      <m:sup>
+                        <m:r>
+                          <m:rPr>
+                            <m:sty m:val="p"/>
+                          </m:rPr>
+                          <m:t>⊤</m:t>
+                        </m:r>
+                      </m:sup>
+                    </m:sSup>
+                    <m:r>
+                      <m:t>F</m:t>
+                    </m:r>
+                    <m:r>
+                      <m:rPr>
+                        <m:sty m:val="p"/>
+                      </m:rPr>
+                      <m:t>/</m:t>
+                    </m:r>
+                    <m:r>
+                      <m:t>T</m:t>
+                    </m:r>
+                    <m:r>
+                      <m:rPr>
+                        <m:sty m:val="p"/>
+                      </m:rPr>
+                      <m:t>=</m:t>
+                    </m:r>
+                    <m:sSub>
+                      <m:e>
+                        <m:r>
+                          <m:t>I</m:t>
+                        </m:r>
+                      </m:e>
+                      <m:sub>
+                        <m:r>
+                          <m:t>r</m:t>
+                        </m:r>
+                      </m:sub>
+                    </m:sSub>
+                  </m:oMath>
+                </a14:m>
+                <a:r>
+                  <a:rPr/>
+                  <a:t> and </a:t>
+                </a:r>
+                <a14:m>
+                  <m:oMath xmlns:m="http://schemas.openxmlformats.org/officeDocument/2006/math">
+                    <m:sSup>
+                      <m:e>
+                        <m:r>
+                          <m:t>Λ</m:t>
+                        </m:r>
+                      </m:e>
+                      <m:sup>
+                        <m:r>
+                          <m:rPr>
+                            <m:sty m:val="p"/>
+                          </m:rPr>
+                          <m:t>⊤</m:t>
+                        </m:r>
+                      </m:sup>
+                    </m:sSup>
+                    <m:r>
+                      <m:t>Λ</m:t>
+                    </m:r>
+                  </m:oMath>
+                </a14:m>
+                <a:r>
+                  <a:rPr/>
+                  <a:t> diagonal.</a:t>
+                </a:r>
+              </a:p>
+              <a:p>
+                <a:pPr lvl="0" indent="0" marL="0">
+                  <a:buNone/>
+                </a:pPr>
+                <a:r>
+                  <a:rPr/>
+                  <a:t>Factors are identified </a:t>
+                </a:r>
+                <a:r>
+                  <a:rPr b="1"/>
+                  <a:t>only up to rotation</a:t>
+                </a:r>
+                <a:r>
+                  <a:rPr/>
+                  <a:t>. So </a:t>
+                </a:r>
+                <a:r>
+                  <a:rPr i="1"/>
+                  <a:t>“Factor 1 is the business cycle”</a:t>
+                </a:r>
+                <a:r>
+                  <a:rPr/>
+                  <a:t> is an interpretation you are offering, never an estimate you have produced.</a:t>
+                </a:r>
+              </a:p>
+              <a:p>
+                <a:pPr lvl="0" indent="0" marL="0">
+                  <a:buNone/>
+                </a:pPr>
+                <a:r>
+                  <a:rPr/>
+                  <a:t>Write that caveat into your paper before you write the interpretation. A referee who finds the interpretation without the caveat will not read further.</a:t>
+                </a:r>
+              </a:p>
+            </p:txBody>
+          </p:sp>
+        </mc:Choice>
+      </mc:AlternateContent>
+    </p:spTree>
+  </p:cSld>
+</p:sld>
+</file>
+
+<file path=ppt/slides/slide33.xml><?xml version="1.0" encoding="utf-8"?>
 <p:sld xmlns:a="http://schemas.openxmlformats.org/drawingml/2006/main" xmlns:r="http://schemas.openxmlformats.org/officeDocument/2006/relationships" xmlns:p="http://schemas.openxmlformats.org/presentationml/2006/main">
   <p:cSld>
     <p:spTree>
@@ -4790,7 +7932,7 @@
             </a:pPr>
             <a:r>
               <a:rPr/>
-              <a:t>8.4 How many factors?</a:t>
+              <a:t>5 · How many factors?</a:t>
             </a:r>
           </a:p>
         </p:txBody>
@@ -4800,7 +7942,7 @@
 </p:sld>
 </file>
 
-<file path=ppt/slides/slide19.xml><?xml version="1.0" encoding="utf-8"?>
+<file path=ppt/slides/slide34.xml><?xml version="1.0" encoding="utf-8"?>
 <p:sld xmlns:a="http://schemas.openxmlformats.org/drawingml/2006/main" xmlns:r="http://schemas.openxmlformats.org/officeDocument/2006/relationships" xmlns:p="http://schemas.openxmlformats.org/presentationml/2006/main">
   <p:cSld>
     <p:spTree>
@@ -4837,142 +7979,7 @@
             </a:pPr>
             <a:r>
               <a:rPr/>
-              <a:t>The informal answers</a:t>
-            </a:r>
-          </a:p>
-        </p:txBody>
-      </p:sp>
-      <p:sp>
-        <p:nvSpPr>
-          <p:cNvPr id="3" name="Content Placeholder 2"/>
-          <p:cNvSpPr>
-            <a:spLocks noGrp="1"/>
-          </p:cNvSpPr>
-          <p:nvPr>
-            <p:ph idx="1"/>
-          </p:nvPr>
-        </p:nvSpPr>
-        <p:spPr/>
-        <p:txBody>
-          <a:bodyPr/>
-          <a:lstStyle/>
-          <a:p>
-            <a:pPr lvl="0"/>
-            <a:r>
-              <a:rPr b="1"/>
-              <a:t>Scree plot</a:t>
-            </a:r>
-            <a:r>
-              <a:rPr/>
-              <a:t> — look for the elbow. Informal, and often ambiguous.</a:t>
-            </a:r>
-          </a:p>
-          <a:p>
-            <a:pPr lvl="0"/>
-            <a:r>
-              <a:rPr b="1"/>
-              <a:t>Cumulative variance</a:t>
-            </a:r>
-            <a:r>
-              <a:rPr/>
-              <a:t> — retain enough for 80–90%. Arbitrary but transparent.</a:t>
-            </a:r>
-          </a:p>
-        </p:txBody>
-      </p:sp>
-    </p:spTree>
-  </p:cSld>
-</p:sld>
-</file>
-
-<file path=ppt/slides/slide2.xml><?xml version="1.0" encoding="utf-8"?>
-<p:sld xmlns:a="http://schemas.openxmlformats.org/drawingml/2006/main" xmlns:r="http://schemas.openxmlformats.org/officeDocument/2006/relationships" xmlns:p="http://schemas.openxmlformats.org/presentationml/2006/main">
-  <p:cSld>
-    <p:spTree>
-      <p:nvGrpSpPr>
-        <p:cNvPr id="1" name=""/>
-        <p:cNvGrpSpPr/>
-        <p:nvPr/>
-      </p:nvGrpSpPr>
-      <p:grpSpPr>
-        <a:xfrm>
-          <a:off x="0" y="0"/>
-          <a:ext cx="0" cy="0"/>
-          <a:chOff x="0" y="0"/>
-          <a:chExt cx="0" cy="0"/>
-        </a:xfrm>
-      </p:grpSpPr>
-      <p:sp>
-        <p:nvSpPr>
-          <p:cNvPr id="3" name="Content Placeholder 2"/>
-          <p:cNvSpPr>
-            <a:spLocks noGrp="1"/>
-          </p:cNvSpPr>
-          <p:nvPr>
-            <p:ph idx="1"/>
-          </p:nvPr>
-        </p:nvSpPr>
-        <p:spPr/>
-        <p:txBody>
-          <a:bodyPr/>
-          <a:lstStyle/>
-          <a:p>
-            <a:pPr lvl="0" indent="0" marL="0">
-              <a:spcBef>
-                <a:spcPts val="3000"/>
-              </a:spcBef>
-              <a:buNone/>
-            </a:pPr>
-            <a:r>
-              <a:rPr b="1"/>
-              <a:t>Two hundred macro series move together. How many things are happening?</a:t>
-            </a:r>
-          </a:p>
-        </p:txBody>
-      </p:sp>
-    </p:spTree>
-  </p:cSld>
-</p:sld>
-</file>
-
-<file path=ppt/slides/slide20.xml><?xml version="1.0" encoding="utf-8"?>
-<p:sld xmlns:a="http://schemas.openxmlformats.org/drawingml/2006/main" xmlns:r="http://schemas.openxmlformats.org/officeDocument/2006/relationships" xmlns:p="http://schemas.openxmlformats.org/presentationml/2006/main">
-  <p:cSld>
-    <p:spTree>
-      <p:nvGrpSpPr>
-        <p:cNvPr id="1" name=""/>
-        <p:cNvGrpSpPr/>
-        <p:nvPr/>
-      </p:nvGrpSpPr>
-      <p:grpSpPr>
-        <a:xfrm>
-          <a:off x="0" y="0"/>
-          <a:ext cx="0" cy="0"/>
-          <a:chOff x="0" y="0"/>
-          <a:chExt cx="0" cy="0"/>
-        </a:xfrm>
-      </p:grpSpPr>
-      <p:sp>
-        <p:nvSpPr>
-          <p:cNvPr id="2" name="Title 1"/>
-          <p:cNvSpPr>
-            <a:spLocks noGrp="1"/>
-          </p:cNvSpPr>
-          <p:nvPr>
-            <p:ph type="title"/>
-          </p:nvPr>
-        </p:nvSpPr>
-        <p:spPr/>
-        <p:txBody>
-          <a:bodyPr/>
-          <a:lstStyle/>
-          <a:p>
-            <a:pPr lvl="0" indent="0" marL="0">
-              <a:buNone/>
-            </a:pPr>
-            <a:r>
-              <a:rPr/>
-              <a:t>Bai–Ng criteria</a:t>
+              <a:t>Four answers, and they will disagree</a:t>
             </a:r>
           </a:p>
         </p:txBody>
@@ -4994,13 +8001,249 @@
               <a:bodyPr/>
               <a:lstStyle/>
               <a:p>
-                <a:pPr lvl="0" indent="0" marL="0">
-                  <a:buNone/>
-                </a:pPr>
+                <a:pPr lvl="0"/>
+                <a:r>
+                  <a:rPr b="1"/>
+                  <a:t>Scree plot</a:t>
+                </a:r>
                 <a:r>
                   <a:rPr/>
-                  <a:t>Minimise</a:t>
-                </a:r>
+                  <a:t> — look for the elbow. Informal, often ambiguous</a:t>
+                </a:r>
+              </a:p>
+              <a:p>
+                <a:pPr lvl="0"/>
+                <a:r>
+                  <a:rPr b="1"/>
+                  <a:t>Cumulative variance</a:t>
+                </a:r>
+                <a:r>
+                  <a:rPr/>
+                  <a:t> — retain 80–90%. Arbitrary but transparent</a:t>
+                </a:r>
+              </a:p>
+              <a:p>
+                <a:pPr lvl="0"/>
+                <a:r>
+                  <a:rPr b="1"/>
+                  <a:t>Bai–Ng information criteria</a:t>
+                </a:r>
+                <a:r>
+                  <a:rPr/>
+                  <a:t> — </a:t>
+                </a:r>
+                <a14:m>
+                  <m:oMath xmlns:m="http://schemas.openxmlformats.org/officeDocument/2006/math">
+                    <m:r>
+                      <m:t>I</m:t>
+                    </m:r>
+                    <m:sSub>
+                      <m:e>
+                        <m:r>
+                          <m:t>C</m:t>
+                        </m:r>
+                      </m:e>
+                      <m:sub>
+                        <m:r>
+                          <m:t>p</m:t>
+                        </m:r>
+                        <m:r>
+                          <m:t>1</m:t>
+                        </m:r>
+                      </m:sub>
+                    </m:sSub>
+                    <m:r>
+                      <m:rPr>
+                        <m:sty m:val="p"/>
+                      </m:rPr>
+                      <m:t>,</m:t>
+                    </m:r>
+                    <m:r>
+                      <m:t>I</m:t>
+                    </m:r>
+                    <m:sSub>
+                      <m:e>
+                        <m:r>
+                          <m:t>C</m:t>
+                        </m:r>
+                      </m:e>
+                      <m:sub>
+                        <m:r>
+                          <m:t>p</m:t>
+                        </m:r>
+                        <m:r>
+                          <m:t>2</m:t>
+                        </m:r>
+                      </m:sub>
+                    </m:sSub>
+                    <m:r>
+                      <m:rPr>
+                        <m:sty m:val="p"/>
+                      </m:rPr>
+                      <m:t>,</m:t>
+                    </m:r>
+                    <m:r>
+                      <m:t>I</m:t>
+                    </m:r>
+                    <m:sSub>
+                      <m:e>
+                        <m:r>
+                          <m:t>C</m:t>
+                        </m:r>
+                      </m:e>
+                      <m:sub>
+                        <m:r>
+                          <m:t>p</m:t>
+                        </m:r>
+                        <m:r>
+                          <m:t>3</m:t>
+                        </m:r>
+                      </m:sub>
+                    </m:sSub>
+                  </m:oMath>
+                </a14:m>
+                <a:r>
+                  <a:rPr/>
+                  <a:t>, with penalties that must vanish slower than </a:t>
+                </a:r>
+                <a14:m>
+                  <m:oMath xmlns:m="http://schemas.openxmlformats.org/officeDocument/2006/math">
+                    <m:r>
+                      <m:rPr>
+                        <m:sty m:val="p"/>
+                      </m:rPr>
+                      <m:t>min</m:t>
+                    </m:r>
+                    <m:sSup>
+                      <m:e>
+                        <m:d>
+                          <m:dPr>
+                            <m:begChr m:val="("/>
+                            <m:sepChr m:val=""/>
+                            <m:endChr m:val=")"/>
+                            <m:grow/>
+                          </m:dPr>
+                          <m:e>
+                            <m:r>
+                              <m:t>N</m:t>
+                            </m:r>
+                            <m:r>
+                              <m:rPr>
+                                <m:sty m:val="p"/>
+                              </m:rPr>
+                              <m:t>,</m:t>
+                            </m:r>
+                            <m:r>
+                              <m:t>T</m:t>
+                            </m:r>
+                          </m:e>
+                        </m:d>
+                      </m:e>
+                      <m:sup>
+                        <m:r>
+                          <m:rPr>
+                            <m:sty m:val="p"/>
+                          </m:rPr>
+                          <m:t>−</m:t>
+                        </m:r>
+                        <m:r>
+                          <m:t>1</m:t>
+                        </m:r>
+                      </m:sup>
+                    </m:sSup>
+                  </m:oMath>
+                </a14:m>
+              </a:p>
+              <a:p>
+                <a:pPr lvl="0"/>
+                <a:r>
+                  <a:rPr b="1"/>
+                  <a:t>Ahn–Horenstein eigenvalue ratio</a:t>
+                </a:r>
+                <a:r>
+                  <a:rPr/>
+                  <a:t> — </a:t>
+                </a:r>
+                <a14:m>
+                  <m:oMath xmlns:m="http://schemas.openxmlformats.org/officeDocument/2006/math">
+                    <m:acc>
+                      <m:accPr>
+                        <m:chr m:val="̂"/>
+                      </m:accPr>
+                      <m:e>
+                        <m:r>
+                          <m:t>r</m:t>
+                        </m:r>
+                      </m:e>
+                    </m:acc>
+                    <m:r>
+                      <m:rPr>
+                        <m:sty m:val="p"/>
+                      </m:rPr>
+                      <m:t>=</m:t>
+                    </m:r>
+                    <m:r>
+                      <m:rPr>
+                        <m:sty m:val="p"/>
+                      </m:rPr>
+                      <m:t>arg</m:t>
+                    </m:r>
+                    <m:sSub>
+                      <m:e>
+                        <m:r>
+                          <m:rPr>
+                            <m:sty m:val="p"/>
+                          </m:rPr>
+                          <m:t>max</m:t>
+                        </m:r>
+                      </m:e>
+                      <m:sub>
+                        <m:r>
+                          <m:t>k</m:t>
+                        </m:r>
+                      </m:sub>
+                    </m:sSub>
+                    <m:sSub>
+                      <m:e>
+                        <m:r>
+                          <m:t>d</m:t>
+                        </m:r>
+                      </m:e>
+                      <m:sub>
+                        <m:r>
+                          <m:t>k</m:t>
+                        </m:r>
+                      </m:sub>
+                    </m:sSub>
+                    <m:r>
+                      <m:rPr>
+                        <m:sty m:val="p"/>
+                      </m:rPr>
+                      <m:t>/</m:t>
+                    </m:r>
+                    <m:sSub>
+                      <m:e>
+                        <m:r>
+                          <m:t>d</m:t>
+                        </m:r>
+                      </m:e>
+                      <m:sub>
+                        <m:r>
+                          <m:t>k</m:t>
+                        </m:r>
+                        <m:r>
+                          <m:rPr>
+                            <m:sty m:val="p"/>
+                          </m:rPr>
+                          <m:t>+</m:t>
+                        </m:r>
+                        <m:r>
+                          <m:t>1</m:t>
+                        </m:r>
+                      </m:sub>
+                    </m:sSub>
+                  </m:oMath>
+                </a14:m>
               </a:p>
               <a:p>
                 <a:pPr lvl="0" indent="0" marL="0">
@@ -5189,200 +8432,6 @@
                   </m:oMathPara>
                 </a14:m>
               </a:p>
-              <a:p>
-                <a:pPr lvl="0" indent="0" marL="0">
-                  <a:buNone/>
-                </a:pPr>
-                <a:r>
-                  <a:rPr/>
-                  <a:t>where </a:t>
-                </a:r>
-                <a14:m>
-                  <m:oMath xmlns:m="http://schemas.openxmlformats.org/officeDocument/2006/math">
-                    <m:r>
-                      <m:t>V</m:t>
-                    </m:r>
-                    <m:d>
-                      <m:dPr>
-                        <m:begChr m:val="("/>
-                        <m:sepChr m:val=""/>
-                        <m:endChr m:val=")"/>
-                        <m:grow/>
-                      </m:dPr>
-                      <m:e>
-                        <m:r>
-                          <m:t>k</m:t>
-                        </m:r>
-                        <m:r>
-                          <m:rPr>
-                            <m:sty m:val="p"/>
-                          </m:rPr>
-                          <m:t>,</m:t>
-                        </m:r>
-                        <m:sSup>
-                          <m:e>
-                            <m:acc>
-                              <m:accPr>
-                                <m:chr m:val="̂"/>
-                              </m:accPr>
-                              <m:e>
-                                <m:r>
-                                  <m:t>F</m:t>
-                                </m:r>
-                              </m:e>
-                            </m:acc>
-                          </m:e>
-                          <m:sup>
-                            <m:r>
-                              <m:t>k</m:t>
-                            </m:r>
-                          </m:sup>
-                        </m:sSup>
-                      </m:e>
-                    </m:d>
-                  </m:oMath>
-                </a14:m>
-                <a:r>
-                  <a:rPr/>
-                  <a:t> is the average residual sum of squares from a </a:t>
-                </a:r>
-                <a14:m>
-                  <m:oMath xmlns:m="http://schemas.openxmlformats.org/officeDocument/2006/math">
-                    <m:r>
-                      <m:t>k</m:t>
-                    </m:r>
-                  </m:oMath>
-                </a14:m>
-                <a:r>
-                  <a:rPr/>
-                  <a:t>-factor fit.</a:t>
-                </a:r>
-              </a:p>
-              <a:p>
-                <a:pPr lvl="0" indent="0" marL="0">
-                  <a:buNone/>
-                </a:pPr>
-                <a:r>
-                  <a:rPr/>
-                  <a:t>The penalty must vanish slower than </a:t>
-                </a:r>
-                <a14:m>
-                  <m:oMath xmlns:m="http://schemas.openxmlformats.org/officeDocument/2006/math">
-                    <m:r>
-                      <m:rPr>
-                        <m:sty m:val="p"/>
-                      </m:rPr>
-                      <m:t>min</m:t>
-                    </m:r>
-                    <m:sSup>
-                      <m:e>
-                        <m:d>
-                          <m:dPr>
-                            <m:begChr m:val="("/>
-                            <m:sepChr m:val=""/>
-                            <m:endChr m:val=")"/>
-                            <m:grow/>
-                          </m:dPr>
-                          <m:e>
-                            <m:r>
-                              <m:t>N</m:t>
-                            </m:r>
-                            <m:r>
-                              <m:rPr>
-                                <m:sty m:val="p"/>
-                              </m:rPr>
-                              <m:t>,</m:t>
-                            </m:r>
-                            <m:r>
-                              <m:t>T</m:t>
-                            </m:r>
-                          </m:e>
-                        </m:d>
-                      </m:e>
-                      <m:sup>
-                        <m:r>
-                          <m:rPr>
-                            <m:sty m:val="p"/>
-                          </m:rPr>
-                          <m:t>−</m:t>
-                        </m:r>
-                        <m:r>
-                          <m:t>1</m:t>
-                        </m:r>
-                      </m:sup>
-                    </m:sSup>
-                  </m:oMath>
-                </a14:m>
-                <a:r>
-                  <a:rPr/>
-                  <a:t>. </a:t>
-                </a:r>
-                <a14:m>
-                  <m:oMath xmlns:m="http://schemas.openxmlformats.org/officeDocument/2006/math">
-                    <m:r>
-                      <m:t>I</m:t>
-                    </m:r>
-                    <m:sSub>
-                      <m:e>
-                        <m:r>
-                          <m:t>C</m:t>
-                        </m:r>
-                      </m:e>
-                      <m:sub>
-                        <m:r>
-                          <m:t>p</m:t>
-                        </m:r>
-                        <m:r>
-                          <m:t>2</m:t>
-                        </m:r>
-                      </m:sub>
-                    </m:sSub>
-                  </m:oMath>
-                </a14:m>
-                <a:r>
-                  <a:rPr/>
-                  <a:t> and </a:t>
-                </a:r>
-                <a14:m>
-                  <m:oMath xmlns:m="http://schemas.openxmlformats.org/officeDocument/2006/math">
-                    <m:r>
-                      <m:t>I</m:t>
-                    </m:r>
-                    <m:sSub>
-                      <m:e>
-                        <m:r>
-                          <m:t>C</m:t>
-                        </m:r>
-                      </m:e>
-                      <m:sub>
-                        <m:r>
-                          <m:t>p</m:t>
-                        </m:r>
-                        <m:r>
-                          <m:t>3</m:t>
-                        </m:r>
-                      </m:sub>
-                    </m:sSub>
-                  </m:oMath>
-                </a14:m>
-                <a:r>
-                  <a:rPr/>
-                  <a:t> use alternative penalty forms.</a:t>
-                </a:r>
-              </a:p>
-              <a:p>
-                <a:pPr lvl="0" indent="0" marL="0">
-                  <a:buNone/>
-                </a:pPr>
-                <a:r>
-                  <a:rPr b="1"/>
-                  <a:t>Report all three.</a:t>
-                </a:r>
-                <a:r>
-                  <a:rPr/>
-                  <a:t> If they disagree, say so.</a:t>
-                </a:r>
-              </a:p>
             </p:txBody>
           </p:sp>
         </mc:Choice>
@@ -5392,7 +8441,7 @@
 </p:sld>
 </file>
 
-<file path=ppt/slides/slide21.xml><?xml version="1.0" encoding="utf-8"?>
+<file path=ppt/slides/slide35.xml><?xml version="1.0" encoding="utf-8"?>
 <p:sld xmlns:a="http://schemas.openxmlformats.org/drawingml/2006/main" xmlns:r="http://schemas.openxmlformats.org/officeDocument/2006/relationships" xmlns:p="http://schemas.openxmlformats.org/presentationml/2006/main">
   <p:cSld>
     <p:spTree>
@@ -5429,7 +8478,1253 @@
             </a:pPr>
             <a:r>
               <a:rPr/>
-              <a:t>Cross-checks</a:t>
+              <a:t>Compute all of them and look</a:t>
+            </a:r>
+          </a:p>
+        </p:txBody>
+      </p:sp>
+      <p:sp>
+        <p:nvSpPr>
+          <p:cNvPr id="3" name="Content Placeholder 2"/>
+          <p:cNvSpPr>
+            <a:spLocks noGrp="1"/>
+          </p:cNvSpPr>
+          <p:nvPr>
+            <p:ph idx="1"/>
+          </p:nvPr>
+        </p:nvSpPr>
+        <p:spPr/>
+        <p:txBody>
+          <a:bodyPr/>
+          <a:lstStyle/>
+          <a:p>
+            <a:pPr lvl="0" indent="0">
+              <a:buNone/>
+            </a:pPr>
+            <a:r>
+              <a:rPr>
+                <a:latin typeface="Courier"/>
+              </a:rPr>
+              <a:t>N_, T_p </a:t>
+            </a:r>
+            <a:r>
+              <a:rPr>
+                <a:solidFill>
+                  <a:srgbClr val="666666"/>
+                </a:solidFill>
+                <a:latin typeface="Courier"/>
+              </a:rPr>
+              <a:t>=</a:t>
+            </a:r>
+            <a:r>
+              <a:rPr>
+                <a:latin typeface="Courier"/>
+              </a:rPr>
+              <a:t> NIND, NOBS          </a:t>
+            </a:r>
+            <a:r>
+              <a:rPr i="1">
+                <a:solidFill>
+                  <a:srgbClr val="60A0B0"/>
+                </a:solidFill>
+                <a:latin typeface="Courier"/>
+              </a:rPr>
+              <a:t># N series, T observations</a:t>
+            </a:r>
+            <a:br/>
+            <a:r>
+              <a:rPr b="1">
+                <a:solidFill>
+                  <a:srgbClr val="007020"/>
+                </a:solidFill>
+                <a:latin typeface="Courier"/>
+              </a:rPr>
+              <a:t>def</a:t>
+            </a:r>
+            <a:r>
+              <a:rPr>
+                <a:latin typeface="Courier"/>
+              </a:rPr>
+              <a:t> V(k):</a:t>
+            </a:r>
+            <a:br/>
+            <a:r>
+              <a:rPr>
+                <a:latin typeface="Courier"/>
+              </a:rPr>
+              <a:t>    </a:t>
+            </a:r>
+            <a:r>
+              <a:rPr i="1">
+                <a:solidFill>
+                  <a:srgbClr val="60A0B0"/>
+                </a:solidFill>
+                <a:latin typeface="Courier"/>
+              </a:rPr>
+              <a:t>"""Average residual sum of squares from a k-factor fit."""</a:t>
+            </a:r>
+            <a:br/>
+            <a:r>
+              <a:rPr>
+                <a:latin typeface="Courier"/>
+              </a:rPr>
+              <a:t>    </a:t>
+            </a:r>
+            <a:r>
+              <a:rPr b="1">
+                <a:solidFill>
+                  <a:srgbClr val="007020"/>
+                </a:solidFill>
+                <a:latin typeface="Courier"/>
+              </a:rPr>
+              <a:t>return</a:t>
+            </a:r>
+            <a:r>
+              <a:rPr>
+                <a:latin typeface="Courier"/>
+              </a:rPr>
+              <a:t> ((Z </a:t>
+            </a:r>
+            <a:r>
+              <a:rPr>
+                <a:solidFill>
+                  <a:srgbClr val="666666"/>
+                </a:solidFill>
+                <a:latin typeface="Courier"/>
+              </a:rPr>
+              <a:t>-</a:t>
+            </a:r>
+            <a:r>
+              <a:rPr>
+                <a:latin typeface="Courier"/>
+              </a:rPr>
+              <a:t> reconstruct(k))</a:t>
+            </a:r>
+            <a:r>
+              <a:rPr>
+                <a:solidFill>
+                  <a:srgbClr val="666666"/>
+                </a:solidFill>
+                <a:latin typeface="Courier"/>
+              </a:rPr>
+              <a:t>**</a:t>
+            </a:r>
+            <a:r>
+              <a:rPr>
+                <a:solidFill>
+                  <a:srgbClr val="40A070"/>
+                </a:solidFill>
+                <a:latin typeface="Courier"/>
+              </a:rPr>
+              <a:t>2</a:t>
+            </a:r>
+            <a:r>
+              <a:rPr>
+                <a:latin typeface="Courier"/>
+              </a:rPr>
+              <a:t>).mean()</a:t>
+            </a:r>
+            <a:br/>
+            <a:br/>
+            <a:r>
+              <a:rPr>
+                <a:latin typeface="Courier"/>
+              </a:rPr>
+              <a:t>c </a:t>
+            </a:r>
+            <a:r>
+              <a:rPr>
+                <a:solidFill>
+                  <a:srgbClr val="666666"/>
+                </a:solidFill>
+                <a:latin typeface="Courier"/>
+              </a:rPr>
+              <a:t>=</a:t>
+            </a:r>
+            <a:r>
+              <a:rPr>
+                <a:latin typeface="Courier"/>
+              </a:rPr>
+              <a:t> (N_ </a:t>
+            </a:r>
+            <a:r>
+              <a:rPr>
+                <a:solidFill>
+                  <a:srgbClr val="666666"/>
+                </a:solidFill>
+                <a:latin typeface="Courier"/>
+              </a:rPr>
+              <a:t>+</a:t>
+            </a:r>
+            <a:r>
+              <a:rPr>
+                <a:latin typeface="Courier"/>
+              </a:rPr>
+              <a:t> T_p) </a:t>
+            </a:r>
+            <a:r>
+              <a:rPr>
+                <a:solidFill>
+                  <a:srgbClr val="666666"/>
+                </a:solidFill>
+                <a:latin typeface="Courier"/>
+              </a:rPr>
+              <a:t>/</a:t>
+            </a:r>
+            <a:r>
+              <a:rPr>
+                <a:latin typeface="Courier"/>
+              </a:rPr>
+              <a:t> (N_ </a:t>
+            </a:r>
+            <a:r>
+              <a:rPr>
+                <a:solidFill>
+                  <a:srgbClr val="666666"/>
+                </a:solidFill>
+                <a:latin typeface="Courier"/>
+              </a:rPr>
+              <a:t>*</a:t>
+            </a:r>
+            <a:r>
+              <a:rPr>
+                <a:latin typeface="Courier"/>
+              </a:rPr>
+              <a:t> T_p)</a:t>
+            </a:r>
+            <a:br/>
+            <a:r>
+              <a:rPr>
+                <a:latin typeface="Courier"/>
+              </a:rPr>
+              <a:t>ks </a:t>
+            </a:r>
+            <a:r>
+              <a:rPr>
+                <a:solidFill>
+                  <a:srgbClr val="666666"/>
+                </a:solidFill>
+                <a:latin typeface="Courier"/>
+              </a:rPr>
+              <a:t>=</a:t>
+            </a:r>
+            <a:r>
+              <a:rPr>
+                <a:latin typeface="Courier"/>
+              </a:rPr>
+              <a:t> np.arange(</a:t>
+            </a:r>
+            <a:r>
+              <a:rPr>
+                <a:solidFill>
+                  <a:srgbClr val="40A070"/>
+                </a:solidFill>
+                <a:latin typeface="Courier"/>
+              </a:rPr>
+              <a:t>1</a:t>
+            </a:r>
+            <a:r>
+              <a:rPr>
+                <a:latin typeface="Courier"/>
+              </a:rPr>
+              <a:t>, </a:t>
+            </a:r>
+            <a:r>
+              <a:rPr>
+                <a:solidFill>
+                  <a:srgbClr val="40A070"/>
+                </a:solidFill>
+                <a:latin typeface="Courier"/>
+              </a:rPr>
+              <a:t>9</a:t>
+            </a:r>
+            <a:r>
+              <a:rPr>
+                <a:latin typeface="Courier"/>
+              </a:rPr>
+              <a:t>)</a:t>
+            </a:r>
+            <a:br/>
+            <a:r>
+              <a:rPr>
+                <a:latin typeface="Courier"/>
+              </a:rPr>
+              <a:t>ic1 </a:t>
+            </a:r>
+            <a:r>
+              <a:rPr>
+                <a:solidFill>
+                  <a:srgbClr val="666666"/>
+                </a:solidFill>
+                <a:latin typeface="Courier"/>
+              </a:rPr>
+              <a:t>=</a:t>
+            </a:r>
+            <a:r>
+              <a:rPr>
+                <a:latin typeface="Courier"/>
+              </a:rPr>
+              <a:t> [np.log(V(k)) </a:t>
+            </a:r>
+            <a:r>
+              <a:rPr>
+                <a:solidFill>
+                  <a:srgbClr val="666666"/>
+                </a:solidFill>
+                <a:latin typeface="Courier"/>
+              </a:rPr>
+              <a:t>+</a:t>
+            </a:r>
+            <a:r>
+              <a:rPr>
+                <a:latin typeface="Courier"/>
+              </a:rPr>
+              <a:t> k </a:t>
+            </a:r>
+            <a:r>
+              <a:rPr>
+                <a:solidFill>
+                  <a:srgbClr val="666666"/>
+                </a:solidFill>
+                <a:latin typeface="Courier"/>
+              </a:rPr>
+              <a:t>*</a:t>
+            </a:r>
+            <a:r>
+              <a:rPr>
+                <a:latin typeface="Courier"/>
+              </a:rPr>
+              <a:t> c </a:t>
+            </a:r>
+            <a:r>
+              <a:rPr>
+                <a:solidFill>
+                  <a:srgbClr val="666666"/>
+                </a:solidFill>
+                <a:latin typeface="Courier"/>
+              </a:rPr>
+              <a:t>*</a:t>
+            </a:r>
+            <a:r>
+              <a:rPr>
+                <a:latin typeface="Courier"/>
+              </a:rPr>
+              <a:t> np.log(</a:t>
+            </a:r>
+            <a:r>
+              <a:rPr>
+                <a:solidFill>
+                  <a:srgbClr val="40A070"/>
+                </a:solidFill>
+                <a:latin typeface="Courier"/>
+              </a:rPr>
+              <a:t>1</a:t>
+            </a:r>
+            <a:r>
+              <a:rPr>
+                <a:latin typeface="Courier"/>
+              </a:rPr>
+              <a:t> </a:t>
+            </a:r>
+            <a:r>
+              <a:rPr>
+                <a:solidFill>
+                  <a:srgbClr val="666666"/>
+                </a:solidFill>
+                <a:latin typeface="Courier"/>
+              </a:rPr>
+              <a:t>/</a:t>
+            </a:r>
+            <a:r>
+              <a:rPr>
+                <a:latin typeface="Courier"/>
+              </a:rPr>
+              <a:t> c) </a:t>
+            </a:r>
+            <a:r>
+              <a:rPr b="1">
+                <a:solidFill>
+                  <a:srgbClr val="007020"/>
+                </a:solidFill>
+                <a:latin typeface="Courier"/>
+              </a:rPr>
+              <a:t>for</a:t>
+            </a:r>
+            <a:r>
+              <a:rPr>
+                <a:latin typeface="Courier"/>
+              </a:rPr>
+              <a:t> k </a:t>
+            </a:r>
+            <a:r>
+              <a:rPr b="1">
+                <a:solidFill>
+                  <a:srgbClr val="007020"/>
+                </a:solidFill>
+                <a:latin typeface="Courier"/>
+              </a:rPr>
+              <a:t>in</a:t>
+            </a:r>
+            <a:r>
+              <a:rPr>
+                <a:latin typeface="Courier"/>
+              </a:rPr>
+              <a:t> ks]</a:t>
+            </a:r>
+            <a:br/>
+            <a:r>
+              <a:rPr>
+                <a:latin typeface="Courier"/>
+              </a:rPr>
+              <a:t>ic2 </a:t>
+            </a:r>
+            <a:r>
+              <a:rPr>
+                <a:solidFill>
+                  <a:srgbClr val="666666"/>
+                </a:solidFill>
+                <a:latin typeface="Courier"/>
+              </a:rPr>
+              <a:t>=</a:t>
+            </a:r>
+            <a:r>
+              <a:rPr>
+                <a:latin typeface="Courier"/>
+              </a:rPr>
+              <a:t> [np.log(V(k)) </a:t>
+            </a:r>
+            <a:r>
+              <a:rPr>
+                <a:solidFill>
+                  <a:srgbClr val="666666"/>
+                </a:solidFill>
+                <a:latin typeface="Courier"/>
+              </a:rPr>
+              <a:t>+</a:t>
+            </a:r>
+            <a:r>
+              <a:rPr>
+                <a:latin typeface="Courier"/>
+              </a:rPr>
+              <a:t> k </a:t>
+            </a:r>
+            <a:r>
+              <a:rPr>
+                <a:solidFill>
+                  <a:srgbClr val="666666"/>
+                </a:solidFill>
+                <a:latin typeface="Courier"/>
+              </a:rPr>
+              <a:t>*</a:t>
+            </a:r>
+            <a:r>
+              <a:rPr>
+                <a:latin typeface="Courier"/>
+              </a:rPr>
+              <a:t> c </a:t>
+            </a:r>
+            <a:r>
+              <a:rPr>
+                <a:solidFill>
+                  <a:srgbClr val="666666"/>
+                </a:solidFill>
+                <a:latin typeface="Courier"/>
+              </a:rPr>
+              <a:t>*</a:t>
+            </a:r>
+            <a:r>
+              <a:rPr>
+                <a:latin typeface="Courier"/>
+              </a:rPr>
+              <a:t> np.log(</a:t>
+            </a:r>
+            <a:r>
+              <a:rPr>
+                <a:solidFill>
+                  <a:srgbClr val="008000"/>
+                </a:solidFill>
+                <a:latin typeface="Courier"/>
+              </a:rPr>
+              <a:t>min</a:t>
+            </a:r>
+            <a:r>
+              <a:rPr>
+                <a:latin typeface="Courier"/>
+              </a:rPr>
+              <a:t>(N_, T_p)) </a:t>
+            </a:r>
+            <a:r>
+              <a:rPr b="1">
+                <a:solidFill>
+                  <a:srgbClr val="007020"/>
+                </a:solidFill>
+                <a:latin typeface="Courier"/>
+              </a:rPr>
+              <a:t>for</a:t>
+            </a:r>
+            <a:r>
+              <a:rPr>
+                <a:latin typeface="Courier"/>
+              </a:rPr>
+              <a:t> k </a:t>
+            </a:r>
+            <a:r>
+              <a:rPr b="1">
+                <a:solidFill>
+                  <a:srgbClr val="007020"/>
+                </a:solidFill>
+                <a:latin typeface="Courier"/>
+              </a:rPr>
+              <a:t>in</a:t>
+            </a:r>
+            <a:r>
+              <a:rPr>
+                <a:latin typeface="Courier"/>
+              </a:rPr>
+              <a:t> ks]</a:t>
+            </a:r>
+            <a:br/>
+            <a:r>
+              <a:rPr>
+                <a:latin typeface="Courier"/>
+              </a:rPr>
+              <a:t>ic3 </a:t>
+            </a:r>
+            <a:r>
+              <a:rPr>
+                <a:solidFill>
+                  <a:srgbClr val="666666"/>
+                </a:solidFill>
+                <a:latin typeface="Courier"/>
+              </a:rPr>
+              <a:t>=</a:t>
+            </a:r>
+            <a:r>
+              <a:rPr>
+                <a:latin typeface="Courier"/>
+              </a:rPr>
+              <a:t> [np.log(V(k)) </a:t>
+            </a:r>
+            <a:r>
+              <a:rPr>
+                <a:solidFill>
+                  <a:srgbClr val="666666"/>
+                </a:solidFill>
+                <a:latin typeface="Courier"/>
+              </a:rPr>
+              <a:t>+</a:t>
+            </a:r>
+            <a:r>
+              <a:rPr>
+                <a:latin typeface="Courier"/>
+              </a:rPr>
+              <a:t> k </a:t>
+            </a:r>
+            <a:r>
+              <a:rPr>
+                <a:solidFill>
+                  <a:srgbClr val="666666"/>
+                </a:solidFill>
+                <a:latin typeface="Courier"/>
+              </a:rPr>
+              <a:t>*</a:t>
+            </a:r>
+            <a:r>
+              <a:rPr>
+                <a:latin typeface="Courier"/>
+              </a:rPr>
+              <a:t> np.log(</a:t>
+            </a:r>
+            <a:r>
+              <a:rPr>
+                <a:solidFill>
+                  <a:srgbClr val="008000"/>
+                </a:solidFill>
+                <a:latin typeface="Courier"/>
+              </a:rPr>
+              <a:t>min</a:t>
+            </a:r>
+            <a:r>
+              <a:rPr>
+                <a:latin typeface="Courier"/>
+              </a:rPr>
+              <a:t>(N_, T_p)) </a:t>
+            </a:r>
+            <a:r>
+              <a:rPr>
+                <a:solidFill>
+                  <a:srgbClr val="666666"/>
+                </a:solidFill>
+                <a:latin typeface="Courier"/>
+              </a:rPr>
+              <a:t>/</a:t>
+            </a:r>
+            <a:r>
+              <a:rPr>
+                <a:latin typeface="Courier"/>
+              </a:rPr>
+              <a:t> </a:t>
+            </a:r>
+            <a:r>
+              <a:rPr>
+                <a:solidFill>
+                  <a:srgbClr val="008000"/>
+                </a:solidFill>
+                <a:latin typeface="Courier"/>
+              </a:rPr>
+              <a:t>min</a:t>
+            </a:r>
+            <a:r>
+              <a:rPr>
+                <a:latin typeface="Courier"/>
+              </a:rPr>
+              <a:t>(N_, T_p) </a:t>
+            </a:r>
+            <a:r>
+              <a:rPr b="1">
+                <a:solidFill>
+                  <a:srgbClr val="007020"/>
+                </a:solidFill>
+                <a:latin typeface="Courier"/>
+              </a:rPr>
+              <a:t>for</a:t>
+            </a:r>
+            <a:r>
+              <a:rPr>
+                <a:latin typeface="Courier"/>
+              </a:rPr>
+              <a:t> k </a:t>
+            </a:r>
+            <a:r>
+              <a:rPr b="1">
+                <a:solidFill>
+                  <a:srgbClr val="007020"/>
+                </a:solidFill>
+                <a:latin typeface="Courier"/>
+              </a:rPr>
+              <a:t>in</a:t>
+            </a:r>
+            <a:r>
+              <a:rPr>
+                <a:latin typeface="Courier"/>
+              </a:rPr>
+              <a:t> ks]</a:t>
+            </a:r>
+            <a:br/>
+            <a:r>
+              <a:rPr>
+                <a:latin typeface="Courier"/>
+              </a:rPr>
+              <a:t>ahr </a:t>
+            </a:r>
+            <a:r>
+              <a:rPr>
+                <a:solidFill>
+                  <a:srgbClr val="666666"/>
+                </a:solidFill>
+                <a:latin typeface="Courier"/>
+              </a:rPr>
+              <a:t>=</a:t>
+            </a:r>
+            <a:r>
+              <a:rPr>
+                <a:latin typeface="Courier"/>
+              </a:rPr>
+              <a:t> [D[k </a:t>
+            </a:r>
+            <a:r>
+              <a:rPr>
+                <a:solidFill>
+                  <a:srgbClr val="666666"/>
+                </a:solidFill>
+                <a:latin typeface="Courier"/>
+              </a:rPr>
+              <a:t>-</a:t>
+            </a:r>
+            <a:r>
+              <a:rPr>
+                <a:latin typeface="Courier"/>
+              </a:rPr>
+              <a:t> </a:t>
+            </a:r>
+            <a:r>
+              <a:rPr>
+                <a:solidFill>
+                  <a:srgbClr val="40A070"/>
+                </a:solidFill>
+                <a:latin typeface="Courier"/>
+              </a:rPr>
+              <a:t>1</a:t>
+            </a:r>
+            <a:r>
+              <a:rPr>
+                <a:latin typeface="Courier"/>
+              </a:rPr>
+              <a:t>] </a:t>
+            </a:r>
+            <a:r>
+              <a:rPr>
+                <a:solidFill>
+                  <a:srgbClr val="666666"/>
+                </a:solidFill>
+                <a:latin typeface="Courier"/>
+              </a:rPr>
+              <a:t>/</a:t>
+            </a:r>
+            <a:r>
+              <a:rPr>
+                <a:latin typeface="Courier"/>
+              </a:rPr>
+              <a:t> D[k] </a:t>
+            </a:r>
+            <a:r>
+              <a:rPr b="1">
+                <a:solidFill>
+                  <a:srgbClr val="007020"/>
+                </a:solidFill>
+                <a:latin typeface="Courier"/>
+              </a:rPr>
+              <a:t>for</a:t>
+            </a:r>
+            <a:r>
+              <a:rPr>
+                <a:latin typeface="Courier"/>
+              </a:rPr>
+              <a:t> k </a:t>
+            </a:r>
+            <a:r>
+              <a:rPr b="1">
+                <a:solidFill>
+                  <a:srgbClr val="007020"/>
+                </a:solidFill>
+                <a:latin typeface="Courier"/>
+              </a:rPr>
+              <a:t>in</a:t>
+            </a:r>
+            <a:r>
+              <a:rPr>
+                <a:latin typeface="Courier"/>
+              </a:rPr>
+              <a:t> ks]</a:t>
+            </a:r>
+            <a:br/>
+            <a:br/>
+            <a:r>
+              <a:rPr>
+                <a:solidFill>
+                  <a:srgbClr val="008000"/>
+                </a:solidFill>
+                <a:latin typeface="Courier"/>
+              </a:rPr>
+              <a:t>print</a:t>
+            </a:r>
+            <a:r>
+              <a:rPr>
+                <a:latin typeface="Courier"/>
+              </a:rPr>
+              <a:t>(</a:t>
+            </a:r>
+            <a:r>
+              <a:rPr>
+                <a:solidFill>
+                  <a:srgbClr val="BB6688"/>
+                </a:solidFill>
+                <a:latin typeface="Courier"/>
+              </a:rPr>
+              <a:t>f"N = </a:t>
+            </a:r>
+            <a:r>
+              <a:rPr>
+                <a:solidFill>
+                  <a:srgbClr val="4070A0"/>
+                </a:solidFill>
+                <a:latin typeface="Courier"/>
+              </a:rPr>
+              <a:t>{</a:t>
+            </a:r>
+            <a:r>
+              <a:rPr>
+                <a:latin typeface="Courier"/>
+              </a:rPr>
+              <a:t>N_</a:t>
+            </a:r>
+            <a:r>
+              <a:rPr>
+                <a:solidFill>
+                  <a:srgbClr val="4070A0"/>
+                </a:solidFill>
+                <a:latin typeface="Courier"/>
+              </a:rPr>
+              <a:t>}</a:t>
+            </a:r>
+            <a:r>
+              <a:rPr>
+                <a:solidFill>
+                  <a:srgbClr val="BB6688"/>
+                </a:solidFill>
+                <a:latin typeface="Courier"/>
+              </a:rPr>
+              <a:t> series, T = </a:t>
+            </a:r>
+            <a:r>
+              <a:rPr>
+                <a:solidFill>
+                  <a:srgbClr val="4070A0"/>
+                </a:solidFill>
+                <a:latin typeface="Courier"/>
+              </a:rPr>
+              <a:t>{</a:t>
+            </a:r>
+            <a:r>
+              <a:rPr>
+                <a:latin typeface="Courier"/>
+              </a:rPr>
+              <a:t>T_p</a:t>
+            </a:r>
+            <a:r>
+              <a:rPr>
+                <a:solidFill>
+                  <a:srgbClr val="4070A0"/>
+                </a:solidFill>
+                <a:latin typeface="Courier"/>
+              </a:rPr>
+              <a:t>}</a:t>
+            </a:r>
+            <a:r>
+              <a:rPr>
+                <a:solidFill>
+                  <a:srgbClr val="BB6688"/>
+                </a:solidFill>
+                <a:latin typeface="Courier"/>
+              </a:rPr>
+              <a:t> observations"</a:t>
+            </a:r>
+            <a:r>
+              <a:rPr>
+                <a:latin typeface="Courier"/>
+              </a:rPr>
+              <a:t>)</a:t>
+            </a:r>
+            <a:br/>
+            <a:r>
+              <a:rPr>
+                <a:solidFill>
+                  <a:srgbClr val="008000"/>
+                </a:solidFill>
+                <a:latin typeface="Courier"/>
+              </a:rPr>
+              <a:t>print</a:t>
+            </a:r>
+            <a:r>
+              <a:rPr>
+                <a:latin typeface="Courier"/>
+              </a:rPr>
+              <a:t>(</a:t>
+            </a:r>
+            <a:r>
+              <a:rPr>
+                <a:solidFill>
+                  <a:srgbClr val="BB6688"/>
+                </a:solidFill>
+                <a:latin typeface="Courier"/>
+              </a:rPr>
+              <a:t>f"Bai-Ng IC_p1 minimised at k = </a:t>
+            </a:r>
+            <a:r>
+              <a:rPr>
+                <a:solidFill>
+                  <a:srgbClr val="4070A0"/>
+                </a:solidFill>
+                <a:latin typeface="Courier"/>
+              </a:rPr>
+              <a:t>{</a:t>
+            </a:r>
+            <a:r>
+              <a:rPr>
+                <a:latin typeface="Courier"/>
+              </a:rPr>
+              <a:t>ks[</a:t>
+            </a:r>
+            <a:r>
+              <a:rPr>
+                <a:solidFill>
+                  <a:srgbClr val="008000"/>
+                </a:solidFill>
+                <a:latin typeface="Courier"/>
+              </a:rPr>
+              <a:t>int</a:t>
+            </a:r>
+            <a:r>
+              <a:rPr>
+                <a:latin typeface="Courier"/>
+              </a:rPr>
+              <a:t>(np.argmin(ic1))]</a:t>
+            </a:r>
+            <a:r>
+              <a:rPr>
+                <a:solidFill>
+                  <a:srgbClr val="4070A0"/>
+                </a:solidFill>
+                <a:latin typeface="Courier"/>
+              </a:rPr>
+              <a:t>}</a:t>
+            </a:r>
+            <a:r>
+              <a:rPr>
+                <a:solidFill>
+                  <a:srgbClr val="BB6688"/>
+                </a:solidFill>
+                <a:latin typeface="Courier"/>
+              </a:rPr>
+              <a:t>"</a:t>
+            </a:r>
+            <a:br/>
+            <a:r>
+              <a:rPr>
+                <a:latin typeface="Courier"/>
+              </a:rPr>
+              <a:t>      </a:t>
+            </a:r>
+            <a:r>
+              <a:rPr>
+                <a:solidFill>
+                  <a:srgbClr val="BB6688"/>
+                </a:solidFill>
+                <a:latin typeface="Courier"/>
+              </a:rPr>
+              <a:t>f"   Ahn-Horenstein argmax at k = </a:t>
+            </a:r>
+            <a:r>
+              <a:rPr>
+                <a:solidFill>
+                  <a:srgbClr val="4070A0"/>
+                </a:solidFill>
+                <a:latin typeface="Courier"/>
+              </a:rPr>
+              <a:t>{</a:t>
+            </a:r>
+            <a:r>
+              <a:rPr>
+                <a:latin typeface="Courier"/>
+              </a:rPr>
+              <a:t>ks[</a:t>
+            </a:r>
+            <a:r>
+              <a:rPr>
+                <a:solidFill>
+                  <a:srgbClr val="008000"/>
+                </a:solidFill>
+                <a:latin typeface="Courier"/>
+              </a:rPr>
+              <a:t>int</a:t>
+            </a:r>
+            <a:r>
+              <a:rPr>
+                <a:latin typeface="Courier"/>
+              </a:rPr>
+              <a:t>(np.argmax(ahr))]</a:t>
+            </a:r>
+            <a:r>
+              <a:rPr>
+                <a:solidFill>
+                  <a:srgbClr val="4070A0"/>
+                </a:solidFill>
+                <a:latin typeface="Courier"/>
+              </a:rPr>
+              <a:t>}</a:t>
+            </a:r>
+            <a:r>
+              <a:rPr>
+                <a:solidFill>
+                  <a:srgbClr val="BB6688"/>
+                </a:solidFill>
+                <a:latin typeface="Courier"/>
+              </a:rPr>
+              <a:t>"</a:t>
+            </a:r>
+            <a:r>
+              <a:rPr>
+                <a:latin typeface="Courier"/>
+              </a:rPr>
+              <a:t>)</a:t>
+            </a:r>
+            <a:br/>
+            <a:r>
+              <a:rPr>
+                <a:solidFill>
+                  <a:srgbClr val="008000"/>
+                </a:solidFill>
+                <a:latin typeface="Courier"/>
+              </a:rPr>
+              <a:t>print</a:t>
+            </a:r>
+            <a:r>
+              <a:rPr>
+                <a:latin typeface="Courier"/>
+              </a:rPr>
+              <a:t>(</a:t>
+            </a:r>
+            <a:r>
+              <a:rPr>
+                <a:solidFill>
+                  <a:srgbClr val="BB6688"/>
+                </a:solidFill>
+                <a:latin typeface="Courier"/>
+              </a:rPr>
+              <a:t>f"cumulative variance: 3 components = </a:t>
+            </a:r>
+            <a:r>
+              <a:rPr>
+                <a:solidFill>
+                  <a:srgbClr val="4070A0"/>
+                </a:solidFill>
+                <a:latin typeface="Courier"/>
+              </a:rPr>
+              <a:t>{</a:t>
+            </a:r>
+            <a:r>
+              <a:rPr>
+                <a:latin typeface="Courier"/>
+              </a:rPr>
+              <a:t>np</a:t>
+            </a:r>
+            <a:r>
+              <a:rPr>
+                <a:solidFill>
+                  <a:srgbClr val="4070A0"/>
+                </a:solidFill>
+                <a:latin typeface="Courier"/>
+              </a:rPr>
+              <a:t>.</a:t>
+            </a:r>
+            <a:r>
+              <a:rPr>
+                <a:latin typeface="Courier"/>
+              </a:rPr>
+              <a:t>cumsum(VAR)[</a:t>
+            </a:r>
+            <a:r>
+              <a:rPr>
+                <a:solidFill>
+                  <a:srgbClr val="40A070"/>
+                </a:solidFill>
+                <a:latin typeface="Courier"/>
+              </a:rPr>
+              <a:t>2</a:t>
+            </a:r>
+            <a:r>
+              <a:rPr>
+                <a:latin typeface="Courier"/>
+              </a:rPr>
+              <a:t>]</a:t>
+            </a:r>
+            <a:r>
+              <a:rPr>
+                <a:solidFill>
+                  <a:srgbClr val="4070A0"/>
+                </a:solidFill>
+                <a:latin typeface="Courier"/>
+              </a:rPr>
+              <a:t>:.1%}</a:t>
+            </a:r>
+            <a:r>
+              <a:rPr>
+                <a:solidFill>
+                  <a:srgbClr val="BB6688"/>
+                </a:solidFill>
+                <a:latin typeface="Courier"/>
+              </a:rPr>
+              <a:t>"</a:t>
+            </a:r>
+            <a:r>
+              <a:rPr>
+                <a:latin typeface="Courier"/>
+              </a:rPr>
+              <a:t>)</a:t>
+            </a:r>
+          </a:p>
+          <a:p>
+            <a:pPr lvl="0" indent="0">
+              <a:buNone/>
+            </a:pPr>
+            <a:r>
+              <a:rPr>
+                <a:latin typeface="Courier"/>
+              </a:rPr>
+              <a:t>N = 13 series, T = 239 observations
+Bai-Ng IC_p1 minimised at k = 8   Ahn-Horenstein argmax at k = 5
+cumulative variance: 3 components = 83.4%</a:t>
+            </a:r>
+          </a:p>
+        </p:txBody>
+      </p:sp>
+    </p:spTree>
+  </p:cSld>
+</p:sld>
+</file>
+
+<file path=ppt/slides/slide36.xml><?xml version="1.0" encoding="utf-8"?>
+<p:sld xmlns:a="http://schemas.openxmlformats.org/drawingml/2006/main" xmlns:r="http://schemas.openxmlformats.org/officeDocument/2006/relationships" xmlns:p="http://schemas.openxmlformats.org/presentationml/2006/main">
+  <p:cSld>
+    <p:spTree>
+      <p:nvGrpSpPr>
+        <p:cNvPr id="1" name=""/>
+        <p:cNvGrpSpPr/>
+        <p:nvPr/>
+      </p:nvGrpSpPr>
+      <p:grpSpPr>
+        <a:xfrm>
+          <a:off x="0" y="0"/>
+          <a:ext cx="0" cy="0"/>
+          <a:chOff x="0" y="0"/>
+          <a:chExt cx="0" cy="0"/>
+        </a:xfrm>
+      </p:grpSpPr>
+      <p:sp>
+        <p:nvSpPr>
+          <p:cNvPr id="2" name="Title 1"/>
+          <p:cNvSpPr>
+            <a:spLocks noGrp="1"/>
+          </p:cNvSpPr>
+          <p:nvPr>
+            <p:ph type="title"/>
+          </p:nvPr>
+        </p:nvSpPr>
+        <p:spPr/>
+        <p:txBody>
+          <a:bodyPr/>
+          <a:lstStyle/>
+          <a:p>
+            <a:pPr lvl="0" indent="0" marL="0">
+              <a:buNone/>
+            </a:pPr>
+            <a:r>
+              <a:rPr/>
+              <a:t>Look at what happened</a:t>
+            </a:r>
+          </a:p>
+        </p:txBody>
+      </p:sp>
+      <p:pic>
+        <p:nvPicPr>
+          <p:cNvPr descr="slides_files/figure-pptx/cell-10-output-1.png" id="0" name="Picture 1"/>
+          <p:cNvPicPr>
+            <a:picLocks noGrp="1" noChangeAspect="1"/>
+          </p:cNvPicPr>
+          <p:nvPr/>
+        </p:nvPicPr>
+        <p:blipFill>
+          <a:blip r:embed="rId2"/>
+          <a:stretch>
+            <a:fillRect/>
+          </a:stretch>
+        </p:blipFill>
+        <p:spPr bwMode="auto">
+          <a:xfrm>
+            <a:off x="457200" y="1358900"/>
+            <a:ext cx="8229600" cy="3048000"/>
+          </a:xfrm>
+          <a:prstGeom prst="rect">
+            <a:avLst/>
+          </a:prstGeom>
+          <a:noFill/>
+          <a:ln w="9525">
+            <a:noFill/>
+            <a:headEnd/>
+            <a:tailEnd/>
+          </a:ln>
+        </p:spPr>
+      </p:pic>
+    </p:spTree>
+  </p:cSld>
+</p:sld>
+</file>
+
+<file path=ppt/slides/slide37.xml><?xml version="1.0" encoding="utf-8"?>
+<p:sld xmlns:a="http://schemas.openxmlformats.org/drawingml/2006/main" xmlns:r="http://schemas.openxmlformats.org/officeDocument/2006/relationships" xmlns:p="http://schemas.openxmlformats.org/presentationml/2006/main">
+  <p:cSld>
+    <p:spTree>
+      <p:nvGrpSpPr>
+        <p:cNvPr id="1" name=""/>
+        <p:cNvGrpSpPr/>
+        <p:nvPr/>
+      </p:nvGrpSpPr>
+      <p:grpSpPr>
+        <a:xfrm>
+          <a:off x="0" y="0"/>
+          <a:ext cx="0" cy="0"/>
+          <a:chOff x="0" y="0"/>
+          <a:chExt cx="0" cy="0"/>
+        </a:xfrm>
+      </p:grpSpPr>
+      <p:sp>
+        <p:nvSpPr>
+          <p:cNvPr id="3" name="Content Placeholder 2"/>
+          <p:cNvSpPr>
+            <a:spLocks noGrp="1"/>
+          </p:cNvSpPr>
+          <p:nvPr>
+            <p:ph idx="1"/>
+          </p:nvPr>
+        </p:nvSpPr>
+        <p:spPr/>
+        <p:txBody>
+          <a:bodyPr/>
+          <a:lstStyle/>
+          <a:p>
+            <a:pPr lvl="0" indent="0" marL="0">
+              <a:buNone/>
+            </a:pPr>
+            <a:r>
+              <a:rPr/>
+              <a:t>Scree says 3. Cumulative variance says 3. Ahn–Horenstein says 5. Bai–Ng is still falling at 8.</a:t>
+            </a:r>
+          </a:p>
+        </p:txBody>
+      </p:sp>
+    </p:spTree>
+  </p:cSld>
+</p:sld>
+</file>
+
+<file path=ppt/slides/slide38.xml><?xml version="1.0" encoding="utf-8"?>
+<p:sld xmlns:a="http://schemas.openxmlformats.org/drawingml/2006/main" xmlns:r="http://schemas.openxmlformats.org/officeDocument/2006/relationships" xmlns:p="http://schemas.openxmlformats.org/presentationml/2006/main">
+  <p:cSld>
+    <p:spTree>
+      <p:nvGrpSpPr>
+        <p:cNvPr id="1" name=""/>
+        <p:cNvGrpSpPr/>
+        <p:nvPr/>
+      </p:nvGrpSpPr>
+      <p:grpSpPr>
+        <a:xfrm>
+          <a:off x="0" y="0"/>
+          <a:ext cx="0" cy="0"/>
+          <a:chOff x="0" y="0"/>
+          <a:chExt cx="0" cy="0"/>
+        </a:xfrm>
+      </p:grpSpPr>
+      <p:sp>
+        <p:nvSpPr>
+          <p:cNvPr id="2" name="Title 1"/>
+          <p:cNvSpPr>
+            <a:spLocks noGrp="1"/>
+          </p:cNvSpPr>
+          <p:nvPr>
+            <p:ph type="title"/>
+          </p:nvPr>
+        </p:nvSpPr>
+        <p:spPr/>
+        <p:txBody>
+          <a:bodyPr/>
+          <a:lstStyle/>
+          <a:p>
+            <a:pPr lvl="0" indent="0" marL="0">
+              <a:buNone/>
+            </a:pPr>
+            <a:r>
+              <a:rPr/>
+              <a:t>Why Bai–Ng failed here, and what to do</a:t>
             </a:r>
           </a:p>
         </p:txBody>
@@ -5451,38 +9746,48 @@
               <a:bodyPr/>
               <a:lstStyle/>
               <a:p>
-                <a:pPr lvl="0"/>
+                <a:pPr lvl="0" indent="0" marL="0">
+                  <a:buNone/>
+                </a:pPr>
+                <a:r>
+                  <a:rPr/>
+                  <a:t>Bai–Ng is consistent as </a:t>
+                </a:r>
                 <a:r>
                   <a:rPr b="1"/>
-                  <a:t>Onatski’s test</a:t>
-                </a:r>
-              </a:p>
-              <a:p>
-                <a:pPr lvl="0"/>
+                  <a:t>both</a:t>
+                </a:r>
                 <a:r>
                   <a:rPr/>
-                  <a:t>the </a:t>
-                </a:r>
-                <a:r>
-                  <a:rPr b="1"/>
-                  <a:t>eigenvalue-ratio</a:t>
-                </a:r>
-                <a:r>
-                  <a:rPr/>
-                  <a:t> criterion of Ahn &amp; Horenstein: </a:t>
+                  <a:t> </a:t>
                 </a:r>
                 <a14:m>
                   <m:oMath xmlns:m="http://schemas.openxmlformats.org/officeDocument/2006/math">
-                    <m:acc>
-                      <m:accPr>
-                        <m:chr m:val="̂"/>
-                      </m:accPr>
-                      <m:e>
-                        <m:r>
-                          <m:t>r</m:t>
-                        </m:r>
-                      </m:e>
-                    </m:acc>
+                    <m:r>
+                      <m:t>N</m:t>
+                    </m:r>
+                  </m:oMath>
+                </a14:m>
+                <a:r>
+                  <a:rPr/>
+                  <a:t> and </a:t>
+                </a:r>
+                <a14:m>
+                  <m:oMath xmlns:m="http://schemas.openxmlformats.org/officeDocument/2006/math">
+                    <m:r>
+                      <m:t>T</m:t>
+                    </m:r>
+                  </m:oMath>
+                </a14:m>
+                <a:r>
+                  <a:rPr/>
+                  <a:t> grow. We have </a:t>
+                </a:r>
+                <a14:m>
+                  <m:oMath xmlns:m="http://schemas.openxmlformats.org/officeDocument/2006/math">
+                    <m:r>
+                      <m:t>T</m:t>
+                    </m:r>
                     <m:r>
                       <m:rPr>
                         <m:sty m:val="p"/>
@@ -5490,53 +9795,43 @@
                       <m:t>=</m:t>
                     </m:r>
                     <m:r>
-                      <m:rPr>
-                        <m:sty m:val="p"/>
-                      </m:rPr>
-                      <m:t>arg</m:t>
+                      <m:t>239</m:t>
                     </m:r>
-                    <m:sSub>
-                      <m:e>
-                        <m:r>
-                          <m:rPr>
-                            <m:sty m:val="p"/>
-                          </m:rPr>
-                          <m:t>max</m:t>
-                        </m:r>
-                      </m:e>
-                      <m:sub>
-                        <m:r>
-                          <m:t>k</m:t>
-                        </m:r>
-                      </m:sub>
-                    </m:sSub>
-                    <m:sSub>
-                      <m:e>
-                        <m:r>
-                          <m:t>d</m:t>
-                        </m:r>
-                      </m:e>
-                      <m:sub>
-                        <m:r>
-                          <m:t>k</m:t>
-                        </m:r>
-                      </m:sub>
-                    </m:sSub>
+                  </m:oMath>
+                </a14:m>
+                <a:r>
+                  <a:rPr/>
+                  <a:t> observations but only </a:t>
+                </a:r>
+                <a14:m>
+                  <m:oMath xmlns:m="http://schemas.openxmlformats.org/officeDocument/2006/math">
+                    <m:r>
+                      <m:t>N</m:t>
+                    </m:r>
                     <m:r>
                       <m:rPr>
                         <m:sty m:val="p"/>
                       </m:rPr>
-                      <m:t>/</m:t>
+                      <m:t>=</m:t>
                     </m:r>
-                    <m:sSub>
-                      <m:e>
+                    <m:r>
+                      <m:t>13</m:t>
+                    </m:r>
+                  </m:oMath>
+                </a14:m>
+                <a:r>
+                  <a:rPr/>
+                  <a:t> series. The penalty </a:t>
+                </a:r>
+                <a14:m>
+                  <m:oMath xmlns:m="http://schemas.openxmlformats.org/officeDocument/2006/math">
+                    <m:f>
+                      <m:fPr>
+                        <m:type m:val="bar"/>
+                      </m:fPr>
+                      <m:num>
                         <m:r>
-                          <m:t>d</m:t>
-                        </m:r>
-                      </m:e>
-                      <m:sub>
-                        <m:r>
-                          <m:t>k</m:t>
+                          <m:t>N</m:t>
                         </m:r>
                         <m:r>
                           <m:rPr>
@@ -5545,12 +9840,68 @@
                           <m:t>+</m:t>
                         </m:r>
                         <m:r>
-                          <m:t>1</m:t>
+                          <m:t>T</m:t>
                         </m:r>
-                      </m:sub>
-                    </m:sSub>
+                      </m:num>
+                      <m:den>
+                        <m:r>
+                          <m:t>N</m:t>
+                        </m:r>
+                        <m:r>
+                          <m:t>T</m:t>
+                        </m:r>
+                      </m:den>
+                    </m:f>
+                    <m:r>
+                      <m:rPr>
+                        <m:sty m:val="p"/>
+                      </m:rPr>
+                      <m:t>log</m:t>
+                    </m:r>
+                    <m:f>
+                      <m:fPr>
+                        <m:type m:val="bar"/>
+                      </m:fPr>
+                      <m:num>
+                        <m:r>
+                          <m:t>N</m:t>
+                        </m:r>
+                        <m:r>
+                          <m:t>T</m:t>
+                        </m:r>
+                      </m:num>
+                      <m:den>
+                        <m:r>
+                          <m:t>N</m:t>
+                        </m:r>
+                        <m:r>
+                          <m:rPr>
+                            <m:sty m:val="p"/>
+                          </m:rPr>
+                          <m:t>+</m:t>
+                        </m:r>
+                        <m:r>
+                          <m:t>T</m:t>
+                        </m:r>
+                      </m:den>
+                    </m:f>
                   </m:oMath>
                 </a14:m>
+                <a:r>
+                  <a:rPr/>
+                  <a:t> is tiny when </a:t>
+                </a:r>
+                <a14:m>
+                  <m:oMath xmlns:m="http://schemas.openxmlformats.org/officeDocument/2006/math">
+                    <m:r>
+                      <m:t>N</m:t>
+                    </m:r>
+                  </m:oMath>
+                </a14:m>
+                <a:r>
+                  <a:rPr/>
+                  <a:t> is small, so it never bites.</a:t>
+                </a:r>
               </a:p>
               <a:p>
                 <a:pPr lvl="0" indent="0" marL="0">
@@ -5558,15 +9909,46 @@
                 </a:pPr>
                 <a:r>
                   <a:rPr/>
-                  <a:t>The course spine was generated from </a:t>
+                  <a:t>Which is not a failure of the criterion. It is the criterion </a:t>
                 </a:r>
                 <a:r>
                   <a:rPr b="1"/>
-                  <a:t>three</a:t>
+                  <a:t>telling you</a:t>
                 </a:r>
                 <a:r>
                   <a:rPr/>
-                  <a:t> factors. Check what each criterion tells you — and notice that a criterion can be confidently wrong.</a:t>
+                  <a:t> your panel is not wide enough for it. Report all four numbers, say they disagree, and say which one your </a:t>
+                </a:r>
+                <a14:m>
+                  <m:oMath xmlns:m="http://schemas.openxmlformats.org/officeDocument/2006/math">
+                    <m:r>
+                      <m:t>N</m:t>
+                    </m:r>
+                  </m:oMath>
+                </a14:m>
+                <a:r>
+                  <a:rPr/>
+                  <a:t> and </a:t>
+                </a:r>
+                <a14:m>
+                  <m:oMath xmlns:m="http://schemas.openxmlformats.org/officeDocument/2006/math">
+                    <m:r>
+                      <m:t>T</m:t>
+                    </m:r>
+                  </m:oMath>
+                </a14:m>
+                <a:r>
+                  <a:rPr/>
+                  <a:t> support.</a:t>
+                </a:r>
+              </a:p>
+              <a:p>
+                <a:pPr lvl="0" indent="0" marL="0">
+                  <a:buNone/>
+                </a:pPr>
+                <a:r>
+                  <a:rPr/>
+                  <a:t>What loses marks: reporting one criterion, the one that gave the number you wanted.</a:t>
                 </a:r>
               </a:p>
             </p:txBody>
@@ -5578,7 +9960,7 @@
 </p:sld>
 </file>
 
-<file path=ppt/slides/slide22.xml><?xml version="1.0" encoding="utf-8"?>
+<file path=ppt/slides/slide39.xml><?xml version="1.0" encoding="utf-8"?>
 <p:sld xmlns:a="http://schemas.openxmlformats.org/drawingml/2006/main" xmlns:r="http://schemas.openxmlformats.org/officeDocument/2006/relationships" xmlns:p="http://schemas.openxmlformats.org/presentationml/2006/main">
   <p:cSld>
     <p:spTree>
@@ -5620,7 +10002,7 @@
             </a:pPr>
             <a:r>
               <a:rPr/>
-              <a:t>8.5 Diffusion-index forecasting</a:t>
+              <a:t>6 · Diffusion-index forecasting</a:t>
             </a:r>
           </a:p>
         </p:txBody>
@@ -5630,7 +10012,7 @@
 </p:sld>
 </file>
 
-<file path=ppt/slides/slide23.xml><?xml version="1.0" encoding="utf-8"?>
+<file path=ppt/slides/slide4.xml><?xml version="1.0" encoding="utf-8"?>
 <p:sld xmlns:a="http://schemas.openxmlformats.org/drawingml/2006/main" xmlns:r="http://schemas.openxmlformats.org/officeDocument/2006/relationships" xmlns:p="http://schemas.openxmlformats.org/presentationml/2006/main">
   <p:cSld>
     <p:spTree>
@@ -5667,6 +10049,140 @@
             </a:pPr>
             <a:r>
               <a:rPr/>
+              <a:t>Learning objectives</a:t>
+            </a:r>
+          </a:p>
+        </p:txBody>
+      </p:sp>
+      <p:sp>
+        <p:nvSpPr>
+          <p:cNvPr id="3" name="Content Placeholder 2"/>
+          <p:cNvSpPr>
+            <a:spLocks noGrp="1"/>
+          </p:cNvSpPr>
+          <p:nvPr>
+            <p:ph idx="1"/>
+          </p:nvPr>
+        </p:nvSpPr>
+        <p:spPr/>
+        <p:txBody>
+          <a:bodyPr/>
+          <a:lstStyle/>
+          <a:p>
+            <a:pPr lvl="0"/>
+            <a:r>
+              <a:rPr/>
+              <a:t>Derive PCA from a constrained maximisation and see </a:t>
+            </a:r>
+            <a:r>
+              <a:rPr b="1"/>
+              <a:t>why the answer is an eigenvector</a:t>
+            </a:r>
+          </a:p>
+          <a:p>
+            <a:pPr lvl="0"/>
+            <a:r>
+              <a:rPr/>
+              <a:t>State Eckart–Young and say exactly </a:t>
+            </a:r>
+            <a:r>
+              <a:rPr b="1"/>
+              <a:t>what you lose</a:t>
+            </a:r>
+            <a:r>
+              <a:rPr/>
+              <a:t> by truncating</a:t>
+            </a:r>
+          </a:p>
+          <a:p>
+            <a:pPr lvl="0"/>
+            <a:r>
+              <a:rPr/>
+              <a:t>Explain why extra series </a:t>
+            </a:r>
+            <a:r>
+              <a:rPr b="1"/>
+              <a:t>help</a:t>
+            </a:r>
+            <a:r>
+              <a:rPr/>
+              <a:t> factor estimation and </a:t>
+            </a:r>
+            <a:r>
+              <a:rPr b="1"/>
+              <a:t>hurt</a:t>
+            </a:r>
+            <a:r>
+              <a:rPr/>
+              <a:t> regression</a:t>
+            </a:r>
+          </a:p>
+          <a:p>
+            <a:pPr lvl="0"/>
+            <a:r>
+              <a:rPr/>
+              <a:t>Report a factor count from several criteria, and say what to do when they disagree</a:t>
+            </a:r>
+          </a:p>
+          <a:p>
+            <a:pPr lvl="0"/>
+            <a:r>
+              <a:rPr/>
+              <a:t>Apply Session 04’s rolling-origin discipline to the </a:t>
+            </a:r>
+            <a:r>
+              <a:rPr b="1"/>
+              <a:t>unsupervised</a:t>
+            </a:r>
+            <a:r>
+              <a:rPr/>
+              <a:t> step</a:t>
+            </a:r>
+          </a:p>
+        </p:txBody>
+      </p:sp>
+    </p:spTree>
+  </p:cSld>
+</p:sld>
+</file>
+
+<file path=ppt/slides/slide40.xml><?xml version="1.0" encoding="utf-8"?>
+<p:sld xmlns:a="http://schemas.openxmlformats.org/drawingml/2006/main" xmlns:r="http://schemas.openxmlformats.org/officeDocument/2006/relationships" xmlns:p="http://schemas.openxmlformats.org/presentationml/2006/main">
+  <p:cSld>
+    <p:spTree>
+      <p:nvGrpSpPr>
+        <p:cNvPr id="1" name=""/>
+        <p:cNvGrpSpPr/>
+        <p:nvPr/>
+      </p:nvGrpSpPr>
+      <p:grpSpPr>
+        <a:xfrm>
+          <a:off x="0" y="0"/>
+          <a:ext cx="0" cy="0"/>
+          <a:chOff x="0" y="0"/>
+          <a:chExt cx="0" cy="0"/>
+        </a:xfrm>
+      </p:grpSpPr>
+      <p:sp>
+        <p:nvSpPr>
+          <p:cNvPr id="2" name="Title 1"/>
+          <p:cNvSpPr>
+            <a:spLocks noGrp="1"/>
+          </p:cNvSpPr>
+          <p:nvPr>
+            <p:ph type="title"/>
+          </p:nvPr>
+        </p:nvSpPr>
+        <p:spPr/>
+        <p:txBody>
+          <a:bodyPr/>
+          <a:lstStyle/>
+          <a:p>
+            <a:pPr lvl="0" indent="0" marL="0">
+              <a:buNone/>
+            </a:pPr>
+            <a:r>
+              <a:rPr/>
               <a:t>Two stages</a:t>
             </a:r>
           </a:p>
@@ -5689,12 +10205,16 @@
               <a:bodyPr/>
               <a:lstStyle/>
               <a:p>
-                <a:pPr lvl="0" indent="-342900" marL="342900">
-                  <a:buAutoNum type="arabicPeriod"/>
+                <a:pPr lvl="0" indent="0" marL="0">
+                  <a:buNone/>
                 </a:pPr>
                 <a:r>
+                  <a:rPr b="1"/>
+                  <a:t>1.</a:t>
+                </a:r>
+                <a:r>
                   <a:rPr/>
-                  <a:t>Extract </a:t>
+                  <a:t> Extract </a:t>
                 </a:r>
                 <a14:m>
                   <m:oMath xmlns:m="http://schemas.openxmlformats.org/officeDocument/2006/math">
@@ -5736,12 +10256,16 @@
                 </a:r>
               </a:p>
               <a:p>
-                <a:pPr lvl="0" indent="-342900" marL="342900">
-                  <a:buAutoNum type="arabicPeriod"/>
+                <a:pPr lvl="0" indent="0" marL="0">
+                  <a:buNone/>
                 </a:pPr>
                 <a:r>
+                  <a:rPr b="1"/>
+                  <a:t>2.</a:t>
+                </a:r>
+                <a:r>
                   <a:rPr/>
-                  <a:t>Forecast the target with a small regression on the factors:</a:t>
+                  <a:t> Forecast the target with a small regression on the factors and a few own lags:</a:t>
                 </a:r>
               </a:p>
               <a:p>
@@ -5934,6 +10458,9 @@
                           </m:sSub>
                         </m:e>
                       </m:nary>
+                      <m:r>
+                        <m:t> </m:t>
+                      </m:r>
                       <m:sSub>
                         <m:e>
                           <m:r>
@@ -5962,6 +10489,15 @@
                   </m:oMathPara>
                 </a14:m>
               </a:p>
+              <a:p>
+                <a:pPr lvl="0" indent="0" marL="0">
+                  <a:buNone/>
+                </a:pPr>
+                <a:r>
+                  <a:rPr/>
+                  <a:t>Two hundred series enter stage 1. Three numbers leave it. Stage 2 is an ordinary regression you already know how to diagnose.</a:t>
+                </a:r>
+              </a:p>
             </p:txBody>
           </p:sp>
         </mc:Choice>
@@ -5971,7 +10507,7 @@
 </p:sld>
 </file>
 
-<file path=ppt/slides/slide24.xml><?xml version="1.0" encoding="utf-8"?>
+<file path=ppt/slides/slide41.xml><?xml version="1.0" encoding="utf-8"?>
 <p:sld xmlns:a="http://schemas.openxmlformats.org/drawingml/2006/main" xmlns:r="http://schemas.openxmlformats.org/officeDocument/2006/relationships" xmlns:p="http://schemas.openxmlformats.org/presentationml/2006/main">
   <p:cSld>
     <p:spTree>
@@ -6013,6 +10549,58 @@
           </a:p>
         </p:txBody>
       </p:sp>
+      <p:pic>
+        <p:nvPicPr>
+          <p:cNvPr descr="slides_files/figure-pptx/cell-11-output-1.png" id="0" name="Picture 1"/>
+          <p:cNvPicPr>
+            <a:picLocks noGrp="1" noChangeAspect="1"/>
+          </p:cNvPicPr>
+          <p:nvPr/>
+        </p:nvPicPr>
+        <p:blipFill>
+          <a:blip r:embed="rId2"/>
+          <a:stretch>
+            <a:fillRect/>
+          </a:stretch>
+        </p:blipFill>
+        <p:spPr bwMode="auto">
+          <a:xfrm>
+            <a:off x="457200" y="1257300"/>
+            <a:ext cx="8229600" cy="3263900"/>
+          </a:xfrm>
+          <a:prstGeom prst="rect">
+            <a:avLst/>
+          </a:prstGeom>
+          <a:noFill/>
+          <a:ln w="9525">
+            <a:noFill/>
+            <a:headEnd/>
+            <a:tailEnd/>
+          </a:ln>
+        </p:spPr>
+      </p:pic>
+    </p:spTree>
+  </p:cSld>
+</p:sld>
+</file>
+
+<file path=ppt/slides/slide42.xml><?xml version="1.0" encoding="utf-8"?>
+<p:sld xmlns:a="http://schemas.openxmlformats.org/drawingml/2006/main" xmlns:r="http://schemas.openxmlformats.org/officeDocument/2006/relationships" xmlns:p="http://schemas.openxmlformats.org/presentationml/2006/main">
+  <p:cSld>
+    <p:spTree>
+      <p:nvGrpSpPr>
+        <p:cNvPr id="1" name=""/>
+        <p:cNvGrpSpPr/>
+        <p:nvPr/>
+      </p:nvGrpSpPr>
+      <p:grpSpPr>
+        <a:xfrm>
+          <a:off x="0" y="0"/>
+          <a:ext cx="0" cy="0"/>
+          <a:chOff x="0" y="0"/>
+          <a:chExt cx="0" cy="0"/>
+        </a:xfrm>
+      </p:grpSpPr>
       <p:sp>
         <p:nvSpPr>
           <p:cNvPr id="3" name="Content Placeholder 2"/>
@@ -6028,46 +10616,20 @@
           <a:bodyPr/>
           <a:lstStyle/>
           <a:p>
-            <a:pPr lvl="0" indent="0" marL="1270000">
-              <a:buNone/>
-            </a:pPr>
-            <a:r>
-              <a:rPr sz="2000" b="1"/>
-              <a:t>Factors must be re-estimated at each forecast origin, using only data available at that time.</a:t>
-            </a:r>
-          </a:p>
-          <a:p>
             <a:pPr lvl="0" indent="0" marL="0">
               <a:buNone/>
             </a:pPr>
             <a:r>
               <a:rPr/>
-              <a:t>Extracting factors from the full sample and then backtesting is </a:t>
+              <a:t>Factors must be </a:t>
             </a:r>
             <a:r>
               <a:rPr b="1"/>
-              <a:t>look-ahead bias</a:t>
+              <a:t>re-estimated at every forecast origin</a:t>
             </a:r>
             <a:r>
               <a:rPr/>
-              <a:t> — and it is the single most common flaw in student factor-model projects.</a:t>
-            </a:r>
-          </a:p>
-          <a:p>
-            <a:pPr lvl="0" indent="0" marL="0">
-              <a:buNone/>
-            </a:pPr>
-            <a:r>
-              <a:rPr/>
-              <a:t>Session 04’s rolling-origin discipline applies to </a:t>
-            </a:r>
-            <a:r>
-              <a:rPr b="1"/>
-              <a:t>every</a:t>
-            </a:r>
-            <a:r>
-              <a:rPr/>
-              <a:t> step, including the unsupervised one.</a:t>
+              <a:t>, from data available at that time. Extracting from the full sample and then backtesting is look-ahead bias, and it is the single most common flaw in student factor-model projects.</a:t>
             </a:r>
           </a:p>
         </p:txBody>
@@ -6077,7 +10639,1477 @@
 </p:sld>
 </file>
 
-<file path=ppt/slides/slide25.xml><?xml version="1.0" encoding="utf-8"?>
+<file path=ppt/slides/slide43.xml><?xml version="1.0" encoding="utf-8"?>
+<p:sld xmlns:a="http://schemas.openxmlformats.org/drawingml/2006/main" xmlns:r="http://schemas.openxmlformats.org/officeDocument/2006/relationships" xmlns:p="http://schemas.openxmlformats.org/presentationml/2006/main">
+  <p:cSld>
+    <p:spTree>
+      <p:nvGrpSpPr>
+        <p:cNvPr id="1" name=""/>
+        <p:cNvGrpSpPr/>
+        <p:nvPr/>
+      </p:nvGrpSpPr>
+      <p:grpSpPr>
+        <a:xfrm>
+          <a:off x="0" y="0"/>
+          <a:ext cx="0" cy="0"/>
+          <a:chOff x="0" y="0"/>
+          <a:chExt cx="0" cy="0"/>
+        </a:xfrm>
+      </p:grpSpPr>
+      <p:sp>
+        <p:nvSpPr>
+          <p:cNvPr id="2" name="Title 1"/>
+          <p:cNvSpPr>
+            <a:spLocks noGrp="1"/>
+          </p:cNvSpPr>
+          <p:nvPr>
+            <p:ph type="title"/>
+          </p:nvPr>
+        </p:nvSpPr>
+        <p:spPr/>
+        <p:txBody>
+          <a:bodyPr/>
+          <a:lstStyle/>
+          <a:p>
+            <a:pPr lvl="0" indent="0" marL="0">
+              <a:buNone/>
+            </a:pPr>
+            <a:r>
+              <a:rPr/>
+              <a:t>Measure the leak on our panel</a:t>
+            </a:r>
+          </a:p>
+        </p:txBody>
+      </p:sp>
+      <p:sp>
+        <p:nvSpPr>
+          <p:cNvPr id="3" name="Content Placeholder 2"/>
+          <p:cNvSpPr>
+            <a:spLocks noGrp="1"/>
+          </p:cNvSpPr>
+          <p:nvPr>
+            <p:ph idx="1"/>
+          </p:nvPr>
+        </p:nvSpPr>
+        <p:spPr/>
+        <p:txBody>
+          <a:bodyPr/>
+          <a:lstStyle/>
+          <a:p>
+            <a:pPr lvl="0" indent="0">
+              <a:buNone/>
+            </a:pPr>
+            <a:r>
+              <a:rPr b="1">
+                <a:solidFill>
+                  <a:srgbClr val="007020"/>
+                </a:solidFill>
+                <a:latin typeface="Courier"/>
+              </a:rPr>
+              <a:t>def</a:t>
+            </a:r>
+            <a:r>
+              <a:rPr>
+                <a:latin typeface="Courier"/>
+              </a:rPr>
+              <a:t> diffusion_rmse(target, R</a:t>
+            </a:r>
+            <a:r>
+              <a:rPr>
+                <a:solidFill>
+                  <a:srgbClr val="666666"/>
+                </a:solidFill>
+                <a:latin typeface="Courier"/>
+              </a:rPr>
+              <a:t>=</a:t>
+            </a:r>
+            <a:r>
+              <a:rPr>
+                <a:solidFill>
+                  <a:srgbClr val="40A070"/>
+                </a:solidFill>
+                <a:latin typeface="Courier"/>
+              </a:rPr>
+              <a:t>3</a:t>
+            </a:r>
+            <a:r>
+              <a:rPr>
+                <a:latin typeface="Courier"/>
+              </a:rPr>
+              <a:t>, leaky</a:t>
+            </a:r>
+            <a:r>
+              <a:rPr>
+                <a:solidFill>
+                  <a:srgbClr val="666666"/>
+                </a:solidFill>
+                <a:latin typeface="Courier"/>
+              </a:rPr>
+              <a:t>=</a:t>
+            </a:r>
+            <a:r>
+              <a:rPr>
+                <a:solidFill>
+                  <a:srgbClr val="19177C"/>
+                </a:solidFill>
+                <a:latin typeface="Courier"/>
+              </a:rPr>
+              <a:t>False</a:t>
+            </a:r>
+            <a:r>
+              <a:rPr>
+                <a:latin typeface="Courier"/>
+              </a:rPr>
+              <a:t>, first</a:t>
+            </a:r>
+            <a:r>
+              <a:rPr>
+                <a:solidFill>
+                  <a:srgbClr val="666666"/>
+                </a:solidFill>
+                <a:latin typeface="Courier"/>
+              </a:rPr>
+              <a:t>=</a:t>
+            </a:r>
+            <a:r>
+              <a:rPr>
+                <a:solidFill>
+                  <a:srgbClr val="40A070"/>
+                </a:solidFill>
+                <a:latin typeface="Courier"/>
+              </a:rPr>
+              <a:t>6</a:t>
+            </a:r>
+            <a:r>
+              <a:rPr>
+                <a:latin typeface="Courier"/>
+              </a:rPr>
+              <a:t>):</a:t>
+            </a:r>
+            <a:br/>
+            <a:r>
+              <a:rPr>
+                <a:latin typeface="Courier"/>
+              </a:rPr>
+              <a:t>    dd </a:t>
+            </a:r>
+            <a:r>
+              <a:rPr>
+                <a:solidFill>
+                  <a:srgbClr val="666666"/>
+                </a:solidFill>
+                <a:latin typeface="Courier"/>
+              </a:rPr>
+              <a:t>=</a:t>
+            </a:r>
+            <a:r>
+              <a:rPr>
+                <a:latin typeface="Courier"/>
+              </a:rPr>
+              <a:t> panel.copy()</a:t>
+            </a:r>
+            <a:br/>
+            <a:r>
+              <a:rPr>
+                <a:latin typeface="Courier"/>
+              </a:rPr>
+              <a:t>    dd[</a:t>
+            </a:r>
+            <a:r>
+              <a:rPr>
+                <a:solidFill>
+                  <a:srgbClr val="4070A0"/>
+                </a:solidFill>
+                <a:latin typeface="Courier"/>
+              </a:rPr>
+              <a:t>"yn"</a:t>
+            </a:r>
+            <a:r>
+              <a:rPr>
+                <a:latin typeface="Courier"/>
+              </a:rPr>
+              <a:t>] </a:t>
+            </a:r>
+            <a:r>
+              <a:rPr>
+                <a:solidFill>
+                  <a:srgbClr val="666666"/>
+                </a:solidFill>
+                <a:latin typeface="Courier"/>
+              </a:rPr>
+              <a:t>=</a:t>
+            </a:r>
+            <a:r>
+              <a:rPr>
+                <a:latin typeface="Courier"/>
+              </a:rPr>
+              <a:t> dd.groupby(</a:t>
+            </a:r>
+            <a:r>
+              <a:rPr>
+                <a:solidFill>
+                  <a:srgbClr val="4070A0"/>
+                </a:solidFill>
+                <a:latin typeface="Courier"/>
+              </a:rPr>
+              <a:t>"geo"</a:t>
+            </a:r>
+            <a:r>
+              <a:rPr>
+                <a:latin typeface="Courier"/>
+              </a:rPr>
+              <a:t>)[target].shift(</a:t>
+            </a:r>
+            <a:r>
+              <a:rPr>
+                <a:solidFill>
+                  <a:srgbClr val="666666"/>
+                </a:solidFill>
+                <a:latin typeface="Courier"/>
+              </a:rPr>
+              <a:t>-</a:t>
+            </a:r>
+            <a:r>
+              <a:rPr>
+                <a:solidFill>
+                  <a:srgbClr val="40A070"/>
+                </a:solidFill>
+                <a:latin typeface="Courier"/>
+              </a:rPr>
+              <a:t>1</a:t>
+            </a:r>
+            <a:r>
+              <a:rPr>
+                <a:latin typeface="Courier"/>
+              </a:rPr>
+              <a:t>)</a:t>
+            </a:r>
+            <a:br/>
+            <a:r>
+              <a:rPr>
+                <a:latin typeface="Courier"/>
+              </a:rPr>
+              <a:t>    dd </a:t>
+            </a:r>
+            <a:r>
+              <a:rPr>
+                <a:solidFill>
+                  <a:srgbClr val="666666"/>
+                </a:solidFill>
+                <a:latin typeface="Courier"/>
+              </a:rPr>
+              <a:t>=</a:t>
+            </a:r>
+            <a:r>
+              <a:rPr>
+                <a:latin typeface="Courier"/>
+              </a:rPr>
+              <a:t> dd.dropna(subset</a:t>
+            </a:r>
+            <a:r>
+              <a:rPr>
+                <a:solidFill>
+                  <a:srgbClr val="666666"/>
+                </a:solidFill>
+                <a:latin typeface="Courier"/>
+              </a:rPr>
+              <a:t>=</a:t>
+            </a:r>
+            <a:r>
+              <a:rPr>
+                <a:latin typeface="Courier"/>
+              </a:rPr>
+              <a:t>[</a:t>
+            </a:r>
+            <a:r>
+              <a:rPr>
+                <a:solidFill>
+                  <a:srgbClr val="4070A0"/>
+                </a:solidFill>
+                <a:latin typeface="Courier"/>
+              </a:rPr>
+              <a:t>"yn"</a:t>
+            </a:r>
+            <a:r>
+              <a:rPr>
+                <a:latin typeface="Courier"/>
+              </a:rPr>
+              <a:t>])</a:t>
+            </a:r>
+            <a:br/>
+            <a:r>
+              <a:rPr>
+                <a:latin typeface="Courier"/>
+              </a:rPr>
+              <a:t>    </a:t>
+            </a:r>
+            <a:r>
+              <a:rPr b="1">
+                <a:solidFill>
+                  <a:srgbClr val="007020"/>
+                </a:solidFill>
+                <a:latin typeface="Courier"/>
+              </a:rPr>
+              <a:t>if</a:t>
+            </a:r>
+            <a:r>
+              <a:rPr>
+                <a:latin typeface="Courier"/>
+              </a:rPr>
+              <a:t> leaky:                                    </a:t>
+            </a:r>
+            <a:r>
+              <a:rPr i="1">
+                <a:solidFill>
+                  <a:srgbClr val="60A0B0"/>
+                </a:solidFill>
+                <a:latin typeface="Courier"/>
+              </a:rPr>
+              <a:t># WRONG: PCA sees the whole sample</a:t>
+            </a:r>
+            <a:br/>
+            <a:r>
+              <a:rPr>
+                <a:latin typeface="Courier"/>
+              </a:rPr>
+              <a:t>        Zf </a:t>
+            </a:r>
+            <a:r>
+              <a:rPr>
+                <a:solidFill>
+                  <a:srgbClr val="666666"/>
+                </a:solidFill>
+                <a:latin typeface="Courier"/>
+              </a:rPr>
+              <a:t>=</a:t>
+            </a:r>
+            <a:r>
+              <a:rPr>
+                <a:latin typeface="Courier"/>
+              </a:rPr>
+              <a:t> (dd[IND] </a:t>
+            </a:r>
+            <a:r>
+              <a:rPr>
+                <a:solidFill>
+                  <a:srgbClr val="666666"/>
+                </a:solidFill>
+                <a:latin typeface="Courier"/>
+              </a:rPr>
+              <a:t>-</a:t>
+            </a:r>
+            <a:r>
+              <a:rPr>
+                <a:latin typeface="Courier"/>
+              </a:rPr>
+              <a:t> dd[IND].mean()) </a:t>
+            </a:r>
+            <a:r>
+              <a:rPr>
+                <a:solidFill>
+                  <a:srgbClr val="666666"/>
+                </a:solidFill>
+                <a:latin typeface="Courier"/>
+              </a:rPr>
+              <a:t>/</a:t>
+            </a:r>
+            <a:r>
+              <a:rPr>
+                <a:latin typeface="Courier"/>
+              </a:rPr>
+              <a:t> dd[IND].std()</a:t>
+            </a:r>
+            <a:br/>
+            <a:r>
+              <a:rPr>
+                <a:latin typeface="Courier"/>
+              </a:rPr>
+              <a:t>        Fall </a:t>
+            </a:r>
+            <a:r>
+              <a:rPr>
+                <a:solidFill>
+                  <a:srgbClr val="666666"/>
+                </a:solidFill>
+                <a:latin typeface="Courier"/>
+              </a:rPr>
+              <a:t>=</a:t>
+            </a:r>
+            <a:r>
+              <a:rPr>
+                <a:latin typeface="Courier"/>
+              </a:rPr>
+              <a:t> PCA(n_components</a:t>
+            </a:r>
+            <a:r>
+              <a:rPr>
+                <a:solidFill>
+                  <a:srgbClr val="666666"/>
+                </a:solidFill>
+                <a:latin typeface="Courier"/>
+              </a:rPr>
+              <a:t>=</a:t>
+            </a:r>
+            <a:r>
+              <a:rPr>
+                <a:latin typeface="Courier"/>
+              </a:rPr>
+              <a:t>R).fit_transform(Zf)</a:t>
+            </a:r>
+            <a:br/>
+            <a:r>
+              <a:rPr>
+                <a:latin typeface="Courier"/>
+              </a:rPr>
+              <a:t>    num </a:t>
+            </a:r>
+            <a:r>
+              <a:rPr>
+                <a:solidFill>
+                  <a:srgbClr val="666666"/>
+                </a:solidFill>
+                <a:latin typeface="Courier"/>
+              </a:rPr>
+              <a:t>=</a:t>
+            </a:r>
+            <a:r>
+              <a:rPr>
+                <a:latin typeface="Courier"/>
+              </a:rPr>
+              <a:t> den </a:t>
+            </a:r>
+            <a:r>
+              <a:rPr>
+                <a:solidFill>
+                  <a:srgbClr val="666666"/>
+                </a:solidFill>
+                <a:latin typeface="Courier"/>
+              </a:rPr>
+              <a:t>=</a:t>
+            </a:r>
+            <a:r>
+              <a:rPr>
+                <a:latin typeface="Courier"/>
+              </a:rPr>
+              <a:t> </a:t>
+            </a:r>
+            <a:r>
+              <a:rPr>
+                <a:solidFill>
+                  <a:srgbClr val="40A070"/>
+                </a:solidFill>
+                <a:latin typeface="Courier"/>
+              </a:rPr>
+              <a:t>0</a:t>
+            </a:r>
+            <a:br/>
+            <a:r>
+              <a:rPr>
+                <a:latin typeface="Courier"/>
+              </a:rPr>
+              <a:t>    </a:t>
+            </a:r>
+            <a:r>
+              <a:rPr b="1">
+                <a:solidFill>
+                  <a:srgbClr val="007020"/>
+                </a:solidFill>
+                <a:latin typeface="Courier"/>
+              </a:rPr>
+              <a:t>for</a:t>
+            </a:r>
+            <a:r>
+              <a:rPr>
+                <a:latin typeface="Courier"/>
+              </a:rPr>
+              <a:t> t </a:t>
+            </a:r>
+            <a:r>
+              <a:rPr b="1">
+                <a:solidFill>
+                  <a:srgbClr val="007020"/>
+                </a:solidFill>
+                <a:latin typeface="Courier"/>
+              </a:rPr>
+              <a:t>in</a:t>
+            </a:r>
+            <a:r>
+              <a:rPr>
+                <a:latin typeface="Courier"/>
+              </a:rPr>
+              <a:t> </a:t>
+            </a:r>
+            <a:r>
+              <a:rPr>
+                <a:solidFill>
+                  <a:srgbClr val="008000"/>
+                </a:solidFill>
+                <a:latin typeface="Courier"/>
+              </a:rPr>
+              <a:t>sorted</a:t>
+            </a:r>
+            <a:r>
+              <a:rPr>
+                <a:latin typeface="Courier"/>
+              </a:rPr>
+              <a:t>(dd.time.unique())[first:]:</a:t>
+            </a:r>
+            <a:br/>
+            <a:r>
+              <a:rPr>
+                <a:latin typeface="Courier"/>
+              </a:rPr>
+              <a:t>        tr, te </a:t>
+            </a:r>
+            <a:r>
+              <a:rPr>
+                <a:solidFill>
+                  <a:srgbClr val="666666"/>
+                </a:solidFill>
+                <a:latin typeface="Courier"/>
+              </a:rPr>
+              <a:t>=</a:t>
+            </a:r>
+            <a:r>
+              <a:rPr>
+                <a:latin typeface="Courier"/>
+              </a:rPr>
+              <a:t> (dd.time </a:t>
+            </a:r>
+            <a:r>
+              <a:rPr>
+                <a:solidFill>
+                  <a:srgbClr val="666666"/>
+                </a:solidFill>
+                <a:latin typeface="Courier"/>
+              </a:rPr>
+              <a:t>&lt;</a:t>
+            </a:r>
+            <a:r>
+              <a:rPr>
+                <a:latin typeface="Courier"/>
+              </a:rPr>
+              <a:t> t).to_numpy(), (dd.time </a:t>
+            </a:r>
+            <a:r>
+              <a:rPr>
+                <a:solidFill>
+                  <a:srgbClr val="666666"/>
+                </a:solidFill>
+                <a:latin typeface="Courier"/>
+              </a:rPr>
+              <a:t>==</a:t>
+            </a:r>
+            <a:r>
+              <a:rPr>
+                <a:latin typeface="Courier"/>
+              </a:rPr>
+              <a:t> t).to_numpy()</a:t>
+            </a:r>
+            <a:br/>
+            <a:r>
+              <a:rPr>
+                <a:latin typeface="Courier"/>
+              </a:rPr>
+              <a:t>        </a:t>
+            </a:r>
+            <a:r>
+              <a:rPr b="1">
+                <a:solidFill>
+                  <a:srgbClr val="007020"/>
+                </a:solidFill>
+                <a:latin typeface="Courier"/>
+              </a:rPr>
+              <a:t>if</a:t>
+            </a:r>
+            <a:r>
+              <a:rPr>
+                <a:latin typeface="Courier"/>
+              </a:rPr>
+              <a:t> leaky:</a:t>
+            </a:r>
+            <a:br/>
+            <a:r>
+              <a:rPr>
+                <a:latin typeface="Courier"/>
+              </a:rPr>
+              <a:t>            Ftr, Fte </a:t>
+            </a:r>
+            <a:r>
+              <a:rPr>
+                <a:solidFill>
+                  <a:srgbClr val="666666"/>
+                </a:solidFill>
+                <a:latin typeface="Courier"/>
+              </a:rPr>
+              <a:t>=</a:t>
+            </a:r>
+            <a:r>
+              <a:rPr>
+                <a:latin typeface="Courier"/>
+              </a:rPr>
+              <a:t> Fall[tr], Fall[te]</a:t>
+            </a:r>
+            <a:br/>
+            <a:r>
+              <a:rPr>
+                <a:latin typeface="Courier"/>
+              </a:rPr>
+              <a:t>        </a:t>
+            </a:r>
+            <a:r>
+              <a:rPr b="1">
+                <a:solidFill>
+                  <a:srgbClr val="007020"/>
+                </a:solidFill>
+                <a:latin typeface="Courier"/>
+              </a:rPr>
+              <a:t>else</a:t>
+            </a:r>
+            <a:r>
+              <a:rPr>
+                <a:latin typeface="Courier"/>
+              </a:rPr>
+              <a:t>:                                    </a:t>
+            </a:r>
+            <a:r>
+              <a:rPr i="1">
+                <a:solidFill>
+                  <a:srgbClr val="60A0B0"/>
+                </a:solidFill>
+                <a:latin typeface="Courier"/>
+              </a:rPr>
+              <a:t># RIGHT: refit PCA on the past only</a:t>
+            </a:r>
+            <a:br/>
+            <a:r>
+              <a:rPr>
+                <a:latin typeface="Courier"/>
+              </a:rPr>
+              <a:t>            mu, sd </a:t>
+            </a:r>
+            <a:r>
+              <a:rPr>
+                <a:solidFill>
+                  <a:srgbClr val="666666"/>
+                </a:solidFill>
+                <a:latin typeface="Courier"/>
+              </a:rPr>
+              <a:t>=</a:t>
+            </a:r>
+            <a:r>
+              <a:rPr>
+                <a:latin typeface="Courier"/>
+              </a:rPr>
+              <a:t> dd.loc[tr, IND].mean(), dd.loc[tr, IND].std()</a:t>
+            </a:r>
+            <a:br/>
+            <a:r>
+              <a:rPr>
+                <a:latin typeface="Courier"/>
+              </a:rPr>
+              <a:t>            p </a:t>
+            </a:r>
+            <a:r>
+              <a:rPr>
+                <a:solidFill>
+                  <a:srgbClr val="666666"/>
+                </a:solidFill>
+                <a:latin typeface="Courier"/>
+              </a:rPr>
+              <a:t>=</a:t>
+            </a:r>
+            <a:r>
+              <a:rPr>
+                <a:latin typeface="Courier"/>
+              </a:rPr>
+              <a:t> PCA(n_components</a:t>
+            </a:r>
+            <a:r>
+              <a:rPr>
+                <a:solidFill>
+                  <a:srgbClr val="666666"/>
+                </a:solidFill>
+                <a:latin typeface="Courier"/>
+              </a:rPr>
+              <a:t>=</a:t>
+            </a:r>
+            <a:r>
+              <a:rPr>
+                <a:latin typeface="Courier"/>
+              </a:rPr>
+              <a:t>R).fit((dd.loc[tr, IND] </a:t>
+            </a:r>
+            <a:r>
+              <a:rPr>
+                <a:solidFill>
+                  <a:srgbClr val="666666"/>
+                </a:solidFill>
+                <a:latin typeface="Courier"/>
+              </a:rPr>
+              <a:t>-</a:t>
+            </a:r>
+            <a:r>
+              <a:rPr>
+                <a:latin typeface="Courier"/>
+              </a:rPr>
+              <a:t> mu) </a:t>
+            </a:r>
+            <a:r>
+              <a:rPr>
+                <a:solidFill>
+                  <a:srgbClr val="666666"/>
+                </a:solidFill>
+                <a:latin typeface="Courier"/>
+              </a:rPr>
+              <a:t>/</a:t>
+            </a:r>
+            <a:r>
+              <a:rPr>
+                <a:latin typeface="Courier"/>
+              </a:rPr>
+              <a:t> sd)</a:t>
+            </a:r>
+            <a:br/>
+            <a:r>
+              <a:rPr>
+                <a:latin typeface="Courier"/>
+              </a:rPr>
+              <a:t>            Ftr </a:t>
+            </a:r>
+            <a:r>
+              <a:rPr>
+                <a:solidFill>
+                  <a:srgbClr val="666666"/>
+                </a:solidFill>
+                <a:latin typeface="Courier"/>
+              </a:rPr>
+              <a:t>=</a:t>
+            </a:r>
+            <a:r>
+              <a:rPr>
+                <a:latin typeface="Courier"/>
+              </a:rPr>
+              <a:t> p.transform((dd.loc[tr, IND] </a:t>
+            </a:r>
+            <a:r>
+              <a:rPr>
+                <a:solidFill>
+                  <a:srgbClr val="666666"/>
+                </a:solidFill>
+                <a:latin typeface="Courier"/>
+              </a:rPr>
+              <a:t>-</a:t>
+            </a:r>
+            <a:r>
+              <a:rPr>
+                <a:latin typeface="Courier"/>
+              </a:rPr>
+              <a:t> mu) </a:t>
+            </a:r>
+            <a:r>
+              <a:rPr>
+                <a:solidFill>
+                  <a:srgbClr val="666666"/>
+                </a:solidFill>
+                <a:latin typeface="Courier"/>
+              </a:rPr>
+              <a:t>/</a:t>
+            </a:r>
+            <a:r>
+              <a:rPr>
+                <a:latin typeface="Courier"/>
+              </a:rPr>
+              <a:t> sd)</a:t>
+            </a:r>
+            <a:br/>
+            <a:r>
+              <a:rPr>
+                <a:latin typeface="Courier"/>
+              </a:rPr>
+              <a:t>            Fte </a:t>
+            </a:r>
+            <a:r>
+              <a:rPr>
+                <a:solidFill>
+                  <a:srgbClr val="666666"/>
+                </a:solidFill>
+                <a:latin typeface="Courier"/>
+              </a:rPr>
+              <a:t>=</a:t>
+            </a:r>
+            <a:r>
+              <a:rPr>
+                <a:latin typeface="Courier"/>
+              </a:rPr>
+              <a:t> p.transform((dd.loc[te, IND] </a:t>
+            </a:r>
+            <a:r>
+              <a:rPr>
+                <a:solidFill>
+                  <a:srgbClr val="666666"/>
+                </a:solidFill>
+                <a:latin typeface="Courier"/>
+              </a:rPr>
+              <a:t>-</a:t>
+            </a:r>
+            <a:r>
+              <a:rPr>
+                <a:latin typeface="Courier"/>
+              </a:rPr>
+              <a:t> mu) </a:t>
+            </a:r>
+            <a:r>
+              <a:rPr>
+                <a:solidFill>
+                  <a:srgbClr val="666666"/>
+                </a:solidFill>
+                <a:latin typeface="Courier"/>
+              </a:rPr>
+              <a:t>/</a:t>
+            </a:r>
+            <a:r>
+              <a:rPr>
+                <a:latin typeface="Courier"/>
+              </a:rPr>
+              <a:t> sd)</a:t>
+            </a:r>
+            <a:br/>
+            <a:r>
+              <a:rPr>
+                <a:latin typeface="Courier"/>
+              </a:rPr>
+              <a:t>        b </a:t>
+            </a:r>
+            <a:r>
+              <a:rPr>
+                <a:solidFill>
+                  <a:srgbClr val="666666"/>
+                </a:solidFill>
+                <a:latin typeface="Courier"/>
+              </a:rPr>
+              <a:t>=</a:t>
+            </a:r>
+            <a:r>
+              <a:rPr>
+                <a:latin typeface="Courier"/>
+              </a:rPr>
+              <a:t> LinearRegression().fit(Ftr, dd.loc[tr, </a:t>
+            </a:r>
+            <a:r>
+              <a:rPr>
+                <a:solidFill>
+                  <a:srgbClr val="4070A0"/>
+                </a:solidFill>
+                <a:latin typeface="Courier"/>
+              </a:rPr>
+              <a:t>"yn"</a:t>
+            </a:r>
+            <a:r>
+              <a:rPr>
+                <a:latin typeface="Courier"/>
+              </a:rPr>
+              <a:t>])</a:t>
+            </a:r>
+            <a:br/>
+            <a:r>
+              <a:rPr>
+                <a:latin typeface="Courier"/>
+              </a:rPr>
+              <a:t>        num </a:t>
+            </a:r>
+            <a:r>
+              <a:rPr>
+                <a:solidFill>
+                  <a:srgbClr val="666666"/>
+                </a:solidFill>
+                <a:latin typeface="Courier"/>
+              </a:rPr>
+              <a:t>+=</a:t>
+            </a:r>
+            <a:r>
+              <a:rPr>
+                <a:latin typeface="Courier"/>
+              </a:rPr>
+              <a:t> ((dd.loc[te, </a:t>
+            </a:r>
+            <a:r>
+              <a:rPr>
+                <a:solidFill>
+                  <a:srgbClr val="4070A0"/>
+                </a:solidFill>
+                <a:latin typeface="Courier"/>
+              </a:rPr>
+              <a:t>"yn"</a:t>
+            </a:r>
+            <a:r>
+              <a:rPr>
+                <a:latin typeface="Courier"/>
+              </a:rPr>
+              <a:t>] </a:t>
+            </a:r>
+            <a:r>
+              <a:rPr>
+                <a:solidFill>
+                  <a:srgbClr val="666666"/>
+                </a:solidFill>
+                <a:latin typeface="Courier"/>
+              </a:rPr>
+              <a:t>-</a:t>
+            </a:r>
+            <a:r>
+              <a:rPr>
+                <a:latin typeface="Courier"/>
+              </a:rPr>
+              <a:t> b.predict(Fte))</a:t>
+            </a:r>
+            <a:r>
+              <a:rPr>
+                <a:solidFill>
+                  <a:srgbClr val="666666"/>
+                </a:solidFill>
+                <a:latin typeface="Courier"/>
+              </a:rPr>
+              <a:t>**</a:t>
+            </a:r>
+            <a:r>
+              <a:rPr>
+                <a:solidFill>
+                  <a:srgbClr val="40A070"/>
+                </a:solidFill>
+                <a:latin typeface="Courier"/>
+              </a:rPr>
+              <a:t>2</a:t>
+            </a:r>
+            <a:r>
+              <a:rPr>
+                <a:latin typeface="Courier"/>
+              </a:rPr>
+              <a:t>).</a:t>
+            </a:r>
+            <a:r>
+              <a:rPr>
+                <a:solidFill>
+                  <a:srgbClr val="008000"/>
+                </a:solidFill>
+                <a:latin typeface="Courier"/>
+              </a:rPr>
+              <a:t>sum</a:t>
+            </a:r>
+            <a:r>
+              <a:rPr>
+                <a:latin typeface="Courier"/>
+              </a:rPr>
+              <a:t>()</a:t>
+            </a:r>
+            <a:r>
+              <a:rPr>
+                <a:solidFill>
+                  <a:srgbClr val="666666"/>
+                </a:solidFill>
+                <a:latin typeface="Courier"/>
+              </a:rPr>
+              <a:t>;</a:t>
+            </a:r>
+            <a:r>
+              <a:rPr>
+                <a:latin typeface="Courier"/>
+              </a:rPr>
+              <a:t> den </a:t>
+            </a:r>
+            <a:r>
+              <a:rPr>
+                <a:solidFill>
+                  <a:srgbClr val="666666"/>
+                </a:solidFill>
+                <a:latin typeface="Courier"/>
+              </a:rPr>
+              <a:t>+=</a:t>
+            </a:r>
+            <a:r>
+              <a:rPr>
+                <a:latin typeface="Courier"/>
+              </a:rPr>
+              <a:t> te.</a:t>
+            </a:r>
+            <a:r>
+              <a:rPr>
+                <a:solidFill>
+                  <a:srgbClr val="008000"/>
+                </a:solidFill>
+                <a:latin typeface="Courier"/>
+              </a:rPr>
+              <a:t>sum</a:t>
+            </a:r>
+            <a:r>
+              <a:rPr>
+                <a:latin typeface="Courier"/>
+              </a:rPr>
+              <a:t>()</a:t>
+            </a:r>
+            <a:br/>
+            <a:r>
+              <a:rPr>
+                <a:latin typeface="Courier"/>
+              </a:rPr>
+              <a:t>    </a:t>
+            </a:r>
+            <a:r>
+              <a:rPr b="1">
+                <a:solidFill>
+                  <a:srgbClr val="007020"/>
+                </a:solidFill>
+                <a:latin typeface="Courier"/>
+              </a:rPr>
+              <a:t>return</a:t>
+            </a:r>
+            <a:r>
+              <a:rPr>
+                <a:latin typeface="Courier"/>
+              </a:rPr>
+              <a:t> np.sqrt(num </a:t>
+            </a:r>
+            <a:r>
+              <a:rPr>
+                <a:solidFill>
+                  <a:srgbClr val="666666"/>
+                </a:solidFill>
+                <a:latin typeface="Courier"/>
+              </a:rPr>
+              <a:t>/</a:t>
+            </a:r>
+            <a:r>
+              <a:rPr>
+                <a:latin typeface="Courier"/>
+              </a:rPr>
+              <a:t> den)</a:t>
+            </a:r>
+            <a:br/>
+            <a:br/>
+            <a:r>
+              <a:rPr>
+                <a:latin typeface="Courier"/>
+              </a:rPr>
+              <a:t>lk </a:t>
+            </a:r>
+            <a:r>
+              <a:rPr>
+                <a:solidFill>
+                  <a:srgbClr val="666666"/>
+                </a:solidFill>
+                <a:latin typeface="Courier"/>
+              </a:rPr>
+              <a:t>=</a:t>
+            </a:r>
+            <a:r>
+              <a:rPr>
+                <a:latin typeface="Courier"/>
+              </a:rPr>
+              <a:t> diffusion_rmse(</a:t>
+            </a:r>
+            <a:r>
+              <a:rPr>
+                <a:solidFill>
+                  <a:srgbClr val="4070A0"/>
+                </a:solidFill>
+                <a:latin typeface="Courier"/>
+              </a:rPr>
+              <a:t>"elec_price_eur_kwh"</a:t>
+            </a:r>
+            <a:r>
+              <a:rPr>
+                <a:latin typeface="Courier"/>
+              </a:rPr>
+              <a:t>, leaky</a:t>
+            </a:r>
+            <a:r>
+              <a:rPr>
+                <a:solidFill>
+                  <a:srgbClr val="666666"/>
+                </a:solidFill>
+                <a:latin typeface="Courier"/>
+              </a:rPr>
+              <a:t>=</a:t>
+            </a:r>
+            <a:r>
+              <a:rPr>
+                <a:solidFill>
+                  <a:srgbClr val="19177C"/>
+                </a:solidFill>
+                <a:latin typeface="Courier"/>
+              </a:rPr>
+              <a:t>True</a:t>
+            </a:r>
+            <a:r>
+              <a:rPr>
+                <a:latin typeface="Courier"/>
+              </a:rPr>
+              <a:t>)</a:t>
+            </a:r>
+            <a:br/>
+            <a:r>
+              <a:rPr>
+                <a:latin typeface="Courier"/>
+              </a:rPr>
+              <a:t>hn </a:t>
+            </a:r>
+            <a:r>
+              <a:rPr>
+                <a:solidFill>
+                  <a:srgbClr val="666666"/>
+                </a:solidFill>
+                <a:latin typeface="Courier"/>
+              </a:rPr>
+              <a:t>=</a:t>
+            </a:r>
+            <a:r>
+              <a:rPr>
+                <a:latin typeface="Courier"/>
+              </a:rPr>
+              <a:t> diffusion_rmse(</a:t>
+            </a:r>
+            <a:r>
+              <a:rPr>
+                <a:solidFill>
+                  <a:srgbClr val="4070A0"/>
+                </a:solidFill>
+                <a:latin typeface="Courier"/>
+              </a:rPr>
+              <a:t>"elec_price_eur_kwh"</a:t>
+            </a:r>
+            <a:r>
+              <a:rPr>
+                <a:latin typeface="Courier"/>
+              </a:rPr>
+              <a:t>, leaky</a:t>
+            </a:r>
+            <a:r>
+              <a:rPr>
+                <a:solidFill>
+                  <a:srgbClr val="666666"/>
+                </a:solidFill>
+                <a:latin typeface="Courier"/>
+              </a:rPr>
+              <a:t>=</a:t>
+            </a:r>
+            <a:r>
+              <a:rPr>
+                <a:solidFill>
+                  <a:srgbClr val="19177C"/>
+                </a:solidFill>
+                <a:latin typeface="Courier"/>
+              </a:rPr>
+              <a:t>False</a:t>
+            </a:r>
+            <a:r>
+              <a:rPr>
+                <a:latin typeface="Courier"/>
+              </a:rPr>
+              <a:t>)</a:t>
+            </a:r>
+            <a:br/>
+            <a:r>
+              <a:rPr>
+                <a:solidFill>
+                  <a:srgbClr val="008000"/>
+                </a:solidFill>
+                <a:latin typeface="Courier"/>
+              </a:rPr>
+              <a:t>print</a:t>
+            </a:r>
+            <a:r>
+              <a:rPr>
+                <a:latin typeface="Courier"/>
+              </a:rPr>
+              <a:t>(</a:t>
+            </a:r>
+            <a:r>
+              <a:rPr>
+                <a:solidFill>
+                  <a:srgbClr val="BB6688"/>
+                </a:solidFill>
+                <a:latin typeface="Courier"/>
+              </a:rPr>
+              <a:t>f"factors from the full sample : RMSE </a:t>
+            </a:r>
+            <a:r>
+              <a:rPr>
+                <a:solidFill>
+                  <a:srgbClr val="4070A0"/>
+                </a:solidFill>
+                <a:latin typeface="Courier"/>
+              </a:rPr>
+              <a:t>{</a:t>
+            </a:r>
+            <a:r>
+              <a:rPr>
+                <a:latin typeface="Courier"/>
+              </a:rPr>
+              <a:t>lk</a:t>
+            </a:r>
+            <a:r>
+              <a:rPr>
+                <a:solidFill>
+                  <a:srgbClr val="4070A0"/>
+                </a:solidFill>
+                <a:latin typeface="Courier"/>
+              </a:rPr>
+              <a:t>:.4f}</a:t>
+            </a:r>
+            <a:r>
+              <a:rPr>
+                <a:solidFill>
+                  <a:srgbClr val="BB6688"/>
+                </a:solidFill>
+                <a:latin typeface="Courier"/>
+              </a:rPr>
+              <a:t>"</a:t>
+            </a:r>
+            <a:r>
+              <a:rPr>
+                <a:latin typeface="Courier"/>
+              </a:rPr>
+              <a:t>)</a:t>
+            </a:r>
+            <a:br/>
+            <a:r>
+              <a:rPr>
+                <a:solidFill>
+                  <a:srgbClr val="008000"/>
+                </a:solidFill>
+                <a:latin typeface="Courier"/>
+              </a:rPr>
+              <a:t>print</a:t>
+            </a:r>
+            <a:r>
+              <a:rPr>
+                <a:latin typeface="Courier"/>
+              </a:rPr>
+              <a:t>(</a:t>
+            </a:r>
+            <a:r>
+              <a:rPr>
+                <a:solidFill>
+                  <a:srgbClr val="BB6688"/>
+                </a:solidFill>
+                <a:latin typeface="Courier"/>
+              </a:rPr>
+              <a:t>f"factors refitted each origin : RMSE </a:t>
+            </a:r>
+            <a:r>
+              <a:rPr>
+                <a:solidFill>
+                  <a:srgbClr val="4070A0"/>
+                </a:solidFill>
+                <a:latin typeface="Courier"/>
+              </a:rPr>
+              <a:t>{</a:t>
+            </a:r>
+            <a:r>
+              <a:rPr>
+                <a:latin typeface="Courier"/>
+              </a:rPr>
+              <a:t>hn</a:t>
+            </a:r>
+            <a:r>
+              <a:rPr>
+                <a:solidFill>
+                  <a:srgbClr val="4070A0"/>
+                </a:solidFill>
+                <a:latin typeface="Courier"/>
+              </a:rPr>
+              <a:t>:.4f}</a:t>
+            </a:r>
+            <a:r>
+              <a:rPr>
+                <a:solidFill>
+                  <a:srgbClr val="BB6688"/>
+                </a:solidFill>
+                <a:latin typeface="Courier"/>
+              </a:rPr>
+              <a:t>      ratio </a:t>
+            </a:r>
+            <a:r>
+              <a:rPr>
+                <a:solidFill>
+                  <a:srgbClr val="4070A0"/>
+                </a:solidFill>
+                <a:latin typeface="Courier"/>
+              </a:rPr>
+              <a:t>{</a:t>
+            </a:r>
+            <a:r>
+              <a:rPr>
+                <a:latin typeface="Courier"/>
+              </a:rPr>
+              <a:t>lk</a:t>
+            </a:r>
+            <a:r>
+              <a:rPr>
+                <a:solidFill>
+                  <a:srgbClr val="666666"/>
+                </a:solidFill>
+                <a:latin typeface="Courier"/>
+              </a:rPr>
+              <a:t>/</a:t>
+            </a:r>
+            <a:r>
+              <a:rPr>
+                <a:latin typeface="Courier"/>
+              </a:rPr>
+              <a:t>hn</a:t>
+            </a:r>
+            <a:r>
+              <a:rPr>
+                <a:solidFill>
+                  <a:srgbClr val="4070A0"/>
+                </a:solidFill>
+                <a:latin typeface="Courier"/>
+              </a:rPr>
+              <a:t>:.3f}</a:t>
+            </a:r>
+            <a:r>
+              <a:rPr>
+                <a:solidFill>
+                  <a:srgbClr val="BB6688"/>
+                </a:solidFill>
+                <a:latin typeface="Courier"/>
+              </a:rPr>
+              <a:t>"</a:t>
+            </a:r>
+            <a:r>
+              <a:rPr>
+                <a:latin typeface="Courier"/>
+              </a:rPr>
+              <a:t>)</a:t>
+            </a:r>
+          </a:p>
+          <a:p>
+            <a:pPr lvl="0" indent="0">
+              <a:buNone/>
+            </a:pPr>
+            <a:r>
+              <a:rPr>
+                <a:latin typeface="Courier"/>
+              </a:rPr>
+              <a:t>factors from the full sample : RMSE 0.0290
+factors refitted each origin : RMSE 0.0285      ratio 1.019</a:t>
+            </a:r>
+          </a:p>
+        </p:txBody>
+      </p:sp>
+    </p:spTree>
+  </p:cSld>
+</p:sld>
+</file>
+
+<file path=ppt/slides/slide44.xml><?xml version="1.0" encoding="utf-8"?>
+<p:sld xmlns:a="http://schemas.openxmlformats.org/drawingml/2006/main" xmlns:r="http://schemas.openxmlformats.org/officeDocument/2006/relationships" xmlns:p="http://schemas.openxmlformats.org/presentationml/2006/main">
+  <p:cSld>
+    <p:spTree>
+      <p:nvGrpSpPr>
+        <p:cNvPr id="1" name=""/>
+        <p:cNvGrpSpPr/>
+        <p:nvPr/>
+      </p:nvGrpSpPr>
+      <p:grpSpPr>
+        <a:xfrm>
+          <a:off x="0" y="0"/>
+          <a:ext cx="0" cy="0"/>
+          <a:chOff x="0" y="0"/>
+          <a:chExt cx="0" cy="0"/>
+        </a:xfrm>
+      </p:grpSpPr>
+      <p:sp>
+        <p:nvSpPr>
+          <p:cNvPr id="2" name="Title 1"/>
+          <p:cNvSpPr>
+            <a:spLocks noGrp="1"/>
+          </p:cNvSpPr>
+          <p:nvPr>
+            <p:ph type="title"/>
+          </p:nvPr>
+        </p:nvSpPr>
+        <p:spPr/>
+        <p:txBody>
+          <a:bodyPr/>
+          <a:lstStyle/>
+          <a:p>
+            <a:pPr lvl="0" indent="0" marL="0">
+              <a:buNone/>
+            </a:pPr>
+            <a:r>
+              <a:rPr/>
+              <a:t>Be honest about that number</a:t>
+            </a:r>
+          </a:p>
+        </p:txBody>
+      </p:sp>
+      <p:sp>
+        <p:nvSpPr>
+          <p:cNvPr id="3" name="Content Placeholder 2"/>
+          <p:cNvSpPr>
+            <a:spLocks noGrp="1"/>
+          </p:cNvSpPr>
+          <p:nvPr>
+            <p:ph idx="1"/>
+          </p:nvPr>
+        </p:nvSpPr>
+        <p:spPr/>
+        <p:txBody>
+          <a:bodyPr/>
+          <a:lstStyle/>
+          <a:p>
+            <a:pPr lvl="0" indent="0" marL="0">
+              <a:buNone/>
+            </a:pPr>
+            <a:r>
+              <a:rPr/>
+              <a:t>On </a:t>
+            </a:r>
+            <a:r>
+              <a:rPr b="1"/>
+              <a:t>this</a:t>
+            </a:r>
+            <a:r>
+              <a:rPr/>
+              <a:t> panel the leak buys about 2%. The factor space is stable across thirteen years, so knowing the future rotation tells you almost nothing.</a:t>
+            </a:r>
+          </a:p>
+          <a:p>
+            <a:pPr lvl="0" indent="0" marL="0">
+              <a:buNone/>
+            </a:pPr>
+            <a:r>
+              <a:rPr/>
+              <a:t>That is not a licence. You cannot know in advance whether the leak is worth 2% or 40% — and it is 40% exactly when the factor structure shifts, which is the case you most want to forecast.</a:t>
+            </a:r>
+          </a:p>
+          <a:p>
+            <a:pPr lvl="0" indent="0" marL="0">
+              <a:buNone/>
+            </a:pPr>
+            <a:r>
+              <a:rPr/>
+              <a:t>The discipline is justified by the fact that </a:t>
+            </a:r>
+            <a:r>
+              <a:rPr b="1"/>
+              <a:t>you cannot audit it after the fact</a:t>
+            </a:r>
+            <a:r>
+              <a:rPr/>
+              <a:t>, not by the size of the measured gap on one dataset.</a:t>
+            </a:r>
+          </a:p>
+        </p:txBody>
+      </p:sp>
+    </p:spTree>
+  </p:cSld>
+</p:sld>
+</file>
+
+<file path=ppt/slides/slide45.xml><?xml version="1.0" encoding="utf-8"?>
 <p:sld xmlns:a="http://schemas.openxmlformats.org/drawingml/2006/main" xmlns:r="http://schemas.openxmlformats.org/officeDocument/2006/relationships" xmlns:p="http://schemas.openxmlformats.org/presentationml/2006/main">
   <p:cSld>
     <p:spTree>
@@ -6119,7 +12151,7 @@
             </a:pPr>
             <a:r>
               <a:rPr/>
-              <a:t>The practice</a:t>
+              <a:t>7 · Takeaways</a:t>
             </a:r>
           </a:p>
         </p:txBody>
@@ -6129,7 +12161,7 @@
 </p:sld>
 </file>
 
-<file path=ppt/slides/slide26.xml><?xml version="1.0" encoding="utf-8"?>
+<file path=ppt/slides/slide46.xml><?xml version="1.0" encoding="utf-8"?>
 <p:sld xmlns:a="http://schemas.openxmlformats.org/drawingml/2006/main" xmlns:r="http://schemas.openxmlformats.org/officeDocument/2006/relationships" xmlns:p="http://schemas.openxmlformats.org/presentationml/2006/main">
   <p:cSld>
     <p:spTree>
@@ -6166,7 +12198,7 @@
             </a:pPr>
             <a:r>
               <a:rPr/>
-              <a:t>What you do</a:t>
+              <a:t>Key takeaways</a:t>
             </a:r>
           </a:p>
         </p:txBody>
@@ -6193,7 +12225,15 @@
                 </a:pPr>
                 <a:r>
                   <a:rPr/>
-                  <a:t>Build the wide panel for your project; standardise it</a:t>
+                  <a:t>PCA is the </a:t>
+                </a:r>
+                <a:r>
+                  <a:rPr b="1"/>
+                  <a:t>solution</a:t>
+                </a:r>
+                <a:r>
+                  <a:rPr/>
+                  <a:t> to a constrained maximisation — hence eigenvectors, hence the SVD</a:t>
                 </a:r>
               </a:p>
               <a:p>
@@ -6202,15 +12242,7 @@
                 </a:pPr>
                 <a:r>
                   <a:rPr/>
-                  <a:t>Run PCA; report variance explained and </a:t>
-                </a:r>
-                <a:r>
-                  <a:rPr b="1"/>
-                  <a:t>all three</a:t>
-                </a:r>
-                <a:r>
-                  <a:rPr/>
-                  <a:t> Bai–Ng criteria</a:t>
+                  <a:t>Eckart–Young says truncation is optimal, and names what you discarded</a:t>
                 </a:r>
               </a:p>
               <a:p>
@@ -6219,26 +12251,27 @@
                 </a:pPr>
                 <a:r>
                   <a:rPr/>
-                  <a:t>Decide </a:t>
+                  <a:t>Ridge damps the small-</a:t>
                 </a:r>
                 <a14:m>
                   <m:oMath xmlns:m="http://schemas.openxmlformats.org/officeDocument/2006/math">
-                    <m:r>
-                      <m:t>r</m:t>
-                    </m:r>
+                    <m:sSub>
+                      <m:e>
+                        <m:r>
+                          <m:t>d</m:t>
+                        </m:r>
+                      </m:e>
+                      <m:sub>
+                        <m:r>
+                          <m:t>j</m:t>
+                        </m:r>
+                      </m:sub>
+                    </m:sSub>
                   </m:oMath>
                 </a14:m>
                 <a:r>
                   <a:rPr/>
-                  <a:t> in writing </a:t>
-                </a:r>
-                <a:r>
-                  <a:rPr b="1"/>
-                  <a:t>before</a:t>
-                </a:r>
-                <a:r>
-                  <a:rPr/>
-                  <a:t> looking at the forecast results</a:t>
+                  <a:t> directions; PCR truncates them. Same basis</a:t>
                 </a:r>
               </a:p>
               <a:p>
@@ -6247,32 +12280,33 @@
                 </a:pPr>
                 <a:r>
                   <a:rPr/>
-                  <a:t>Run a diffusion-index forecast, re-estimating factors at each origin</a:t>
+                  <a:t>More series </a:t>
+                </a:r>
+                <a:r>
+                  <a:rPr b="1"/>
+                  <a:t>help</a:t>
+                </a:r>
+                <a:r>
+                  <a:rPr/>
+                  <a:t> factor estimation because each is another reading of one object</a:t>
                 </a:r>
               </a:p>
               <a:p>
-                <a:pPr lvl="0" indent="0" marL="0">
-                  <a:buNone/>
+                <a:pPr lvl="0" indent="-342900" marL="342900">
+                  <a:buAutoNum type="arabicPeriod"/>
                 </a:pPr>
                 <a:r>
                   <a:rPr/>
-                  <a:t>State your </a:t>
-                </a:r>
-                <a:r>
-                  <a:rPr b="1"/>
-                  <a:t>normalisation</a:t>
-                </a:r>
+                  <a:t>Factors are identified only up to rotation — interpretation is a claim, not an estimate</a:t>
+                </a:r>
+              </a:p>
+              <a:p>
+                <a:pPr lvl="0" indent="-342900" marL="342900">
+                  <a:buAutoNum type="arabicPeriod"/>
+                </a:pPr>
                 <a:r>
                   <a:rPr/>
-                  <a:t> and your </a:t>
-                </a:r>
-                <a:r>
-                  <a:rPr b="1"/>
-                  <a:t>sign convention</a:t>
-                </a:r>
-                <a:r>
-                  <a:rPr/>
-                  <a:t>. Without them the loadings are not reproducible.</a:t>
+                  <a:t>Re-estimate factors at every forecast origin. Every time</a:t>
                 </a:r>
               </a:p>
             </p:txBody>
@@ -6284,7 +12318,7 @@
 </p:sld>
 </file>
 
-<file path=ppt/slides/slide27.xml><?xml version="1.0" encoding="utf-8"?>
+<file path=ppt/slides/slide47.xml><?xml version="1.0" encoding="utf-8"?>
 <p:sld xmlns:a="http://schemas.openxmlformats.org/drawingml/2006/main" xmlns:r="http://schemas.openxmlformats.org/officeDocument/2006/relationships" xmlns:p="http://schemas.openxmlformats.org/presentationml/2006/main">
   <p:cSld>
     <p:spTree>
@@ -6321,99 +12355,76 @@
             </a:pPr>
             <a:r>
               <a:rPr/>
-              <a:t>The two-minute report</a:t>
+              <a:t>What loses marks</a:t>
             </a:r>
           </a:p>
         </p:txBody>
       </p:sp>
-      <mc:AlternateContent xmlns:mc="http://schemas.openxmlformats.org/markup-compatibility/2006">
-        <mc:Choice xmlns:a14="http://schemas.microsoft.com/office/drawing/2010/main" Requires="a14">
-          <p:sp>
-            <p:nvSpPr>
-              <p:cNvPr id="3" name="Content Placeholder 2"/>
-              <p:cNvSpPr>
-                <a:spLocks noGrp="1"/>
-              </p:cNvSpPr>
-              <p:nvPr>
-                <p:ph idx="1"/>
-              </p:nvPr>
-            </p:nvSpPr>
-            <p:spPr/>
-            <p:txBody>
-              <a:bodyPr/>
-              <a:lstStyle/>
-              <a:p>
-                <a:pPr lvl="0" indent="-342900" marL="342900">
-                  <a:buAutoNum type="arabicPeriod"/>
-                </a:pPr>
-                <a:r>
-                  <a:rPr b="1"/>
-                  <a:t>What I did</a:t>
-                </a:r>
-                <a:r>
-                  <a:rPr/>
-                  <a:t> — the panel, the normalisation, how you chose </a:t>
-                </a:r>
-                <a14:m>
-                  <m:oMath xmlns:m="http://schemas.openxmlformats.org/officeDocument/2006/math">
-                    <m:r>
-                      <m:t>r</m:t>
-                    </m:r>
-                  </m:oMath>
-                </a14:m>
-              </a:p>
-              <a:p>
-                <a:pPr lvl="0" indent="-342900" marL="342900">
-                  <a:buAutoNum type="arabicPeriod"/>
-                </a:pPr>
-                <a:r>
-                  <a:rPr b="1"/>
-                  <a:t>The number</a:t>
-                </a:r>
-                <a:r>
-                  <a:rPr/>
-                  <a:t> — variance explained, and forecast error against a benchmark</a:t>
-                </a:r>
-              </a:p>
-              <a:p>
-                <a:pPr lvl="0" indent="-342900" marL="342900">
-                  <a:buAutoNum type="arabicPeriod"/>
-                </a:pPr>
-                <a:r>
-                  <a:rPr b="1"/>
-                  <a:t>The catch</a:t>
-                </a:r>
-                <a:r>
-                  <a:rPr/>
-                  <a:t> — that factors are coordinates, and naming them is an interpretation</a:t>
-                </a:r>
-              </a:p>
-              <a:p>
-                <a:pPr lvl="0" indent="0" marL="0">
-                  <a:buNone/>
-                </a:pPr>
-                <a:r>
-                  <a:rPr/>
-                  <a:t>Full brief: </a:t>
-                </a:r>
-                <a:r>
-                  <a:rPr>
-                    <a:hlinkClick r:id="rId2"/>
-                    <a:latin typeface="Courier"/>
-                  </a:rPr>
-                  <a:t>02-practice/README.md</a:t>
-                </a:r>
-              </a:p>
-            </p:txBody>
-          </p:sp>
-        </mc:Choice>
-      </mc:AlternateContent>
+      <p:sp>
+        <p:nvSpPr>
+          <p:cNvPr id="3" name="Content Placeholder 2"/>
+          <p:cNvSpPr>
+            <a:spLocks noGrp="1"/>
+          </p:cNvSpPr>
+          <p:nvPr>
+            <p:ph idx="1"/>
+          </p:nvPr>
+        </p:nvSpPr>
+        <p:spPr/>
+        <p:txBody>
+          <a:bodyPr/>
+          <a:lstStyle/>
+          <a:p>
+            <a:pPr lvl="0"/>
+            <a:r>
+              <a:rPr/>
+              <a:t>Running PCA on </a:t>
+            </a:r>
+            <a:r>
+              <a:rPr b="1"/>
+              <a:t>unstandardised</a:t>
+            </a:r>
+            <a:r>
+              <a:rPr/>
+              <a:t> columns</a:t>
+            </a:r>
+          </a:p>
+          <a:p>
+            <a:pPr lvl="0"/>
+            <a:r>
+              <a:rPr/>
+              <a:t>Naming a factor (“this is the business cycle”) without the rotation caveat</a:t>
+            </a:r>
+          </a:p>
+          <a:p>
+            <a:pPr lvl="0"/>
+            <a:r>
+              <a:rPr/>
+              <a:t>Reporting one factor-count criterion out of four</a:t>
+            </a:r>
+          </a:p>
+          <a:p>
+            <a:pPr lvl="0"/>
+            <a:r>
+              <a:rPr/>
+              <a:t>Extracting factors once on the full sample, then backtesting</a:t>
+            </a:r>
+          </a:p>
+          <a:p>
+            <a:pPr lvl="0"/>
+            <a:r>
+              <a:rPr/>
+              <a:t>Reporting “80% of variance explained” as if 80% were a rule rather than a choice</a:t>
+            </a:r>
+          </a:p>
+        </p:txBody>
+      </p:sp>
     </p:spTree>
   </p:cSld>
 </p:sld>
 </file>
 
-<file path=ppt/slides/slide3.xml><?xml version="1.0" encoding="utf-8"?>
+<file path=ppt/slides/slide48.xml><?xml version="1.0" encoding="utf-8"?>
 <p:sld xmlns:a="http://schemas.openxmlformats.org/drawingml/2006/main" xmlns:r="http://schemas.openxmlformats.org/officeDocument/2006/relationships" xmlns:p="http://schemas.openxmlformats.org/presentationml/2006/main">
   <p:cSld>
     <p:spTree>
@@ -6450,221 +12461,11 @@
             </a:pPr>
             <a:r>
               <a:rPr/>
-              <a:t>These slides follow the notes</a:t>
+              <a:t>Now, the practice</a:t>
             </a:r>
           </a:p>
         </p:txBody>
       </p:sp>
-      <p:graphicFrame>
-        <p:nvGraphicFramePr>
-          <p:cNvPr id="6" name="Content Placeholder 5"/>
-          <p:cNvGraphicFramePr>
-            <a:graphicFrameLocks noGrp="1"/>
-          </p:cNvGraphicFramePr>
-          <p:nvPr>
-            <p:ph idx="1"/>
-          </p:nvPr>
-        </p:nvGraphicFramePr>
-        <p:xfrm>
-          <a:off x="457200" y="1193800"/>
-          <a:ext cx="8229600" cy="3390900"/>
-        </p:xfrm>
-        <a:graphic>
-          <a:graphicData uri="http://schemas.openxmlformats.org/drawingml/2006/table">
-            <a:tbl>
-              <a:tblPr firstRow="0" bandRow="1">
-                <a:tableStyleId>{5C22544A-7EE6-4342-B048-85BDC9FD1C3A}</a:tableStyleId>
-              </a:tblPr>
-              <a:tblGrid>
-                <a:gridCol w="4114800"/>
-                <a:gridCol w="4114800"/>
-              </a:tblGrid>
-              <a:tr h="0">
-                <a:tc>
-                  <a:txBody>
-                    <a:bodyPr/>
-                    <a:lstStyle/>
-                    <a:p>
-                      <a:pPr lvl="0" indent="0" marL="0">
-                        <a:buNone/>
-                      </a:pPr>
-                      <a:r>
-                        <a:rPr b="1"/>
-                        <a:t>8.1</a:t>
-                      </a:r>
-                    </a:p>
-                  </a:txBody>
-                </a:tc>
-                <a:tc>
-                  <a:txBody>
-                    <a:bodyPr/>
-                    <a:lstStyle/>
-                    <a:p>
-                      <a:pPr lvl="0" indent="0" marL="0">
-                        <a:buNone/>
-                      </a:pPr>
-                      <a:r>
-                        <a:rPr/>
-                        <a:t>PCA as variance maximisation</a:t>
-                      </a:r>
-                    </a:p>
-                  </a:txBody>
-                </a:tc>
-              </a:tr>
-              <a:tr h="0">
-                <a:tc>
-                  <a:txBody>
-                    <a:bodyPr/>
-                    <a:lstStyle/>
-                    <a:p>
-                      <a:pPr lvl="0" indent="0" marL="0">
-                        <a:buNone/>
-                      </a:pPr>
-                      <a:r>
-                        <a:rPr b="1"/>
-                        <a:t>8.2</a:t>
-                      </a:r>
-                    </a:p>
-                  </a:txBody>
-                </a:tc>
-                <a:tc>
-                  <a:txBody>
-                    <a:bodyPr/>
-                    <a:lstStyle/>
-                    <a:p>
-                      <a:pPr lvl="0" indent="0" marL="0">
-                        <a:buNone/>
-                      </a:pPr>
-                      <a:r>
-                        <a:rPr/>
-                        <a:t>Eckart–Young: best low-rank approximation</a:t>
-                      </a:r>
-                    </a:p>
-                  </a:txBody>
-                </a:tc>
-              </a:tr>
-              <a:tr h="0">
-                <a:tc>
-                  <a:txBody>
-                    <a:bodyPr/>
-                    <a:lstStyle/>
-                    <a:p>
-                      <a:pPr lvl="0" indent="0" marL="0">
-                        <a:buNone/>
-                      </a:pPr>
-                      <a:r>
-                        <a:rPr b="1"/>
-                        <a:t>8.3</a:t>
-                      </a:r>
-                    </a:p>
-                  </a:txBody>
-                </a:tc>
-                <a:tc>
-                  <a:txBody>
-                    <a:bodyPr/>
-                    <a:lstStyle/>
-                    <a:p>
-                      <a:pPr lvl="0" indent="0" marL="0">
-                        <a:buNone/>
-                      </a:pPr>
-                      <a:r>
-                        <a:rPr/>
-                        <a:t>The approximate factor model</a:t>
-                      </a:r>
-                    </a:p>
-                  </a:txBody>
-                </a:tc>
-              </a:tr>
-              <a:tr h="0">
-                <a:tc>
-                  <a:txBody>
-                    <a:bodyPr/>
-                    <a:lstStyle/>
-                    <a:p>
-                      <a:pPr lvl="0" indent="0" marL="0">
-                        <a:buNone/>
-                      </a:pPr>
-                      <a:r>
-                        <a:rPr b="1"/>
-                        <a:t>8.4</a:t>
-                      </a:r>
-                    </a:p>
-                  </a:txBody>
-                </a:tc>
-                <a:tc>
-                  <a:txBody>
-                    <a:bodyPr/>
-                    <a:lstStyle/>
-                    <a:p>
-                      <a:pPr lvl="0" indent="0" marL="0">
-                        <a:buNone/>
-                      </a:pPr>
-                      <a:r>
-                        <a:rPr/>
-                        <a:t>How many factors?</a:t>
-                      </a:r>
-                    </a:p>
-                  </a:txBody>
-                </a:tc>
-              </a:tr>
-              <a:tr h="0">
-                <a:tc>
-                  <a:txBody>
-                    <a:bodyPr/>
-                    <a:lstStyle/>
-                    <a:p>
-                      <a:pPr lvl="0" indent="0" marL="0">
-                        <a:buNone/>
-                      </a:pPr>
-                      <a:r>
-                        <a:rPr b="1"/>
-                        <a:t>8.5</a:t>
-                      </a:r>
-                    </a:p>
-                  </a:txBody>
-                </a:tc>
-                <a:tc>
-                  <a:txBody>
-                    <a:bodyPr/>
-                    <a:lstStyle/>
-                    <a:p>
-                      <a:pPr lvl="0" indent="0" marL="0">
-                        <a:buNone/>
-                      </a:pPr>
-                      <a:r>
-                        <a:rPr/>
-                        <a:t>Diffusion-index forecasting</a:t>
-                      </a:r>
-                    </a:p>
-                  </a:txBody>
-                </a:tc>
-              </a:tr>
-            </a:tbl>
-          </a:graphicData>
-        </a:graphic>
-      </p:graphicFrame>
-    </p:spTree>
-  </p:cSld>
-</p:sld>
-</file>
-
-<file path=ppt/slides/slide4.xml><?xml version="1.0" encoding="utf-8"?>
-<p:sld xmlns:a="http://schemas.openxmlformats.org/drawingml/2006/main" xmlns:r="http://schemas.openxmlformats.org/officeDocument/2006/relationships" xmlns:p="http://schemas.openxmlformats.org/presentationml/2006/main">
-  <p:cSld>
-    <p:spTree>
-      <p:nvGrpSpPr>
-        <p:cNvPr id="1" name=""/>
-        <p:cNvGrpSpPr/>
-        <p:nvPr/>
-      </p:nvGrpSpPr>
-      <p:grpSpPr>
-        <a:xfrm>
-          <a:off x="0" y="0"/>
-          <a:ext cx="0" cy="0"/>
-          <a:chOff x="0" y="0"/>
-          <a:chExt cx="0" cy="0"/>
-        </a:xfrm>
-      </p:grpSpPr>
       <p:sp>
         <p:nvSpPr>
           <p:cNvPr id="3" name="Content Placeholder 2"/>
@@ -6685,7 +12486,16 @@
             </a:pPr>
             <a:r>
               <a:rPr/>
-              <a:t>Same numbering as </a:t>
+              <a:t>Ninety minutes, in your groups. You will extract factors from a wide panel, defend the number you retained against at least three criteria, and build a diffusion-index forecast whose factors are re-estimated at every origin.</a:t>
+            </a:r>
+          </a:p>
+          <a:p>
+            <a:pPr lvl="0" indent="0" marL="0">
+              <a:buNone/>
+            </a:pPr>
+            <a:r>
+              <a:rPr/>
+              <a:t>Notes: </a:t>
             </a:r>
             <a:r>
               <a:rPr>
@@ -6696,7 +12506,14 @@
             </a:r>
             <a:r>
               <a:rPr/>
-              <a:t>.</a:t>
+              <a:t> · practice brief: </a:t>
+            </a:r>
+            <a:r>
+              <a:rPr>
+                <a:hlinkClick r:id="rId3"/>
+                <a:latin typeface="Courier"/>
+              </a:rPr>
+              <a:t>02-practice/README.md</a:t>
             </a:r>
           </a:p>
         </p:txBody>
@@ -6748,7 +12565,7 @@
             </a:pPr>
             <a:r>
               <a:rPr/>
-              <a:t>8.1 PCA as variance maximisation</a:t>
+              <a:t>1 · What this adds</a:t>
             </a:r>
           </a:p>
         </p:txBody>
@@ -6758,293 +12575,7 @@
 </p:sld>
 </file>
 
-<file path=ppt/slides/slide6.xml><?xml version="1.0" encoding="utf-8"?>
-<p:sld xmlns:a="http://schemas.openxmlformats.org/drawingml/2006/main" xmlns:r="http://schemas.openxmlformats.org/officeDocument/2006/relationships" xmlns:p="http://schemas.openxmlformats.org/presentationml/2006/main">
-  <p:cSld>
-    <p:spTree>
-      <p:nvGrpSpPr>
-        <p:cNvPr id="1" name=""/>
-        <p:cNvGrpSpPr/>
-        <p:nvPr/>
-      </p:nvGrpSpPr>
-      <p:grpSpPr>
-        <a:xfrm>
-          <a:off x="0" y="0"/>
-          <a:ext cx="0" cy="0"/>
-          <a:chOff x="0" y="0"/>
-          <a:chExt cx="0" cy="0"/>
-        </a:xfrm>
-      </p:grpSpPr>
-      <p:sp>
-        <p:nvSpPr>
-          <p:cNvPr id="2" name="Title 1"/>
-          <p:cNvSpPr>
-            <a:spLocks noGrp="1"/>
-          </p:cNvSpPr>
-          <p:nvPr>
-            <p:ph type="title"/>
-          </p:nvPr>
-        </p:nvSpPr>
-        <p:spPr/>
-        <p:txBody>
-          <a:bodyPr/>
-          <a:lstStyle/>
-          <a:p>
-            <a:pPr lvl="0" indent="0" marL="0">
-              <a:buNone/>
-            </a:pPr>
-            <a:r>
-              <a:rPr/>
-              <a:t>The problem</a:t>
-            </a:r>
-          </a:p>
-        </p:txBody>
-      </p:sp>
-      <mc:AlternateContent xmlns:mc="http://schemas.openxmlformats.org/markup-compatibility/2006">
-        <mc:Choice xmlns:a14="http://schemas.microsoft.com/office/drawing/2010/main" Requires="a14">
-          <p:sp>
-            <p:nvSpPr>
-              <p:cNvPr id="3" name="Content Placeholder 2"/>
-              <p:cNvSpPr>
-                <a:spLocks noGrp="1"/>
-              </p:cNvSpPr>
-              <p:nvPr>
-                <p:ph idx="1"/>
-              </p:nvPr>
-            </p:nvSpPr>
-            <p:spPr/>
-            <p:txBody>
-              <a:bodyPr/>
-              <a:lstStyle/>
-              <a:p>
-                <a:pPr lvl="0" indent="0" marL="0">
-                  <a:buNone/>
-                </a:pPr>
-                <a14:m>
-                  <m:oMath xmlns:m="http://schemas.openxmlformats.org/officeDocument/2006/math">
-                    <m:r>
-                      <m:t>X</m:t>
-                    </m:r>
-                  </m:oMath>
-                </a14:m>
-                <a:r>
-                  <a:rPr/>
-                  <a:t> is </a:t>
-                </a:r>
-                <a14:m>
-                  <m:oMath xmlns:m="http://schemas.openxmlformats.org/officeDocument/2006/math">
-                    <m:r>
-                      <m:t>n</m:t>
-                    </m:r>
-                    <m:r>
-                      <m:rPr>
-                        <m:sty m:val="p"/>
-                      </m:rPr>
-                      <m:t>×</m:t>
-                    </m:r>
-                    <m:r>
-                      <m:t>p</m:t>
-                    </m:r>
-                  </m:oMath>
-                </a14:m>
-                <a:r>
-                  <a:rPr/>
-                  <a:t>, columns centred and standardised. Seek a unit vector </a:t>
-                </a:r>
-                <a14:m>
-                  <m:oMath xmlns:m="http://schemas.openxmlformats.org/officeDocument/2006/math">
-                    <m:sSub>
-                      <m:e>
-                        <m:r>
-                          <m:t>v</m:t>
-                        </m:r>
-                      </m:e>
-                      <m:sub>
-                        <m:r>
-                          <m:t>1</m:t>
-                        </m:r>
-                      </m:sub>
-                    </m:sSub>
-                  </m:oMath>
-                </a14:m>
-                <a:r>
-                  <a:rPr/>
-                  <a:t> maximising the variance of the projection:</a:t>
-                </a:r>
-              </a:p>
-              <a:p>
-                <a:pPr lvl="0" indent="0" marL="0">
-                  <a:buNone/>
-                </a:pPr>
-                <a14:m>
-                  <m:oMathPara xmlns:m="http://schemas.openxmlformats.org/officeDocument/2006/math">
-                    <m:oMathParaPr>
-                      <m:jc m:val="center"/>
-                    </m:oMathParaPr>
-                    <m:oMath>
-                      <m:sSub>
-                        <m:e>
-                          <m:r>
-                            <m:t>v</m:t>
-                          </m:r>
-                        </m:e>
-                        <m:sub>
-                          <m:r>
-                            <m:t>1</m:t>
-                          </m:r>
-                        </m:sub>
-                      </m:sSub>
-                      <m:r>
-                        <m:rPr>
-                          <m:sty m:val="p"/>
-                        </m:rPr>
-                        <m:t>=</m:t>
-                      </m:r>
-                      <m:r>
-                        <m:rPr>
-                          <m:sty m:val="p"/>
-                        </m:rPr>
-                        <m:t>arg</m:t>
-                      </m:r>
-                      <m:limLow>
-                        <m:e>
-                          <m:r>
-                            <m:rPr>
-                              <m:sty m:val="p"/>
-                            </m:rPr>
-                            <m:t>max</m:t>
-                          </m:r>
-                        </m:e>
-                        <m:lim>
-                          <m:r>
-                            <m:rPr>
-                              <m:sty m:val="p"/>
-                            </m:rPr>
-                            <m:t>∥</m:t>
-                          </m:r>
-                          <m:r>
-                            <m:t>v</m:t>
-                          </m:r>
-                          <m:r>
-                            <m:rPr>
-                              <m:sty m:val="p"/>
-                            </m:rPr>
-                            <m:t>∥</m:t>
-                          </m:r>
-                          <m:r>
-                            <m:rPr>
-                              <m:sty m:val="p"/>
-                            </m:rPr>
-                            <m:t>=</m:t>
-                          </m:r>
-                          <m:r>
-                            <m:t>1</m:t>
-                          </m:r>
-                        </m:lim>
-                      </m:limLow>
-                      <m:r>
-                        <m:t> </m:t>
-                      </m:r>
-                      <m:sSup>
-                        <m:e>
-                          <m:r>
-                            <m:t>v</m:t>
-                          </m:r>
-                        </m:e>
-                        <m:sup>
-                          <m:r>
-                            <m:rPr>
-                              <m:sty m:val="p"/>
-                            </m:rPr>
-                            <m:t>⊤</m:t>
-                          </m:r>
-                        </m:sup>
-                      </m:sSup>
-                      <m:acc>
-                        <m:accPr>
-                          <m:chr m:val="̂"/>
-                        </m:accPr>
-                        <m:e>
-                          <m:r>
-                            <m:t>Σ</m:t>
-                          </m:r>
-                        </m:e>
-                      </m:acc>
-                      <m:r>
-                        <m:t> </m:t>
-                      </m:r>
-                      <m:r>
-                        <m:t>v</m:t>
-                      </m:r>
-                      <m:r>
-                        <m:rPr>
-                          <m:sty m:val="p"/>
-                        </m:rPr>
-                        <m:t>,</m:t>
-                      </m:r>
-                      <m:r>
-                        <m:t>  </m:t>
-                      </m:r>
-                      <m:acc>
-                        <m:accPr>
-                          <m:chr m:val="̂"/>
-                        </m:accPr>
-                        <m:e>
-                          <m:r>
-                            <m:t>Σ</m:t>
-                          </m:r>
-                        </m:e>
-                      </m:acc>
-                      <m:r>
-                        <m:rPr>
-                          <m:sty m:val="p"/>
-                        </m:rPr>
-                        <m:t>=</m:t>
-                      </m:r>
-                      <m:f>
-                        <m:fPr>
-                          <m:type m:val="lin"/>
-                        </m:fPr>
-                        <m:num>
-                          <m:r>
-                            <m:t>1</m:t>
-                          </m:r>
-                        </m:num>
-                        <m:den>
-                          <m:r>
-                            <m:t>n</m:t>
-                          </m:r>
-                        </m:den>
-                      </m:f>
-                      <m:sSup>
-                        <m:e>
-                          <m:r>
-                            <m:t>X</m:t>
-                          </m:r>
-                        </m:e>
-                        <m:sup>
-                          <m:r>
-                            <m:rPr>
-                              <m:sty m:val="p"/>
-                            </m:rPr>
-                            <m:t>⊤</m:t>
-                          </m:r>
-                        </m:sup>
-                      </m:sSup>
-                      <m:r>
-                        <m:t>X</m:t>
-                      </m:r>
-                    </m:oMath>
-                  </m:oMathPara>
-                </a14:m>
-              </a:p>
-            </p:txBody>
-          </p:sp>
-        </mc:Choice>
-      </mc:AlternateContent>
-    </p:spTree>
-  </p:cSld>
-</p:sld>
+<file path=ppt/slides/slide6.xml><?xml version="1.0" encoding="UTF-8"?><p:sld xmlns:a="http://schemas.openxmlformats.org/drawingml/2006/main" xmlns:r="http://schemas.openxmlformats.org/officeDocument/2006/relationships" xmlns:p="http://schemas.openxmlformats.org/presentationml/2006/main"><p:cSld><p:spTree><p:nvGrpSpPr><p:cNvPr id="1" name="" /><p:cNvGrpSpPr /><p:nvPr /></p:nvGrpSpPr><p:grpSpPr><a:xfrm><a:off x="0" y="0" /><a:ext cx="0" cy="0" /><a:chOff x="0" y="0" /><a:chExt cx="0" cy="0" /></a:xfrm></p:grpSpPr><mc:AlternateContent xmlns:mc="http://schemas.openxmlformats.org/markup-compatibility/2006"><mc:Choice xmlns:a14="http://schemas.microsoft.com/office/drawing/2010/main" Requires="a14"><p:sp><p:nvSpPr><p:cNvPr id="2" name="Title 1" /><p:cNvSpPr><a:spLocks noGrp="1" /></p:cNvSpPr><p:nvPr><p:ph type="title" /></p:nvPr></p:nvSpPr><p:spPr /><p:txBody><a:bodyPr /><a:lstStyle /><a:p><a:pPr lvl="0" indent="0" marL="0"><a:buNone /></a:pPr><a:r><a:rPr /><a:t>Every session so far had a </a:t></a:r><a14:m><m:oMath xmlns:m="http://schemas.openxmlformats.org/officeDocument/2006/math"><m:r><m:t>y</m:t></m:r></m:oMath></a14:m></a:p></p:txBody></p:sp></mc:Choice></mc:AlternateContent><p:graphicFrame><p:nvGraphicFramePr><p:cNvPr id="6" name="Content Placeholder 5" /><p:cNvGraphicFramePr><a:graphicFrameLocks noGrp="1" /></p:cNvGraphicFramePr><p:nvPr><p:ph idx="1" /></p:nvPr></p:nvGraphicFramePr><p:xfrm><a:off x="457200" y="1193800" /><a:ext cx="8229600" cy="3390900" /></p:xfrm><a:graphic><a:graphicData uri="http://schemas.openxmlformats.org/drawingml/2006/table"><a:tbl><a:tblPr firstRow="1" bandRow="1"><a:tableStyleId>{5C22544A-7EE6-4342-B048-85BDC9FD1C3A}</a:tableStyleId></a:tblPr><a:tblGrid><a:gridCol w="4114800" /><a:gridCol w="4114800" /></a:tblGrid><a:tr h="0"><a:tc><a:txBody><a:bodyPr /><a:lstStyle /><a:p><a:pPr lvl="0" indent="0" marL="0"><a:buNone /></a:pPr><a:r><a:rPr /><a:t>Session</a:t></a:r></a:p></a:txBody><a:tcPr /></a:tc><a:tc><a:txBody><a:bodyPr /><a:lstStyle /><a:p><a:pPr lvl="0" indent="0" marL="0"><a:buNone /></a:pPr><a:r><a:rPr /><a:t>The question</a:t></a:r></a:p></a:txBody><a:tcPr /></a:tc></a:tr><a:tr h="0"><a:tc><a:txBody><a:bodyPr /><a:lstStyle /><a:p><a:pPr lvl="0" indent="0" marL="0"><a:buNone /></a:pPr><a:r><a:rPr b="1" /><a:t>02–03</a:t></a:r></a:p></a:txBody></a:tc><a:tc><a:txBody><a:bodyPr /><a:lstStyle /><a:p><a:pPr lvl="0" indent="0" marL="0"><a:buNone /></a:pPr><a:r><a:rPr /><a:t>given </a:t></a:r><a14:m><m:oMath xmlns:m="http://schemas.openxmlformats.org/officeDocument/2006/math"><m:r><m:t>y</m:t></m:r></m:oMath></a14:m><a:r><a:rPr /><a:t> and </a:t></a:r><a14:m><m:oMath xmlns:m="http://schemas.openxmlformats.org/officeDocument/2006/math"><m:r><m:t>X</m:t></m:r></m:oMath></a14:m><a:r><a:rPr /><a:t>, what is </a:t></a:r><a14:m><m:oMath xmlns:m="http://schemas.openxmlformats.org/officeDocument/2006/math"><m:acc><m:accPr><m:chr m:val="̂" /></m:accPr><m:e><m:r><m:t>β</m:t></m:r></m:e></m:acc></m:oMath></a14:m><a:r><a:rPr /><a:t>, and how sure are we?</a:t></a:r></a:p></a:txBody></a:tc></a:tr><a:tr h="0"><a:tc><a:txBody><a:bodyPr /><a:lstStyle /><a:p><a:pPr lvl="0" indent="0" marL="0"><a:buNone /></a:pPr><a:r><a:rPr b="1" /><a:t>04–05</a:t></a:r></a:p></a:txBody></a:tc><a:tc><a:txBody><a:bodyPr /><a:lstStyle /><a:p><a:pPr lvl="0" indent="0" marL="0"><a:buNone /></a:pPr><a:r><a:rPr /><a:t>given </a:t></a:r><a14:m><m:oMath xmlns:m="http://schemas.openxmlformats.org/officeDocument/2006/math"><m:r><m:t>y</m:t></m:r></m:oMath></a14:m><a:r><a:rPr /><a:t>, how well can we predict it, and how do we tune?</a:t></a:r></a:p></a:txBody></a:tc></a:tr><a:tr h="0"><a:tc><a:txBody><a:bodyPr /><a:lstStyle /><a:p><a:pPr lvl="0" indent="0" marL="0"><a:buNone /></a:pPr><a:r><a:rPr b="1" /><a:t>06–07</a:t></a:r></a:p></a:txBody></a:tc><a:tc><a:txBody><a:bodyPr /><a:lstStyle /><a:p><a:pPr lvl="0" indent="0" marL="0"><a:buNone /></a:pPr><a:r><a:rPr /><a:t>given a binary </a:t></a:r><a14:m><m:oMath xmlns:m="http://schemas.openxmlformats.org/officeDocument/2006/math"><m:r><m:t>y</m:t></m:r></m:oMath></a14:m><a:r><a:rPr /><a:t>, where do we set the threshold?</a:t></a:r></a:p></a:txBody></a:tc></a:tr></a:tbl></a:graphicData></a:graphic></p:graphicFrame></p:spTree></p:cSld></p:sld>
 </file>
 
 <file path=ppt/slides/slide7.xml><?xml version="1.0" encoding="utf-8"?>
@@ -7066,12 +12597,12 @@
       </p:grpSpPr>
       <p:sp>
         <p:nvSpPr>
-          <p:cNvPr id="2" name="Title 1"/>
+          <p:cNvPr id="3" name="Content Placeholder 2"/>
           <p:cNvSpPr>
             <a:spLocks noGrp="1"/>
           </p:cNvSpPr>
           <p:nvPr>
-            <p:ph type="title"/>
+            <p:ph idx="1"/>
           </p:nvPr>
         </p:nvSpPr>
         <p:spPr/>
@@ -7084,206 +12615,19 @@
             </a:pPr>
             <a:r>
               <a:rPr/>
-              <a:t>The Lagrangian gives an eigenproblem</a:t>
+              <a:t>All of it was </a:t>
+            </a:r>
+            <a:r>
+              <a:rPr b="1"/>
+              <a:t>supervised</a:t>
+            </a:r>
+            <a:r>
+              <a:rPr/>
+              <a:t>. There was always an outcome telling you what to look for.</a:t>
             </a:r>
           </a:p>
         </p:txBody>
       </p:sp>
-      <mc:AlternateContent xmlns:mc="http://schemas.openxmlformats.org/markup-compatibility/2006">
-        <mc:Choice xmlns:a14="http://schemas.microsoft.com/office/drawing/2010/main" Requires="a14">
-          <p:sp>
-            <p:nvSpPr>
-              <p:cNvPr id="3" name="Content Placeholder 2"/>
-              <p:cNvSpPr>
-                <a:spLocks noGrp="1"/>
-              </p:cNvSpPr>
-              <p:nvPr>
-                <p:ph idx="1"/>
-              </p:nvPr>
-            </p:nvSpPr>
-            <p:spPr/>
-            <p:txBody>
-              <a:bodyPr/>
-              <a:lstStyle/>
-              <a:p>
-                <a:pPr lvl="0" indent="0" marL="0">
-                  <a:buNone/>
-                </a:pPr>
-                <a14:m>
-                  <m:oMathPara xmlns:m="http://schemas.openxmlformats.org/officeDocument/2006/math">
-                    <m:oMathParaPr>
-                      <m:jc m:val="center"/>
-                    </m:oMathParaPr>
-                    <m:oMath>
-                      <m:r>
-                        <m:rPr>
-                          <m:sty m:val="p"/>
-                          <m:scr m:val="script"/>
-                        </m:rPr>
-                        <m:t>L</m:t>
-                      </m:r>
-                      <m:r>
-                        <m:rPr>
-                          <m:sty m:val="p"/>
-                        </m:rPr>
-                        <m:t>=</m:t>
-                      </m:r>
-                      <m:sSup>
-                        <m:e>
-                          <m:r>
-                            <m:t>v</m:t>
-                          </m:r>
-                        </m:e>
-                        <m:sup>
-                          <m:r>
-                            <m:rPr>
-                              <m:sty m:val="p"/>
-                            </m:rPr>
-                            <m:t>⊤</m:t>
-                          </m:r>
-                        </m:sup>
-                      </m:sSup>
-                      <m:acc>
-                        <m:accPr>
-                          <m:chr m:val="̂"/>
-                        </m:accPr>
-                        <m:e>
-                          <m:r>
-                            <m:t>Σ</m:t>
-                          </m:r>
-                        </m:e>
-                      </m:acc>
-                      <m:r>
-                        <m:t>v</m:t>
-                      </m:r>
-                      <m:r>
-                        <m:rPr>
-                          <m:sty m:val="p"/>
-                        </m:rPr>
-                        <m:t>−</m:t>
-                      </m:r>
-                      <m:r>
-                        <m:t>ϕ</m:t>
-                      </m:r>
-                      <m:d>
-                        <m:dPr>
-                          <m:begChr m:val="("/>
-                          <m:sepChr m:val=""/>
-                          <m:endChr m:val=")"/>
-                          <m:grow/>
-                        </m:dPr>
-                        <m:e>
-                          <m:sSup>
-                            <m:e>
-                              <m:r>
-                                <m:t>v</m:t>
-                              </m:r>
-                            </m:e>
-                            <m:sup>
-                              <m:r>
-                                <m:rPr>
-                                  <m:sty m:val="p"/>
-                                </m:rPr>
-                                <m:t>⊤</m:t>
-                              </m:r>
-                            </m:sup>
-                          </m:sSup>
-                          <m:r>
-                            <m:t>v</m:t>
-                          </m:r>
-                          <m:r>
-                            <m:rPr>
-                              <m:sty m:val="p"/>
-                            </m:rPr>
-                            <m:t>−</m:t>
-                          </m:r>
-                          <m:r>
-                            <m:t>1</m:t>
-                          </m:r>
-                        </m:e>
-                      </m:d>
-                      <m:r>
-                        <m:t> </m:t>
-                      </m:r>
-                      <m:r>
-                        <m:rPr>
-                          <m:sty m:val="p"/>
-                        </m:rPr>
-                        <m:t>⇒</m:t>
-                      </m:r>
-                      <m:r>
-                        <m:t> </m:t>
-                      </m:r>
-                      <m:acc>
-                        <m:accPr>
-                          <m:chr m:val="̂"/>
-                        </m:accPr>
-                        <m:e>
-                          <m:r>
-                            <m:t>Σ</m:t>
-                          </m:r>
-                        </m:e>
-                      </m:acc>
-                      <m:r>
-                        <m:t>v</m:t>
-                      </m:r>
-                      <m:r>
-                        <m:rPr>
-                          <m:sty m:val="p"/>
-                        </m:rPr>
-                        <m:t>=</m:t>
-                      </m:r>
-                      <m:r>
-                        <m:t>ϕ</m:t>
-                      </m:r>
-                      <m:r>
-                        <m:t>v</m:t>
-                      </m:r>
-                    </m:oMath>
-                  </m:oMathPara>
-                </a14:m>
-              </a:p>
-              <a:p>
-                <a:pPr lvl="0" indent="0" marL="0">
-                  <a:buNone/>
-                </a:pPr>
-                <a:r>
-                  <a:rPr/>
-                  <a:t>So </a:t>
-                </a:r>
-                <a14:m>
-                  <m:oMath xmlns:m="http://schemas.openxmlformats.org/officeDocument/2006/math">
-                    <m:r>
-                      <m:t>v</m:t>
-                    </m:r>
-                  </m:oMath>
-                </a14:m>
-                <a:r>
-                  <a:rPr/>
-                  <a:t> must be an </a:t>
-                </a:r>
-                <a:r>
-                  <a:rPr b="1"/>
-                  <a:t>eigenvector</a:t>
-                </a:r>
-                <a:r>
-                  <a:rPr/>
-                  <a:t> — and since the objective at an eigenvector equals its eigenvalue, we take the largest.</a:t>
-                </a:r>
-              </a:p>
-              <a:p>
-                <a:pPr lvl="0" indent="0" marL="0">
-                  <a:buNone/>
-                </a:pPr>
-                <a:r>
-                  <a:rPr/>
-                  <a:t>Subsequent components solve the same problem subject to orthogonality to those already found, giving the eigenvectors in decreasing eigenvalue order.</a:t>
-                </a:r>
-              </a:p>
-            </p:txBody>
-          </p:sp>
-        </mc:Choice>
-      </mc:AlternateContent>
     </p:spTree>
   </p:cSld>
 </p:sld>
@@ -7306,31 +12650,42 @@
           <a:chExt cx="0" cy="0"/>
         </a:xfrm>
       </p:grpSpPr>
-      <p:sp>
-        <p:nvSpPr>
-          <p:cNvPr id="2" name="Title 1"/>
-          <p:cNvSpPr>
-            <a:spLocks noGrp="1"/>
-          </p:cNvSpPr>
-          <p:nvPr>
-            <p:ph type="title"/>
-          </p:nvPr>
-        </p:nvSpPr>
-        <p:spPr/>
-        <p:txBody>
-          <a:bodyPr/>
-          <a:lstStyle/>
-          <a:p>
-            <a:pPr lvl="0" indent="0" marL="0">
-              <a:buNone/>
-            </a:pPr>
-            <a:r>
-              <a:rPr/>
-              <a:t>Via the SVD</a:t>
-            </a:r>
-          </a:p>
-        </p:txBody>
-      </p:sp>
+      <mc:AlternateContent xmlns:mc="http://schemas.openxmlformats.org/markup-compatibility/2006">
+        <mc:Choice xmlns:a14="http://schemas.microsoft.com/office/drawing/2010/main" Requires="a14">
+          <p:sp>
+            <p:nvSpPr>
+              <p:cNvPr id="2" name="Title 1"/>
+              <p:cNvSpPr>
+                <a:spLocks noGrp="1"/>
+              </p:cNvSpPr>
+              <p:nvPr>
+                <p:ph type="title"/>
+              </p:nvPr>
+            </p:nvSpPr>
+            <p:spPr/>
+            <p:txBody>
+              <a:bodyPr/>
+              <a:lstStyle/>
+              <a:p>
+                <a:pPr lvl="0" indent="0" marL="0">
+                  <a:buNone/>
+                </a:pPr>
+                <a:r>
+                  <a:rPr/>
+                  <a:t>Today there is no </a:t>
+                </a:r>
+                <a14:m>
+                  <m:oMath xmlns:m="http://schemas.openxmlformats.org/officeDocument/2006/math">
+                    <m:r>
+                      <m:t>y</m:t>
+                    </m:r>
+                  </m:oMath>
+                </a14:m>
+              </a:p>
+            </p:txBody>
+          </p:sp>
+        </mc:Choice>
+      </mc:AlternateContent>
       <mc:AlternateContent xmlns:mc="http://schemas.openxmlformats.org/markup-compatibility/2006">
         <mc:Choice xmlns:a14="http://schemas.microsoft.com/office/drawing/2010/main" Requires="a14">
           <p:sp>
@@ -7348,272 +12703,78 @@
               <a:bodyPr/>
               <a:lstStyle/>
               <a:p>
-                <a:pPr lvl="0" indent="0" marL="0">
+                <a:pPr lvl="0" indent="0" marL="1270000">
                   <a:buNone/>
                 </a:pPr>
                 <a:r>
-                  <a:rPr/>
-                  <a:t>Cleaner, and what software actually computes. With </a:t>
+                  <a:rPr sz="2000"/>
+                  <a:t>The question is about the </a:t>
+                </a:r>
+                <a:r>
+                  <a:rPr sz="2000" b="1"/>
+                  <a:t>structure of </a:t>
                 </a:r>
                 <a14:m>
                   <m:oMath xmlns:m="http://schemas.openxmlformats.org/officeDocument/2006/math">
                     <m:r>
                       <m:t>X</m:t>
                     </m:r>
-                    <m:r>
-                      <m:rPr>
-                        <m:sty m:val="p"/>
-                      </m:rPr>
-                      <m:t>=</m:t>
-                    </m:r>
-                    <m:r>
-                      <m:t>U</m:t>
-                    </m:r>
-                    <m:r>
-                      <m:t>D</m:t>
-                    </m:r>
-                    <m:sSup>
-                      <m:e>
-                        <m:r>
-                          <m:t>V</m:t>
-                        </m:r>
-                      </m:e>
-                      <m:sup>
-                        <m:r>
-                          <m:rPr>
-                            <m:sty m:val="p"/>
-                          </m:rPr>
-                          <m:t>⊤</m:t>
-                        </m:r>
-                      </m:sup>
-                    </m:sSup>
                   </m:oMath>
                 </a14:m>
                 <a:r>
+                  <a:rPr sz="2000" b="1"/>
+                  <a:t> itself</a:t>
+                </a:r>
+                <a:r>
+                  <a:rPr sz="2000"/>
+                  <a:t>.</a:t>
+                </a:r>
+              </a:p>
+              <a:p>
+                <a:pPr lvl="0"/>
+                <a:r>
                   <a:rPr/>
-                  <a:t>:</a:t>
+                  <a:t>You have 200 macro series. They visibly move together</a:t>
+                </a:r>
+              </a:p>
+              <a:p>
+                <a:pPr lvl="0"/>
+                <a:r>
+                  <a:rPr/>
+                  <a:t>Nobody labelled which of them matter, because there is nothing yet to matter </a:t>
+                </a:r>
+                <a:r>
+                  <a:rPr i="1"/>
+                  <a:t>for</a:t>
+                </a:r>
+              </a:p>
+              <a:p>
+                <a:pPr lvl="0"/>
+                <a:r>
+                  <a:rPr/>
+                  <a:t>The question is: </a:t>
+                </a:r>
+                <a:r>
+                  <a:rPr b="1"/>
+                  <a:t>how many distinct things are being measured?</a:t>
                 </a:r>
               </a:p>
               <a:p>
                 <a:pPr lvl="0" indent="0" marL="0">
                   <a:buNone/>
                 </a:pPr>
-                <a14:m>
-                  <m:oMathPara xmlns:m="http://schemas.openxmlformats.org/officeDocument/2006/math">
-                    <m:oMathParaPr>
-                      <m:jc m:val="center"/>
-                    </m:oMathParaPr>
-                    <m:oMath>
-                      <m:acc>
-                        <m:accPr>
-                          <m:chr m:val="̂"/>
-                        </m:accPr>
-                        <m:e>
-                          <m:r>
-                            <m:t>Σ</m:t>
-                          </m:r>
-                        </m:e>
-                      </m:acc>
-                      <m:r>
-                        <m:rPr>
-                          <m:sty m:val="p"/>
-                        </m:rPr>
-                        <m:t>=</m:t>
-                      </m:r>
-                      <m:f>
-                        <m:fPr>
-                          <m:type m:val="lin"/>
-                        </m:fPr>
-                        <m:num>
-                          <m:r>
-                            <m:t>1</m:t>
-                          </m:r>
-                        </m:num>
-                        <m:den>
-                          <m:r>
-                            <m:t>n</m:t>
-                          </m:r>
-                        </m:den>
-                      </m:f>
-                      <m:r>
-                        <m:t>V</m:t>
-                      </m:r>
-                      <m:sSup>
-                        <m:e>
-                          <m:r>
-                            <m:t>D</m:t>
-                          </m:r>
-                        </m:e>
-                        <m:sup>
-                          <m:r>
-                            <m:t>2</m:t>
-                          </m:r>
-                        </m:sup>
-                      </m:sSup>
-                      <m:sSup>
-                        <m:e>
-                          <m:r>
-                            <m:t>V</m:t>
-                          </m:r>
-                        </m:e>
-                        <m:sup>
-                          <m:r>
-                            <m:rPr>
-                              <m:sty m:val="p"/>
-                            </m:rPr>
-                            <m:t>⊤</m:t>
-                          </m:r>
-                        </m:sup>
-                      </m:sSup>
-                    </m:oMath>
-                  </m:oMathPara>
-                </a14:m>
-              </a:p>
-              <a:p>
-                <a:pPr lvl="0"/>
-                <a:r>
-                  <a:rPr b="1"/>
-                  <a:t>loadings</a:t>
-                </a:r>
                 <a:r>
                   <a:rPr/>
-                  <a:t> — the columns of </a:t>
-                </a:r>
-                <a14:m>
-                  <m:oMath xmlns:m="http://schemas.openxmlformats.org/officeDocument/2006/math">
-                    <m:r>
-                      <m:t>V</m:t>
-                    </m:r>
-                  </m:oMath>
-                </a14:m>
-              </a:p>
-              <a:p>
-                <a:pPr lvl="0"/>
-                <a:r>
-                  <a:rPr b="1"/>
-                  <a:t>scores</a:t>
+                  <a:t>This is not a detour. Once you can compress 200 series into 3 factors, you can put those 3 factors into any of the supervised methods from Sessions 03–07 — and that is what a </a:t>
+                </a:r>
+                <a:r>
+                  <a:rPr i="1"/>
+                  <a:t>diffusion index</a:t>
                 </a:r>
                 <a:r>
                   <a:rPr/>
-                  <a:t> — </a:t>
-                </a:r>
-                <a14:m>
-                  <m:oMath xmlns:m="http://schemas.openxmlformats.org/officeDocument/2006/math">
-                    <m:r>
-                      <m:t>Z</m:t>
-                    </m:r>
-                    <m:r>
-                      <m:rPr>
-                        <m:sty m:val="p"/>
-                      </m:rPr>
-                      <m:t>=</m:t>
-                    </m:r>
-                    <m:r>
-                      <m:t>X</m:t>
-                    </m:r>
-                    <m:r>
-                      <m:t>V</m:t>
-                    </m:r>
-                    <m:r>
-                      <m:rPr>
-                        <m:sty m:val="p"/>
-                      </m:rPr>
-                      <m:t>=</m:t>
-                    </m:r>
-                    <m:r>
-                      <m:t>U</m:t>
-                    </m:r>
-                    <m:r>
-                      <m:t>D</m:t>
-                    </m:r>
-                  </m:oMath>
-                </a14:m>
-              </a:p>
-              <a:p>
-                <a:pPr lvl="0"/>
-                <a:r>
-                  <a:rPr b="1"/>
-                  <a:t>variance explained</a:t>
-                </a:r>
-                <a:r>
-                  <a:rPr/>
-                  <a:t> by component </a:t>
-                </a:r>
-                <a14:m>
-                  <m:oMath xmlns:m="http://schemas.openxmlformats.org/officeDocument/2006/math">
-                    <m:r>
-                      <m:t>j</m:t>
-                    </m:r>
-                  </m:oMath>
-                </a14:m>
-                <a:r>
-                  <a:rPr/>
-                  <a:t> — </a:t>
-                </a:r>
-                <a14:m>
-                  <m:oMath xmlns:m="http://schemas.openxmlformats.org/officeDocument/2006/math">
-                    <m:sSubSup>
-                      <m:e>
-                        <m:r>
-                          <m:t>d</m:t>
-                        </m:r>
-                      </m:e>
-                      <m:sub>
-                        <m:r>
-                          <m:t>j</m:t>
-                        </m:r>
-                      </m:sub>
-                      <m:sup>
-                        <m:r>
-                          <m:t>2</m:t>
-                        </m:r>
-                      </m:sup>
-                    </m:sSubSup>
-                    <m:r>
-                      <m:rPr>
-                        <m:sty m:val="p"/>
-                      </m:rPr>
-                      <m:t>/</m:t>
-                    </m:r>
-                    <m:nary>
-                      <m:naryPr>
-                        <m:chr m:val="∑"/>
-                        <m:limLoc m:val="undOvr"/>
-                        <m:subHide m:val="off"/>
-                        <m:supHide m:val="on"/>
-                      </m:naryPr>
-                      <m:sub>
-                        <m:r>
-                          <m:t>k</m:t>
-                        </m:r>
-                      </m:sub>
-                      <m:sup>
-                        <m:r>
-                          <m:t>​</m:t>
-                        </m:r>
-                      </m:sup>
-                      <m:e>
-                        <m:sSubSup>
-                          <m:e>
-                            <m:r>
-                              <m:t>d</m:t>
-                            </m:r>
-                          </m:e>
-                          <m:sub>
-                            <m:r>
-                              <m:t>k</m:t>
-                            </m:r>
-                          </m:sub>
-                          <m:sup>
-                            <m:r>
-                              <m:t>2</m:t>
-                            </m:r>
-                          </m:sup>
-                        </m:sSubSup>
-                      </m:e>
-                    </m:nary>
-                  </m:oMath>
-                </a14:m>
+                  <a:t> is.</a:t>
+                </a:r>
               </a:p>
             </p:txBody>
           </p:sp>
@@ -7661,7 +12822,7 @@
             </a:pPr>
             <a:r>
               <a:rPr/>
-              <a:t>The connection to Session 05</a:t>
+              <a:t>The connection you should be looking for</a:t>
             </a:r>
           </a:p>
         </p:txBody>
@@ -7688,23 +12849,15 @@
                 </a:pPr>
                 <a:r>
                   <a:rPr/>
-                  <a:t>Ridge shrank along the </a:t>
-                </a:r>
-                <a:r>
-                  <a:rPr b="1"/>
-                  <a:t>same </a:t>
+                  <a:t>Session 05 shrank coefficients along the SVD basis of </a:t>
                 </a:r>
                 <a14:m>
                   <m:oMath xmlns:m="http://schemas.openxmlformats.org/officeDocument/2006/math">
                     <m:r>
-                      <m:t>V</m:t>
+                      <m:t>X</m:t>
                     </m:r>
                   </m:oMath>
                 </a14:m>
-                <a:r>
-                  <a:rPr b="1"/>
-                  <a:t> basis</a:t>
-                </a:r>
                 <a:r>
                   <a:rPr/>
                   <a:t>, damping small-</a:t>
@@ -7727,16 +12880,7 @@
                 </a14:m>
                 <a:r>
                   <a:rPr/>
-                  <a:t> directions.</a:t>
-                </a:r>
-              </a:p>
-              <a:p>
-                <a:pPr lvl="0" indent="0" marL="1270000">
-                  <a:buNone/>
-                </a:pPr>
-                <a:r>
-                  <a:rPr sz="2000" b="1"/>
-                  <a:t>PCA truncates exactly the directions ridge shrinks.</a:t>
+                  <a:t> directions smoothly.</a:t>
                 </a:r>
               </a:p>
               <a:p>
@@ -7745,7 +12889,43 @@
                 </a:pPr>
                 <a:r>
                   <a:rPr/>
-                  <a:t>Principal components regression is, in this light, a hard-thresholded ridge.</a:t>
+                  <a:t>Today we </a:t>
+                </a:r>
+                <a:r>
+                  <a:rPr b="1"/>
+                  <a:t>truncate</a:t>
+                </a:r>
+                <a:r>
+                  <a:rPr/>
+                  <a:t> exactly those directions — keep the first </a:t>
+                </a:r>
+                <a14:m>
+                  <m:oMath xmlns:m="http://schemas.openxmlformats.org/officeDocument/2006/math">
+                    <m:r>
+                      <m:t>k</m:t>
+                    </m:r>
+                  </m:oMath>
+                </a14:m>
+                <a:r>
+                  <a:rPr/>
+                  <a:t>, discard the rest.</a:t>
+                </a:r>
+              </a:p>
+              <a:p>
+                <a:pPr lvl="0" indent="0" marL="0">
+                  <a:buNone/>
+                </a:pPr>
+                <a:r>
+                  <a:rPr/>
+                  <a:t>Principal components regression is, in this light, a </a:t>
+                </a:r>
+                <a:r>
+                  <a:rPr b="1"/>
+                  <a:t>hard-thresholded ridge</a:t>
+                </a:r>
+                <a:r>
+                  <a:rPr/>
+                  <a:t>. Same basis, different rule. Keep that sentence for the end of Section 3.</a:t>
                 </a:r>
               </a:p>
             </p:txBody>
